--- a/docs/plots/carbo/jx_carbo_linsubhr_dosedisc_throm2.pptx
+++ b/docs/plots/carbo/jx_carbo_linsubhr_dosedisc_throm2.pptx
@@ -3132,518 +3132,521 @@
           <p:spPr>
             <a:xfrm>
               <a:off x="1172049" y="1896563"/>
-              <a:ext cx="7090630" cy="3581901"/>
+              <a:ext cx="7090630" cy="3579434"/>
             </a:xfrm>
             <a:custGeom>
               <a:avLst/>
               <a:pathLst>
-                <a:path w="7090630" h="3581901">
+                <a:path w="7090630" h="3579434">
                   <a:moveTo>
-                    <a:pt x="0" y="3002545"/>
+                    <a:pt x="0" y="2794749"/>
                   </a:moveTo>
                   <a:lnTo>
-                    <a:pt x="71622" y="2998088"/>
-                  </a:lnTo>
-                  <a:lnTo>
-                    <a:pt x="143245" y="2993599"/>
-                  </a:lnTo>
-                  <a:lnTo>
-                    <a:pt x="214867" y="2989081"/>
-                  </a:lnTo>
-                  <a:lnTo>
-                    <a:pt x="286490" y="2984531"/>
-                  </a:lnTo>
-                  <a:lnTo>
-                    <a:pt x="358112" y="2979950"/>
-                  </a:lnTo>
-                  <a:lnTo>
-                    <a:pt x="429735" y="2975338"/>
-                  </a:lnTo>
-                  <a:lnTo>
-                    <a:pt x="501357" y="2970694"/>
-                  </a:lnTo>
-                  <a:lnTo>
-                    <a:pt x="572980" y="2966018"/>
-                  </a:lnTo>
-                  <a:lnTo>
-                    <a:pt x="644602" y="2961310"/>
-                  </a:lnTo>
-                  <a:lnTo>
-                    <a:pt x="716225" y="2956570"/>
-                  </a:lnTo>
-                  <a:lnTo>
-                    <a:pt x="787847" y="2951797"/>
-                  </a:lnTo>
-                  <a:lnTo>
-                    <a:pt x="859470" y="2946991"/>
-                  </a:lnTo>
-                  <a:lnTo>
-                    <a:pt x="931092" y="2942153"/>
-                  </a:lnTo>
-                  <a:lnTo>
-                    <a:pt x="1002715" y="2937282"/>
-                  </a:lnTo>
-                  <a:lnTo>
-                    <a:pt x="1074337" y="2932377"/>
-                  </a:lnTo>
-                  <a:lnTo>
-                    <a:pt x="1145960" y="2927438"/>
-                  </a:lnTo>
-                  <a:lnTo>
-                    <a:pt x="1217582" y="2922466"/>
-                  </a:lnTo>
-                  <a:lnTo>
-                    <a:pt x="1289205" y="2917459"/>
-                  </a:lnTo>
-                  <a:lnTo>
-                    <a:pt x="1360827" y="2912418"/>
-                  </a:lnTo>
-                  <a:lnTo>
-                    <a:pt x="1432450" y="2907343"/>
-                  </a:lnTo>
-                  <a:lnTo>
-                    <a:pt x="1504073" y="2902232"/>
-                  </a:lnTo>
-                  <a:lnTo>
-                    <a:pt x="1575695" y="2897087"/>
-                  </a:lnTo>
-                  <a:lnTo>
-                    <a:pt x="1647318" y="2891907"/>
-                  </a:lnTo>
-                  <a:lnTo>
-                    <a:pt x="1718940" y="2886691"/>
-                  </a:lnTo>
-                  <a:lnTo>
-                    <a:pt x="1790563" y="2881439"/>
-                  </a:lnTo>
-                  <a:lnTo>
-                    <a:pt x="1862185" y="2876151"/>
-                  </a:lnTo>
-                  <a:lnTo>
-                    <a:pt x="1933808" y="2870827"/>
-                  </a:lnTo>
-                  <a:lnTo>
-                    <a:pt x="2005430" y="2865466"/>
-                  </a:lnTo>
-                  <a:lnTo>
-                    <a:pt x="2077053" y="2860069"/>
-                  </a:lnTo>
-                  <a:lnTo>
-                    <a:pt x="2148675" y="2854635"/>
-                  </a:lnTo>
-                  <a:lnTo>
-                    <a:pt x="2220298" y="2849163"/>
-                  </a:lnTo>
-                  <a:lnTo>
-                    <a:pt x="2291920" y="2843654"/>
-                  </a:lnTo>
-                  <a:lnTo>
-                    <a:pt x="2363543" y="2838107"/>
-                  </a:lnTo>
-                  <a:lnTo>
-                    <a:pt x="2435165" y="2832522"/>
-                  </a:lnTo>
-                  <a:lnTo>
-                    <a:pt x="2506788" y="2826899"/>
-                  </a:lnTo>
-                  <a:lnTo>
-                    <a:pt x="2578410" y="2821237"/>
-                  </a:lnTo>
-                  <a:lnTo>
-                    <a:pt x="2650033" y="2815536"/>
-                  </a:lnTo>
-                  <a:lnTo>
-                    <a:pt x="2721655" y="2809797"/>
-                  </a:lnTo>
-                  <a:lnTo>
-                    <a:pt x="2793278" y="2804017"/>
-                  </a:lnTo>
-                  <a:lnTo>
-                    <a:pt x="2864901" y="2798199"/>
-                  </a:lnTo>
-                  <a:lnTo>
-                    <a:pt x="2936523" y="2792340"/>
-                  </a:lnTo>
-                  <a:lnTo>
-                    <a:pt x="3008146" y="2786441"/>
-                  </a:lnTo>
-                  <a:lnTo>
-                    <a:pt x="3079768" y="2761490"/>
-                  </a:lnTo>
-                  <a:lnTo>
-                    <a:pt x="3151391" y="2707408"/>
-                  </a:lnTo>
-                  <a:lnTo>
-                    <a:pt x="3223013" y="2650043"/>
-                  </a:lnTo>
-                  <a:lnTo>
-                    <a:pt x="3294636" y="2589197"/>
-                  </a:lnTo>
-                  <a:lnTo>
-                    <a:pt x="3366258" y="2524658"/>
-                  </a:lnTo>
-                  <a:lnTo>
-                    <a:pt x="3437881" y="2456202"/>
-                  </a:lnTo>
-                  <a:lnTo>
-                    <a:pt x="3509503" y="2383592"/>
-                  </a:lnTo>
-                  <a:lnTo>
-                    <a:pt x="3581126" y="2306576"/>
-                  </a:lnTo>
-                  <a:lnTo>
-                    <a:pt x="3652748" y="2224885"/>
-                  </a:lnTo>
-                  <a:lnTo>
-                    <a:pt x="3724371" y="2138237"/>
-                  </a:lnTo>
-                  <a:lnTo>
-                    <a:pt x="3795993" y="2046330"/>
-                  </a:lnTo>
-                  <a:lnTo>
-                    <a:pt x="3867616" y="1948845"/>
-                  </a:lnTo>
-                  <a:lnTo>
-                    <a:pt x="3939238" y="1845444"/>
-                  </a:lnTo>
-                  <a:lnTo>
-                    <a:pt x="4010861" y="1735769"/>
-                  </a:lnTo>
-                  <a:lnTo>
-                    <a:pt x="4082483" y="1619437"/>
-                  </a:lnTo>
-                  <a:lnTo>
-                    <a:pt x="4154106" y="1496045"/>
-                  </a:lnTo>
-                  <a:lnTo>
-                    <a:pt x="4225729" y="1365164"/>
-                  </a:lnTo>
-                  <a:lnTo>
-                    <a:pt x="4297351" y="1226341"/>
-                  </a:lnTo>
-                  <a:lnTo>
-                    <a:pt x="4368974" y="1079092"/>
-                  </a:lnTo>
-                  <a:lnTo>
-                    <a:pt x="4440596" y="922908"/>
-                  </a:lnTo>
-                  <a:lnTo>
-                    <a:pt x="4512219" y="757245"/>
-                  </a:lnTo>
-                  <a:lnTo>
-                    <a:pt x="4583841" y="581528"/>
-                  </a:lnTo>
-                  <a:lnTo>
-                    <a:pt x="4655464" y="395147"/>
-                  </a:lnTo>
-                  <a:lnTo>
-                    <a:pt x="4727086" y="197455"/>
-                  </a:lnTo>
-                  <a:lnTo>
-                    <a:pt x="4794530" y="0"/>
+                    <a:pt x="71622" y="2794474"/>
+                  </a:lnTo>
+                  <a:lnTo>
+                    <a:pt x="143245" y="2794199"/>
+                  </a:lnTo>
+                  <a:lnTo>
+                    <a:pt x="214867" y="2793924"/>
+                  </a:lnTo>
+                  <a:lnTo>
+                    <a:pt x="286490" y="2793649"/>
+                  </a:lnTo>
+                  <a:lnTo>
+                    <a:pt x="358112" y="2793374"/>
+                  </a:lnTo>
+                  <a:lnTo>
+                    <a:pt x="429735" y="2793099"/>
+                  </a:lnTo>
+                  <a:lnTo>
+                    <a:pt x="501357" y="2792823"/>
+                  </a:lnTo>
+                  <a:lnTo>
+                    <a:pt x="572980" y="2792548"/>
+                  </a:lnTo>
+                  <a:lnTo>
+                    <a:pt x="644602" y="2792272"/>
+                  </a:lnTo>
+                  <a:lnTo>
+                    <a:pt x="716225" y="2791997"/>
+                  </a:lnTo>
+                  <a:lnTo>
+                    <a:pt x="787847" y="2791721"/>
+                  </a:lnTo>
+                  <a:lnTo>
+                    <a:pt x="859470" y="2791445"/>
+                  </a:lnTo>
+                  <a:lnTo>
+                    <a:pt x="931092" y="2791169"/>
+                  </a:lnTo>
+                  <a:lnTo>
+                    <a:pt x="1002715" y="2790893"/>
+                  </a:lnTo>
+                  <a:lnTo>
+                    <a:pt x="1074337" y="2790617"/>
+                  </a:lnTo>
+                  <a:lnTo>
+                    <a:pt x="1145960" y="2790341"/>
+                  </a:lnTo>
+                  <a:lnTo>
+                    <a:pt x="1217582" y="2790065"/>
+                  </a:lnTo>
+                  <a:lnTo>
+                    <a:pt x="1289205" y="2789788"/>
+                  </a:lnTo>
+                  <a:lnTo>
+                    <a:pt x="1360827" y="2789512"/>
+                  </a:lnTo>
+                  <a:lnTo>
+                    <a:pt x="1432450" y="2789235"/>
+                  </a:lnTo>
+                  <a:lnTo>
+                    <a:pt x="1504073" y="2788959"/>
+                  </a:lnTo>
+                  <a:lnTo>
+                    <a:pt x="1575695" y="2788682"/>
+                  </a:lnTo>
+                  <a:lnTo>
+                    <a:pt x="1647318" y="2788405"/>
+                  </a:lnTo>
+                  <a:lnTo>
+                    <a:pt x="1718940" y="2788129"/>
+                  </a:lnTo>
+                  <a:lnTo>
+                    <a:pt x="1790563" y="2787852"/>
+                  </a:lnTo>
+                  <a:lnTo>
+                    <a:pt x="1862185" y="2787574"/>
+                  </a:lnTo>
+                  <a:lnTo>
+                    <a:pt x="1933808" y="2787297"/>
+                  </a:lnTo>
+                  <a:lnTo>
+                    <a:pt x="2005430" y="2787020"/>
+                  </a:lnTo>
+                  <a:lnTo>
+                    <a:pt x="2077053" y="2786743"/>
+                  </a:lnTo>
+                  <a:lnTo>
+                    <a:pt x="2148675" y="2786465"/>
+                  </a:lnTo>
+                  <a:lnTo>
+                    <a:pt x="2220298" y="2786188"/>
+                  </a:lnTo>
+                  <a:lnTo>
+                    <a:pt x="2291920" y="2785910"/>
+                  </a:lnTo>
+                  <a:lnTo>
+                    <a:pt x="2363543" y="2785633"/>
+                  </a:lnTo>
+                  <a:lnTo>
+                    <a:pt x="2435165" y="2785355"/>
+                  </a:lnTo>
+                  <a:lnTo>
+                    <a:pt x="2506788" y="2785077"/>
+                  </a:lnTo>
+                  <a:lnTo>
+                    <a:pt x="2578410" y="2784799"/>
+                  </a:lnTo>
+                  <a:lnTo>
+                    <a:pt x="2650033" y="2784521"/>
+                  </a:lnTo>
+                  <a:lnTo>
+                    <a:pt x="2721655" y="2784243"/>
+                  </a:lnTo>
+                  <a:lnTo>
+                    <a:pt x="2793278" y="2783965"/>
+                  </a:lnTo>
+                  <a:lnTo>
+                    <a:pt x="2864901" y="2783686"/>
+                  </a:lnTo>
+                  <a:lnTo>
+                    <a:pt x="2936523" y="2783408"/>
+                  </a:lnTo>
+                  <a:lnTo>
+                    <a:pt x="3008146" y="2783129"/>
+                  </a:lnTo>
+                  <a:lnTo>
+                    <a:pt x="3079768" y="2761787"/>
+                  </a:lnTo>
+                  <a:lnTo>
+                    <a:pt x="3151391" y="2708483"/>
+                  </a:lnTo>
+                  <a:lnTo>
+                    <a:pt x="3223013" y="2651989"/>
+                  </a:lnTo>
+                  <a:lnTo>
+                    <a:pt x="3294636" y="2592115"/>
+                  </a:lnTo>
+                  <a:lnTo>
+                    <a:pt x="3366258" y="2528659"/>
+                  </a:lnTo>
+                  <a:lnTo>
+                    <a:pt x="3437881" y="2461405"/>
+                  </a:lnTo>
+                  <a:lnTo>
+                    <a:pt x="3509503" y="2390127"/>
+                  </a:lnTo>
+                  <a:lnTo>
+                    <a:pt x="3581126" y="2314585"/>
+                  </a:lnTo>
+                  <a:lnTo>
+                    <a:pt x="3652748" y="2234522"/>
+                  </a:lnTo>
+                  <a:lnTo>
+                    <a:pt x="3724371" y="2149669"/>
+                  </a:lnTo>
+                  <a:lnTo>
+                    <a:pt x="3795993" y="2059739"/>
+                  </a:lnTo>
+                  <a:lnTo>
+                    <a:pt x="3867616" y="1964427"/>
+                  </a:lnTo>
+                  <a:lnTo>
+                    <a:pt x="3939238" y="1863413"/>
+                  </a:lnTo>
+                  <a:lnTo>
+                    <a:pt x="4010861" y="1756355"/>
+                  </a:lnTo>
+                  <a:lnTo>
+                    <a:pt x="4082483" y="1642890"/>
+                  </a:lnTo>
+                  <a:lnTo>
+                    <a:pt x="4154106" y="1522637"/>
+                  </a:lnTo>
+                  <a:lnTo>
+                    <a:pt x="4225729" y="1395188"/>
+                  </a:lnTo>
+                  <a:lnTo>
+                    <a:pt x="4297351" y="1260113"/>
+                  </a:lnTo>
+                  <a:lnTo>
+                    <a:pt x="4368974" y="1116957"/>
+                  </a:lnTo>
+                  <a:lnTo>
+                    <a:pt x="4440596" y="965234"/>
+                  </a:lnTo>
+                  <a:lnTo>
+                    <a:pt x="4512219" y="804433"/>
+                  </a:lnTo>
+                  <a:lnTo>
+                    <a:pt x="4583841" y="634011"/>
+                  </a:lnTo>
+                  <a:lnTo>
+                    <a:pt x="4655464" y="453391"/>
+                  </a:lnTo>
+                  <a:lnTo>
+                    <a:pt x="4727086" y="261964"/>
+                  </a:lnTo>
+                  <a:lnTo>
+                    <a:pt x="4798709" y="59083"/>
+                  </a:lnTo>
+                  <a:lnTo>
+                    <a:pt x="4818389" y="0"/>
                   </a:lnTo>
                   <a:lnTo>
                     <a:pt x="7090630" y="0"/>
                   </a:lnTo>
                   <a:lnTo>
-                    <a:pt x="7090630" y="2373929"/>
-                  </a:lnTo>
-                  <a:lnTo>
-                    <a:pt x="7019007" y="2382637"/>
-                  </a:lnTo>
-                  <a:lnTo>
-                    <a:pt x="6947385" y="2391286"/>
-                  </a:lnTo>
-                  <a:lnTo>
-                    <a:pt x="6875762" y="2399875"/>
-                  </a:lnTo>
-                  <a:lnTo>
-                    <a:pt x="6804139" y="2408407"/>
-                  </a:lnTo>
-                  <a:lnTo>
-                    <a:pt x="6732517" y="2416880"/>
-                  </a:lnTo>
-                  <a:lnTo>
-                    <a:pt x="6660894" y="2425295"/>
-                  </a:lnTo>
-                  <a:lnTo>
-                    <a:pt x="6589272" y="2433653"/>
-                  </a:lnTo>
-                  <a:lnTo>
-                    <a:pt x="6517649" y="2441955"/>
-                  </a:lnTo>
-                  <a:lnTo>
-                    <a:pt x="6446027" y="2450199"/>
-                  </a:lnTo>
-                  <a:lnTo>
-                    <a:pt x="6374404" y="2458388"/>
-                  </a:lnTo>
-                  <a:lnTo>
-                    <a:pt x="6302782" y="2466520"/>
-                  </a:lnTo>
-                  <a:lnTo>
-                    <a:pt x="6231159" y="2474598"/>
-                  </a:lnTo>
-                  <a:lnTo>
-                    <a:pt x="6159537" y="2482620"/>
-                  </a:lnTo>
-                  <a:lnTo>
-                    <a:pt x="6087914" y="2490588"/>
-                  </a:lnTo>
-                  <a:lnTo>
-                    <a:pt x="6016292" y="2498501"/>
-                  </a:lnTo>
-                  <a:lnTo>
-                    <a:pt x="5944669" y="2506361"/>
-                  </a:lnTo>
-                  <a:lnTo>
-                    <a:pt x="5873047" y="2514167"/>
-                  </a:lnTo>
-                  <a:lnTo>
-                    <a:pt x="5801424" y="2521920"/>
-                  </a:lnTo>
-                  <a:lnTo>
-                    <a:pt x="5729802" y="2529620"/>
-                  </a:lnTo>
-                  <a:lnTo>
-                    <a:pt x="5658179" y="2537268"/>
-                  </a:lnTo>
-                  <a:lnTo>
-                    <a:pt x="5586557" y="2544863"/>
-                  </a:lnTo>
-                  <a:lnTo>
-                    <a:pt x="5514934" y="2552407"/>
-                  </a:lnTo>
-                  <a:lnTo>
-                    <a:pt x="5443311" y="2559900"/>
-                  </a:lnTo>
-                  <a:lnTo>
-                    <a:pt x="5371689" y="2567341"/>
-                  </a:lnTo>
-                  <a:lnTo>
-                    <a:pt x="5300066" y="2574732"/>
-                  </a:lnTo>
-                  <a:lnTo>
-                    <a:pt x="5228444" y="2582073"/>
-                  </a:lnTo>
-                  <a:lnTo>
-                    <a:pt x="5156821" y="2589363"/>
-                  </a:lnTo>
-                  <a:lnTo>
-                    <a:pt x="5085199" y="2596604"/>
-                  </a:lnTo>
-                  <a:lnTo>
-                    <a:pt x="5013576" y="2603795"/>
-                  </a:lnTo>
-                  <a:lnTo>
-                    <a:pt x="4941954" y="2610938"/>
-                  </a:lnTo>
-                  <a:lnTo>
-                    <a:pt x="4870331" y="2618032"/>
-                  </a:lnTo>
-                  <a:lnTo>
-                    <a:pt x="4798709" y="2625078"/>
-                  </a:lnTo>
-                  <a:lnTo>
-                    <a:pt x="4727086" y="2632075"/>
-                  </a:lnTo>
-                  <a:lnTo>
-                    <a:pt x="4655464" y="2639025"/>
-                  </a:lnTo>
-                  <a:lnTo>
-                    <a:pt x="4583841" y="2645928"/>
-                  </a:lnTo>
-                  <a:lnTo>
-                    <a:pt x="4512219" y="2652783"/>
-                  </a:lnTo>
-                  <a:lnTo>
-                    <a:pt x="4440596" y="2659592"/>
-                  </a:lnTo>
-                  <a:lnTo>
-                    <a:pt x="4368974" y="2666355"/>
-                  </a:lnTo>
-                  <a:lnTo>
-                    <a:pt x="4297351" y="2673071"/>
-                  </a:lnTo>
-                  <a:lnTo>
-                    <a:pt x="4225729" y="2679742"/>
-                  </a:lnTo>
-                  <a:lnTo>
-                    <a:pt x="4154106" y="2686368"/>
-                  </a:lnTo>
-                  <a:lnTo>
-                    <a:pt x="4082483" y="2692948"/>
-                  </a:lnTo>
-                  <a:lnTo>
-                    <a:pt x="4010861" y="2699483"/>
-                  </a:lnTo>
-                  <a:lnTo>
-                    <a:pt x="3939238" y="2705974"/>
-                  </a:lnTo>
-                  <a:lnTo>
-                    <a:pt x="3867616" y="2712421"/>
-                  </a:lnTo>
-                  <a:lnTo>
-                    <a:pt x="3795993" y="2718824"/>
-                  </a:lnTo>
-                  <a:lnTo>
-                    <a:pt x="3724371" y="2725183"/>
-                  </a:lnTo>
-                  <a:lnTo>
-                    <a:pt x="3652748" y="2731499"/>
-                  </a:lnTo>
-                  <a:lnTo>
-                    <a:pt x="3581126" y="2737772"/>
-                  </a:lnTo>
-                  <a:lnTo>
-                    <a:pt x="3509503" y="2744002"/>
-                  </a:lnTo>
-                  <a:lnTo>
-                    <a:pt x="3437881" y="2750190"/>
-                  </a:lnTo>
-                  <a:lnTo>
-                    <a:pt x="3366258" y="2756335"/>
-                  </a:lnTo>
-                  <a:lnTo>
-                    <a:pt x="3294636" y="2762439"/>
-                  </a:lnTo>
-                  <a:lnTo>
-                    <a:pt x="3223013" y="2768501"/>
-                  </a:lnTo>
-                  <a:lnTo>
-                    <a:pt x="3151391" y="2774522"/>
-                  </a:lnTo>
-                  <a:lnTo>
-                    <a:pt x="3079768" y="2780502"/>
-                  </a:lnTo>
-                  <a:lnTo>
-                    <a:pt x="3008146" y="2812479"/>
-                  </a:lnTo>
-                  <a:lnTo>
-                    <a:pt x="2936523" y="2860549"/>
-                  </a:lnTo>
-                  <a:lnTo>
-                    <a:pt x="2864901" y="2905870"/>
-                  </a:lnTo>
-                  <a:lnTo>
-                    <a:pt x="2793278" y="2948597"/>
-                  </a:lnTo>
-                  <a:lnTo>
-                    <a:pt x="2721655" y="2988880"/>
-                  </a:lnTo>
-                  <a:lnTo>
-                    <a:pt x="2650033" y="3026858"/>
-                  </a:lnTo>
-                  <a:lnTo>
-                    <a:pt x="2578410" y="3062663"/>
-                  </a:lnTo>
-                  <a:lnTo>
-                    <a:pt x="2506788" y="3096419"/>
-                  </a:lnTo>
-                  <a:lnTo>
-                    <a:pt x="2435165" y="3128244"/>
-                  </a:lnTo>
-                  <a:lnTo>
-                    <a:pt x="2363543" y="3158248"/>
-                  </a:lnTo>
-                  <a:lnTo>
-                    <a:pt x="2291920" y="3186535"/>
-                  </a:lnTo>
-                  <a:lnTo>
-                    <a:pt x="2220298" y="3213204"/>
-                  </a:lnTo>
-                  <a:lnTo>
-                    <a:pt x="2148675" y="3238347"/>
-                  </a:lnTo>
-                  <a:lnTo>
-                    <a:pt x="2077053" y="3262052"/>
-                  </a:lnTo>
-                  <a:lnTo>
-                    <a:pt x="2005430" y="3284400"/>
-                  </a:lnTo>
-                  <a:lnTo>
-                    <a:pt x="1933808" y="3305469"/>
-                  </a:lnTo>
-                  <a:lnTo>
-                    <a:pt x="1862185" y="3325333"/>
-                  </a:lnTo>
-                  <a:lnTo>
-                    <a:pt x="1790563" y="3344060"/>
-                  </a:lnTo>
-                  <a:lnTo>
-                    <a:pt x="1718940" y="3361716"/>
-                  </a:lnTo>
-                  <a:lnTo>
-                    <a:pt x="1647318" y="3378362"/>
-                  </a:lnTo>
-                  <a:lnTo>
-                    <a:pt x="1575695" y="3394055"/>
-                  </a:lnTo>
-                  <a:lnTo>
-                    <a:pt x="1504073" y="3408851"/>
-                  </a:lnTo>
-                  <a:lnTo>
-                    <a:pt x="1432450" y="3422800"/>
-                  </a:lnTo>
-                  <a:lnTo>
-                    <a:pt x="1360827" y="3435950"/>
-                  </a:lnTo>
-                  <a:lnTo>
-                    <a:pt x="1289205" y="3448349"/>
-                  </a:lnTo>
-                  <a:lnTo>
-                    <a:pt x="1217582" y="3460038"/>
-                  </a:lnTo>
-                  <a:lnTo>
-                    <a:pt x="1145960" y="3471058"/>
-                  </a:lnTo>
-                  <a:lnTo>
-                    <a:pt x="1074337" y="3481447"/>
-                  </a:lnTo>
-                  <a:lnTo>
-                    <a:pt x="1002715" y="3491242"/>
-                  </a:lnTo>
-                  <a:lnTo>
-                    <a:pt x="931092" y="3500477"/>
-                  </a:lnTo>
-                  <a:lnTo>
-                    <a:pt x="859470" y="3509183"/>
-                  </a:lnTo>
-                  <a:lnTo>
-                    <a:pt x="787847" y="3517392"/>
-                  </a:lnTo>
-                  <a:lnTo>
-                    <a:pt x="716225" y="3525130"/>
-                  </a:lnTo>
-                  <a:lnTo>
-                    <a:pt x="644602" y="3532426"/>
-                  </a:lnTo>
-                  <a:lnTo>
-                    <a:pt x="572980" y="3539304"/>
-                  </a:lnTo>
-                  <a:lnTo>
-                    <a:pt x="501357" y="3545789"/>
-                  </a:lnTo>
-                  <a:lnTo>
-                    <a:pt x="429735" y="3551903"/>
-                  </a:lnTo>
-                  <a:lnTo>
-                    <a:pt x="358112" y="3557667"/>
-                  </a:lnTo>
-                  <a:lnTo>
-                    <a:pt x="286490" y="3563101"/>
-                  </a:lnTo>
-                  <a:lnTo>
-                    <a:pt x="214867" y="3568224"/>
-                  </a:lnTo>
-                  <a:lnTo>
-                    <a:pt x="143245" y="3573054"/>
-                  </a:lnTo>
-                  <a:lnTo>
-                    <a:pt x="71622" y="3577608"/>
-                  </a:lnTo>
-                  <a:lnTo>
-                    <a:pt x="0" y="3581901"/>
+                    <a:pt x="7090630" y="2767108"/>
+                  </a:lnTo>
+                  <a:lnTo>
+                    <a:pt x="7019007" y="2767391"/>
+                  </a:lnTo>
+                  <a:lnTo>
+                    <a:pt x="6947385" y="2767675"/>
+                  </a:lnTo>
+                  <a:lnTo>
+                    <a:pt x="6875762" y="2767958"/>
+                  </a:lnTo>
+                  <a:lnTo>
+                    <a:pt x="6804139" y="2768241"/>
+                  </a:lnTo>
+                  <a:lnTo>
+                    <a:pt x="6732517" y="2768525"/>
+                  </a:lnTo>
+                  <a:lnTo>
+                    <a:pt x="6660894" y="2768808"/>
+                  </a:lnTo>
+                  <a:lnTo>
+                    <a:pt x="6589272" y="2769091"/>
+                  </a:lnTo>
+                  <a:lnTo>
+                    <a:pt x="6517649" y="2769374"/>
+                  </a:lnTo>
+                  <a:lnTo>
+                    <a:pt x="6446027" y="2769657"/>
+                  </a:lnTo>
+                  <a:lnTo>
+                    <a:pt x="6374404" y="2769940"/>
+                  </a:lnTo>
+                  <a:lnTo>
+                    <a:pt x="6302782" y="2770222"/>
+                  </a:lnTo>
+                  <a:lnTo>
+                    <a:pt x="6231159" y="2770505"/>
+                  </a:lnTo>
+                  <a:lnTo>
+                    <a:pt x="6159537" y="2770787"/>
+                  </a:lnTo>
+                  <a:lnTo>
+                    <a:pt x="6087914" y="2771070"/>
+                  </a:lnTo>
+                  <a:lnTo>
+                    <a:pt x="6016292" y="2771352"/>
+                  </a:lnTo>
+                  <a:lnTo>
+                    <a:pt x="5944669" y="2771634"/>
+                  </a:lnTo>
+                  <a:lnTo>
+                    <a:pt x="5873047" y="2771917"/>
+                  </a:lnTo>
+                  <a:lnTo>
+                    <a:pt x="5801424" y="2772199"/>
+                  </a:lnTo>
+                  <a:lnTo>
+                    <a:pt x="5729802" y="2772481"/>
+                  </a:lnTo>
+                  <a:lnTo>
+                    <a:pt x="5658179" y="2772763"/>
+                  </a:lnTo>
+                  <a:lnTo>
+                    <a:pt x="5586557" y="2773044"/>
+                  </a:lnTo>
+                  <a:lnTo>
+                    <a:pt x="5514934" y="2773326"/>
+                  </a:lnTo>
+                  <a:lnTo>
+                    <a:pt x="5443311" y="2773608"/>
+                  </a:lnTo>
+                  <a:lnTo>
+                    <a:pt x="5371689" y="2773889"/>
+                  </a:lnTo>
+                  <a:lnTo>
+                    <a:pt x="5300066" y="2774171"/>
+                  </a:lnTo>
+                  <a:lnTo>
+                    <a:pt x="5228444" y="2774452"/>
+                  </a:lnTo>
+                  <a:lnTo>
+                    <a:pt x="5156821" y="2774733"/>
+                  </a:lnTo>
+                  <a:lnTo>
+                    <a:pt x="5085199" y="2775014"/>
+                  </a:lnTo>
+                  <a:lnTo>
+                    <a:pt x="5013576" y="2775296"/>
+                  </a:lnTo>
+                  <a:lnTo>
+                    <a:pt x="4941954" y="2775577"/>
+                  </a:lnTo>
+                  <a:lnTo>
+                    <a:pt x="4870331" y="2775857"/>
+                  </a:lnTo>
+                  <a:lnTo>
+                    <a:pt x="4798709" y="2776138"/>
+                  </a:lnTo>
+                  <a:lnTo>
+                    <a:pt x="4727086" y="2776419"/>
+                  </a:lnTo>
+                  <a:lnTo>
+                    <a:pt x="4655464" y="2776700"/>
+                  </a:lnTo>
+                  <a:lnTo>
+                    <a:pt x="4583841" y="2776980"/>
+                  </a:lnTo>
+                  <a:lnTo>
+                    <a:pt x="4512219" y="2777261"/>
+                  </a:lnTo>
+                  <a:lnTo>
+                    <a:pt x="4440596" y="2777541"/>
+                  </a:lnTo>
+                  <a:lnTo>
+                    <a:pt x="4368974" y="2777821"/>
+                  </a:lnTo>
+                  <a:lnTo>
+                    <a:pt x="4297351" y="2778101"/>
+                  </a:lnTo>
+                  <a:lnTo>
+                    <a:pt x="4225729" y="2778382"/>
+                  </a:lnTo>
+                  <a:lnTo>
+                    <a:pt x="4154106" y="2778662"/>
+                  </a:lnTo>
+                  <a:lnTo>
+                    <a:pt x="4082483" y="2778941"/>
+                  </a:lnTo>
+                  <a:lnTo>
+                    <a:pt x="4010861" y="2779221"/>
+                  </a:lnTo>
+                  <a:lnTo>
+                    <a:pt x="3939238" y="2779501"/>
+                  </a:lnTo>
+                  <a:lnTo>
+                    <a:pt x="3867616" y="2779781"/>
+                  </a:lnTo>
+                  <a:lnTo>
+                    <a:pt x="3795993" y="2780060"/>
+                  </a:lnTo>
+                  <a:lnTo>
+                    <a:pt x="3724371" y="2780340"/>
+                  </a:lnTo>
+                  <a:lnTo>
+                    <a:pt x="3652748" y="2780619"/>
+                  </a:lnTo>
+                  <a:lnTo>
+                    <a:pt x="3581126" y="2780898"/>
+                  </a:lnTo>
+                  <a:lnTo>
+                    <a:pt x="3509503" y="2781178"/>
+                  </a:lnTo>
+                  <a:lnTo>
+                    <a:pt x="3437881" y="2781457"/>
+                  </a:lnTo>
+                  <a:lnTo>
+                    <a:pt x="3366258" y="2781736"/>
+                  </a:lnTo>
+                  <a:lnTo>
+                    <a:pt x="3294636" y="2782015"/>
+                  </a:lnTo>
+                  <a:lnTo>
+                    <a:pt x="3223013" y="2782293"/>
+                  </a:lnTo>
+                  <a:lnTo>
+                    <a:pt x="3151391" y="2782572"/>
+                  </a:lnTo>
+                  <a:lnTo>
+                    <a:pt x="3079768" y="2782851"/>
+                  </a:lnTo>
+                  <a:lnTo>
+                    <a:pt x="3008146" y="2812082"/>
+                  </a:lnTo>
+                  <a:lnTo>
+                    <a:pt x="2936523" y="2859538"/>
+                  </a:lnTo>
+                  <a:lnTo>
+                    <a:pt x="2864901" y="2904314"/>
+                  </a:lnTo>
+                  <a:lnTo>
+                    <a:pt x="2793278" y="2946562"/>
+                  </a:lnTo>
+                  <a:lnTo>
+                    <a:pt x="2721655" y="2986425"/>
+                  </a:lnTo>
+                  <a:lnTo>
+                    <a:pt x="2650033" y="3024038"/>
+                  </a:lnTo>
+                  <a:lnTo>
+                    <a:pt x="2578410" y="3059527"/>
+                  </a:lnTo>
+                  <a:lnTo>
+                    <a:pt x="2506788" y="3093012"/>
+                  </a:lnTo>
+                  <a:lnTo>
+                    <a:pt x="2435165" y="3124607"/>
+                  </a:lnTo>
+                  <a:lnTo>
+                    <a:pt x="2363543" y="3154419"/>
+                  </a:lnTo>
+                  <a:lnTo>
+                    <a:pt x="2291920" y="3182547"/>
+                  </a:lnTo>
+                  <a:lnTo>
+                    <a:pt x="2220298" y="3209087"/>
+                  </a:lnTo>
+                  <a:lnTo>
+                    <a:pt x="2148675" y="3234129"/>
+                  </a:lnTo>
+                  <a:lnTo>
+                    <a:pt x="2077053" y="3257757"/>
+                  </a:lnTo>
+                  <a:lnTo>
+                    <a:pt x="2005430" y="3280051"/>
+                  </a:lnTo>
+                  <a:lnTo>
+                    <a:pt x="1933808" y="3301086"/>
+                  </a:lnTo>
+                  <a:lnTo>
+                    <a:pt x="1862185" y="3320934"/>
+                  </a:lnTo>
+                  <a:lnTo>
+                    <a:pt x="1790563" y="3339661"/>
+                  </a:lnTo>
+                  <a:lnTo>
+                    <a:pt x="1718940" y="3357331"/>
+                  </a:lnTo>
+                  <a:lnTo>
+                    <a:pt x="1647318" y="3374004"/>
+                  </a:lnTo>
+                  <a:lnTo>
+                    <a:pt x="1575695" y="3389735"/>
+                  </a:lnTo>
+                  <a:lnTo>
+                    <a:pt x="1504073" y="3404578"/>
+                  </a:lnTo>
+                  <a:lnTo>
+                    <a:pt x="1432450" y="3418583"/>
+                  </a:lnTo>
+                  <a:lnTo>
+                    <a:pt x="1360827" y="3431797"/>
+                  </a:lnTo>
+                  <a:lnTo>
+                    <a:pt x="1289205" y="3444265"/>
+                  </a:lnTo>
+                  <a:lnTo>
+                    <a:pt x="1217582" y="3456030"/>
+                  </a:lnTo>
+                  <a:lnTo>
+                    <a:pt x="1145960" y="3467130"/>
+                  </a:lnTo>
+                  <a:lnTo>
+                    <a:pt x="1074337" y="3477603"/>
+                  </a:lnTo>
+                  <a:lnTo>
+                    <a:pt x="1002715" y="3487486"/>
+                  </a:lnTo>
+                  <a:lnTo>
+                    <a:pt x="931092" y="3496810"/>
+                  </a:lnTo>
+                  <a:lnTo>
+                    <a:pt x="859470" y="3505608"/>
+                  </a:lnTo>
+                  <a:lnTo>
+                    <a:pt x="787847" y="3513909"/>
+                  </a:lnTo>
+                  <a:lnTo>
+                    <a:pt x="716225" y="3521741"/>
+                  </a:lnTo>
+                  <a:lnTo>
+                    <a:pt x="644602" y="3529132"/>
+                  </a:lnTo>
+                  <a:lnTo>
+                    <a:pt x="572980" y="3536105"/>
+                  </a:lnTo>
+                  <a:lnTo>
+                    <a:pt x="501357" y="3542684"/>
+                  </a:lnTo>
+                  <a:lnTo>
+                    <a:pt x="429735" y="3548892"/>
+                  </a:lnTo>
+                  <a:lnTo>
+                    <a:pt x="358112" y="3554750"/>
+                  </a:lnTo>
+                  <a:lnTo>
+                    <a:pt x="286490" y="3560276"/>
+                  </a:lnTo>
+                  <a:lnTo>
+                    <a:pt x="214867" y="3565491"/>
+                  </a:lnTo>
+                  <a:lnTo>
+                    <a:pt x="143245" y="3570411"/>
+                  </a:lnTo>
+                  <a:lnTo>
+                    <a:pt x="71622" y="3575054"/>
+                  </a:lnTo>
+                  <a:lnTo>
+                    <a:pt x="0" y="3579434"/>
                   </a:lnTo>
                   <a:close/>
                 </a:path>
@@ -3670,215 +3673,218 @@
           <p:spPr>
             <a:xfrm>
               <a:off x="1172049" y="1896563"/>
-              <a:ext cx="4794530" cy="3002545"/>
+              <a:ext cx="4818389" cy="2794749"/>
             </a:xfrm>
             <a:custGeom>
               <a:avLst/>
               <a:pathLst>
-                <a:path w="4794530" h="3002545">
+                <a:path w="4818389" h="2794749">
                   <a:moveTo>
-                    <a:pt x="0" y="3002545"/>
+                    <a:pt x="0" y="2794749"/>
                   </a:moveTo>
                   <a:lnTo>
-                    <a:pt x="71622" y="2998088"/>
-                  </a:lnTo>
-                  <a:lnTo>
-                    <a:pt x="143245" y="2993599"/>
-                  </a:lnTo>
-                  <a:lnTo>
-                    <a:pt x="214867" y="2989081"/>
-                  </a:lnTo>
-                  <a:lnTo>
-                    <a:pt x="286490" y="2984531"/>
-                  </a:lnTo>
-                  <a:lnTo>
-                    <a:pt x="358112" y="2979950"/>
-                  </a:lnTo>
-                  <a:lnTo>
-                    <a:pt x="429735" y="2975338"/>
-                  </a:lnTo>
-                  <a:lnTo>
-                    <a:pt x="501357" y="2970694"/>
-                  </a:lnTo>
-                  <a:lnTo>
-                    <a:pt x="572980" y="2966018"/>
-                  </a:lnTo>
-                  <a:lnTo>
-                    <a:pt x="644602" y="2961310"/>
-                  </a:lnTo>
-                  <a:lnTo>
-                    <a:pt x="716225" y="2956570"/>
-                  </a:lnTo>
-                  <a:lnTo>
-                    <a:pt x="787847" y="2951797"/>
-                  </a:lnTo>
-                  <a:lnTo>
-                    <a:pt x="859470" y="2946991"/>
-                  </a:lnTo>
-                  <a:lnTo>
-                    <a:pt x="931092" y="2942153"/>
-                  </a:lnTo>
-                  <a:lnTo>
-                    <a:pt x="1002715" y="2937282"/>
-                  </a:lnTo>
-                  <a:lnTo>
-                    <a:pt x="1074337" y="2932377"/>
-                  </a:lnTo>
-                  <a:lnTo>
-                    <a:pt x="1145960" y="2927438"/>
-                  </a:lnTo>
-                  <a:lnTo>
-                    <a:pt x="1217582" y="2922466"/>
-                  </a:lnTo>
-                  <a:lnTo>
-                    <a:pt x="1289205" y="2917459"/>
-                  </a:lnTo>
-                  <a:lnTo>
-                    <a:pt x="1360827" y="2912418"/>
-                  </a:lnTo>
-                  <a:lnTo>
-                    <a:pt x="1432450" y="2907343"/>
-                  </a:lnTo>
-                  <a:lnTo>
-                    <a:pt x="1504073" y="2902232"/>
-                  </a:lnTo>
-                  <a:lnTo>
-                    <a:pt x="1575695" y="2897087"/>
-                  </a:lnTo>
-                  <a:lnTo>
-                    <a:pt x="1647318" y="2891907"/>
-                  </a:lnTo>
-                  <a:lnTo>
-                    <a:pt x="1718940" y="2886691"/>
-                  </a:lnTo>
-                  <a:lnTo>
-                    <a:pt x="1790563" y="2881439"/>
-                  </a:lnTo>
-                  <a:lnTo>
-                    <a:pt x="1862185" y="2876151"/>
-                  </a:lnTo>
-                  <a:lnTo>
-                    <a:pt x="1933808" y="2870827"/>
-                  </a:lnTo>
-                  <a:lnTo>
-                    <a:pt x="2005430" y="2865466"/>
-                  </a:lnTo>
-                  <a:lnTo>
-                    <a:pt x="2077053" y="2860069"/>
-                  </a:lnTo>
-                  <a:lnTo>
-                    <a:pt x="2148675" y="2854635"/>
-                  </a:lnTo>
-                  <a:lnTo>
-                    <a:pt x="2220298" y="2849163"/>
-                  </a:lnTo>
-                  <a:lnTo>
-                    <a:pt x="2291920" y="2843654"/>
-                  </a:lnTo>
-                  <a:lnTo>
-                    <a:pt x="2363543" y="2838107"/>
-                  </a:lnTo>
-                  <a:lnTo>
-                    <a:pt x="2435165" y="2832522"/>
-                  </a:lnTo>
-                  <a:lnTo>
-                    <a:pt x="2506788" y="2826899"/>
-                  </a:lnTo>
-                  <a:lnTo>
-                    <a:pt x="2578410" y="2821237"/>
-                  </a:lnTo>
-                  <a:lnTo>
-                    <a:pt x="2650033" y="2815536"/>
-                  </a:lnTo>
-                  <a:lnTo>
-                    <a:pt x="2721655" y="2809797"/>
-                  </a:lnTo>
-                  <a:lnTo>
-                    <a:pt x="2793278" y="2804017"/>
-                  </a:lnTo>
-                  <a:lnTo>
-                    <a:pt x="2864901" y="2798199"/>
-                  </a:lnTo>
-                  <a:lnTo>
-                    <a:pt x="2936523" y="2792340"/>
-                  </a:lnTo>
-                  <a:lnTo>
-                    <a:pt x="3008146" y="2786441"/>
-                  </a:lnTo>
-                  <a:lnTo>
-                    <a:pt x="3079768" y="2761490"/>
-                  </a:lnTo>
-                  <a:lnTo>
-                    <a:pt x="3151391" y="2707408"/>
-                  </a:lnTo>
-                  <a:lnTo>
-                    <a:pt x="3223013" y="2650043"/>
-                  </a:lnTo>
-                  <a:lnTo>
-                    <a:pt x="3294636" y="2589197"/>
-                  </a:lnTo>
-                  <a:lnTo>
-                    <a:pt x="3366258" y="2524658"/>
-                  </a:lnTo>
-                  <a:lnTo>
-                    <a:pt x="3437881" y="2456202"/>
-                  </a:lnTo>
-                  <a:lnTo>
-                    <a:pt x="3509503" y="2383592"/>
-                  </a:lnTo>
-                  <a:lnTo>
-                    <a:pt x="3581126" y="2306576"/>
-                  </a:lnTo>
-                  <a:lnTo>
-                    <a:pt x="3652748" y="2224885"/>
-                  </a:lnTo>
-                  <a:lnTo>
-                    <a:pt x="3724371" y="2138237"/>
-                  </a:lnTo>
-                  <a:lnTo>
-                    <a:pt x="3795993" y="2046330"/>
-                  </a:lnTo>
-                  <a:lnTo>
-                    <a:pt x="3867616" y="1948845"/>
-                  </a:lnTo>
-                  <a:lnTo>
-                    <a:pt x="3939238" y="1845444"/>
-                  </a:lnTo>
-                  <a:lnTo>
-                    <a:pt x="4010861" y="1735769"/>
-                  </a:lnTo>
-                  <a:lnTo>
-                    <a:pt x="4082483" y="1619437"/>
-                  </a:lnTo>
-                  <a:lnTo>
-                    <a:pt x="4154106" y="1496045"/>
-                  </a:lnTo>
-                  <a:lnTo>
-                    <a:pt x="4225729" y="1365164"/>
-                  </a:lnTo>
-                  <a:lnTo>
-                    <a:pt x="4297351" y="1226341"/>
-                  </a:lnTo>
-                  <a:lnTo>
-                    <a:pt x="4368974" y="1079092"/>
-                  </a:lnTo>
-                  <a:lnTo>
-                    <a:pt x="4440596" y="922908"/>
-                  </a:lnTo>
-                  <a:lnTo>
-                    <a:pt x="4512219" y="757245"/>
-                  </a:lnTo>
-                  <a:lnTo>
-                    <a:pt x="4583841" y="581528"/>
-                  </a:lnTo>
-                  <a:lnTo>
-                    <a:pt x="4655464" y="395147"/>
-                  </a:lnTo>
-                  <a:lnTo>
-                    <a:pt x="4727086" y="197455"/>
-                  </a:lnTo>
-                  <a:lnTo>
-                    <a:pt x="4794530" y="0"/>
+                    <a:pt x="71622" y="2794474"/>
+                  </a:lnTo>
+                  <a:lnTo>
+                    <a:pt x="143245" y="2794199"/>
+                  </a:lnTo>
+                  <a:lnTo>
+                    <a:pt x="214867" y="2793924"/>
+                  </a:lnTo>
+                  <a:lnTo>
+                    <a:pt x="286490" y="2793649"/>
+                  </a:lnTo>
+                  <a:lnTo>
+                    <a:pt x="358112" y="2793374"/>
+                  </a:lnTo>
+                  <a:lnTo>
+                    <a:pt x="429735" y="2793099"/>
+                  </a:lnTo>
+                  <a:lnTo>
+                    <a:pt x="501357" y="2792823"/>
+                  </a:lnTo>
+                  <a:lnTo>
+                    <a:pt x="572980" y="2792548"/>
+                  </a:lnTo>
+                  <a:lnTo>
+                    <a:pt x="644602" y="2792272"/>
+                  </a:lnTo>
+                  <a:lnTo>
+                    <a:pt x="716225" y="2791997"/>
+                  </a:lnTo>
+                  <a:lnTo>
+                    <a:pt x="787847" y="2791721"/>
+                  </a:lnTo>
+                  <a:lnTo>
+                    <a:pt x="859470" y="2791445"/>
+                  </a:lnTo>
+                  <a:lnTo>
+                    <a:pt x="931092" y="2791169"/>
+                  </a:lnTo>
+                  <a:lnTo>
+                    <a:pt x="1002715" y="2790893"/>
+                  </a:lnTo>
+                  <a:lnTo>
+                    <a:pt x="1074337" y="2790617"/>
+                  </a:lnTo>
+                  <a:lnTo>
+                    <a:pt x="1145960" y="2790341"/>
+                  </a:lnTo>
+                  <a:lnTo>
+                    <a:pt x="1217582" y="2790065"/>
+                  </a:lnTo>
+                  <a:lnTo>
+                    <a:pt x="1289205" y="2789788"/>
+                  </a:lnTo>
+                  <a:lnTo>
+                    <a:pt x="1360827" y="2789512"/>
+                  </a:lnTo>
+                  <a:lnTo>
+                    <a:pt x="1432450" y="2789235"/>
+                  </a:lnTo>
+                  <a:lnTo>
+                    <a:pt x="1504073" y="2788959"/>
+                  </a:lnTo>
+                  <a:lnTo>
+                    <a:pt x="1575695" y="2788682"/>
+                  </a:lnTo>
+                  <a:lnTo>
+                    <a:pt x="1647318" y="2788405"/>
+                  </a:lnTo>
+                  <a:lnTo>
+                    <a:pt x="1718940" y="2788129"/>
+                  </a:lnTo>
+                  <a:lnTo>
+                    <a:pt x="1790563" y="2787852"/>
+                  </a:lnTo>
+                  <a:lnTo>
+                    <a:pt x="1862185" y="2787574"/>
+                  </a:lnTo>
+                  <a:lnTo>
+                    <a:pt x="1933808" y="2787297"/>
+                  </a:lnTo>
+                  <a:lnTo>
+                    <a:pt x="2005430" y="2787020"/>
+                  </a:lnTo>
+                  <a:lnTo>
+                    <a:pt x="2077053" y="2786743"/>
+                  </a:lnTo>
+                  <a:lnTo>
+                    <a:pt x="2148675" y="2786465"/>
+                  </a:lnTo>
+                  <a:lnTo>
+                    <a:pt x="2220298" y="2786188"/>
+                  </a:lnTo>
+                  <a:lnTo>
+                    <a:pt x="2291920" y="2785910"/>
+                  </a:lnTo>
+                  <a:lnTo>
+                    <a:pt x="2363543" y="2785633"/>
+                  </a:lnTo>
+                  <a:lnTo>
+                    <a:pt x="2435165" y="2785355"/>
+                  </a:lnTo>
+                  <a:lnTo>
+                    <a:pt x="2506788" y="2785077"/>
+                  </a:lnTo>
+                  <a:lnTo>
+                    <a:pt x="2578410" y="2784799"/>
+                  </a:lnTo>
+                  <a:lnTo>
+                    <a:pt x="2650033" y="2784521"/>
+                  </a:lnTo>
+                  <a:lnTo>
+                    <a:pt x="2721655" y="2784243"/>
+                  </a:lnTo>
+                  <a:lnTo>
+                    <a:pt x="2793278" y="2783965"/>
+                  </a:lnTo>
+                  <a:lnTo>
+                    <a:pt x="2864901" y="2783686"/>
+                  </a:lnTo>
+                  <a:lnTo>
+                    <a:pt x="2936523" y="2783408"/>
+                  </a:lnTo>
+                  <a:lnTo>
+                    <a:pt x="3008146" y="2783129"/>
+                  </a:lnTo>
+                  <a:lnTo>
+                    <a:pt x="3079768" y="2761787"/>
+                  </a:lnTo>
+                  <a:lnTo>
+                    <a:pt x="3151391" y="2708483"/>
+                  </a:lnTo>
+                  <a:lnTo>
+                    <a:pt x="3223013" y="2651989"/>
+                  </a:lnTo>
+                  <a:lnTo>
+                    <a:pt x="3294636" y="2592115"/>
+                  </a:lnTo>
+                  <a:lnTo>
+                    <a:pt x="3366258" y="2528659"/>
+                  </a:lnTo>
+                  <a:lnTo>
+                    <a:pt x="3437881" y="2461405"/>
+                  </a:lnTo>
+                  <a:lnTo>
+                    <a:pt x="3509503" y="2390127"/>
+                  </a:lnTo>
+                  <a:lnTo>
+                    <a:pt x="3581126" y="2314585"/>
+                  </a:lnTo>
+                  <a:lnTo>
+                    <a:pt x="3652748" y="2234522"/>
+                  </a:lnTo>
+                  <a:lnTo>
+                    <a:pt x="3724371" y="2149669"/>
+                  </a:lnTo>
+                  <a:lnTo>
+                    <a:pt x="3795993" y="2059739"/>
+                  </a:lnTo>
+                  <a:lnTo>
+                    <a:pt x="3867616" y="1964427"/>
+                  </a:lnTo>
+                  <a:lnTo>
+                    <a:pt x="3939238" y="1863413"/>
+                  </a:lnTo>
+                  <a:lnTo>
+                    <a:pt x="4010861" y="1756355"/>
+                  </a:lnTo>
+                  <a:lnTo>
+                    <a:pt x="4082483" y="1642890"/>
+                  </a:lnTo>
+                  <a:lnTo>
+                    <a:pt x="4154106" y="1522637"/>
+                  </a:lnTo>
+                  <a:lnTo>
+                    <a:pt x="4225729" y="1395188"/>
+                  </a:lnTo>
+                  <a:lnTo>
+                    <a:pt x="4297351" y="1260113"/>
+                  </a:lnTo>
+                  <a:lnTo>
+                    <a:pt x="4368974" y="1116957"/>
+                  </a:lnTo>
+                  <a:lnTo>
+                    <a:pt x="4440596" y="965234"/>
+                  </a:lnTo>
+                  <a:lnTo>
+                    <a:pt x="4512219" y="804433"/>
+                  </a:lnTo>
+                  <a:lnTo>
+                    <a:pt x="4583841" y="634011"/>
+                  </a:lnTo>
+                  <a:lnTo>
+                    <a:pt x="4655464" y="453391"/>
+                  </a:lnTo>
+                  <a:lnTo>
+                    <a:pt x="4727086" y="261964"/>
+                  </a:lnTo>
+                  <a:lnTo>
+                    <a:pt x="4798709" y="59083"/>
+                  </a:lnTo>
+                  <a:lnTo>
+                    <a:pt x="4818389" y="0"/>
                   </a:lnTo>
                 </a:path>
               </a:pathLst>
@@ -3898,312 +3904,312 @@
           </p:nvSpPr>
           <p:spPr>
             <a:xfrm>
-              <a:off x="1172049" y="4270493"/>
-              <a:ext cx="7090630" cy="1207972"/>
+              <a:off x="1172049" y="4663671"/>
+              <a:ext cx="7090630" cy="812326"/>
             </a:xfrm>
             <a:custGeom>
               <a:avLst/>
               <a:pathLst>
-                <a:path w="7090630" h="1207972">
+                <a:path w="7090630" h="812326">
                   <a:moveTo>
                     <a:pt x="7090630" y="0"/>
                   </a:moveTo>
                   <a:lnTo>
-                    <a:pt x="7019007" y="8707"/>
-                  </a:lnTo>
-                  <a:lnTo>
-                    <a:pt x="6947385" y="17356"/>
-                  </a:lnTo>
-                  <a:lnTo>
-                    <a:pt x="6875762" y="25946"/>
-                  </a:lnTo>
-                  <a:lnTo>
-                    <a:pt x="6804139" y="34477"/>
-                  </a:lnTo>
-                  <a:lnTo>
-                    <a:pt x="6732517" y="42950"/>
-                  </a:lnTo>
-                  <a:lnTo>
-                    <a:pt x="6660894" y="51366"/>
-                  </a:lnTo>
-                  <a:lnTo>
-                    <a:pt x="6589272" y="59724"/>
-                  </a:lnTo>
-                  <a:lnTo>
-                    <a:pt x="6517649" y="68025"/>
-                  </a:lnTo>
-                  <a:lnTo>
-                    <a:pt x="6446027" y="76270"/>
-                  </a:lnTo>
-                  <a:lnTo>
-                    <a:pt x="6374404" y="84458"/>
-                  </a:lnTo>
-                  <a:lnTo>
-                    <a:pt x="6302782" y="92591"/>
-                  </a:lnTo>
-                  <a:lnTo>
-                    <a:pt x="6231159" y="100668"/>
-                  </a:lnTo>
-                  <a:lnTo>
-                    <a:pt x="6159537" y="108691"/>
-                  </a:lnTo>
-                  <a:lnTo>
-                    <a:pt x="6087914" y="116658"/>
-                  </a:lnTo>
-                  <a:lnTo>
-                    <a:pt x="6016292" y="124572"/>
-                  </a:lnTo>
-                  <a:lnTo>
-                    <a:pt x="5944669" y="132431"/>
-                  </a:lnTo>
-                  <a:lnTo>
-                    <a:pt x="5873047" y="140238"/>
-                  </a:lnTo>
-                  <a:lnTo>
-                    <a:pt x="5801424" y="147990"/>
-                  </a:lnTo>
-                  <a:lnTo>
-                    <a:pt x="5729802" y="155691"/>
-                  </a:lnTo>
-                  <a:lnTo>
-                    <a:pt x="5658179" y="163338"/>
-                  </a:lnTo>
-                  <a:lnTo>
-                    <a:pt x="5586557" y="170934"/>
-                  </a:lnTo>
-                  <a:lnTo>
-                    <a:pt x="5514934" y="178478"/>
-                  </a:lnTo>
-                  <a:lnTo>
-                    <a:pt x="5443311" y="185970"/>
-                  </a:lnTo>
-                  <a:lnTo>
-                    <a:pt x="5371689" y="193412"/>
-                  </a:lnTo>
-                  <a:lnTo>
-                    <a:pt x="5300066" y="200803"/>
-                  </a:lnTo>
-                  <a:lnTo>
-                    <a:pt x="5228444" y="208143"/>
-                  </a:lnTo>
-                  <a:lnTo>
-                    <a:pt x="5156821" y="215433"/>
-                  </a:lnTo>
-                  <a:lnTo>
-                    <a:pt x="5085199" y="222674"/>
-                  </a:lnTo>
-                  <a:lnTo>
-                    <a:pt x="5013576" y="229866"/>
-                  </a:lnTo>
-                  <a:lnTo>
-                    <a:pt x="4941954" y="237008"/>
-                  </a:lnTo>
-                  <a:lnTo>
-                    <a:pt x="4870331" y="244102"/>
-                  </a:lnTo>
-                  <a:lnTo>
-                    <a:pt x="4798709" y="251148"/>
-                  </a:lnTo>
-                  <a:lnTo>
-                    <a:pt x="4727086" y="258146"/>
-                  </a:lnTo>
-                  <a:lnTo>
-                    <a:pt x="4655464" y="265096"/>
-                  </a:lnTo>
-                  <a:lnTo>
-                    <a:pt x="4583841" y="271998"/>
-                  </a:lnTo>
-                  <a:lnTo>
-                    <a:pt x="4512219" y="278854"/>
-                  </a:lnTo>
-                  <a:lnTo>
-                    <a:pt x="4440596" y="285663"/>
-                  </a:lnTo>
-                  <a:lnTo>
-                    <a:pt x="4368974" y="292425"/>
-                  </a:lnTo>
-                  <a:lnTo>
-                    <a:pt x="4297351" y="299142"/>
-                  </a:lnTo>
-                  <a:lnTo>
-                    <a:pt x="4225729" y="305813"/>
-                  </a:lnTo>
-                  <a:lnTo>
-                    <a:pt x="4154106" y="312438"/>
-                  </a:lnTo>
-                  <a:lnTo>
-                    <a:pt x="4082483" y="319018"/>
-                  </a:lnTo>
-                  <a:lnTo>
-                    <a:pt x="4010861" y="325554"/>
-                  </a:lnTo>
-                  <a:lnTo>
-                    <a:pt x="3939238" y="332045"/>
-                  </a:lnTo>
-                  <a:lnTo>
-                    <a:pt x="3867616" y="338491"/>
-                  </a:lnTo>
-                  <a:lnTo>
-                    <a:pt x="3795993" y="344894"/>
-                  </a:lnTo>
-                  <a:lnTo>
-                    <a:pt x="3724371" y="351253"/>
-                  </a:lnTo>
-                  <a:lnTo>
-                    <a:pt x="3652748" y="357569"/>
-                  </a:lnTo>
-                  <a:lnTo>
-                    <a:pt x="3581126" y="363842"/>
-                  </a:lnTo>
-                  <a:lnTo>
-                    <a:pt x="3509503" y="370072"/>
-                  </a:lnTo>
-                  <a:lnTo>
-                    <a:pt x="3437881" y="376260"/>
-                  </a:lnTo>
-                  <a:lnTo>
-                    <a:pt x="3366258" y="382406"/>
-                  </a:lnTo>
-                  <a:lnTo>
-                    <a:pt x="3294636" y="388510"/>
-                  </a:lnTo>
-                  <a:lnTo>
-                    <a:pt x="3223013" y="394572"/>
-                  </a:lnTo>
-                  <a:lnTo>
-                    <a:pt x="3151391" y="400593"/>
-                  </a:lnTo>
-                  <a:lnTo>
-                    <a:pt x="3079768" y="406573"/>
-                  </a:lnTo>
-                  <a:lnTo>
-                    <a:pt x="3008146" y="438549"/>
-                  </a:lnTo>
-                  <a:lnTo>
-                    <a:pt x="2936523" y="486620"/>
-                  </a:lnTo>
-                  <a:lnTo>
-                    <a:pt x="2864901" y="531940"/>
-                  </a:lnTo>
-                  <a:lnTo>
-                    <a:pt x="2793278" y="574668"/>
-                  </a:lnTo>
-                  <a:lnTo>
-                    <a:pt x="2721655" y="614950"/>
-                  </a:lnTo>
-                  <a:lnTo>
-                    <a:pt x="2650033" y="652928"/>
-                  </a:lnTo>
-                  <a:lnTo>
-                    <a:pt x="2578410" y="688733"/>
-                  </a:lnTo>
-                  <a:lnTo>
-                    <a:pt x="2506788" y="722490"/>
-                  </a:lnTo>
-                  <a:lnTo>
-                    <a:pt x="2435165" y="754314"/>
-                  </a:lnTo>
-                  <a:lnTo>
-                    <a:pt x="2363543" y="784319"/>
-                  </a:lnTo>
-                  <a:lnTo>
-                    <a:pt x="2291920" y="812606"/>
-                  </a:lnTo>
-                  <a:lnTo>
-                    <a:pt x="2220298" y="839275"/>
-                  </a:lnTo>
-                  <a:lnTo>
-                    <a:pt x="2148675" y="864418"/>
-                  </a:lnTo>
-                  <a:lnTo>
-                    <a:pt x="2077053" y="888122"/>
-                  </a:lnTo>
-                  <a:lnTo>
-                    <a:pt x="2005430" y="910470"/>
-                  </a:lnTo>
-                  <a:lnTo>
-                    <a:pt x="1933808" y="931540"/>
-                  </a:lnTo>
-                  <a:lnTo>
-                    <a:pt x="1862185" y="951403"/>
-                  </a:lnTo>
-                  <a:lnTo>
-                    <a:pt x="1790563" y="970131"/>
-                  </a:lnTo>
-                  <a:lnTo>
-                    <a:pt x="1718940" y="987787"/>
-                  </a:lnTo>
-                  <a:lnTo>
-                    <a:pt x="1647318" y="1004432"/>
-                  </a:lnTo>
-                  <a:lnTo>
-                    <a:pt x="1575695" y="1020126"/>
-                  </a:lnTo>
-                  <a:lnTo>
-                    <a:pt x="1504073" y="1034921"/>
-                  </a:lnTo>
-                  <a:lnTo>
-                    <a:pt x="1432450" y="1048870"/>
-                  </a:lnTo>
-                  <a:lnTo>
-                    <a:pt x="1360827" y="1062021"/>
-                  </a:lnTo>
-                  <a:lnTo>
-                    <a:pt x="1289205" y="1074419"/>
-                  </a:lnTo>
-                  <a:lnTo>
-                    <a:pt x="1217582" y="1086108"/>
-                  </a:lnTo>
-                  <a:lnTo>
-                    <a:pt x="1145960" y="1097128"/>
-                  </a:lnTo>
-                  <a:lnTo>
-                    <a:pt x="1074337" y="1107518"/>
-                  </a:lnTo>
-                  <a:lnTo>
-                    <a:pt x="1002715" y="1117313"/>
-                  </a:lnTo>
-                  <a:lnTo>
-                    <a:pt x="931092" y="1126548"/>
-                  </a:lnTo>
-                  <a:lnTo>
-                    <a:pt x="859470" y="1135254"/>
-                  </a:lnTo>
-                  <a:lnTo>
-                    <a:pt x="787847" y="1143462"/>
-                  </a:lnTo>
-                  <a:lnTo>
-                    <a:pt x="716225" y="1151201"/>
-                  </a:lnTo>
-                  <a:lnTo>
-                    <a:pt x="644602" y="1158496"/>
-                  </a:lnTo>
-                  <a:lnTo>
-                    <a:pt x="572980" y="1165375"/>
-                  </a:lnTo>
-                  <a:lnTo>
-                    <a:pt x="501357" y="1171860"/>
-                  </a:lnTo>
-                  <a:lnTo>
-                    <a:pt x="429735" y="1177973"/>
-                  </a:lnTo>
-                  <a:lnTo>
-                    <a:pt x="358112" y="1183737"/>
-                  </a:lnTo>
-                  <a:lnTo>
-                    <a:pt x="286490" y="1189171"/>
-                  </a:lnTo>
-                  <a:lnTo>
-                    <a:pt x="214867" y="1194295"/>
-                  </a:lnTo>
-                  <a:lnTo>
-                    <a:pt x="143245" y="1199125"/>
-                  </a:lnTo>
-                  <a:lnTo>
-                    <a:pt x="71622" y="1203679"/>
-                  </a:lnTo>
-                  <a:lnTo>
-                    <a:pt x="0" y="1207972"/>
+                    <a:pt x="7019007" y="283"/>
+                  </a:lnTo>
+                  <a:lnTo>
+                    <a:pt x="6947385" y="567"/>
+                  </a:lnTo>
+                  <a:lnTo>
+                    <a:pt x="6875762" y="850"/>
+                  </a:lnTo>
+                  <a:lnTo>
+                    <a:pt x="6804139" y="1133"/>
+                  </a:lnTo>
+                  <a:lnTo>
+                    <a:pt x="6732517" y="1417"/>
+                  </a:lnTo>
+                  <a:lnTo>
+                    <a:pt x="6660894" y="1700"/>
+                  </a:lnTo>
+                  <a:lnTo>
+                    <a:pt x="6589272" y="1983"/>
+                  </a:lnTo>
+                  <a:lnTo>
+                    <a:pt x="6517649" y="2266"/>
+                  </a:lnTo>
+                  <a:lnTo>
+                    <a:pt x="6446027" y="2549"/>
+                  </a:lnTo>
+                  <a:lnTo>
+                    <a:pt x="6374404" y="2832"/>
+                  </a:lnTo>
+                  <a:lnTo>
+                    <a:pt x="6302782" y="3114"/>
+                  </a:lnTo>
+                  <a:lnTo>
+                    <a:pt x="6231159" y="3397"/>
+                  </a:lnTo>
+                  <a:lnTo>
+                    <a:pt x="6159537" y="3679"/>
+                  </a:lnTo>
+                  <a:lnTo>
+                    <a:pt x="6087914" y="3962"/>
+                  </a:lnTo>
+                  <a:lnTo>
+                    <a:pt x="6016292" y="4244"/>
+                  </a:lnTo>
+                  <a:lnTo>
+                    <a:pt x="5944669" y="4526"/>
+                  </a:lnTo>
+                  <a:lnTo>
+                    <a:pt x="5873047" y="4809"/>
+                  </a:lnTo>
+                  <a:lnTo>
+                    <a:pt x="5801424" y="5091"/>
+                  </a:lnTo>
+                  <a:lnTo>
+                    <a:pt x="5729802" y="5373"/>
+                  </a:lnTo>
+                  <a:lnTo>
+                    <a:pt x="5658179" y="5655"/>
+                  </a:lnTo>
+                  <a:lnTo>
+                    <a:pt x="5586557" y="5936"/>
+                  </a:lnTo>
+                  <a:lnTo>
+                    <a:pt x="5514934" y="6218"/>
+                  </a:lnTo>
+                  <a:lnTo>
+                    <a:pt x="5443311" y="6500"/>
+                  </a:lnTo>
+                  <a:lnTo>
+                    <a:pt x="5371689" y="6781"/>
+                  </a:lnTo>
+                  <a:lnTo>
+                    <a:pt x="5300066" y="7063"/>
+                  </a:lnTo>
+                  <a:lnTo>
+                    <a:pt x="5228444" y="7344"/>
+                  </a:lnTo>
+                  <a:lnTo>
+                    <a:pt x="5156821" y="7625"/>
+                  </a:lnTo>
+                  <a:lnTo>
+                    <a:pt x="5085199" y="7906"/>
+                  </a:lnTo>
+                  <a:lnTo>
+                    <a:pt x="5013576" y="8188"/>
+                  </a:lnTo>
+                  <a:lnTo>
+                    <a:pt x="4941954" y="8469"/>
+                  </a:lnTo>
+                  <a:lnTo>
+                    <a:pt x="4870331" y="8749"/>
+                  </a:lnTo>
+                  <a:lnTo>
+                    <a:pt x="4798709" y="9030"/>
+                  </a:lnTo>
+                  <a:lnTo>
+                    <a:pt x="4727086" y="9311"/>
+                  </a:lnTo>
+                  <a:lnTo>
+                    <a:pt x="4655464" y="9592"/>
+                  </a:lnTo>
+                  <a:lnTo>
+                    <a:pt x="4583841" y="9872"/>
+                  </a:lnTo>
+                  <a:lnTo>
+                    <a:pt x="4512219" y="10153"/>
+                  </a:lnTo>
+                  <a:lnTo>
+                    <a:pt x="4440596" y="10433"/>
+                  </a:lnTo>
+                  <a:lnTo>
+                    <a:pt x="4368974" y="10713"/>
+                  </a:lnTo>
+                  <a:lnTo>
+                    <a:pt x="4297351" y="10993"/>
+                  </a:lnTo>
+                  <a:lnTo>
+                    <a:pt x="4225729" y="11274"/>
+                  </a:lnTo>
+                  <a:lnTo>
+                    <a:pt x="4154106" y="11554"/>
+                  </a:lnTo>
+                  <a:lnTo>
+                    <a:pt x="4082483" y="11833"/>
+                  </a:lnTo>
+                  <a:lnTo>
+                    <a:pt x="4010861" y="12113"/>
+                  </a:lnTo>
+                  <a:lnTo>
+                    <a:pt x="3939238" y="12393"/>
+                  </a:lnTo>
+                  <a:lnTo>
+                    <a:pt x="3867616" y="12673"/>
+                  </a:lnTo>
+                  <a:lnTo>
+                    <a:pt x="3795993" y="12952"/>
+                  </a:lnTo>
+                  <a:lnTo>
+                    <a:pt x="3724371" y="13232"/>
+                  </a:lnTo>
+                  <a:lnTo>
+                    <a:pt x="3652748" y="13511"/>
+                  </a:lnTo>
+                  <a:lnTo>
+                    <a:pt x="3581126" y="13790"/>
+                  </a:lnTo>
+                  <a:lnTo>
+                    <a:pt x="3509503" y="14070"/>
+                  </a:lnTo>
+                  <a:lnTo>
+                    <a:pt x="3437881" y="14349"/>
+                  </a:lnTo>
+                  <a:lnTo>
+                    <a:pt x="3366258" y="14628"/>
+                  </a:lnTo>
+                  <a:lnTo>
+                    <a:pt x="3294636" y="14907"/>
+                  </a:lnTo>
+                  <a:lnTo>
+                    <a:pt x="3223013" y="15185"/>
+                  </a:lnTo>
+                  <a:lnTo>
+                    <a:pt x="3151391" y="15464"/>
+                  </a:lnTo>
+                  <a:lnTo>
+                    <a:pt x="3079768" y="15743"/>
+                  </a:lnTo>
+                  <a:lnTo>
+                    <a:pt x="3008146" y="44974"/>
+                  </a:lnTo>
+                  <a:lnTo>
+                    <a:pt x="2936523" y="92430"/>
+                  </a:lnTo>
+                  <a:lnTo>
+                    <a:pt x="2864901" y="137206"/>
+                  </a:lnTo>
+                  <a:lnTo>
+                    <a:pt x="2793278" y="179454"/>
+                  </a:lnTo>
+                  <a:lnTo>
+                    <a:pt x="2721655" y="219317"/>
+                  </a:lnTo>
+                  <a:lnTo>
+                    <a:pt x="2650033" y="256930"/>
+                  </a:lnTo>
+                  <a:lnTo>
+                    <a:pt x="2578410" y="292419"/>
+                  </a:lnTo>
+                  <a:lnTo>
+                    <a:pt x="2506788" y="325904"/>
+                  </a:lnTo>
+                  <a:lnTo>
+                    <a:pt x="2435165" y="357499"/>
+                  </a:lnTo>
+                  <a:lnTo>
+                    <a:pt x="2363543" y="387311"/>
+                  </a:lnTo>
+                  <a:lnTo>
+                    <a:pt x="2291920" y="415439"/>
+                  </a:lnTo>
+                  <a:lnTo>
+                    <a:pt x="2220298" y="441979"/>
+                  </a:lnTo>
+                  <a:lnTo>
+                    <a:pt x="2148675" y="467021"/>
+                  </a:lnTo>
+                  <a:lnTo>
+                    <a:pt x="2077053" y="490649"/>
+                  </a:lnTo>
+                  <a:lnTo>
+                    <a:pt x="2005430" y="512943"/>
+                  </a:lnTo>
+                  <a:lnTo>
+                    <a:pt x="1933808" y="533978"/>
+                  </a:lnTo>
+                  <a:lnTo>
+                    <a:pt x="1862185" y="553826"/>
+                  </a:lnTo>
+                  <a:lnTo>
+                    <a:pt x="1790563" y="572553"/>
+                  </a:lnTo>
+                  <a:lnTo>
+                    <a:pt x="1718940" y="590223"/>
+                  </a:lnTo>
+                  <a:lnTo>
+                    <a:pt x="1647318" y="606896"/>
+                  </a:lnTo>
+                  <a:lnTo>
+                    <a:pt x="1575695" y="622627"/>
+                  </a:lnTo>
+                  <a:lnTo>
+                    <a:pt x="1504073" y="637470"/>
+                  </a:lnTo>
+                  <a:lnTo>
+                    <a:pt x="1432450" y="651475"/>
+                  </a:lnTo>
+                  <a:lnTo>
+                    <a:pt x="1360827" y="664689"/>
+                  </a:lnTo>
+                  <a:lnTo>
+                    <a:pt x="1289205" y="677157"/>
+                  </a:lnTo>
+                  <a:lnTo>
+                    <a:pt x="1217582" y="688922"/>
+                  </a:lnTo>
+                  <a:lnTo>
+                    <a:pt x="1145960" y="700022"/>
+                  </a:lnTo>
+                  <a:lnTo>
+                    <a:pt x="1074337" y="710495"/>
+                  </a:lnTo>
+                  <a:lnTo>
+                    <a:pt x="1002715" y="720378"/>
+                  </a:lnTo>
+                  <a:lnTo>
+                    <a:pt x="931092" y="729702"/>
+                  </a:lnTo>
+                  <a:lnTo>
+                    <a:pt x="859470" y="738500"/>
+                  </a:lnTo>
+                  <a:lnTo>
+                    <a:pt x="787847" y="746801"/>
+                  </a:lnTo>
+                  <a:lnTo>
+                    <a:pt x="716225" y="754633"/>
+                  </a:lnTo>
+                  <a:lnTo>
+                    <a:pt x="644602" y="762024"/>
+                  </a:lnTo>
+                  <a:lnTo>
+                    <a:pt x="572980" y="768997"/>
+                  </a:lnTo>
+                  <a:lnTo>
+                    <a:pt x="501357" y="775576"/>
+                  </a:lnTo>
+                  <a:lnTo>
+                    <a:pt x="429735" y="781784"/>
+                  </a:lnTo>
+                  <a:lnTo>
+                    <a:pt x="358112" y="787642"/>
+                  </a:lnTo>
+                  <a:lnTo>
+                    <a:pt x="286490" y="793168"/>
+                  </a:lnTo>
+                  <a:lnTo>
+                    <a:pt x="214867" y="798383"/>
+                  </a:lnTo>
+                  <a:lnTo>
+                    <a:pt x="143245" y="803303"/>
+                  </a:lnTo>
+                  <a:lnTo>
+                    <a:pt x="71622" y="807946"/>
+                  </a:lnTo>
+                  <a:lnTo>
+                    <a:pt x="0" y="812326"/>
                   </a:lnTo>
                 </a:path>
               </a:pathLst>
@@ -4224,275 +4230,290 @@
           <p:spPr>
             <a:xfrm>
               <a:off x="1172049" y="1896563"/>
-              <a:ext cx="6176360" cy="3438192"/>
+              <a:ext cx="6567891" cy="3402033"/>
             </a:xfrm>
             <a:custGeom>
               <a:avLst/>
               <a:pathLst>
-                <a:path w="6176360" h="3438192">
+                <a:path w="6567891" h="3402033">
                   <a:moveTo>
-                    <a:pt x="0" y="3438192"/>
+                    <a:pt x="0" y="3402033"/>
                   </a:moveTo>
                   <a:lnTo>
-                    <a:pt x="71622" y="3431025"/>
-                  </a:lnTo>
-                  <a:lnTo>
-                    <a:pt x="143245" y="3423618"/>
-                  </a:lnTo>
-                  <a:lnTo>
-                    <a:pt x="214867" y="3415964"/>
-                  </a:lnTo>
-                  <a:lnTo>
-                    <a:pt x="286490" y="3408053"/>
-                  </a:lnTo>
-                  <a:lnTo>
-                    <a:pt x="358112" y="3399879"/>
-                  </a:lnTo>
-                  <a:lnTo>
-                    <a:pt x="429735" y="3391431"/>
-                  </a:lnTo>
-                  <a:lnTo>
-                    <a:pt x="501357" y="3382700"/>
-                  </a:lnTo>
-                  <a:lnTo>
-                    <a:pt x="572980" y="3373678"/>
-                  </a:lnTo>
-                  <a:lnTo>
-                    <a:pt x="644602" y="3364355"/>
-                  </a:lnTo>
-                  <a:lnTo>
-                    <a:pt x="716225" y="3354720"/>
-                  </a:lnTo>
-                  <a:lnTo>
-                    <a:pt x="787847" y="3344762"/>
-                  </a:lnTo>
-                  <a:lnTo>
-                    <a:pt x="859470" y="3334472"/>
-                  </a:lnTo>
-                  <a:lnTo>
-                    <a:pt x="931092" y="3323839"/>
-                  </a:lnTo>
-                  <a:lnTo>
-                    <a:pt x="1002715" y="3312849"/>
-                  </a:lnTo>
-                  <a:lnTo>
-                    <a:pt x="1074337" y="3301493"/>
-                  </a:lnTo>
-                  <a:lnTo>
-                    <a:pt x="1145960" y="3289756"/>
-                  </a:lnTo>
-                  <a:lnTo>
-                    <a:pt x="1217582" y="3277628"/>
-                  </a:lnTo>
-                  <a:lnTo>
-                    <a:pt x="1289205" y="3265094"/>
-                  </a:lnTo>
-                  <a:lnTo>
-                    <a:pt x="1360827" y="3252142"/>
-                  </a:lnTo>
-                  <a:lnTo>
-                    <a:pt x="1432450" y="3238756"/>
-                  </a:lnTo>
-                  <a:lnTo>
-                    <a:pt x="1504073" y="3224923"/>
-                  </a:lnTo>
-                  <a:lnTo>
-                    <a:pt x="1575695" y="3210628"/>
-                  </a:lnTo>
-                  <a:lnTo>
-                    <a:pt x="1647318" y="3195855"/>
-                  </a:lnTo>
-                  <a:lnTo>
-                    <a:pt x="1718940" y="3180588"/>
-                  </a:lnTo>
-                  <a:lnTo>
-                    <a:pt x="1790563" y="3164811"/>
-                  </a:lnTo>
-                  <a:lnTo>
-                    <a:pt x="1862185" y="3148507"/>
-                  </a:lnTo>
-                  <a:lnTo>
-                    <a:pt x="1933808" y="3131657"/>
-                  </a:lnTo>
-                  <a:lnTo>
-                    <a:pt x="2005430" y="3114245"/>
-                  </a:lnTo>
-                  <a:lnTo>
-                    <a:pt x="2077053" y="3096250"/>
-                  </a:lnTo>
-                  <a:lnTo>
-                    <a:pt x="2148675" y="3077655"/>
-                  </a:lnTo>
-                  <a:lnTo>
-                    <a:pt x="2220298" y="3058437"/>
-                  </a:lnTo>
-                  <a:lnTo>
-                    <a:pt x="2291920" y="3038578"/>
-                  </a:lnTo>
-                  <a:lnTo>
-                    <a:pt x="2363543" y="3018055"/>
-                  </a:lnTo>
-                  <a:lnTo>
-                    <a:pt x="2435165" y="2996845"/>
-                  </a:lnTo>
-                  <a:lnTo>
-                    <a:pt x="2506788" y="2974927"/>
-                  </a:lnTo>
-                  <a:lnTo>
-                    <a:pt x="2578410" y="2952277"/>
-                  </a:lnTo>
-                  <a:lnTo>
-                    <a:pt x="2650033" y="2928869"/>
-                  </a:lnTo>
-                  <a:lnTo>
-                    <a:pt x="2721655" y="2904679"/>
-                  </a:lnTo>
-                  <a:lnTo>
-                    <a:pt x="2793278" y="2879680"/>
-                  </a:lnTo>
-                  <a:lnTo>
-                    <a:pt x="2864901" y="2853846"/>
-                  </a:lnTo>
-                  <a:lnTo>
-                    <a:pt x="2936523" y="2827149"/>
-                  </a:lnTo>
-                  <a:lnTo>
-                    <a:pt x="3008146" y="2799559"/>
-                  </a:lnTo>
-                  <a:lnTo>
-                    <a:pt x="3079768" y="2771048"/>
-                  </a:lnTo>
-                  <a:lnTo>
-                    <a:pt x="3151391" y="2741583"/>
-                  </a:lnTo>
-                  <a:lnTo>
-                    <a:pt x="3223013" y="2711133"/>
-                  </a:lnTo>
-                  <a:lnTo>
-                    <a:pt x="3294636" y="2679666"/>
-                  </a:lnTo>
-                  <a:lnTo>
-                    <a:pt x="3366258" y="2647147"/>
-                  </a:lnTo>
-                  <a:lnTo>
-                    <a:pt x="3437881" y="2613542"/>
-                  </a:lnTo>
-                  <a:lnTo>
-                    <a:pt x="3509503" y="2578813"/>
-                  </a:lnTo>
-                  <a:lnTo>
-                    <a:pt x="3581126" y="2542923"/>
-                  </a:lnTo>
-                  <a:lnTo>
-                    <a:pt x="3652748" y="2505834"/>
-                  </a:lnTo>
-                  <a:lnTo>
-                    <a:pt x="3724371" y="2467505"/>
-                  </a:lnTo>
-                  <a:lnTo>
-                    <a:pt x="3795993" y="2427896"/>
-                  </a:lnTo>
-                  <a:lnTo>
-                    <a:pt x="3867616" y="2386962"/>
-                  </a:lnTo>
-                  <a:lnTo>
-                    <a:pt x="3939238" y="2344660"/>
-                  </a:lnTo>
-                  <a:lnTo>
-                    <a:pt x="4010861" y="2300945"/>
-                  </a:lnTo>
-                  <a:lnTo>
-                    <a:pt x="4082483" y="2255769"/>
-                  </a:lnTo>
-                  <a:lnTo>
-                    <a:pt x="4154106" y="2209082"/>
-                  </a:lnTo>
-                  <a:lnTo>
-                    <a:pt x="4225729" y="2160835"/>
-                  </a:lnTo>
-                  <a:lnTo>
-                    <a:pt x="4297351" y="2110976"/>
-                  </a:lnTo>
-                  <a:lnTo>
-                    <a:pt x="4368974" y="2059451"/>
-                  </a:lnTo>
-                  <a:lnTo>
-                    <a:pt x="4440596" y="2006203"/>
-                  </a:lnTo>
-                  <a:lnTo>
-                    <a:pt x="4512219" y="1951175"/>
-                  </a:lnTo>
-                  <a:lnTo>
-                    <a:pt x="4583841" y="1894309"/>
-                  </a:lnTo>
-                  <a:lnTo>
-                    <a:pt x="4655464" y="1835542"/>
-                  </a:lnTo>
-                  <a:lnTo>
-                    <a:pt x="4727086" y="1774811"/>
-                  </a:lnTo>
-                  <a:lnTo>
-                    <a:pt x="4798709" y="1712050"/>
-                  </a:lnTo>
-                  <a:lnTo>
-                    <a:pt x="4870331" y="1647191"/>
-                  </a:lnTo>
-                  <a:lnTo>
-                    <a:pt x="4941954" y="1580165"/>
-                  </a:lnTo>
-                  <a:lnTo>
-                    <a:pt x="5013576" y="1510898"/>
-                  </a:lnTo>
-                  <a:lnTo>
-                    <a:pt x="5085199" y="1439317"/>
-                  </a:lnTo>
-                  <a:lnTo>
-                    <a:pt x="5156821" y="1365343"/>
-                  </a:lnTo>
-                  <a:lnTo>
-                    <a:pt x="5228444" y="1288897"/>
-                  </a:lnTo>
-                  <a:lnTo>
-                    <a:pt x="5300066" y="1209896"/>
-                  </a:lnTo>
-                  <a:lnTo>
-                    <a:pt x="5371689" y="1128254"/>
-                  </a:lnTo>
-                  <a:lnTo>
-                    <a:pt x="5443311" y="1043884"/>
-                  </a:lnTo>
-                  <a:lnTo>
-                    <a:pt x="5514934" y="956694"/>
-                  </a:lnTo>
-                  <a:lnTo>
-                    <a:pt x="5586557" y="866590"/>
-                  </a:lnTo>
-                  <a:lnTo>
-                    <a:pt x="5658179" y="773474"/>
-                  </a:lnTo>
-                  <a:lnTo>
-                    <a:pt x="5729802" y="677247"/>
-                  </a:lnTo>
-                  <a:lnTo>
-                    <a:pt x="5801424" y="577803"/>
-                  </a:lnTo>
-                  <a:lnTo>
-                    <a:pt x="5873047" y="475035"/>
-                  </a:lnTo>
-                  <a:lnTo>
-                    <a:pt x="5944669" y="368833"/>
-                  </a:lnTo>
-                  <a:lnTo>
-                    <a:pt x="6016292" y="259082"/>
-                  </a:lnTo>
-                  <a:lnTo>
-                    <a:pt x="6087914" y="145662"/>
-                  </a:lnTo>
-                  <a:lnTo>
-                    <a:pt x="6159537" y="28452"/>
-                  </a:lnTo>
-                  <a:lnTo>
-                    <a:pt x="6176360" y="0"/>
+                    <a:pt x="71622" y="3394603"/>
+                  </a:lnTo>
+                  <a:lnTo>
+                    <a:pt x="143245" y="3386953"/>
+                  </a:lnTo>
+                  <a:lnTo>
+                    <a:pt x="214867" y="3379076"/>
+                  </a:lnTo>
+                  <a:lnTo>
+                    <a:pt x="286490" y="3370965"/>
+                  </a:lnTo>
+                  <a:lnTo>
+                    <a:pt x="358112" y="3362614"/>
+                  </a:lnTo>
+                  <a:lnTo>
+                    <a:pt x="429735" y="3354015"/>
+                  </a:lnTo>
+                  <a:lnTo>
+                    <a:pt x="501357" y="3345161"/>
+                  </a:lnTo>
+                  <a:lnTo>
+                    <a:pt x="572980" y="3336045"/>
+                  </a:lnTo>
+                  <a:lnTo>
+                    <a:pt x="644602" y="3326659"/>
+                  </a:lnTo>
+                  <a:lnTo>
+                    <a:pt x="716225" y="3316994"/>
+                  </a:lnTo>
+                  <a:lnTo>
+                    <a:pt x="787847" y="3307043"/>
+                  </a:lnTo>
+                  <a:lnTo>
+                    <a:pt x="859470" y="3296797"/>
+                  </a:lnTo>
+                  <a:lnTo>
+                    <a:pt x="931092" y="3286247"/>
+                  </a:lnTo>
+                  <a:lnTo>
+                    <a:pt x="1002715" y="3275384"/>
+                  </a:lnTo>
+                  <a:lnTo>
+                    <a:pt x="1074337" y="3264199"/>
+                  </a:lnTo>
+                  <a:lnTo>
+                    <a:pt x="1145960" y="3252682"/>
+                  </a:lnTo>
+                  <a:lnTo>
+                    <a:pt x="1217582" y="3240825"/>
+                  </a:lnTo>
+                  <a:lnTo>
+                    <a:pt x="1289205" y="3228615"/>
+                  </a:lnTo>
+                  <a:lnTo>
+                    <a:pt x="1360827" y="3216044"/>
+                  </a:lnTo>
+                  <a:lnTo>
+                    <a:pt x="1432450" y="3203099"/>
+                  </a:lnTo>
+                  <a:lnTo>
+                    <a:pt x="1504073" y="3189771"/>
+                  </a:lnTo>
+                  <a:lnTo>
+                    <a:pt x="1575695" y="3176048"/>
+                  </a:lnTo>
+                  <a:lnTo>
+                    <a:pt x="1647318" y="3161918"/>
+                  </a:lnTo>
+                  <a:lnTo>
+                    <a:pt x="1718940" y="3147369"/>
+                  </a:lnTo>
+                  <a:lnTo>
+                    <a:pt x="1790563" y="3132389"/>
+                  </a:lnTo>
+                  <a:lnTo>
+                    <a:pt x="1862185" y="3116965"/>
+                  </a:lnTo>
+                  <a:lnTo>
+                    <a:pt x="1933808" y="3101083"/>
+                  </a:lnTo>
+                  <a:lnTo>
+                    <a:pt x="2005430" y="3084731"/>
+                  </a:lnTo>
+                  <a:lnTo>
+                    <a:pt x="2077053" y="3067893"/>
+                  </a:lnTo>
+                  <a:lnTo>
+                    <a:pt x="2148675" y="3050557"/>
+                  </a:lnTo>
+                  <a:lnTo>
+                    <a:pt x="2220298" y="3032706"/>
+                  </a:lnTo>
+                  <a:lnTo>
+                    <a:pt x="2291920" y="3014327"/>
+                  </a:lnTo>
+                  <a:lnTo>
+                    <a:pt x="2363543" y="2995402"/>
+                  </a:lnTo>
+                  <a:lnTo>
+                    <a:pt x="2435165" y="2975916"/>
+                  </a:lnTo>
+                  <a:lnTo>
+                    <a:pt x="2506788" y="2955853"/>
+                  </a:lnTo>
+                  <a:lnTo>
+                    <a:pt x="2578410" y="2935195"/>
+                  </a:lnTo>
+                  <a:lnTo>
+                    <a:pt x="2650033" y="2913924"/>
+                  </a:lnTo>
+                  <a:lnTo>
+                    <a:pt x="2721655" y="2892022"/>
+                  </a:lnTo>
+                  <a:lnTo>
+                    <a:pt x="2793278" y="2869472"/>
+                  </a:lnTo>
+                  <a:lnTo>
+                    <a:pt x="2864901" y="2846252"/>
+                  </a:lnTo>
+                  <a:lnTo>
+                    <a:pt x="2936523" y="2822345"/>
+                  </a:lnTo>
+                  <a:lnTo>
+                    <a:pt x="3008146" y="2797728"/>
+                  </a:lnTo>
+                  <a:lnTo>
+                    <a:pt x="3079768" y="2772382"/>
+                  </a:lnTo>
+                  <a:lnTo>
+                    <a:pt x="3151391" y="2746284"/>
+                  </a:lnTo>
+                  <a:lnTo>
+                    <a:pt x="3223013" y="2719413"/>
+                  </a:lnTo>
+                  <a:lnTo>
+                    <a:pt x="3294636" y="2691745"/>
+                  </a:lnTo>
+                  <a:lnTo>
+                    <a:pt x="3366258" y="2663256"/>
+                  </a:lnTo>
+                  <a:lnTo>
+                    <a:pt x="3437881" y="2633923"/>
+                  </a:lnTo>
+                  <a:lnTo>
+                    <a:pt x="3509503" y="2603720"/>
+                  </a:lnTo>
+                  <a:lnTo>
+                    <a:pt x="3581126" y="2572622"/>
+                  </a:lnTo>
+                  <a:lnTo>
+                    <a:pt x="3652748" y="2540602"/>
+                  </a:lnTo>
+                  <a:lnTo>
+                    <a:pt x="3724371" y="2507632"/>
+                  </a:lnTo>
+                  <a:lnTo>
+                    <a:pt x="3795993" y="2473685"/>
+                  </a:lnTo>
+                  <a:lnTo>
+                    <a:pt x="3867616" y="2438732"/>
+                  </a:lnTo>
+                  <a:lnTo>
+                    <a:pt x="3939238" y="2402742"/>
+                  </a:lnTo>
+                  <a:lnTo>
+                    <a:pt x="4010861" y="2365686"/>
+                  </a:lnTo>
+                  <a:lnTo>
+                    <a:pt x="4082483" y="2327530"/>
+                  </a:lnTo>
+                  <a:lnTo>
+                    <a:pt x="4154106" y="2288244"/>
+                  </a:lnTo>
+                  <a:lnTo>
+                    <a:pt x="4225729" y="2247792"/>
+                  </a:lnTo>
+                  <a:lnTo>
+                    <a:pt x="4297351" y="2206141"/>
+                  </a:lnTo>
+                  <a:lnTo>
+                    <a:pt x="4368974" y="2163256"/>
+                  </a:lnTo>
+                  <a:lnTo>
+                    <a:pt x="4440596" y="2119099"/>
+                  </a:lnTo>
+                  <a:lnTo>
+                    <a:pt x="4512219" y="2073633"/>
+                  </a:lnTo>
+                  <a:lnTo>
+                    <a:pt x="4583841" y="2026819"/>
+                  </a:lnTo>
+                  <a:lnTo>
+                    <a:pt x="4655464" y="1978617"/>
+                  </a:lnTo>
+                  <a:lnTo>
+                    <a:pt x="4727086" y="1928986"/>
+                  </a:lnTo>
+                  <a:lnTo>
+                    <a:pt x="4798709" y="1877883"/>
+                  </a:lnTo>
+                  <a:lnTo>
+                    <a:pt x="4870331" y="1825265"/>
+                  </a:lnTo>
+                  <a:lnTo>
+                    <a:pt x="4941954" y="1771088"/>
+                  </a:lnTo>
+                  <a:lnTo>
+                    <a:pt x="5013576" y="1715304"/>
+                  </a:lnTo>
+                  <a:lnTo>
+                    <a:pt x="5085199" y="1657866"/>
+                  </a:lnTo>
+                  <a:lnTo>
+                    <a:pt x="5156821" y="1598726"/>
+                  </a:lnTo>
+                  <a:lnTo>
+                    <a:pt x="5228444" y="1537832"/>
+                  </a:lnTo>
+                  <a:lnTo>
+                    <a:pt x="5300066" y="1475132"/>
+                  </a:lnTo>
+                  <a:lnTo>
+                    <a:pt x="5371689" y="1410574"/>
+                  </a:lnTo>
+                  <a:lnTo>
+                    <a:pt x="5443311" y="1344102"/>
+                  </a:lnTo>
+                  <a:lnTo>
+                    <a:pt x="5514934" y="1275659"/>
+                  </a:lnTo>
+                  <a:lnTo>
+                    <a:pt x="5586557" y="1205186"/>
+                  </a:lnTo>
+                  <a:lnTo>
+                    <a:pt x="5658179" y="1132625"/>
+                  </a:lnTo>
+                  <a:lnTo>
+                    <a:pt x="5729802" y="1057912"/>
+                  </a:lnTo>
+                  <a:lnTo>
+                    <a:pt x="5801424" y="980984"/>
+                  </a:lnTo>
+                  <a:lnTo>
+                    <a:pt x="5873047" y="901775"/>
+                  </a:lnTo>
+                  <a:lnTo>
+                    <a:pt x="5944669" y="820218"/>
+                  </a:lnTo>
+                  <a:lnTo>
+                    <a:pt x="6016292" y="736243"/>
+                  </a:lnTo>
+                  <a:lnTo>
+                    <a:pt x="6087914" y="649779"/>
+                  </a:lnTo>
+                  <a:lnTo>
+                    <a:pt x="6159537" y="560751"/>
+                  </a:lnTo>
+                  <a:lnTo>
+                    <a:pt x="6231159" y="469083"/>
+                  </a:lnTo>
+                  <a:lnTo>
+                    <a:pt x="6302782" y="374698"/>
+                  </a:lnTo>
+                  <a:lnTo>
+                    <a:pt x="6374404" y="277514"/>
+                  </a:lnTo>
+                  <a:lnTo>
+                    <a:pt x="6446027" y="177449"/>
+                  </a:lnTo>
+                  <a:lnTo>
+                    <a:pt x="6517649" y="74417"/>
+                  </a:lnTo>
+                  <a:lnTo>
+                    <a:pt x="6567891" y="0"/>
                   </a:lnTo>
                 </a:path>
               </a:pathLst>

--- a/docs/plots/carbo/jx_carbo_linsubhr_dosedisc_throm2.pptx
+++ b/docs/plots/carbo/jx_carbo_linsubhr_dosedisc_throm2.pptx
@@ -3132,521 +3132,524 @@
           <p:spPr>
             <a:xfrm>
               <a:off x="1172049" y="1896563"/>
-              <a:ext cx="7090630" cy="3579434"/>
+              <a:ext cx="7090630" cy="3568180"/>
             </a:xfrm>
             <a:custGeom>
               <a:avLst/>
               <a:pathLst>
-                <a:path w="7090630" h="3579434">
+                <a:path w="7090630" h="3568180">
                   <a:moveTo>
-                    <a:pt x="0" y="2794749"/>
+                    <a:pt x="0" y="2830258"/>
                   </a:moveTo>
                   <a:lnTo>
-                    <a:pt x="71622" y="2794474"/>
-                  </a:lnTo>
-                  <a:lnTo>
-                    <a:pt x="143245" y="2794199"/>
-                  </a:lnTo>
-                  <a:lnTo>
-                    <a:pt x="214867" y="2793924"/>
-                  </a:lnTo>
-                  <a:lnTo>
-                    <a:pt x="286490" y="2793649"/>
-                  </a:lnTo>
-                  <a:lnTo>
-                    <a:pt x="358112" y="2793374"/>
-                  </a:lnTo>
-                  <a:lnTo>
-                    <a:pt x="429735" y="2793099"/>
-                  </a:lnTo>
-                  <a:lnTo>
-                    <a:pt x="501357" y="2792823"/>
-                  </a:lnTo>
-                  <a:lnTo>
-                    <a:pt x="572980" y="2792548"/>
-                  </a:lnTo>
-                  <a:lnTo>
-                    <a:pt x="644602" y="2792272"/>
-                  </a:lnTo>
-                  <a:lnTo>
-                    <a:pt x="716225" y="2791997"/>
-                  </a:lnTo>
-                  <a:lnTo>
-                    <a:pt x="787847" y="2791721"/>
-                  </a:lnTo>
-                  <a:lnTo>
-                    <a:pt x="859470" y="2791445"/>
-                  </a:lnTo>
-                  <a:lnTo>
-                    <a:pt x="931092" y="2791169"/>
-                  </a:lnTo>
-                  <a:lnTo>
-                    <a:pt x="1002715" y="2790893"/>
-                  </a:lnTo>
-                  <a:lnTo>
-                    <a:pt x="1074337" y="2790617"/>
-                  </a:lnTo>
-                  <a:lnTo>
-                    <a:pt x="1145960" y="2790341"/>
-                  </a:lnTo>
-                  <a:lnTo>
-                    <a:pt x="1217582" y="2790065"/>
-                  </a:lnTo>
-                  <a:lnTo>
-                    <a:pt x="1289205" y="2789788"/>
-                  </a:lnTo>
-                  <a:lnTo>
-                    <a:pt x="1360827" y="2789512"/>
-                  </a:lnTo>
-                  <a:lnTo>
-                    <a:pt x="1432450" y="2789235"/>
-                  </a:lnTo>
-                  <a:lnTo>
-                    <a:pt x="1504073" y="2788959"/>
-                  </a:lnTo>
-                  <a:lnTo>
-                    <a:pt x="1575695" y="2788682"/>
-                  </a:lnTo>
-                  <a:lnTo>
-                    <a:pt x="1647318" y="2788405"/>
-                  </a:lnTo>
-                  <a:lnTo>
-                    <a:pt x="1718940" y="2788129"/>
-                  </a:lnTo>
-                  <a:lnTo>
-                    <a:pt x="1790563" y="2787852"/>
-                  </a:lnTo>
-                  <a:lnTo>
-                    <a:pt x="1862185" y="2787574"/>
-                  </a:lnTo>
-                  <a:lnTo>
-                    <a:pt x="1933808" y="2787297"/>
-                  </a:lnTo>
-                  <a:lnTo>
-                    <a:pt x="2005430" y="2787020"/>
-                  </a:lnTo>
-                  <a:lnTo>
-                    <a:pt x="2077053" y="2786743"/>
-                  </a:lnTo>
-                  <a:lnTo>
-                    <a:pt x="2148675" y="2786465"/>
-                  </a:lnTo>
-                  <a:lnTo>
-                    <a:pt x="2220298" y="2786188"/>
-                  </a:lnTo>
-                  <a:lnTo>
-                    <a:pt x="2291920" y="2785910"/>
-                  </a:lnTo>
-                  <a:lnTo>
-                    <a:pt x="2363543" y="2785633"/>
-                  </a:lnTo>
-                  <a:lnTo>
-                    <a:pt x="2435165" y="2785355"/>
-                  </a:lnTo>
-                  <a:lnTo>
-                    <a:pt x="2506788" y="2785077"/>
-                  </a:lnTo>
-                  <a:lnTo>
-                    <a:pt x="2578410" y="2784799"/>
-                  </a:lnTo>
-                  <a:lnTo>
-                    <a:pt x="2650033" y="2784521"/>
-                  </a:lnTo>
-                  <a:lnTo>
-                    <a:pt x="2721655" y="2784243"/>
-                  </a:lnTo>
-                  <a:lnTo>
-                    <a:pt x="2793278" y="2783965"/>
-                  </a:lnTo>
-                  <a:lnTo>
-                    <a:pt x="2864901" y="2783686"/>
-                  </a:lnTo>
-                  <a:lnTo>
-                    <a:pt x="2936523" y="2783408"/>
-                  </a:lnTo>
-                  <a:lnTo>
-                    <a:pt x="3008146" y="2783129"/>
-                  </a:lnTo>
-                  <a:lnTo>
-                    <a:pt x="3079768" y="2761787"/>
-                  </a:lnTo>
-                  <a:lnTo>
-                    <a:pt x="3151391" y="2708483"/>
-                  </a:lnTo>
-                  <a:lnTo>
-                    <a:pt x="3223013" y="2651989"/>
-                  </a:lnTo>
-                  <a:lnTo>
-                    <a:pt x="3294636" y="2592115"/>
-                  </a:lnTo>
-                  <a:lnTo>
-                    <a:pt x="3366258" y="2528659"/>
-                  </a:lnTo>
-                  <a:lnTo>
-                    <a:pt x="3437881" y="2461405"/>
-                  </a:lnTo>
-                  <a:lnTo>
-                    <a:pt x="3509503" y="2390127"/>
-                  </a:lnTo>
-                  <a:lnTo>
-                    <a:pt x="3581126" y="2314585"/>
-                  </a:lnTo>
-                  <a:lnTo>
-                    <a:pt x="3652748" y="2234522"/>
-                  </a:lnTo>
-                  <a:lnTo>
-                    <a:pt x="3724371" y="2149669"/>
-                  </a:lnTo>
-                  <a:lnTo>
-                    <a:pt x="3795993" y="2059739"/>
-                  </a:lnTo>
-                  <a:lnTo>
-                    <a:pt x="3867616" y="1964427"/>
-                  </a:lnTo>
-                  <a:lnTo>
-                    <a:pt x="3939238" y="1863413"/>
-                  </a:lnTo>
-                  <a:lnTo>
-                    <a:pt x="4010861" y="1756355"/>
-                  </a:lnTo>
-                  <a:lnTo>
-                    <a:pt x="4082483" y="1642890"/>
-                  </a:lnTo>
-                  <a:lnTo>
-                    <a:pt x="4154106" y="1522637"/>
-                  </a:lnTo>
-                  <a:lnTo>
-                    <a:pt x="4225729" y="1395188"/>
-                  </a:lnTo>
-                  <a:lnTo>
-                    <a:pt x="4297351" y="1260113"/>
-                  </a:lnTo>
-                  <a:lnTo>
-                    <a:pt x="4368974" y="1116957"/>
-                  </a:lnTo>
-                  <a:lnTo>
-                    <a:pt x="4440596" y="965234"/>
-                  </a:lnTo>
-                  <a:lnTo>
-                    <a:pt x="4512219" y="804433"/>
-                  </a:lnTo>
-                  <a:lnTo>
-                    <a:pt x="4583841" y="634011"/>
-                  </a:lnTo>
-                  <a:lnTo>
-                    <a:pt x="4655464" y="453391"/>
-                  </a:lnTo>
-                  <a:lnTo>
-                    <a:pt x="4727086" y="261964"/>
-                  </a:lnTo>
-                  <a:lnTo>
-                    <a:pt x="4798709" y="59083"/>
-                  </a:lnTo>
-                  <a:lnTo>
-                    <a:pt x="4818389" y="0"/>
+                    <a:pt x="71622" y="2829177"/>
+                  </a:lnTo>
+                  <a:lnTo>
+                    <a:pt x="143245" y="2828095"/>
+                  </a:lnTo>
+                  <a:lnTo>
+                    <a:pt x="214867" y="2827012"/>
+                  </a:lnTo>
+                  <a:lnTo>
+                    <a:pt x="286490" y="2825927"/>
+                  </a:lnTo>
+                  <a:lnTo>
+                    <a:pt x="358112" y="2824841"/>
+                  </a:lnTo>
+                  <a:lnTo>
+                    <a:pt x="429735" y="2823754"/>
+                  </a:lnTo>
+                  <a:lnTo>
+                    <a:pt x="501357" y="2822665"/>
+                  </a:lnTo>
+                  <a:lnTo>
+                    <a:pt x="572980" y="2821574"/>
+                  </a:lnTo>
+                  <a:lnTo>
+                    <a:pt x="644602" y="2820482"/>
+                  </a:lnTo>
+                  <a:lnTo>
+                    <a:pt x="716225" y="2819389"/>
+                  </a:lnTo>
+                  <a:lnTo>
+                    <a:pt x="787847" y="2818294"/>
+                  </a:lnTo>
+                  <a:lnTo>
+                    <a:pt x="859470" y="2817198"/>
+                  </a:lnTo>
+                  <a:lnTo>
+                    <a:pt x="931092" y="2816101"/>
+                  </a:lnTo>
+                  <a:lnTo>
+                    <a:pt x="1002715" y="2815002"/>
+                  </a:lnTo>
+                  <a:lnTo>
+                    <a:pt x="1074337" y="2813901"/>
+                  </a:lnTo>
+                  <a:lnTo>
+                    <a:pt x="1145960" y="2812799"/>
+                  </a:lnTo>
+                  <a:lnTo>
+                    <a:pt x="1217582" y="2811696"/>
+                  </a:lnTo>
+                  <a:lnTo>
+                    <a:pt x="1289205" y="2810591"/>
+                  </a:lnTo>
+                  <a:lnTo>
+                    <a:pt x="1360827" y="2809485"/>
+                  </a:lnTo>
+                  <a:lnTo>
+                    <a:pt x="1432450" y="2808377"/>
+                  </a:lnTo>
+                  <a:lnTo>
+                    <a:pt x="1504073" y="2807268"/>
+                  </a:lnTo>
+                  <a:lnTo>
+                    <a:pt x="1575695" y="2806157"/>
+                  </a:lnTo>
+                  <a:lnTo>
+                    <a:pt x="1647318" y="2805045"/>
+                  </a:lnTo>
+                  <a:lnTo>
+                    <a:pt x="1718940" y="2803931"/>
+                  </a:lnTo>
+                  <a:lnTo>
+                    <a:pt x="1790563" y="2802816"/>
+                  </a:lnTo>
+                  <a:lnTo>
+                    <a:pt x="1862185" y="2801700"/>
+                  </a:lnTo>
+                  <a:lnTo>
+                    <a:pt x="1933808" y="2800582"/>
+                  </a:lnTo>
+                  <a:lnTo>
+                    <a:pt x="2005430" y="2799462"/>
+                  </a:lnTo>
+                  <a:lnTo>
+                    <a:pt x="2077053" y="2798342"/>
+                  </a:lnTo>
+                  <a:lnTo>
+                    <a:pt x="2148675" y="2797219"/>
+                  </a:lnTo>
+                  <a:lnTo>
+                    <a:pt x="2220298" y="2796095"/>
+                  </a:lnTo>
+                  <a:lnTo>
+                    <a:pt x="2291920" y="2794970"/>
+                  </a:lnTo>
+                  <a:lnTo>
+                    <a:pt x="2363543" y="2793843"/>
+                  </a:lnTo>
+                  <a:lnTo>
+                    <a:pt x="2435165" y="2792715"/>
+                  </a:lnTo>
+                  <a:lnTo>
+                    <a:pt x="2506788" y="2791585"/>
+                  </a:lnTo>
+                  <a:lnTo>
+                    <a:pt x="2578410" y="2790454"/>
+                  </a:lnTo>
+                  <a:lnTo>
+                    <a:pt x="2650033" y="2789321"/>
+                  </a:lnTo>
+                  <a:lnTo>
+                    <a:pt x="2721655" y="2788187"/>
+                  </a:lnTo>
+                  <a:lnTo>
+                    <a:pt x="2793278" y="2787051"/>
+                  </a:lnTo>
+                  <a:lnTo>
+                    <a:pt x="2864901" y="2785914"/>
+                  </a:lnTo>
+                  <a:lnTo>
+                    <a:pt x="2936523" y="2784775"/>
+                  </a:lnTo>
+                  <a:lnTo>
+                    <a:pt x="3008146" y="2783635"/>
+                  </a:lnTo>
+                  <a:lnTo>
+                    <a:pt x="3079768" y="2763025"/>
+                  </a:lnTo>
+                  <a:lnTo>
+                    <a:pt x="3151391" y="2712955"/>
+                  </a:lnTo>
+                  <a:lnTo>
+                    <a:pt x="3223013" y="2660068"/>
+                  </a:lnTo>
+                  <a:lnTo>
+                    <a:pt x="3294636" y="2604204"/>
+                  </a:lnTo>
+                  <a:lnTo>
+                    <a:pt x="3366258" y="2545195"/>
+                  </a:lnTo>
+                  <a:lnTo>
+                    <a:pt x="3437881" y="2482866"/>
+                  </a:lnTo>
+                  <a:lnTo>
+                    <a:pt x="3509503" y="2417028"/>
+                  </a:lnTo>
+                  <a:lnTo>
+                    <a:pt x="3581126" y="2347485"/>
+                  </a:lnTo>
+                  <a:lnTo>
+                    <a:pt x="3652748" y="2274028"/>
+                  </a:lnTo>
+                  <a:lnTo>
+                    <a:pt x="3724371" y="2196437"/>
+                  </a:lnTo>
+                  <a:lnTo>
+                    <a:pt x="3795993" y="2114479"/>
+                  </a:lnTo>
+                  <a:lnTo>
+                    <a:pt x="3867616" y="2027907"/>
+                  </a:lnTo>
+                  <a:lnTo>
+                    <a:pt x="3939238" y="1936464"/>
+                  </a:lnTo>
+                  <a:lnTo>
+                    <a:pt x="4010861" y="1839874"/>
+                  </a:lnTo>
+                  <a:lnTo>
+                    <a:pt x="4082483" y="1737847"/>
+                  </a:lnTo>
+                  <a:lnTo>
+                    <a:pt x="4154106" y="1630079"/>
+                  </a:lnTo>
+                  <a:lnTo>
+                    <a:pt x="4225729" y="1516244"/>
+                  </a:lnTo>
+                  <a:lnTo>
+                    <a:pt x="4297351" y="1396004"/>
+                  </a:lnTo>
+                  <a:lnTo>
+                    <a:pt x="4368974" y="1268995"/>
+                  </a:lnTo>
+                  <a:lnTo>
+                    <a:pt x="4440596" y="1134838"/>
+                  </a:lnTo>
+                  <a:lnTo>
+                    <a:pt x="4512219" y="993131"/>
+                  </a:lnTo>
+                  <a:lnTo>
+                    <a:pt x="4583841" y="843448"/>
+                  </a:lnTo>
+                  <a:lnTo>
+                    <a:pt x="4655464" y="685341"/>
+                  </a:lnTo>
+                  <a:lnTo>
+                    <a:pt x="4727086" y="518335"/>
+                  </a:lnTo>
+                  <a:lnTo>
+                    <a:pt x="4798709" y="341930"/>
+                  </a:lnTo>
+                  <a:lnTo>
+                    <a:pt x="4870331" y="155596"/>
+                  </a:lnTo>
+                  <a:lnTo>
+                    <a:pt x="4926952" y="0"/>
                   </a:lnTo>
                   <a:lnTo>
                     <a:pt x="7090630" y="0"/>
                   </a:lnTo>
                   <a:lnTo>
-                    <a:pt x="7090630" y="2767108"/>
-                  </a:lnTo>
-                  <a:lnTo>
-                    <a:pt x="7019007" y="2767391"/>
-                  </a:lnTo>
-                  <a:lnTo>
-                    <a:pt x="6947385" y="2767675"/>
-                  </a:lnTo>
-                  <a:lnTo>
-                    <a:pt x="6875762" y="2767958"/>
-                  </a:lnTo>
-                  <a:lnTo>
-                    <a:pt x="6804139" y="2768241"/>
-                  </a:lnTo>
-                  <a:lnTo>
-                    <a:pt x="6732517" y="2768525"/>
-                  </a:lnTo>
-                  <a:lnTo>
-                    <a:pt x="6660894" y="2768808"/>
-                  </a:lnTo>
-                  <a:lnTo>
-                    <a:pt x="6589272" y="2769091"/>
-                  </a:lnTo>
-                  <a:lnTo>
-                    <a:pt x="6517649" y="2769374"/>
-                  </a:lnTo>
-                  <a:lnTo>
-                    <a:pt x="6446027" y="2769657"/>
-                  </a:lnTo>
-                  <a:lnTo>
-                    <a:pt x="6374404" y="2769940"/>
-                  </a:lnTo>
-                  <a:lnTo>
-                    <a:pt x="6302782" y="2770222"/>
-                  </a:lnTo>
-                  <a:lnTo>
-                    <a:pt x="6231159" y="2770505"/>
-                  </a:lnTo>
-                  <a:lnTo>
-                    <a:pt x="6159537" y="2770787"/>
-                  </a:lnTo>
-                  <a:lnTo>
-                    <a:pt x="6087914" y="2771070"/>
-                  </a:lnTo>
-                  <a:lnTo>
-                    <a:pt x="6016292" y="2771352"/>
-                  </a:lnTo>
-                  <a:lnTo>
-                    <a:pt x="5944669" y="2771634"/>
-                  </a:lnTo>
-                  <a:lnTo>
-                    <a:pt x="5873047" y="2771917"/>
-                  </a:lnTo>
-                  <a:lnTo>
-                    <a:pt x="5801424" y="2772199"/>
-                  </a:lnTo>
-                  <a:lnTo>
-                    <a:pt x="5729802" y="2772481"/>
-                  </a:lnTo>
-                  <a:lnTo>
-                    <a:pt x="5658179" y="2772763"/>
-                  </a:lnTo>
-                  <a:lnTo>
-                    <a:pt x="5586557" y="2773044"/>
-                  </a:lnTo>
-                  <a:lnTo>
-                    <a:pt x="5514934" y="2773326"/>
-                  </a:lnTo>
-                  <a:lnTo>
-                    <a:pt x="5443311" y="2773608"/>
-                  </a:lnTo>
-                  <a:lnTo>
-                    <a:pt x="5371689" y="2773889"/>
-                  </a:lnTo>
-                  <a:lnTo>
-                    <a:pt x="5300066" y="2774171"/>
-                  </a:lnTo>
-                  <a:lnTo>
-                    <a:pt x="5228444" y="2774452"/>
-                  </a:lnTo>
-                  <a:lnTo>
-                    <a:pt x="5156821" y="2774733"/>
-                  </a:lnTo>
-                  <a:lnTo>
-                    <a:pt x="5085199" y="2775014"/>
-                  </a:lnTo>
-                  <a:lnTo>
-                    <a:pt x="5013576" y="2775296"/>
-                  </a:lnTo>
-                  <a:lnTo>
-                    <a:pt x="4941954" y="2775577"/>
-                  </a:lnTo>
-                  <a:lnTo>
-                    <a:pt x="4870331" y="2775857"/>
-                  </a:lnTo>
-                  <a:lnTo>
-                    <a:pt x="4798709" y="2776138"/>
-                  </a:lnTo>
-                  <a:lnTo>
-                    <a:pt x="4727086" y="2776419"/>
-                  </a:lnTo>
-                  <a:lnTo>
-                    <a:pt x="4655464" y="2776700"/>
-                  </a:lnTo>
-                  <a:lnTo>
-                    <a:pt x="4583841" y="2776980"/>
-                  </a:lnTo>
-                  <a:lnTo>
-                    <a:pt x="4512219" y="2777261"/>
-                  </a:lnTo>
-                  <a:lnTo>
-                    <a:pt x="4440596" y="2777541"/>
-                  </a:lnTo>
-                  <a:lnTo>
-                    <a:pt x="4368974" y="2777821"/>
-                  </a:lnTo>
-                  <a:lnTo>
-                    <a:pt x="4297351" y="2778101"/>
-                  </a:lnTo>
-                  <a:lnTo>
-                    <a:pt x="4225729" y="2778382"/>
-                  </a:lnTo>
-                  <a:lnTo>
-                    <a:pt x="4154106" y="2778662"/>
-                  </a:lnTo>
-                  <a:lnTo>
-                    <a:pt x="4082483" y="2778941"/>
-                  </a:lnTo>
-                  <a:lnTo>
-                    <a:pt x="4010861" y="2779221"/>
-                  </a:lnTo>
-                  <a:lnTo>
-                    <a:pt x="3939238" y="2779501"/>
-                  </a:lnTo>
-                  <a:lnTo>
-                    <a:pt x="3867616" y="2779781"/>
-                  </a:lnTo>
-                  <a:lnTo>
-                    <a:pt x="3795993" y="2780060"/>
-                  </a:lnTo>
-                  <a:lnTo>
-                    <a:pt x="3724371" y="2780340"/>
-                  </a:lnTo>
-                  <a:lnTo>
-                    <a:pt x="3652748" y="2780619"/>
-                  </a:lnTo>
-                  <a:lnTo>
-                    <a:pt x="3581126" y="2780898"/>
-                  </a:lnTo>
-                  <a:lnTo>
-                    <a:pt x="3509503" y="2781178"/>
-                  </a:lnTo>
-                  <a:lnTo>
-                    <a:pt x="3437881" y="2781457"/>
-                  </a:lnTo>
-                  <a:lnTo>
-                    <a:pt x="3366258" y="2781736"/>
-                  </a:lnTo>
-                  <a:lnTo>
-                    <a:pt x="3294636" y="2782015"/>
-                  </a:lnTo>
-                  <a:lnTo>
-                    <a:pt x="3223013" y="2782293"/>
-                  </a:lnTo>
-                  <a:lnTo>
-                    <a:pt x="3151391" y="2782572"/>
-                  </a:lnTo>
-                  <a:lnTo>
-                    <a:pt x="3079768" y="2782851"/>
-                  </a:lnTo>
-                  <a:lnTo>
-                    <a:pt x="3008146" y="2812082"/>
-                  </a:lnTo>
-                  <a:lnTo>
-                    <a:pt x="2936523" y="2859538"/>
-                  </a:lnTo>
-                  <a:lnTo>
-                    <a:pt x="2864901" y="2904314"/>
-                  </a:lnTo>
-                  <a:lnTo>
-                    <a:pt x="2793278" y="2946562"/>
-                  </a:lnTo>
-                  <a:lnTo>
-                    <a:pt x="2721655" y="2986425"/>
-                  </a:lnTo>
-                  <a:lnTo>
-                    <a:pt x="2650033" y="3024038"/>
-                  </a:lnTo>
-                  <a:lnTo>
-                    <a:pt x="2578410" y="3059527"/>
-                  </a:lnTo>
-                  <a:lnTo>
-                    <a:pt x="2506788" y="3093012"/>
-                  </a:lnTo>
-                  <a:lnTo>
-                    <a:pt x="2435165" y="3124607"/>
-                  </a:lnTo>
-                  <a:lnTo>
-                    <a:pt x="2363543" y="3154419"/>
-                  </a:lnTo>
-                  <a:lnTo>
-                    <a:pt x="2291920" y="3182547"/>
-                  </a:lnTo>
-                  <a:lnTo>
-                    <a:pt x="2220298" y="3209087"/>
-                  </a:lnTo>
-                  <a:lnTo>
-                    <a:pt x="2148675" y="3234129"/>
-                  </a:lnTo>
-                  <a:lnTo>
-                    <a:pt x="2077053" y="3257757"/>
-                  </a:lnTo>
-                  <a:lnTo>
-                    <a:pt x="2005430" y="3280051"/>
-                  </a:lnTo>
-                  <a:lnTo>
-                    <a:pt x="1933808" y="3301086"/>
-                  </a:lnTo>
-                  <a:lnTo>
-                    <a:pt x="1862185" y="3320934"/>
-                  </a:lnTo>
-                  <a:lnTo>
-                    <a:pt x="1790563" y="3339661"/>
-                  </a:lnTo>
-                  <a:lnTo>
-                    <a:pt x="1718940" y="3357331"/>
-                  </a:lnTo>
-                  <a:lnTo>
-                    <a:pt x="1647318" y="3374004"/>
-                  </a:lnTo>
-                  <a:lnTo>
-                    <a:pt x="1575695" y="3389735"/>
-                  </a:lnTo>
-                  <a:lnTo>
-                    <a:pt x="1504073" y="3404578"/>
-                  </a:lnTo>
-                  <a:lnTo>
-                    <a:pt x="1432450" y="3418583"/>
-                  </a:lnTo>
-                  <a:lnTo>
-                    <a:pt x="1360827" y="3431797"/>
-                  </a:lnTo>
-                  <a:lnTo>
-                    <a:pt x="1289205" y="3444265"/>
-                  </a:lnTo>
-                  <a:lnTo>
-                    <a:pt x="1217582" y="3456030"/>
-                  </a:lnTo>
-                  <a:lnTo>
-                    <a:pt x="1145960" y="3467130"/>
-                  </a:lnTo>
-                  <a:lnTo>
-                    <a:pt x="1074337" y="3477603"/>
-                  </a:lnTo>
-                  <a:lnTo>
-                    <a:pt x="1002715" y="3487486"/>
-                  </a:lnTo>
-                  <a:lnTo>
-                    <a:pt x="931092" y="3496810"/>
-                  </a:lnTo>
-                  <a:lnTo>
-                    <a:pt x="859470" y="3505608"/>
-                  </a:lnTo>
-                  <a:lnTo>
-                    <a:pt x="787847" y="3513909"/>
-                  </a:lnTo>
-                  <a:lnTo>
-                    <a:pt x="716225" y="3521741"/>
-                  </a:lnTo>
-                  <a:lnTo>
-                    <a:pt x="644602" y="3529132"/>
-                  </a:lnTo>
-                  <a:lnTo>
-                    <a:pt x="572980" y="3536105"/>
-                  </a:lnTo>
-                  <a:lnTo>
-                    <a:pt x="501357" y="3542684"/>
-                  </a:lnTo>
-                  <a:lnTo>
-                    <a:pt x="429735" y="3548892"/>
-                  </a:lnTo>
-                  <a:lnTo>
-                    <a:pt x="358112" y="3554750"/>
-                  </a:lnTo>
-                  <a:lnTo>
-                    <a:pt x="286490" y="3560276"/>
-                  </a:lnTo>
-                  <a:lnTo>
-                    <a:pt x="214867" y="3565491"/>
-                  </a:lnTo>
-                  <a:lnTo>
-                    <a:pt x="143245" y="3570411"/>
-                  </a:lnTo>
-                  <a:lnTo>
-                    <a:pt x="71622" y="3575054"/>
-                  </a:lnTo>
-                  <a:lnTo>
-                    <a:pt x="0" y="3579434"/>
+                    <a:pt x="7090630" y="2716106"/>
+                  </a:lnTo>
+                  <a:lnTo>
+                    <a:pt x="7019007" y="2717334"/>
+                  </a:lnTo>
+                  <a:lnTo>
+                    <a:pt x="6947385" y="2718562"/>
+                  </a:lnTo>
+                  <a:lnTo>
+                    <a:pt x="6875762" y="2719787"/>
+                  </a:lnTo>
+                  <a:lnTo>
+                    <a:pt x="6804139" y="2721011"/>
+                  </a:lnTo>
+                  <a:lnTo>
+                    <a:pt x="6732517" y="2722233"/>
+                  </a:lnTo>
+                  <a:lnTo>
+                    <a:pt x="6660894" y="2723454"/>
+                  </a:lnTo>
+                  <a:lnTo>
+                    <a:pt x="6589272" y="2724673"/>
+                  </a:lnTo>
+                  <a:lnTo>
+                    <a:pt x="6517649" y="2725891"/>
+                  </a:lnTo>
+                  <a:lnTo>
+                    <a:pt x="6446027" y="2727107"/>
+                  </a:lnTo>
+                  <a:lnTo>
+                    <a:pt x="6374404" y="2728321"/>
+                  </a:lnTo>
+                  <a:lnTo>
+                    <a:pt x="6302782" y="2729534"/>
+                  </a:lnTo>
+                  <a:lnTo>
+                    <a:pt x="6231159" y="2730745"/>
+                  </a:lnTo>
+                  <a:lnTo>
+                    <a:pt x="6159537" y="2731955"/>
+                  </a:lnTo>
+                  <a:lnTo>
+                    <a:pt x="6087914" y="2733163"/>
+                  </a:lnTo>
+                  <a:lnTo>
+                    <a:pt x="6016292" y="2734369"/>
+                  </a:lnTo>
+                  <a:lnTo>
+                    <a:pt x="5944669" y="2735574"/>
+                  </a:lnTo>
+                  <a:lnTo>
+                    <a:pt x="5873047" y="2736777"/>
+                  </a:lnTo>
+                  <a:lnTo>
+                    <a:pt x="5801424" y="2737979"/>
+                  </a:lnTo>
+                  <a:lnTo>
+                    <a:pt x="5729802" y="2739179"/>
+                  </a:lnTo>
+                  <a:lnTo>
+                    <a:pt x="5658179" y="2740378"/>
+                  </a:lnTo>
+                  <a:lnTo>
+                    <a:pt x="5586557" y="2741575"/>
+                  </a:lnTo>
+                  <a:lnTo>
+                    <a:pt x="5514934" y="2742770"/>
+                  </a:lnTo>
+                  <a:lnTo>
+                    <a:pt x="5443311" y="2743964"/>
+                  </a:lnTo>
+                  <a:lnTo>
+                    <a:pt x="5371689" y="2745156"/>
+                  </a:lnTo>
+                  <a:lnTo>
+                    <a:pt x="5300066" y="2746347"/>
+                  </a:lnTo>
+                  <a:lnTo>
+                    <a:pt x="5228444" y="2747536"/>
+                  </a:lnTo>
+                  <a:lnTo>
+                    <a:pt x="5156821" y="2748723"/>
+                  </a:lnTo>
+                  <a:lnTo>
+                    <a:pt x="5085199" y="2749909"/>
+                  </a:lnTo>
+                  <a:lnTo>
+                    <a:pt x="5013576" y="2751094"/>
+                  </a:lnTo>
+                  <a:lnTo>
+                    <a:pt x="4941954" y="2752277"/>
+                  </a:lnTo>
+                  <a:lnTo>
+                    <a:pt x="4870331" y="2753458"/>
+                  </a:lnTo>
+                  <a:lnTo>
+                    <a:pt x="4798709" y="2754638"/>
+                  </a:lnTo>
+                  <a:lnTo>
+                    <a:pt x="4727086" y="2755816"/>
+                  </a:lnTo>
+                  <a:lnTo>
+                    <a:pt x="4655464" y="2756993"/>
+                  </a:lnTo>
+                  <a:lnTo>
+                    <a:pt x="4583841" y="2758168"/>
+                  </a:lnTo>
+                  <a:lnTo>
+                    <a:pt x="4512219" y="2759342"/>
+                  </a:lnTo>
+                  <a:lnTo>
+                    <a:pt x="4440596" y="2760514"/>
+                  </a:lnTo>
+                  <a:lnTo>
+                    <a:pt x="4368974" y="2761684"/>
+                  </a:lnTo>
+                  <a:lnTo>
+                    <a:pt x="4297351" y="2762853"/>
+                  </a:lnTo>
+                  <a:lnTo>
+                    <a:pt x="4225729" y="2764021"/>
+                  </a:lnTo>
+                  <a:lnTo>
+                    <a:pt x="4154106" y="2765187"/>
+                  </a:lnTo>
+                  <a:lnTo>
+                    <a:pt x="4082483" y="2766351"/>
+                  </a:lnTo>
+                  <a:lnTo>
+                    <a:pt x="4010861" y="2767514"/>
+                  </a:lnTo>
+                  <a:lnTo>
+                    <a:pt x="3939238" y="2768675"/>
+                  </a:lnTo>
+                  <a:lnTo>
+                    <a:pt x="3867616" y="2769835"/>
+                  </a:lnTo>
+                  <a:lnTo>
+                    <a:pt x="3795993" y="2770994"/>
+                  </a:lnTo>
+                  <a:lnTo>
+                    <a:pt x="3724371" y="2772150"/>
+                  </a:lnTo>
+                  <a:lnTo>
+                    <a:pt x="3652748" y="2773306"/>
+                  </a:lnTo>
+                  <a:lnTo>
+                    <a:pt x="3581126" y="2774459"/>
+                  </a:lnTo>
+                  <a:lnTo>
+                    <a:pt x="3509503" y="2775612"/>
+                  </a:lnTo>
+                  <a:lnTo>
+                    <a:pt x="3437881" y="2776762"/>
+                  </a:lnTo>
+                  <a:lnTo>
+                    <a:pt x="3366258" y="2777912"/>
+                  </a:lnTo>
+                  <a:lnTo>
+                    <a:pt x="3294636" y="2779059"/>
+                  </a:lnTo>
+                  <a:lnTo>
+                    <a:pt x="3223013" y="2780205"/>
+                  </a:lnTo>
+                  <a:lnTo>
+                    <a:pt x="3151391" y="2781350"/>
+                  </a:lnTo>
+                  <a:lnTo>
+                    <a:pt x="3079768" y="2782493"/>
+                  </a:lnTo>
+                  <a:lnTo>
+                    <a:pt x="3008146" y="2810427"/>
+                  </a:lnTo>
+                  <a:lnTo>
+                    <a:pt x="2936523" y="2855303"/>
+                  </a:lnTo>
+                  <a:lnTo>
+                    <a:pt x="2864901" y="2897787"/>
+                  </a:lnTo>
+                  <a:lnTo>
+                    <a:pt x="2793278" y="2938009"/>
+                  </a:lnTo>
+                  <a:lnTo>
+                    <a:pt x="2721655" y="2976087"/>
+                  </a:lnTo>
+                  <a:lnTo>
+                    <a:pt x="2650033" y="3012136"/>
+                  </a:lnTo>
+                  <a:lnTo>
+                    <a:pt x="2578410" y="3046264"/>
+                  </a:lnTo>
+                  <a:lnTo>
+                    <a:pt x="2506788" y="3078574"/>
+                  </a:lnTo>
+                  <a:lnTo>
+                    <a:pt x="2435165" y="3109162"/>
+                  </a:lnTo>
+                  <a:lnTo>
+                    <a:pt x="2363543" y="3138120"/>
+                  </a:lnTo>
+                  <a:lnTo>
+                    <a:pt x="2291920" y="3165536"/>
+                  </a:lnTo>
+                  <a:lnTo>
+                    <a:pt x="2220298" y="3191491"/>
+                  </a:lnTo>
+                  <a:lnTo>
+                    <a:pt x="2148675" y="3216062"/>
+                  </a:lnTo>
+                  <a:lnTo>
+                    <a:pt x="2077053" y="3239325"/>
+                  </a:lnTo>
+                  <a:lnTo>
+                    <a:pt x="2005430" y="3261348"/>
+                  </a:lnTo>
+                  <a:lnTo>
+                    <a:pt x="1933808" y="3282197"/>
+                  </a:lnTo>
+                  <a:lnTo>
+                    <a:pt x="1862185" y="3301936"/>
+                  </a:lnTo>
+                  <a:lnTo>
+                    <a:pt x="1790563" y="3320622"/>
+                  </a:lnTo>
+                  <a:lnTo>
+                    <a:pt x="1718940" y="3338314"/>
+                  </a:lnTo>
+                  <a:lnTo>
+                    <a:pt x="1647318" y="3355062"/>
+                  </a:lnTo>
+                  <a:lnTo>
+                    <a:pt x="1575695" y="3370918"/>
+                  </a:lnTo>
+                  <a:lnTo>
+                    <a:pt x="1504073" y="3385929"/>
+                  </a:lnTo>
+                  <a:lnTo>
+                    <a:pt x="1432450" y="3400141"/>
+                  </a:lnTo>
+                  <a:lnTo>
+                    <a:pt x="1360827" y="3413595"/>
+                  </a:lnTo>
+                  <a:lnTo>
+                    <a:pt x="1289205" y="3426332"/>
+                  </a:lnTo>
+                  <a:lnTo>
+                    <a:pt x="1217582" y="3438391"/>
+                  </a:lnTo>
+                  <a:lnTo>
+                    <a:pt x="1145960" y="3449807"/>
+                  </a:lnTo>
+                  <a:lnTo>
+                    <a:pt x="1074337" y="3460615"/>
+                  </a:lnTo>
+                  <a:lnTo>
+                    <a:pt x="1002715" y="3470846"/>
+                  </a:lnTo>
+                  <a:lnTo>
+                    <a:pt x="931092" y="3480533"/>
+                  </a:lnTo>
+                  <a:lnTo>
+                    <a:pt x="859470" y="3489704"/>
+                  </a:lnTo>
+                  <a:lnTo>
+                    <a:pt x="787847" y="3498386"/>
+                  </a:lnTo>
+                  <a:lnTo>
+                    <a:pt x="716225" y="3506605"/>
+                  </a:lnTo>
+                  <a:lnTo>
+                    <a:pt x="644602" y="3514386"/>
+                  </a:lnTo>
+                  <a:lnTo>
+                    <a:pt x="572980" y="3521753"/>
+                  </a:lnTo>
+                  <a:lnTo>
+                    <a:pt x="501357" y="3528727"/>
+                  </a:lnTo>
+                  <a:lnTo>
+                    <a:pt x="429735" y="3535330"/>
+                  </a:lnTo>
+                  <a:lnTo>
+                    <a:pt x="358112" y="3541581"/>
+                  </a:lnTo>
+                  <a:lnTo>
+                    <a:pt x="286490" y="3547499"/>
+                  </a:lnTo>
+                  <a:lnTo>
+                    <a:pt x="214867" y="3553101"/>
+                  </a:lnTo>
+                  <a:lnTo>
+                    <a:pt x="143245" y="3558405"/>
+                  </a:lnTo>
+                  <a:lnTo>
+                    <a:pt x="71622" y="3563426"/>
+                  </a:lnTo>
+                  <a:lnTo>
+                    <a:pt x="0" y="3568180"/>
                   </a:lnTo>
                   <a:close/>
                 </a:path>
@@ -3673,218 +3676,221 @@
           <p:spPr>
             <a:xfrm>
               <a:off x="1172049" y="1896563"/>
-              <a:ext cx="4818389" cy="2794749"/>
+              <a:ext cx="4926952" cy="2830258"/>
             </a:xfrm>
             <a:custGeom>
               <a:avLst/>
               <a:pathLst>
-                <a:path w="4818389" h="2794749">
+                <a:path w="4926952" h="2830258">
                   <a:moveTo>
-                    <a:pt x="0" y="2794749"/>
+                    <a:pt x="0" y="2830258"/>
                   </a:moveTo>
                   <a:lnTo>
-                    <a:pt x="71622" y="2794474"/>
-                  </a:lnTo>
-                  <a:lnTo>
-                    <a:pt x="143245" y="2794199"/>
-                  </a:lnTo>
-                  <a:lnTo>
-                    <a:pt x="214867" y="2793924"/>
-                  </a:lnTo>
-                  <a:lnTo>
-                    <a:pt x="286490" y="2793649"/>
-                  </a:lnTo>
-                  <a:lnTo>
-                    <a:pt x="358112" y="2793374"/>
-                  </a:lnTo>
-                  <a:lnTo>
-                    <a:pt x="429735" y="2793099"/>
-                  </a:lnTo>
-                  <a:lnTo>
-                    <a:pt x="501357" y="2792823"/>
-                  </a:lnTo>
-                  <a:lnTo>
-                    <a:pt x="572980" y="2792548"/>
-                  </a:lnTo>
-                  <a:lnTo>
-                    <a:pt x="644602" y="2792272"/>
-                  </a:lnTo>
-                  <a:lnTo>
-                    <a:pt x="716225" y="2791997"/>
-                  </a:lnTo>
-                  <a:lnTo>
-                    <a:pt x="787847" y="2791721"/>
-                  </a:lnTo>
-                  <a:lnTo>
-                    <a:pt x="859470" y="2791445"/>
-                  </a:lnTo>
-                  <a:lnTo>
-                    <a:pt x="931092" y="2791169"/>
-                  </a:lnTo>
-                  <a:lnTo>
-                    <a:pt x="1002715" y="2790893"/>
-                  </a:lnTo>
-                  <a:lnTo>
-                    <a:pt x="1074337" y="2790617"/>
-                  </a:lnTo>
-                  <a:lnTo>
-                    <a:pt x="1145960" y="2790341"/>
-                  </a:lnTo>
-                  <a:lnTo>
-                    <a:pt x="1217582" y="2790065"/>
-                  </a:lnTo>
-                  <a:lnTo>
-                    <a:pt x="1289205" y="2789788"/>
-                  </a:lnTo>
-                  <a:lnTo>
-                    <a:pt x="1360827" y="2789512"/>
-                  </a:lnTo>
-                  <a:lnTo>
-                    <a:pt x="1432450" y="2789235"/>
-                  </a:lnTo>
-                  <a:lnTo>
-                    <a:pt x="1504073" y="2788959"/>
-                  </a:lnTo>
-                  <a:lnTo>
-                    <a:pt x="1575695" y="2788682"/>
-                  </a:lnTo>
-                  <a:lnTo>
-                    <a:pt x="1647318" y="2788405"/>
-                  </a:lnTo>
-                  <a:lnTo>
-                    <a:pt x="1718940" y="2788129"/>
-                  </a:lnTo>
-                  <a:lnTo>
-                    <a:pt x="1790563" y="2787852"/>
-                  </a:lnTo>
-                  <a:lnTo>
-                    <a:pt x="1862185" y="2787574"/>
-                  </a:lnTo>
-                  <a:lnTo>
-                    <a:pt x="1933808" y="2787297"/>
-                  </a:lnTo>
-                  <a:lnTo>
-                    <a:pt x="2005430" y="2787020"/>
-                  </a:lnTo>
-                  <a:lnTo>
-                    <a:pt x="2077053" y="2786743"/>
-                  </a:lnTo>
-                  <a:lnTo>
-                    <a:pt x="2148675" y="2786465"/>
-                  </a:lnTo>
-                  <a:lnTo>
-                    <a:pt x="2220298" y="2786188"/>
-                  </a:lnTo>
-                  <a:lnTo>
-                    <a:pt x="2291920" y="2785910"/>
-                  </a:lnTo>
-                  <a:lnTo>
-                    <a:pt x="2363543" y="2785633"/>
-                  </a:lnTo>
-                  <a:lnTo>
-                    <a:pt x="2435165" y="2785355"/>
-                  </a:lnTo>
-                  <a:lnTo>
-                    <a:pt x="2506788" y="2785077"/>
-                  </a:lnTo>
-                  <a:lnTo>
-                    <a:pt x="2578410" y="2784799"/>
-                  </a:lnTo>
-                  <a:lnTo>
-                    <a:pt x="2650033" y="2784521"/>
-                  </a:lnTo>
-                  <a:lnTo>
-                    <a:pt x="2721655" y="2784243"/>
-                  </a:lnTo>
-                  <a:lnTo>
-                    <a:pt x="2793278" y="2783965"/>
-                  </a:lnTo>
-                  <a:lnTo>
-                    <a:pt x="2864901" y="2783686"/>
-                  </a:lnTo>
-                  <a:lnTo>
-                    <a:pt x="2936523" y="2783408"/>
-                  </a:lnTo>
-                  <a:lnTo>
-                    <a:pt x="3008146" y="2783129"/>
-                  </a:lnTo>
-                  <a:lnTo>
-                    <a:pt x="3079768" y="2761787"/>
-                  </a:lnTo>
-                  <a:lnTo>
-                    <a:pt x="3151391" y="2708483"/>
-                  </a:lnTo>
-                  <a:lnTo>
-                    <a:pt x="3223013" y="2651989"/>
-                  </a:lnTo>
-                  <a:lnTo>
-                    <a:pt x="3294636" y="2592115"/>
-                  </a:lnTo>
-                  <a:lnTo>
-                    <a:pt x="3366258" y="2528659"/>
-                  </a:lnTo>
-                  <a:lnTo>
-                    <a:pt x="3437881" y="2461405"/>
-                  </a:lnTo>
-                  <a:lnTo>
-                    <a:pt x="3509503" y="2390127"/>
-                  </a:lnTo>
-                  <a:lnTo>
-                    <a:pt x="3581126" y="2314585"/>
-                  </a:lnTo>
-                  <a:lnTo>
-                    <a:pt x="3652748" y="2234522"/>
-                  </a:lnTo>
-                  <a:lnTo>
-                    <a:pt x="3724371" y="2149669"/>
-                  </a:lnTo>
-                  <a:lnTo>
-                    <a:pt x="3795993" y="2059739"/>
-                  </a:lnTo>
-                  <a:lnTo>
-                    <a:pt x="3867616" y="1964427"/>
-                  </a:lnTo>
-                  <a:lnTo>
-                    <a:pt x="3939238" y="1863413"/>
-                  </a:lnTo>
-                  <a:lnTo>
-                    <a:pt x="4010861" y="1756355"/>
-                  </a:lnTo>
-                  <a:lnTo>
-                    <a:pt x="4082483" y="1642890"/>
-                  </a:lnTo>
-                  <a:lnTo>
-                    <a:pt x="4154106" y="1522637"/>
-                  </a:lnTo>
-                  <a:lnTo>
-                    <a:pt x="4225729" y="1395188"/>
-                  </a:lnTo>
-                  <a:lnTo>
-                    <a:pt x="4297351" y="1260113"/>
-                  </a:lnTo>
-                  <a:lnTo>
-                    <a:pt x="4368974" y="1116957"/>
-                  </a:lnTo>
-                  <a:lnTo>
-                    <a:pt x="4440596" y="965234"/>
-                  </a:lnTo>
-                  <a:lnTo>
-                    <a:pt x="4512219" y="804433"/>
-                  </a:lnTo>
-                  <a:lnTo>
-                    <a:pt x="4583841" y="634011"/>
-                  </a:lnTo>
-                  <a:lnTo>
-                    <a:pt x="4655464" y="453391"/>
-                  </a:lnTo>
-                  <a:lnTo>
-                    <a:pt x="4727086" y="261964"/>
-                  </a:lnTo>
-                  <a:lnTo>
-                    <a:pt x="4798709" y="59083"/>
-                  </a:lnTo>
-                  <a:lnTo>
-                    <a:pt x="4818389" y="0"/>
+                    <a:pt x="71622" y="2829177"/>
+                  </a:lnTo>
+                  <a:lnTo>
+                    <a:pt x="143245" y="2828095"/>
+                  </a:lnTo>
+                  <a:lnTo>
+                    <a:pt x="214867" y="2827012"/>
+                  </a:lnTo>
+                  <a:lnTo>
+                    <a:pt x="286490" y="2825927"/>
+                  </a:lnTo>
+                  <a:lnTo>
+                    <a:pt x="358112" y="2824841"/>
+                  </a:lnTo>
+                  <a:lnTo>
+                    <a:pt x="429735" y="2823754"/>
+                  </a:lnTo>
+                  <a:lnTo>
+                    <a:pt x="501357" y="2822665"/>
+                  </a:lnTo>
+                  <a:lnTo>
+                    <a:pt x="572980" y="2821574"/>
+                  </a:lnTo>
+                  <a:lnTo>
+                    <a:pt x="644602" y="2820482"/>
+                  </a:lnTo>
+                  <a:lnTo>
+                    <a:pt x="716225" y="2819389"/>
+                  </a:lnTo>
+                  <a:lnTo>
+                    <a:pt x="787847" y="2818294"/>
+                  </a:lnTo>
+                  <a:lnTo>
+                    <a:pt x="859470" y="2817198"/>
+                  </a:lnTo>
+                  <a:lnTo>
+                    <a:pt x="931092" y="2816101"/>
+                  </a:lnTo>
+                  <a:lnTo>
+                    <a:pt x="1002715" y="2815002"/>
+                  </a:lnTo>
+                  <a:lnTo>
+                    <a:pt x="1074337" y="2813901"/>
+                  </a:lnTo>
+                  <a:lnTo>
+                    <a:pt x="1145960" y="2812799"/>
+                  </a:lnTo>
+                  <a:lnTo>
+                    <a:pt x="1217582" y="2811696"/>
+                  </a:lnTo>
+                  <a:lnTo>
+                    <a:pt x="1289205" y="2810591"/>
+                  </a:lnTo>
+                  <a:lnTo>
+                    <a:pt x="1360827" y="2809485"/>
+                  </a:lnTo>
+                  <a:lnTo>
+                    <a:pt x="1432450" y="2808377"/>
+                  </a:lnTo>
+                  <a:lnTo>
+                    <a:pt x="1504073" y="2807268"/>
+                  </a:lnTo>
+                  <a:lnTo>
+                    <a:pt x="1575695" y="2806157"/>
+                  </a:lnTo>
+                  <a:lnTo>
+                    <a:pt x="1647318" y="2805045"/>
+                  </a:lnTo>
+                  <a:lnTo>
+                    <a:pt x="1718940" y="2803931"/>
+                  </a:lnTo>
+                  <a:lnTo>
+                    <a:pt x="1790563" y="2802816"/>
+                  </a:lnTo>
+                  <a:lnTo>
+                    <a:pt x="1862185" y="2801700"/>
+                  </a:lnTo>
+                  <a:lnTo>
+                    <a:pt x="1933808" y="2800582"/>
+                  </a:lnTo>
+                  <a:lnTo>
+                    <a:pt x="2005430" y="2799462"/>
+                  </a:lnTo>
+                  <a:lnTo>
+                    <a:pt x="2077053" y="2798342"/>
+                  </a:lnTo>
+                  <a:lnTo>
+                    <a:pt x="2148675" y="2797219"/>
+                  </a:lnTo>
+                  <a:lnTo>
+                    <a:pt x="2220298" y="2796095"/>
+                  </a:lnTo>
+                  <a:lnTo>
+                    <a:pt x="2291920" y="2794970"/>
+                  </a:lnTo>
+                  <a:lnTo>
+                    <a:pt x="2363543" y="2793843"/>
+                  </a:lnTo>
+                  <a:lnTo>
+                    <a:pt x="2435165" y="2792715"/>
+                  </a:lnTo>
+                  <a:lnTo>
+                    <a:pt x="2506788" y="2791585"/>
+                  </a:lnTo>
+                  <a:lnTo>
+                    <a:pt x="2578410" y="2790454"/>
+                  </a:lnTo>
+                  <a:lnTo>
+                    <a:pt x="2650033" y="2789321"/>
+                  </a:lnTo>
+                  <a:lnTo>
+                    <a:pt x="2721655" y="2788187"/>
+                  </a:lnTo>
+                  <a:lnTo>
+                    <a:pt x="2793278" y="2787051"/>
+                  </a:lnTo>
+                  <a:lnTo>
+                    <a:pt x="2864901" y="2785914"/>
+                  </a:lnTo>
+                  <a:lnTo>
+                    <a:pt x="2936523" y="2784775"/>
+                  </a:lnTo>
+                  <a:lnTo>
+                    <a:pt x="3008146" y="2783635"/>
+                  </a:lnTo>
+                  <a:lnTo>
+                    <a:pt x="3079768" y="2763025"/>
+                  </a:lnTo>
+                  <a:lnTo>
+                    <a:pt x="3151391" y="2712955"/>
+                  </a:lnTo>
+                  <a:lnTo>
+                    <a:pt x="3223013" y="2660068"/>
+                  </a:lnTo>
+                  <a:lnTo>
+                    <a:pt x="3294636" y="2604204"/>
+                  </a:lnTo>
+                  <a:lnTo>
+                    <a:pt x="3366258" y="2545195"/>
+                  </a:lnTo>
+                  <a:lnTo>
+                    <a:pt x="3437881" y="2482866"/>
+                  </a:lnTo>
+                  <a:lnTo>
+                    <a:pt x="3509503" y="2417028"/>
+                  </a:lnTo>
+                  <a:lnTo>
+                    <a:pt x="3581126" y="2347485"/>
+                  </a:lnTo>
+                  <a:lnTo>
+                    <a:pt x="3652748" y="2274028"/>
+                  </a:lnTo>
+                  <a:lnTo>
+                    <a:pt x="3724371" y="2196437"/>
+                  </a:lnTo>
+                  <a:lnTo>
+                    <a:pt x="3795993" y="2114479"/>
+                  </a:lnTo>
+                  <a:lnTo>
+                    <a:pt x="3867616" y="2027907"/>
+                  </a:lnTo>
+                  <a:lnTo>
+                    <a:pt x="3939238" y="1936464"/>
+                  </a:lnTo>
+                  <a:lnTo>
+                    <a:pt x="4010861" y="1839874"/>
+                  </a:lnTo>
+                  <a:lnTo>
+                    <a:pt x="4082483" y="1737847"/>
+                  </a:lnTo>
+                  <a:lnTo>
+                    <a:pt x="4154106" y="1630079"/>
+                  </a:lnTo>
+                  <a:lnTo>
+                    <a:pt x="4225729" y="1516244"/>
+                  </a:lnTo>
+                  <a:lnTo>
+                    <a:pt x="4297351" y="1396004"/>
+                  </a:lnTo>
+                  <a:lnTo>
+                    <a:pt x="4368974" y="1268995"/>
+                  </a:lnTo>
+                  <a:lnTo>
+                    <a:pt x="4440596" y="1134838"/>
+                  </a:lnTo>
+                  <a:lnTo>
+                    <a:pt x="4512219" y="993131"/>
+                  </a:lnTo>
+                  <a:lnTo>
+                    <a:pt x="4583841" y="843448"/>
+                  </a:lnTo>
+                  <a:lnTo>
+                    <a:pt x="4655464" y="685341"/>
+                  </a:lnTo>
+                  <a:lnTo>
+                    <a:pt x="4727086" y="518335"/>
+                  </a:lnTo>
+                  <a:lnTo>
+                    <a:pt x="4798709" y="341930"/>
+                  </a:lnTo>
+                  <a:lnTo>
+                    <a:pt x="4870331" y="155596"/>
+                  </a:lnTo>
+                  <a:lnTo>
+                    <a:pt x="4926952" y="0"/>
                   </a:lnTo>
                 </a:path>
               </a:pathLst>
@@ -3904,312 +3910,312 @@
           </p:nvSpPr>
           <p:spPr>
             <a:xfrm>
-              <a:off x="1172049" y="4663671"/>
-              <a:ext cx="7090630" cy="812326"/>
+              <a:off x="1172049" y="4612669"/>
+              <a:ext cx="7090630" cy="852074"/>
             </a:xfrm>
             <a:custGeom>
               <a:avLst/>
               <a:pathLst>
-                <a:path w="7090630" h="812326">
+                <a:path w="7090630" h="852074">
                   <a:moveTo>
                     <a:pt x="7090630" y="0"/>
                   </a:moveTo>
                   <a:lnTo>
-                    <a:pt x="7019007" y="283"/>
-                  </a:lnTo>
-                  <a:lnTo>
-                    <a:pt x="6947385" y="567"/>
-                  </a:lnTo>
-                  <a:lnTo>
-                    <a:pt x="6875762" y="850"/>
-                  </a:lnTo>
-                  <a:lnTo>
-                    <a:pt x="6804139" y="1133"/>
-                  </a:lnTo>
-                  <a:lnTo>
-                    <a:pt x="6732517" y="1417"/>
-                  </a:lnTo>
-                  <a:lnTo>
-                    <a:pt x="6660894" y="1700"/>
-                  </a:lnTo>
-                  <a:lnTo>
-                    <a:pt x="6589272" y="1983"/>
-                  </a:lnTo>
-                  <a:lnTo>
-                    <a:pt x="6517649" y="2266"/>
-                  </a:lnTo>
-                  <a:lnTo>
-                    <a:pt x="6446027" y="2549"/>
-                  </a:lnTo>
-                  <a:lnTo>
-                    <a:pt x="6374404" y="2832"/>
-                  </a:lnTo>
-                  <a:lnTo>
-                    <a:pt x="6302782" y="3114"/>
-                  </a:lnTo>
-                  <a:lnTo>
-                    <a:pt x="6231159" y="3397"/>
-                  </a:lnTo>
-                  <a:lnTo>
-                    <a:pt x="6159537" y="3679"/>
-                  </a:lnTo>
-                  <a:lnTo>
-                    <a:pt x="6087914" y="3962"/>
-                  </a:lnTo>
-                  <a:lnTo>
-                    <a:pt x="6016292" y="4244"/>
-                  </a:lnTo>
-                  <a:lnTo>
-                    <a:pt x="5944669" y="4526"/>
-                  </a:lnTo>
-                  <a:lnTo>
-                    <a:pt x="5873047" y="4809"/>
-                  </a:lnTo>
-                  <a:lnTo>
-                    <a:pt x="5801424" y="5091"/>
-                  </a:lnTo>
-                  <a:lnTo>
-                    <a:pt x="5729802" y="5373"/>
-                  </a:lnTo>
-                  <a:lnTo>
-                    <a:pt x="5658179" y="5655"/>
-                  </a:lnTo>
-                  <a:lnTo>
-                    <a:pt x="5586557" y="5936"/>
-                  </a:lnTo>
-                  <a:lnTo>
-                    <a:pt x="5514934" y="6218"/>
-                  </a:lnTo>
-                  <a:lnTo>
-                    <a:pt x="5443311" y="6500"/>
-                  </a:lnTo>
-                  <a:lnTo>
-                    <a:pt x="5371689" y="6781"/>
-                  </a:lnTo>
-                  <a:lnTo>
-                    <a:pt x="5300066" y="7063"/>
-                  </a:lnTo>
-                  <a:lnTo>
-                    <a:pt x="5228444" y="7344"/>
-                  </a:lnTo>
-                  <a:lnTo>
-                    <a:pt x="5156821" y="7625"/>
-                  </a:lnTo>
-                  <a:lnTo>
-                    <a:pt x="5085199" y="7906"/>
-                  </a:lnTo>
-                  <a:lnTo>
-                    <a:pt x="5013576" y="8188"/>
-                  </a:lnTo>
-                  <a:lnTo>
-                    <a:pt x="4941954" y="8469"/>
-                  </a:lnTo>
-                  <a:lnTo>
-                    <a:pt x="4870331" y="8749"/>
-                  </a:lnTo>
-                  <a:lnTo>
-                    <a:pt x="4798709" y="9030"/>
-                  </a:lnTo>
-                  <a:lnTo>
-                    <a:pt x="4727086" y="9311"/>
-                  </a:lnTo>
-                  <a:lnTo>
-                    <a:pt x="4655464" y="9592"/>
-                  </a:lnTo>
-                  <a:lnTo>
-                    <a:pt x="4583841" y="9872"/>
-                  </a:lnTo>
-                  <a:lnTo>
-                    <a:pt x="4512219" y="10153"/>
-                  </a:lnTo>
-                  <a:lnTo>
-                    <a:pt x="4440596" y="10433"/>
-                  </a:lnTo>
-                  <a:lnTo>
-                    <a:pt x="4368974" y="10713"/>
-                  </a:lnTo>
-                  <a:lnTo>
-                    <a:pt x="4297351" y="10993"/>
-                  </a:lnTo>
-                  <a:lnTo>
-                    <a:pt x="4225729" y="11274"/>
-                  </a:lnTo>
-                  <a:lnTo>
-                    <a:pt x="4154106" y="11554"/>
-                  </a:lnTo>
-                  <a:lnTo>
-                    <a:pt x="4082483" y="11833"/>
-                  </a:lnTo>
-                  <a:lnTo>
-                    <a:pt x="4010861" y="12113"/>
-                  </a:lnTo>
-                  <a:lnTo>
-                    <a:pt x="3939238" y="12393"/>
-                  </a:lnTo>
-                  <a:lnTo>
-                    <a:pt x="3867616" y="12673"/>
-                  </a:lnTo>
-                  <a:lnTo>
-                    <a:pt x="3795993" y="12952"/>
-                  </a:lnTo>
-                  <a:lnTo>
-                    <a:pt x="3724371" y="13232"/>
-                  </a:lnTo>
-                  <a:lnTo>
-                    <a:pt x="3652748" y="13511"/>
-                  </a:lnTo>
-                  <a:lnTo>
-                    <a:pt x="3581126" y="13790"/>
-                  </a:lnTo>
-                  <a:lnTo>
-                    <a:pt x="3509503" y="14070"/>
-                  </a:lnTo>
-                  <a:lnTo>
-                    <a:pt x="3437881" y="14349"/>
-                  </a:lnTo>
-                  <a:lnTo>
-                    <a:pt x="3366258" y="14628"/>
-                  </a:lnTo>
-                  <a:lnTo>
-                    <a:pt x="3294636" y="14907"/>
-                  </a:lnTo>
-                  <a:lnTo>
-                    <a:pt x="3223013" y="15185"/>
-                  </a:lnTo>
-                  <a:lnTo>
-                    <a:pt x="3151391" y="15464"/>
-                  </a:lnTo>
-                  <a:lnTo>
-                    <a:pt x="3079768" y="15743"/>
-                  </a:lnTo>
-                  <a:lnTo>
-                    <a:pt x="3008146" y="44974"/>
-                  </a:lnTo>
-                  <a:lnTo>
-                    <a:pt x="2936523" y="92430"/>
-                  </a:lnTo>
-                  <a:lnTo>
-                    <a:pt x="2864901" y="137206"/>
-                  </a:lnTo>
-                  <a:lnTo>
-                    <a:pt x="2793278" y="179454"/>
-                  </a:lnTo>
-                  <a:lnTo>
-                    <a:pt x="2721655" y="219317"/>
-                  </a:lnTo>
-                  <a:lnTo>
-                    <a:pt x="2650033" y="256930"/>
-                  </a:lnTo>
-                  <a:lnTo>
-                    <a:pt x="2578410" y="292419"/>
-                  </a:lnTo>
-                  <a:lnTo>
-                    <a:pt x="2506788" y="325904"/>
-                  </a:lnTo>
-                  <a:lnTo>
-                    <a:pt x="2435165" y="357499"/>
-                  </a:lnTo>
-                  <a:lnTo>
-                    <a:pt x="2363543" y="387311"/>
-                  </a:lnTo>
-                  <a:lnTo>
-                    <a:pt x="2291920" y="415439"/>
-                  </a:lnTo>
-                  <a:lnTo>
-                    <a:pt x="2220298" y="441979"/>
-                  </a:lnTo>
-                  <a:lnTo>
-                    <a:pt x="2148675" y="467021"/>
-                  </a:lnTo>
-                  <a:lnTo>
-                    <a:pt x="2077053" y="490649"/>
-                  </a:lnTo>
-                  <a:lnTo>
-                    <a:pt x="2005430" y="512943"/>
-                  </a:lnTo>
-                  <a:lnTo>
-                    <a:pt x="1933808" y="533978"/>
-                  </a:lnTo>
-                  <a:lnTo>
-                    <a:pt x="1862185" y="553826"/>
-                  </a:lnTo>
-                  <a:lnTo>
-                    <a:pt x="1790563" y="572553"/>
-                  </a:lnTo>
-                  <a:lnTo>
-                    <a:pt x="1718940" y="590223"/>
-                  </a:lnTo>
-                  <a:lnTo>
-                    <a:pt x="1647318" y="606896"/>
-                  </a:lnTo>
-                  <a:lnTo>
-                    <a:pt x="1575695" y="622627"/>
-                  </a:lnTo>
-                  <a:lnTo>
-                    <a:pt x="1504073" y="637470"/>
-                  </a:lnTo>
-                  <a:lnTo>
-                    <a:pt x="1432450" y="651475"/>
-                  </a:lnTo>
-                  <a:lnTo>
-                    <a:pt x="1360827" y="664689"/>
-                  </a:lnTo>
-                  <a:lnTo>
-                    <a:pt x="1289205" y="677157"/>
-                  </a:lnTo>
-                  <a:lnTo>
-                    <a:pt x="1217582" y="688922"/>
-                  </a:lnTo>
-                  <a:lnTo>
-                    <a:pt x="1145960" y="700022"/>
-                  </a:lnTo>
-                  <a:lnTo>
-                    <a:pt x="1074337" y="710495"/>
-                  </a:lnTo>
-                  <a:lnTo>
-                    <a:pt x="1002715" y="720378"/>
-                  </a:lnTo>
-                  <a:lnTo>
-                    <a:pt x="931092" y="729702"/>
-                  </a:lnTo>
-                  <a:lnTo>
-                    <a:pt x="859470" y="738500"/>
-                  </a:lnTo>
-                  <a:lnTo>
-                    <a:pt x="787847" y="746801"/>
-                  </a:lnTo>
-                  <a:lnTo>
-                    <a:pt x="716225" y="754633"/>
-                  </a:lnTo>
-                  <a:lnTo>
-                    <a:pt x="644602" y="762024"/>
-                  </a:lnTo>
-                  <a:lnTo>
-                    <a:pt x="572980" y="768997"/>
-                  </a:lnTo>
-                  <a:lnTo>
-                    <a:pt x="501357" y="775576"/>
-                  </a:lnTo>
-                  <a:lnTo>
-                    <a:pt x="429735" y="781784"/>
-                  </a:lnTo>
-                  <a:lnTo>
-                    <a:pt x="358112" y="787642"/>
-                  </a:lnTo>
-                  <a:lnTo>
-                    <a:pt x="286490" y="793168"/>
-                  </a:lnTo>
-                  <a:lnTo>
-                    <a:pt x="214867" y="798383"/>
-                  </a:lnTo>
-                  <a:lnTo>
-                    <a:pt x="143245" y="803303"/>
-                  </a:lnTo>
-                  <a:lnTo>
-                    <a:pt x="71622" y="807946"/>
-                  </a:lnTo>
-                  <a:lnTo>
-                    <a:pt x="0" y="812326"/>
+                    <a:pt x="7019007" y="1228"/>
+                  </a:lnTo>
+                  <a:lnTo>
+                    <a:pt x="6947385" y="2455"/>
+                  </a:lnTo>
+                  <a:lnTo>
+                    <a:pt x="6875762" y="3681"/>
+                  </a:lnTo>
+                  <a:lnTo>
+                    <a:pt x="6804139" y="4905"/>
+                  </a:lnTo>
+                  <a:lnTo>
+                    <a:pt x="6732517" y="6127"/>
+                  </a:lnTo>
+                  <a:lnTo>
+                    <a:pt x="6660894" y="7348"/>
+                  </a:lnTo>
+                  <a:lnTo>
+                    <a:pt x="6589272" y="8567"/>
+                  </a:lnTo>
+                  <a:lnTo>
+                    <a:pt x="6517649" y="9785"/>
+                  </a:lnTo>
+                  <a:lnTo>
+                    <a:pt x="6446027" y="11001"/>
+                  </a:lnTo>
+                  <a:lnTo>
+                    <a:pt x="6374404" y="12215"/>
+                  </a:lnTo>
+                  <a:lnTo>
+                    <a:pt x="6302782" y="13428"/>
+                  </a:lnTo>
+                  <a:lnTo>
+                    <a:pt x="6231159" y="14639"/>
+                  </a:lnTo>
+                  <a:lnTo>
+                    <a:pt x="6159537" y="15849"/>
+                  </a:lnTo>
+                  <a:lnTo>
+                    <a:pt x="6087914" y="17057"/>
+                  </a:lnTo>
+                  <a:lnTo>
+                    <a:pt x="6016292" y="18263"/>
+                  </a:lnTo>
+                  <a:lnTo>
+                    <a:pt x="5944669" y="19468"/>
+                  </a:lnTo>
+                  <a:lnTo>
+                    <a:pt x="5873047" y="20671"/>
+                  </a:lnTo>
+                  <a:lnTo>
+                    <a:pt x="5801424" y="21873"/>
+                  </a:lnTo>
+                  <a:lnTo>
+                    <a:pt x="5729802" y="23073"/>
+                  </a:lnTo>
+                  <a:lnTo>
+                    <a:pt x="5658179" y="24272"/>
+                  </a:lnTo>
+                  <a:lnTo>
+                    <a:pt x="5586557" y="25469"/>
+                  </a:lnTo>
+                  <a:lnTo>
+                    <a:pt x="5514934" y="26664"/>
+                  </a:lnTo>
+                  <a:lnTo>
+                    <a:pt x="5443311" y="27858"/>
+                  </a:lnTo>
+                  <a:lnTo>
+                    <a:pt x="5371689" y="29050"/>
+                  </a:lnTo>
+                  <a:lnTo>
+                    <a:pt x="5300066" y="30241"/>
+                  </a:lnTo>
+                  <a:lnTo>
+                    <a:pt x="5228444" y="31430"/>
+                  </a:lnTo>
+                  <a:lnTo>
+                    <a:pt x="5156821" y="32617"/>
+                  </a:lnTo>
+                  <a:lnTo>
+                    <a:pt x="5085199" y="33803"/>
+                  </a:lnTo>
+                  <a:lnTo>
+                    <a:pt x="5013576" y="34988"/>
+                  </a:lnTo>
+                  <a:lnTo>
+                    <a:pt x="4941954" y="36171"/>
+                  </a:lnTo>
+                  <a:lnTo>
+                    <a:pt x="4870331" y="37352"/>
+                  </a:lnTo>
+                  <a:lnTo>
+                    <a:pt x="4798709" y="38532"/>
+                  </a:lnTo>
+                  <a:lnTo>
+                    <a:pt x="4727086" y="39710"/>
+                  </a:lnTo>
+                  <a:lnTo>
+                    <a:pt x="4655464" y="40887"/>
+                  </a:lnTo>
+                  <a:lnTo>
+                    <a:pt x="4583841" y="42062"/>
+                  </a:lnTo>
+                  <a:lnTo>
+                    <a:pt x="4512219" y="43236"/>
+                  </a:lnTo>
+                  <a:lnTo>
+                    <a:pt x="4440596" y="44408"/>
+                  </a:lnTo>
+                  <a:lnTo>
+                    <a:pt x="4368974" y="45578"/>
+                  </a:lnTo>
+                  <a:lnTo>
+                    <a:pt x="4297351" y="46747"/>
+                  </a:lnTo>
+                  <a:lnTo>
+                    <a:pt x="4225729" y="47915"/>
+                  </a:lnTo>
+                  <a:lnTo>
+                    <a:pt x="4154106" y="49081"/>
+                  </a:lnTo>
+                  <a:lnTo>
+                    <a:pt x="4082483" y="50245"/>
+                  </a:lnTo>
+                  <a:lnTo>
+                    <a:pt x="4010861" y="51408"/>
+                  </a:lnTo>
+                  <a:lnTo>
+                    <a:pt x="3939238" y="52569"/>
+                  </a:lnTo>
+                  <a:lnTo>
+                    <a:pt x="3867616" y="53729"/>
+                  </a:lnTo>
+                  <a:lnTo>
+                    <a:pt x="3795993" y="54887"/>
+                  </a:lnTo>
+                  <a:lnTo>
+                    <a:pt x="3724371" y="56044"/>
+                  </a:lnTo>
+                  <a:lnTo>
+                    <a:pt x="3652748" y="57200"/>
+                  </a:lnTo>
+                  <a:lnTo>
+                    <a:pt x="3581126" y="58353"/>
+                  </a:lnTo>
+                  <a:lnTo>
+                    <a:pt x="3509503" y="59506"/>
+                  </a:lnTo>
+                  <a:lnTo>
+                    <a:pt x="3437881" y="60656"/>
+                  </a:lnTo>
+                  <a:lnTo>
+                    <a:pt x="3366258" y="61805"/>
+                  </a:lnTo>
+                  <a:lnTo>
+                    <a:pt x="3294636" y="62953"/>
+                  </a:lnTo>
+                  <a:lnTo>
+                    <a:pt x="3223013" y="64099"/>
+                  </a:lnTo>
+                  <a:lnTo>
+                    <a:pt x="3151391" y="65244"/>
+                  </a:lnTo>
+                  <a:lnTo>
+                    <a:pt x="3079768" y="66387"/>
+                  </a:lnTo>
+                  <a:lnTo>
+                    <a:pt x="3008146" y="94321"/>
+                  </a:lnTo>
+                  <a:lnTo>
+                    <a:pt x="2936523" y="139197"/>
+                  </a:lnTo>
+                  <a:lnTo>
+                    <a:pt x="2864901" y="181681"/>
+                  </a:lnTo>
+                  <a:lnTo>
+                    <a:pt x="2793278" y="221903"/>
+                  </a:lnTo>
+                  <a:lnTo>
+                    <a:pt x="2721655" y="259981"/>
+                  </a:lnTo>
+                  <a:lnTo>
+                    <a:pt x="2650033" y="296030"/>
+                  </a:lnTo>
+                  <a:lnTo>
+                    <a:pt x="2578410" y="330158"/>
+                  </a:lnTo>
+                  <a:lnTo>
+                    <a:pt x="2506788" y="362468"/>
+                  </a:lnTo>
+                  <a:lnTo>
+                    <a:pt x="2435165" y="393056"/>
+                  </a:lnTo>
+                  <a:lnTo>
+                    <a:pt x="2363543" y="422014"/>
+                  </a:lnTo>
+                  <a:lnTo>
+                    <a:pt x="2291920" y="449430"/>
+                  </a:lnTo>
+                  <a:lnTo>
+                    <a:pt x="2220298" y="475385"/>
+                  </a:lnTo>
+                  <a:lnTo>
+                    <a:pt x="2148675" y="499956"/>
+                  </a:lnTo>
+                  <a:lnTo>
+                    <a:pt x="2077053" y="523219"/>
+                  </a:lnTo>
+                  <a:lnTo>
+                    <a:pt x="2005430" y="545242"/>
+                  </a:lnTo>
+                  <a:lnTo>
+                    <a:pt x="1933808" y="566091"/>
+                  </a:lnTo>
+                  <a:lnTo>
+                    <a:pt x="1862185" y="585830"/>
+                  </a:lnTo>
+                  <a:lnTo>
+                    <a:pt x="1790563" y="604516"/>
+                  </a:lnTo>
+                  <a:lnTo>
+                    <a:pt x="1718940" y="622208"/>
+                  </a:lnTo>
+                  <a:lnTo>
+                    <a:pt x="1647318" y="638956"/>
+                  </a:lnTo>
+                  <a:lnTo>
+                    <a:pt x="1575695" y="654812"/>
+                  </a:lnTo>
+                  <a:lnTo>
+                    <a:pt x="1504073" y="669823"/>
+                  </a:lnTo>
+                  <a:lnTo>
+                    <a:pt x="1432450" y="684035"/>
+                  </a:lnTo>
+                  <a:lnTo>
+                    <a:pt x="1360827" y="697489"/>
+                  </a:lnTo>
+                  <a:lnTo>
+                    <a:pt x="1289205" y="710226"/>
+                  </a:lnTo>
+                  <a:lnTo>
+                    <a:pt x="1217582" y="722285"/>
+                  </a:lnTo>
+                  <a:lnTo>
+                    <a:pt x="1145960" y="733701"/>
+                  </a:lnTo>
+                  <a:lnTo>
+                    <a:pt x="1074337" y="744509"/>
+                  </a:lnTo>
+                  <a:lnTo>
+                    <a:pt x="1002715" y="754740"/>
+                  </a:lnTo>
+                  <a:lnTo>
+                    <a:pt x="931092" y="764427"/>
+                  </a:lnTo>
+                  <a:lnTo>
+                    <a:pt x="859470" y="773598"/>
+                  </a:lnTo>
+                  <a:lnTo>
+                    <a:pt x="787847" y="782280"/>
+                  </a:lnTo>
+                  <a:lnTo>
+                    <a:pt x="716225" y="790499"/>
+                  </a:lnTo>
+                  <a:lnTo>
+                    <a:pt x="644602" y="798280"/>
+                  </a:lnTo>
+                  <a:lnTo>
+                    <a:pt x="572980" y="805647"/>
+                  </a:lnTo>
+                  <a:lnTo>
+                    <a:pt x="501357" y="812621"/>
+                  </a:lnTo>
+                  <a:lnTo>
+                    <a:pt x="429735" y="819224"/>
+                  </a:lnTo>
+                  <a:lnTo>
+                    <a:pt x="358112" y="825475"/>
+                  </a:lnTo>
+                  <a:lnTo>
+                    <a:pt x="286490" y="831393"/>
+                  </a:lnTo>
+                  <a:lnTo>
+                    <a:pt x="214867" y="836995"/>
+                  </a:lnTo>
+                  <a:lnTo>
+                    <a:pt x="143245" y="842299"/>
+                  </a:lnTo>
+                  <a:lnTo>
+                    <a:pt x="71622" y="847320"/>
+                  </a:lnTo>
+                  <a:lnTo>
+                    <a:pt x="0" y="852074"/>
                   </a:lnTo>
                 </a:path>
               </a:pathLst>
@@ -4230,290 +4236,296 @@
           <p:spPr>
             <a:xfrm>
               <a:off x="1172049" y="1896563"/>
-              <a:ext cx="6567891" cy="3402033"/>
+              <a:ext cx="6716345" cy="3389088"/>
             </a:xfrm>
             <a:custGeom>
               <a:avLst/>
               <a:pathLst>
-                <a:path w="6567891" h="3402033">
+                <a:path w="6716345" h="3389088">
                   <a:moveTo>
-                    <a:pt x="0" y="3402033"/>
+                    <a:pt x="0" y="3389088"/>
                   </a:moveTo>
                   <a:lnTo>
-                    <a:pt x="71622" y="3394603"/>
-                  </a:lnTo>
-                  <a:lnTo>
-                    <a:pt x="143245" y="3386953"/>
-                  </a:lnTo>
-                  <a:lnTo>
-                    <a:pt x="214867" y="3379076"/>
-                  </a:lnTo>
-                  <a:lnTo>
-                    <a:pt x="286490" y="3370965"/>
-                  </a:lnTo>
-                  <a:lnTo>
-                    <a:pt x="358112" y="3362614"/>
-                  </a:lnTo>
-                  <a:lnTo>
-                    <a:pt x="429735" y="3354015"/>
-                  </a:lnTo>
-                  <a:lnTo>
-                    <a:pt x="501357" y="3345161"/>
-                  </a:lnTo>
-                  <a:lnTo>
-                    <a:pt x="572980" y="3336045"/>
-                  </a:lnTo>
-                  <a:lnTo>
-                    <a:pt x="644602" y="3326659"/>
-                  </a:lnTo>
-                  <a:lnTo>
-                    <a:pt x="716225" y="3316994"/>
-                  </a:lnTo>
-                  <a:lnTo>
-                    <a:pt x="787847" y="3307043"/>
-                  </a:lnTo>
-                  <a:lnTo>
-                    <a:pt x="859470" y="3296797"/>
-                  </a:lnTo>
-                  <a:lnTo>
-                    <a:pt x="931092" y="3286247"/>
-                  </a:lnTo>
-                  <a:lnTo>
-                    <a:pt x="1002715" y="3275384"/>
-                  </a:lnTo>
-                  <a:lnTo>
-                    <a:pt x="1074337" y="3264199"/>
-                  </a:lnTo>
-                  <a:lnTo>
-                    <a:pt x="1145960" y="3252682"/>
-                  </a:lnTo>
-                  <a:lnTo>
-                    <a:pt x="1217582" y="3240825"/>
-                  </a:lnTo>
-                  <a:lnTo>
-                    <a:pt x="1289205" y="3228615"/>
-                  </a:lnTo>
-                  <a:lnTo>
-                    <a:pt x="1360827" y="3216044"/>
-                  </a:lnTo>
-                  <a:lnTo>
-                    <a:pt x="1432450" y="3203099"/>
-                  </a:lnTo>
-                  <a:lnTo>
-                    <a:pt x="1504073" y="3189771"/>
-                  </a:lnTo>
-                  <a:lnTo>
-                    <a:pt x="1575695" y="3176048"/>
-                  </a:lnTo>
-                  <a:lnTo>
-                    <a:pt x="1647318" y="3161918"/>
-                  </a:lnTo>
-                  <a:lnTo>
-                    <a:pt x="1718940" y="3147369"/>
-                  </a:lnTo>
-                  <a:lnTo>
-                    <a:pt x="1790563" y="3132389"/>
-                  </a:lnTo>
-                  <a:lnTo>
-                    <a:pt x="1862185" y="3116965"/>
-                  </a:lnTo>
-                  <a:lnTo>
-                    <a:pt x="1933808" y="3101083"/>
-                  </a:lnTo>
-                  <a:lnTo>
-                    <a:pt x="2005430" y="3084731"/>
-                  </a:lnTo>
-                  <a:lnTo>
-                    <a:pt x="2077053" y="3067893"/>
-                  </a:lnTo>
-                  <a:lnTo>
-                    <a:pt x="2148675" y="3050557"/>
-                  </a:lnTo>
-                  <a:lnTo>
-                    <a:pt x="2220298" y="3032706"/>
-                  </a:lnTo>
-                  <a:lnTo>
-                    <a:pt x="2291920" y="3014327"/>
-                  </a:lnTo>
-                  <a:lnTo>
-                    <a:pt x="2363543" y="2995402"/>
-                  </a:lnTo>
-                  <a:lnTo>
-                    <a:pt x="2435165" y="2975916"/>
-                  </a:lnTo>
-                  <a:lnTo>
-                    <a:pt x="2506788" y="2955853"/>
-                  </a:lnTo>
-                  <a:lnTo>
-                    <a:pt x="2578410" y="2935195"/>
-                  </a:lnTo>
-                  <a:lnTo>
-                    <a:pt x="2650033" y="2913924"/>
-                  </a:lnTo>
-                  <a:lnTo>
-                    <a:pt x="2721655" y="2892022"/>
-                  </a:lnTo>
-                  <a:lnTo>
-                    <a:pt x="2793278" y="2869472"/>
-                  </a:lnTo>
-                  <a:lnTo>
-                    <a:pt x="2864901" y="2846252"/>
-                  </a:lnTo>
-                  <a:lnTo>
-                    <a:pt x="2936523" y="2822345"/>
-                  </a:lnTo>
-                  <a:lnTo>
-                    <a:pt x="3008146" y="2797728"/>
-                  </a:lnTo>
-                  <a:lnTo>
-                    <a:pt x="3079768" y="2772382"/>
-                  </a:lnTo>
-                  <a:lnTo>
-                    <a:pt x="3151391" y="2746284"/>
-                  </a:lnTo>
-                  <a:lnTo>
-                    <a:pt x="3223013" y="2719413"/>
-                  </a:lnTo>
-                  <a:lnTo>
-                    <a:pt x="3294636" y="2691745"/>
-                  </a:lnTo>
-                  <a:lnTo>
-                    <a:pt x="3366258" y="2663256"/>
-                  </a:lnTo>
-                  <a:lnTo>
-                    <a:pt x="3437881" y="2633923"/>
-                  </a:lnTo>
-                  <a:lnTo>
-                    <a:pt x="3509503" y="2603720"/>
-                  </a:lnTo>
-                  <a:lnTo>
-                    <a:pt x="3581126" y="2572622"/>
-                  </a:lnTo>
-                  <a:lnTo>
-                    <a:pt x="3652748" y="2540602"/>
-                  </a:lnTo>
-                  <a:lnTo>
-                    <a:pt x="3724371" y="2507632"/>
-                  </a:lnTo>
-                  <a:lnTo>
-                    <a:pt x="3795993" y="2473685"/>
-                  </a:lnTo>
-                  <a:lnTo>
-                    <a:pt x="3867616" y="2438732"/>
-                  </a:lnTo>
-                  <a:lnTo>
-                    <a:pt x="3939238" y="2402742"/>
-                  </a:lnTo>
-                  <a:lnTo>
-                    <a:pt x="4010861" y="2365686"/>
-                  </a:lnTo>
-                  <a:lnTo>
-                    <a:pt x="4082483" y="2327530"/>
-                  </a:lnTo>
-                  <a:lnTo>
-                    <a:pt x="4154106" y="2288244"/>
-                  </a:lnTo>
-                  <a:lnTo>
-                    <a:pt x="4225729" y="2247792"/>
-                  </a:lnTo>
-                  <a:lnTo>
-                    <a:pt x="4297351" y="2206141"/>
-                  </a:lnTo>
-                  <a:lnTo>
-                    <a:pt x="4368974" y="2163256"/>
-                  </a:lnTo>
-                  <a:lnTo>
-                    <a:pt x="4440596" y="2119099"/>
-                  </a:lnTo>
-                  <a:lnTo>
-                    <a:pt x="4512219" y="2073633"/>
-                  </a:lnTo>
-                  <a:lnTo>
-                    <a:pt x="4583841" y="2026819"/>
-                  </a:lnTo>
-                  <a:lnTo>
-                    <a:pt x="4655464" y="1978617"/>
-                  </a:lnTo>
-                  <a:lnTo>
-                    <a:pt x="4727086" y="1928986"/>
-                  </a:lnTo>
-                  <a:lnTo>
-                    <a:pt x="4798709" y="1877883"/>
-                  </a:lnTo>
-                  <a:lnTo>
-                    <a:pt x="4870331" y="1825265"/>
-                  </a:lnTo>
-                  <a:lnTo>
-                    <a:pt x="4941954" y="1771088"/>
-                  </a:lnTo>
-                  <a:lnTo>
-                    <a:pt x="5013576" y="1715304"/>
-                  </a:lnTo>
-                  <a:lnTo>
-                    <a:pt x="5085199" y="1657866"/>
-                  </a:lnTo>
-                  <a:lnTo>
-                    <a:pt x="5156821" y="1598726"/>
-                  </a:lnTo>
-                  <a:lnTo>
-                    <a:pt x="5228444" y="1537832"/>
-                  </a:lnTo>
-                  <a:lnTo>
-                    <a:pt x="5300066" y="1475132"/>
-                  </a:lnTo>
-                  <a:lnTo>
-                    <a:pt x="5371689" y="1410574"/>
-                  </a:lnTo>
-                  <a:lnTo>
-                    <a:pt x="5443311" y="1344102"/>
-                  </a:lnTo>
-                  <a:lnTo>
-                    <a:pt x="5514934" y="1275659"/>
-                  </a:lnTo>
-                  <a:lnTo>
-                    <a:pt x="5586557" y="1205186"/>
-                  </a:lnTo>
-                  <a:lnTo>
-                    <a:pt x="5658179" y="1132625"/>
-                  </a:lnTo>
-                  <a:lnTo>
-                    <a:pt x="5729802" y="1057912"/>
-                  </a:lnTo>
-                  <a:lnTo>
-                    <a:pt x="5801424" y="980984"/>
-                  </a:lnTo>
-                  <a:lnTo>
-                    <a:pt x="5873047" y="901775"/>
-                  </a:lnTo>
-                  <a:lnTo>
-                    <a:pt x="5944669" y="820218"/>
-                  </a:lnTo>
-                  <a:lnTo>
-                    <a:pt x="6016292" y="736243"/>
-                  </a:lnTo>
-                  <a:lnTo>
-                    <a:pt x="6087914" y="649779"/>
-                  </a:lnTo>
-                  <a:lnTo>
-                    <a:pt x="6159537" y="560751"/>
-                  </a:lnTo>
-                  <a:lnTo>
-                    <a:pt x="6231159" y="469083"/>
-                  </a:lnTo>
-                  <a:lnTo>
-                    <a:pt x="6302782" y="374698"/>
-                  </a:lnTo>
-                  <a:lnTo>
-                    <a:pt x="6374404" y="277514"/>
-                  </a:lnTo>
-                  <a:lnTo>
-                    <a:pt x="6446027" y="177449"/>
-                  </a:lnTo>
-                  <a:lnTo>
-                    <a:pt x="6517649" y="74417"/>
-                  </a:lnTo>
-                  <a:lnTo>
-                    <a:pt x="6567891" y="0"/>
+                    <a:pt x="71622" y="3381595"/>
+                  </a:lnTo>
+                  <a:lnTo>
+                    <a:pt x="143245" y="3373889"/>
+                  </a:lnTo>
+                  <a:lnTo>
+                    <a:pt x="214867" y="3365964"/>
+                  </a:lnTo>
+                  <a:lnTo>
+                    <a:pt x="286490" y="3357813"/>
+                  </a:lnTo>
+                  <a:lnTo>
+                    <a:pt x="358112" y="3349431"/>
+                  </a:lnTo>
+                  <a:lnTo>
+                    <a:pt x="429735" y="3340810"/>
+                  </a:lnTo>
+                  <a:lnTo>
+                    <a:pt x="501357" y="3331945"/>
+                  </a:lnTo>
+                  <a:lnTo>
+                    <a:pt x="572980" y="3322827"/>
+                  </a:lnTo>
+                  <a:lnTo>
+                    <a:pt x="644602" y="3313450"/>
+                  </a:lnTo>
+                  <a:lnTo>
+                    <a:pt x="716225" y="3303807"/>
+                  </a:lnTo>
+                  <a:lnTo>
+                    <a:pt x="787847" y="3293889"/>
+                  </a:lnTo>
+                  <a:lnTo>
+                    <a:pt x="859470" y="3283689"/>
+                  </a:lnTo>
+                  <a:lnTo>
+                    <a:pt x="931092" y="3273200"/>
+                  </a:lnTo>
+                  <a:lnTo>
+                    <a:pt x="1002715" y="3262412"/>
+                  </a:lnTo>
+                  <a:lnTo>
+                    <a:pt x="1074337" y="3251317"/>
+                  </a:lnTo>
+                  <a:lnTo>
+                    <a:pt x="1145960" y="3239907"/>
+                  </a:lnTo>
+                  <a:lnTo>
+                    <a:pt x="1217582" y="3228173"/>
+                  </a:lnTo>
+                  <a:lnTo>
+                    <a:pt x="1289205" y="3216105"/>
+                  </a:lnTo>
+                  <a:lnTo>
+                    <a:pt x="1360827" y="3203694"/>
+                  </a:lnTo>
+                  <a:lnTo>
+                    <a:pt x="1432450" y="3190930"/>
+                  </a:lnTo>
+                  <a:lnTo>
+                    <a:pt x="1504073" y="3177803"/>
+                  </a:lnTo>
+                  <a:lnTo>
+                    <a:pt x="1575695" y="3164303"/>
+                  </a:lnTo>
+                  <a:lnTo>
+                    <a:pt x="1647318" y="3150419"/>
+                  </a:lnTo>
+                  <a:lnTo>
+                    <a:pt x="1718940" y="3136140"/>
+                  </a:lnTo>
+                  <a:lnTo>
+                    <a:pt x="1790563" y="3121456"/>
+                  </a:lnTo>
+                  <a:lnTo>
+                    <a:pt x="1862185" y="3106354"/>
+                  </a:lnTo>
+                  <a:lnTo>
+                    <a:pt x="1933808" y="3090822"/>
+                  </a:lnTo>
+                  <a:lnTo>
+                    <a:pt x="2005430" y="3074849"/>
+                  </a:lnTo>
+                  <a:lnTo>
+                    <a:pt x="2077053" y="3058422"/>
+                  </a:lnTo>
+                  <a:lnTo>
+                    <a:pt x="2148675" y="3041528"/>
+                  </a:lnTo>
+                  <a:lnTo>
+                    <a:pt x="2220298" y="3024153"/>
+                  </a:lnTo>
+                  <a:lnTo>
+                    <a:pt x="2291920" y="3006285"/>
+                  </a:lnTo>
+                  <a:lnTo>
+                    <a:pt x="2363543" y="2987909"/>
+                  </a:lnTo>
+                  <a:lnTo>
+                    <a:pt x="2435165" y="2969010"/>
+                  </a:lnTo>
+                  <a:lnTo>
+                    <a:pt x="2506788" y="2949573"/>
+                  </a:lnTo>
+                  <a:lnTo>
+                    <a:pt x="2578410" y="2929585"/>
+                  </a:lnTo>
+                  <a:lnTo>
+                    <a:pt x="2650033" y="2909028"/>
+                  </a:lnTo>
+                  <a:lnTo>
+                    <a:pt x="2721655" y="2887886"/>
+                  </a:lnTo>
+                  <a:lnTo>
+                    <a:pt x="2793278" y="2866143"/>
+                  </a:lnTo>
+                  <a:lnTo>
+                    <a:pt x="2864901" y="2843783"/>
+                  </a:lnTo>
+                  <a:lnTo>
+                    <a:pt x="2936523" y="2820786"/>
+                  </a:lnTo>
+                  <a:lnTo>
+                    <a:pt x="3008146" y="2797136"/>
+                  </a:lnTo>
+                  <a:lnTo>
+                    <a:pt x="3079768" y="2772813"/>
+                  </a:lnTo>
+                  <a:lnTo>
+                    <a:pt x="3151391" y="2747799"/>
+                  </a:lnTo>
+                  <a:lnTo>
+                    <a:pt x="3223013" y="2722073"/>
+                  </a:lnTo>
+                  <a:lnTo>
+                    <a:pt x="3294636" y="2695617"/>
+                  </a:lnTo>
+                  <a:lnTo>
+                    <a:pt x="3366258" y="2668408"/>
+                  </a:lnTo>
+                  <a:lnTo>
+                    <a:pt x="3437881" y="2640425"/>
+                  </a:lnTo>
+                  <a:lnTo>
+                    <a:pt x="3509503" y="2611647"/>
+                  </a:lnTo>
+                  <a:lnTo>
+                    <a:pt x="3581126" y="2582050"/>
+                  </a:lnTo>
+                  <a:lnTo>
+                    <a:pt x="3652748" y="2551613"/>
+                  </a:lnTo>
+                  <a:lnTo>
+                    <a:pt x="3724371" y="2520310"/>
+                  </a:lnTo>
+                  <a:lnTo>
+                    <a:pt x="3795993" y="2488117"/>
+                  </a:lnTo>
+                  <a:lnTo>
+                    <a:pt x="3867616" y="2455008"/>
+                  </a:lnTo>
+                  <a:lnTo>
+                    <a:pt x="3939238" y="2420958"/>
+                  </a:lnTo>
+                  <a:lnTo>
+                    <a:pt x="4010861" y="2385941"/>
+                  </a:lnTo>
+                  <a:lnTo>
+                    <a:pt x="4082483" y="2349927"/>
+                  </a:lnTo>
+                  <a:lnTo>
+                    <a:pt x="4154106" y="2312890"/>
+                  </a:lnTo>
+                  <a:lnTo>
+                    <a:pt x="4225729" y="2274800"/>
+                  </a:lnTo>
+                  <a:lnTo>
+                    <a:pt x="4297351" y="2235627"/>
+                  </a:lnTo>
+                  <a:lnTo>
+                    <a:pt x="4368974" y="2195340"/>
+                  </a:lnTo>
+                  <a:lnTo>
+                    <a:pt x="4440596" y="2153908"/>
+                  </a:lnTo>
+                  <a:lnTo>
+                    <a:pt x="4512219" y="2111298"/>
+                  </a:lnTo>
+                  <a:lnTo>
+                    <a:pt x="4583841" y="2067476"/>
+                  </a:lnTo>
+                  <a:lnTo>
+                    <a:pt x="4655464" y="2022409"/>
+                  </a:lnTo>
+                  <a:lnTo>
+                    <a:pt x="4727086" y="1976060"/>
+                  </a:lnTo>
+                  <a:lnTo>
+                    <a:pt x="4798709" y="1928393"/>
+                  </a:lnTo>
+                  <a:lnTo>
+                    <a:pt x="4870331" y="1879371"/>
+                  </a:lnTo>
+                  <a:lnTo>
+                    <a:pt x="4941954" y="1828956"/>
+                  </a:lnTo>
+                  <a:lnTo>
+                    <a:pt x="5013576" y="1777107"/>
+                  </a:lnTo>
+                  <a:lnTo>
+                    <a:pt x="5085199" y="1723784"/>
+                  </a:lnTo>
+                  <a:lnTo>
+                    <a:pt x="5156821" y="1668945"/>
+                  </a:lnTo>
+                  <a:lnTo>
+                    <a:pt x="5228444" y="1612547"/>
+                  </a:lnTo>
+                  <a:lnTo>
+                    <a:pt x="5300066" y="1554546"/>
+                  </a:lnTo>
+                  <a:lnTo>
+                    <a:pt x="5371689" y="1494895"/>
+                  </a:lnTo>
+                  <a:lnTo>
+                    <a:pt x="5443311" y="1433549"/>
+                  </a:lnTo>
+                  <a:lnTo>
+                    <a:pt x="5514934" y="1370458"/>
+                  </a:lnTo>
+                  <a:lnTo>
+                    <a:pt x="5586557" y="1305574"/>
+                  </a:lnTo>
+                  <a:lnTo>
+                    <a:pt x="5658179" y="1238845"/>
+                  </a:lnTo>
+                  <a:lnTo>
+                    <a:pt x="5729802" y="1170219"/>
+                  </a:lnTo>
+                  <a:lnTo>
+                    <a:pt x="5801424" y="1099642"/>
+                  </a:lnTo>
+                  <a:lnTo>
+                    <a:pt x="5873047" y="1027058"/>
+                  </a:lnTo>
+                  <a:lnTo>
+                    <a:pt x="5944669" y="952411"/>
+                  </a:lnTo>
+                  <a:lnTo>
+                    <a:pt x="6016292" y="875641"/>
+                  </a:lnTo>
+                  <a:lnTo>
+                    <a:pt x="6087914" y="796689"/>
+                  </a:lnTo>
+                  <a:lnTo>
+                    <a:pt x="6159537" y="715492"/>
+                  </a:lnTo>
+                  <a:lnTo>
+                    <a:pt x="6231159" y="631987"/>
+                  </a:lnTo>
+                  <a:lnTo>
+                    <a:pt x="6302782" y="546107"/>
+                  </a:lnTo>
+                  <a:lnTo>
+                    <a:pt x="6374404" y="457786"/>
+                  </a:lnTo>
+                  <a:lnTo>
+                    <a:pt x="6446027" y="366954"/>
+                  </a:lnTo>
+                  <a:lnTo>
+                    <a:pt x="6517649" y="273539"/>
+                  </a:lnTo>
+                  <a:lnTo>
+                    <a:pt x="6589272" y="177468"/>
+                  </a:lnTo>
+                  <a:lnTo>
+                    <a:pt x="6660894" y="78667"/>
+                  </a:lnTo>
+                  <a:lnTo>
+                    <a:pt x="6716345" y="0"/>
                   </a:lnTo>
                 </a:path>
               </a:pathLst>

--- a/docs/plots/carbo/jx_carbo_linsubhr_dosedisc_throm2.pptx
+++ b/docs/plots/carbo/jx_carbo_linsubhr_dosedisc_throm2.pptx
@@ -3132,524 +3132,521 @@
           <p:spPr>
             <a:xfrm>
               <a:off x="1172049" y="1896563"/>
-              <a:ext cx="7090630" cy="3568180"/>
+              <a:ext cx="7090630" cy="3579434"/>
             </a:xfrm>
             <a:custGeom>
               <a:avLst/>
               <a:pathLst>
-                <a:path w="7090630" h="3568180">
+                <a:path w="7090630" h="3579434">
                   <a:moveTo>
-                    <a:pt x="0" y="2830258"/>
+                    <a:pt x="0" y="2794749"/>
                   </a:moveTo>
                   <a:lnTo>
-                    <a:pt x="71622" y="2829177"/>
-                  </a:lnTo>
-                  <a:lnTo>
-                    <a:pt x="143245" y="2828095"/>
-                  </a:lnTo>
-                  <a:lnTo>
-                    <a:pt x="214867" y="2827012"/>
-                  </a:lnTo>
-                  <a:lnTo>
-                    <a:pt x="286490" y="2825927"/>
-                  </a:lnTo>
-                  <a:lnTo>
-                    <a:pt x="358112" y="2824841"/>
-                  </a:lnTo>
-                  <a:lnTo>
-                    <a:pt x="429735" y="2823754"/>
-                  </a:lnTo>
-                  <a:lnTo>
-                    <a:pt x="501357" y="2822665"/>
-                  </a:lnTo>
-                  <a:lnTo>
-                    <a:pt x="572980" y="2821574"/>
-                  </a:lnTo>
-                  <a:lnTo>
-                    <a:pt x="644602" y="2820482"/>
-                  </a:lnTo>
-                  <a:lnTo>
-                    <a:pt x="716225" y="2819389"/>
-                  </a:lnTo>
-                  <a:lnTo>
-                    <a:pt x="787847" y="2818294"/>
-                  </a:lnTo>
-                  <a:lnTo>
-                    <a:pt x="859470" y="2817198"/>
-                  </a:lnTo>
-                  <a:lnTo>
-                    <a:pt x="931092" y="2816101"/>
-                  </a:lnTo>
-                  <a:lnTo>
-                    <a:pt x="1002715" y="2815002"/>
-                  </a:lnTo>
-                  <a:lnTo>
-                    <a:pt x="1074337" y="2813901"/>
-                  </a:lnTo>
-                  <a:lnTo>
-                    <a:pt x="1145960" y="2812799"/>
-                  </a:lnTo>
-                  <a:lnTo>
-                    <a:pt x="1217582" y="2811696"/>
-                  </a:lnTo>
-                  <a:lnTo>
-                    <a:pt x="1289205" y="2810591"/>
-                  </a:lnTo>
-                  <a:lnTo>
-                    <a:pt x="1360827" y="2809485"/>
-                  </a:lnTo>
-                  <a:lnTo>
-                    <a:pt x="1432450" y="2808377"/>
-                  </a:lnTo>
-                  <a:lnTo>
-                    <a:pt x="1504073" y="2807268"/>
-                  </a:lnTo>
-                  <a:lnTo>
-                    <a:pt x="1575695" y="2806157"/>
-                  </a:lnTo>
-                  <a:lnTo>
-                    <a:pt x="1647318" y="2805045"/>
-                  </a:lnTo>
-                  <a:lnTo>
-                    <a:pt x="1718940" y="2803931"/>
-                  </a:lnTo>
-                  <a:lnTo>
-                    <a:pt x="1790563" y="2802816"/>
-                  </a:lnTo>
-                  <a:lnTo>
-                    <a:pt x="1862185" y="2801700"/>
-                  </a:lnTo>
-                  <a:lnTo>
-                    <a:pt x="1933808" y="2800582"/>
-                  </a:lnTo>
-                  <a:lnTo>
-                    <a:pt x="2005430" y="2799462"/>
-                  </a:lnTo>
-                  <a:lnTo>
-                    <a:pt x="2077053" y="2798342"/>
-                  </a:lnTo>
-                  <a:lnTo>
-                    <a:pt x="2148675" y="2797219"/>
-                  </a:lnTo>
-                  <a:lnTo>
-                    <a:pt x="2220298" y="2796095"/>
-                  </a:lnTo>
-                  <a:lnTo>
-                    <a:pt x="2291920" y="2794970"/>
-                  </a:lnTo>
-                  <a:lnTo>
-                    <a:pt x="2363543" y="2793843"/>
-                  </a:lnTo>
-                  <a:lnTo>
-                    <a:pt x="2435165" y="2792715"/>
-                  </a:lnTo>
-                  <a:lnTo>
-                    <a:pt x="2506788" y="2791585"/>
-                  </a:lnTo>
-                  <a:lnTo>
-                    <a:pt x="2578410" y="2790454"/>
-                  </a:lnTo>
-                  <a:lnTo>
-                    <a:pt x="2650033" y="2789321"/>
-                  </a:lnTo>
-                  <a:lnTo>
-                    <a:pt x="2721655" y="2788187"/>
-                  </a:lnTo>
-                  <a:lnTo>
-                    <a:pt x="2793278" y="2787051"/>
-                  </a:lnTo>
-                  <a:lnTo>
-                    <a:pt x="2864901" y="2785914"/>
-                  </a:lnTo>
-                  <a:lnTo>
-                    <a:pt x="2936523" y="2784775"/>
-                  </a:lnTo>
-                  <a:lnTo>
-                    <a:pt x="3008146" y="2783635"/>
-                  </a:lnTo>
-                  <a:lnTo>
-                    <a:pt x="3079768" y="2763025"/>
-                  </a:lnTo>
-                  <a:lnTo>
-                    <a:pt x="3151391" y="2712955"/>
-                  </a:lnTo>
-                  <a:lnTo>
-                    <a:pt x="3223013" y="2660068"/>
-                  </a:lnTo>
-                  <a:lnTo>
-                    <a:pt x="3294636" y="2604204"/>
-                  </a:lnTo>
-                  <a:lnTo>
-                    <a:pt x="3366258" y="2545195"/>
-                  </a:lnTo>
-                  <a:lnTo>
-                    <a:pt x="3437881" y="2482866"/>
-                  </a:lnTo>
-                  <a:lnTo>
-                    <a:pt x="3509503" y="2417028"/>
-                  </a:lnTo>
-                  <a:lnTo>
-                    <a:pt x="3581126" y="2347485"/>
-                  </a:lnTo>
-                  <a:lnTo>
-                    <a:pt x="3652748" y="2274028"/>
-                  </a:lnTo>
-                  <a:lnTo>
-                    <a:pt x="3724371" y="2196437"/>
-                  </a:lnTo>
-                  <a:lnTo>
-                    <a:pt x="3795993" y="2114479"/>
-                  </a:lnTo>
-                  <a:lnTo>
-                    <a:pt x="3867616" y="2027907"/>
-                  </a:lnTo>
-                  <a:lnTo>
-                    <a:pt x="3939238" y="1936464"/>
-                  </a:lnTo>
-                  <a:lnTo>
-                    <a:pt x="4010861" y="1839874"/>
-                  </a:lnTo>
-                  <a:lnTo>
-                    <a:pt x="4082483" y="1737847"/>
-                  </a:lnTo>
-                  <a:lnTo>
-                    <a:pt x="4154106" y="1630079"/>
-                  </a:lnTo>
-                  <a:lnTo>
-                    <a:pt x="4225729" y="1516244"/>
-                  </a:lnTo>
-                  <a:lnTo>
-                    <a:pt x="4297351" y="1396004"/>
-                  </a:lnTo>
-                  <a:lnTo>
-                    <a:pt x="4368974" y="1268995"/>
-                  </a:lnTo>
-                  <a:lnTo>
-                    <a:pt x="4440596" y="1134838"/>
-                  </a:lnTo>
-                  <a:lnTo>
-                    <a:pt x="4512219" y="993131"/>
-                  </a:lnTo>
-                  <a:lnTo>
-                    <a:pt x="4583841" y="843448"/>
-                  </a:lnTo>
-                  <a:lnTo>
-                    <a:pt x="4655464" y="685341"/>
-                  </a:lnTo>
-                  <a:lnTo>
-                    <a:pt x="4727086" y="518335"/>
-                  </a:lnTo>
-                  <a:lnTo>
-                    <a:pt x="4798709" y="341930"/>
-                  </a:lnTo>
-                  <a:lnTo>
-                    <a:pt x="4870331" y="155596"/>
-                  </a:lnTo>
-                  <a:lnTo>
-                    <a:pt x="4926952" y="0"/>
+                    <a:pt x="71622" y="2794474"/>
+                  </a:lnTo>
+                  <a:lnTo>
+                    <a:pt x="143245" y="2794199"/>
+                  </a:lnTo>
+                  <a:lnTo>
+                    <a:pt x="214867" y="2793924"/>
+                  </a:lnTo>
+                  <a:lnTo>
+                    <a:pt x="286490" y="2793649"/>
+                  </a:lnTo>
+                  <a:lnTo>
+                    <a:pt x="358112" y="2793374"/>
+                  </a:lnTo>
+                  <a:lnTo>
+                    <a:pt x="429735" y="2793099"/>
+                  </a:lnTo>
+                  <a:lnTo>
+                    <a:pt x="501357" y="2792823"/>
+                  </a:lnTo>
+                  <a:lnTo>
+                    <a:pt x="572980" y="2792548"/>
+                  </a:lnTo>
+                  <a:lnTo>
+                    <a:pt x="644602" y="2792272"/>
+                  </a:lnTo>
+                  <a:lnTo>
+                    <a:pt x="716225" y="2791997"/>
+                  </a:lnTo>
+                  <a:lnTo>
+                    <a:pt x="787847" y="2791721"/>
+                  </a:lnTo>
+                  <a:lnTo>
+                    <a:pt x="859470" y="2791445"/>
+                  </a:lnTo>
+                  <a:lnTo>
+                    <a:pt x="931092" y="2791169"/>
+                  </a:lnTo>
+                  <a:lnTo>
+                    <a:pt x="1002715" y="2790893"/>
+                  </a:lnTo>
+                  <a:lnTo>
+                    <a:pt x="1074337" y="2790617"/>
+                  </a:lnTo>
+                  <a:lnTo>
+                    <a:pt x="1145960" y="2790341"/>
+                  </a:lnTo>
+                  <a:lnTo>
+                    <a:pt x="1217582" y="2790065"/>
+                  </a:lnTo>
+                  <a:lnTo>
+                    <a:pt x="1289205" y="2789788"/>
+                  </a:lnTo>
+                  <a:lnTo>
+                    <a:pt x="1360827" y="2789512"/>
+                  </a:lnTo>
+                  <a:lnTo>
+                    <a:pt x="1432450" y="2789235"/>
+                  </a:lnTo>
+                  <a:lnTo>
+                    <a:pt x="1504073" y="2788959"/>
+                  </a:lnTo>
+                  <a:lnTo>
+                    <a:pt x="1575695" y="2788682"/>
+                  </a:lnTo>
+                  <a:lnTo>
+                    <a:pt x="1647318" y="2788405"/>
+                  </a:lnTo>
+                  <a:lnTo>
+                    <a:pt x="1718940" y="2788129"/>
+                  </a:lnTo>
+                  <a:lnTo>
+                    <a:pt x="1790563" y="2787852"/>
+                  </a:lnTo>
+                  <a:lnTo>
+                    <a:pt x="1862185" y="2787574"/>
+                  </a:lnTo>
+                  <a:lnTo>
+                    <a:pt x="1933808" y="2787297"/>
+                  </a:lnTo>
+                  <a:lnTo>
+                    <a:pt x="2005430" y="2787020"/>
+                  </a:lnTo>
+                  <a:lnTo>
+                    <a:pt x="2077053" y="2786743"/>
+                  </a:lnTo>
+                  <a:lnTo>
+                    <a:pt x="2148675" y="2786465"/>
+                  </a:lnTo>
+                  <a:lnTo>
+                    <a:pt x="2220298" y="2786188"/>
+                  </a:lnTo>
+                  <a:lnTo>
+                    <a:pt x="2291920" y="2785910"/>
+                  </a:lnTo>
+                  <a:lnTo>
+                    <a:pt x="2363543" y="2785633"/>
+                  </a:lnTo>
+                  <a:lnTo>
+                    <a:pt x="2435165" y="2785355"/>
+                  </a:lnTo>
+                  <a:lnTo>
+                    <a:pt x="2506788" y="2785077"/>
+                  </a:lnTo>
+                  <a:lnTo>
+                    <a:pt x="2578410" y="2784799"/>
+                  </a:lnTo>
+                  <a:lnTo>
+                    <a:pt x="2650033" y="2784521"/>
+                  </a:lnTo>
+                  <a:lnTo>
+                    <a:pt x="2721655" y="2784243"/>
+                  </a:lnTo>
+                  <a:lnTo>
+                    <a:pt x="2793278" y="2783965"/>
+                  </a:lnTo>
+                  <a:lnTo>
+                    <a:pt x="2864901" y="2783686"/>
+                  </a:lnTo>
+                  <a:lnTo>
+                    <a:pt x="2936523" y="2783408"/>
+                  </a:lnTo>
+                  <a:lnTo>
+                    <a:pt x="3008146" y="2783129"/>
+                  </a:lnTo>
+                  <a:lnTo>
+                    <a:pt x="3079768" y="2761787"/>
+                  </a:lnTo>
+                  <a:lnTo>
+                    <a:pt x="3151391" y="2708483"/>
+                  </a:lnTo>
+                  <a:lnTo>
+                    <a:pt x="3223013" y="2651989"/>
+                  </a:lnTo>
+                  <a:lnTo>
+                    <a:pt x="3294636" y="2592115"/>
+                  </a:lnTo>
+                  <a:lnTo>
+                    <a:pt x="3366258" y="2528659"/>
+                  </a:lnTo>
+                  <a:lnTo>
+                    <a:pt x="3437881" y="2461405"/>
+                  </a:lnTo>
+                  <a:lnTo>
+                    <a:pt x="3509503" y="2390127"/>
+                  </a:lnTo>
+                  <a:lnTo>
+                    <a:pt x="3581126" y="2314585"/>
+                  </a:lnTo>
+                  <a:lnTo>
+                    <a:pt x="3652748" y="2234522"/>
+                  </a:lnTo>
+                  <a:lnTo>
+                    <a:pt x="3724371" y="2149669"/>
+                  </a:lnTo>
+                  <a:lnTo>
+                    <a:pt x="3795993" y="2059739"/>
+                  </a:lnTo>
+                  <a:lnTo>
+                    <a:pt x="3867616" y="1964427"/>
+                  </a:lnTo>
+                  <a:lnTo>
+                    <a:pt x="3939238" y="1863413"/>
+                  </a:lnTo>
+                  <a:lnTo>
+                    <a:pt x="4010861" y="1756355"/>
+                  </a:lnTo>
+                  <a:lnTo>
+                    <a:pt x="4082483" y="1642890"/>
+                  </a:lnTo>
+                  <a:lnTo>
+                    <a:pt x="4154106" y="1522637"/>
+                  </a:lnTo>
+                  <a:lnTo>
+                    <a:pt x="4225729" y="1395188"/>
+                  </a:lnTo>
+                  <a:lnTo>
+                    <a:pt x="4297351" y="1260113"/>
+                  </a:lnTo>
+                  <a:lnTo>
+                    <a:pt x="4368974" y="1116957"/>
+                  </a:lnTo>
+                  <a:lnTo>
+                    <a:pt x="4440596" y="965234"/>
+                  </a:lnTo>
+                  <a:lnTo>
+                    <a:pt x="4512219" y="804433"/>
+                  </a:lnTo>
+                  <a:lnTo>
+                    <a:pt x="4583841" y="634011"/>
+                  </a:lnTo>
+                  <a:lnTo>
+                    <a:pt x="4655464" y="453391"/>
+                  </a:lnTo>
+                  <a:lnTo>
+                    <a:pt x="4727086" y="261964"/>
+                  </a:lnTo>
+                  <a:lnTo>
+                    <a:pt x="4798709" y="59083"/>
+                  </a:lnTo>
+                  <a:lnTo>
+                    <a:pt x="4818389" y="0"/>
                   </a:lnTo>
                   <a:lnTo>
                     <a:pt x="7090630" y="0"/>
                   </a:lnTo>
                   <a:lnTo>
-                    <a:pt x="7090630" y="2716106"/>
-                  </a:lnTo>
-                  <a:lnTo>
-                    <a:pt x="7019007" y="2717334"/>
-                  </a:lnTo>
-                  <a:lnTo>
-                    <a:pt x="6947385" y="2718562"/>
-                  </a:lnTo>
-                  <a:lnTo>
-                    <a:pt x="6875762" y="2719787"/>
-                  </a:lnTo>
-                  <a:lnTo>
-                    <a:pt x="6804139" y="2721011"/>
-                  </a:lnTo>
-                  <a:lnTo>
-                    <a:pt x="6732517" y="2722233"/>
-                  </a:lnTo>
-                  <a:lnTo>
-                    <a:pt x="6660894" y="2723454"/>
-                  </a:lnTo>
-                  <a:lnTo>
-                    <a:pt x="6589272" y="2724673"/>
-                  </a:lnTo>
-                  <a:lnTo>
-                    <a:pt x="6517649" y="2725891"/>
-                  </a:lnTo>
-                  <a:lnTo>
-                    <a:pt x="6446027" y="2727107"/>
-                  </a:lnTo>
-                  <a:lnTo>
-                    <a:pt x="6374404" y="2728321"/>
-                  </a:lnTo>
-                  <a:lnTo>
-                    <a:pt x="6302782" y="2729534"/>
-                  </a:lnTo>
-                  <a:lnTo>
-                    <a:pt x="6231159" y="2730745"/>
-                  </a:lnTo>
-                  <a:lnTo>
-                    <a:pt x="6159537" y="2731955"/>
-                  </a:lnTo>
-                  <a:lnTo>
-                    <a:pt x="6087914" y="2733163"/>
-                  </a:lnTo>
-                  <a:lnTo>
-                    <a:pt x="6016292" y="2734369"/>
-                  </a:lnTo>
-                  <a:lnTo>
-                    <a:pt x="5944669" y="2735574"/>
-                  </a:lnTo>
-                  <a:lnTo>
-                    <a:pt x="5873047" y="2736777"/>
-                  </a:lnTo>
-                  <a:lnTo>
-                    <a:pt x="5801424" y="2737979"/>
-                  </a:lnTo>
-                  <a:lnTo>
-                    <a:pt x="5729802" y="2739179"/>
-                  </a:lnTo>
-                  <a:lnTo>
-                    <a:pt x="5658179" y="2740378"/>
-                  </a:lnTo>
-                  <a:lnTo>
-                    <a:pt x="5586557" y="2741575"/>
-                  </a:lnTo>
-                  <a:lnTo>
-                    <a:pt x="5514934" y="2742770"/>
-                  </a:lnTo>
-                  <a:lnTo>
-                    <a:pt x="5443311" y="2743964"/>
-                  </a:lnTo>
-                  <a:lnTo>
-                    <a:pt x="5371689" y="2745156"/>
-                  </a:lnTo>
-                  <a:lnTo>
-                    <a:pt x="5300066" y="2746347"/>
-                  </a:lnTo>
-                  <a:lnTo>
-                    <a:pt x="5228444" y="2747536"/>
-                  </a:lnTo>
-                  <a:lnTo>
-                    <a:pt x="5156821" y="2748723"/>
-                  </a:lnTo>
-                  <a:lnTo>
-                    <a:pt x="5085199" y="2749909"/>
-                  </a:lnTo>
-                  <a:lnTo>
-                    <a:pt x="5013576" y="2751094"/>
-                  </a:lnTo>
-                  <a:lnTo>
-                    <a:pt x="4941954" y="2752277"/>
-                  </a:lnTo>
-                  <a:lnTo>
-                    <a:pt x="4870331" y="2753458"/>
-                  </a:lnTo>
-                  <a:lnTo>
-                    <a:pt x="4798709" y="2754638"/>
-                  </a:lnTo>
-                  <a:lnTo>
-                    <a:pt x="4727086" y="2755816"/>
-                  </a:lnTo>
-                  <a:lnTo>
-                    <a:pt x="4655464" y="2756993"/>
-                  </a:lnTo>
-                  <a:lnTo>
-                    <a:pt x="4583841" y="2758168"/>
-                  </a:lnTo>
-                  <a:lnTo>
-                    <a:pt x="4512219" y="2759342"/>
-                  </a:lnTo>
-                  <a:lnTo>
-                    <a:pt x="4440596" y="2760514"/>
-                  </a:lnTo>
-                  <a:lnTo>
-                    <a:pt x="4368974" y="2761684"/>
-                  </a:lnTo>
-                  <a:lnTo>
-                    <a:pt x="4297351" y="2762853"/>
-                  </a:lnTo>
-                  <a:lnTo>
-                    <a:pt x="4225729" y="2764021"/>
-                  </a:lnTo>
-                  <a:lnTo>
-                    <a:pt x="4154106" y="2765187"/>
-                  </a:lnTo>
-                  <a:lnTo>
-                    <a:pt x="4082483" y="2766351"/>
-                  </a:lnTo>
-                  <a:lnTo>
-                    <a:pt x="4010861" y="2767514"/>
-                  </a:lnTo>
-                  <a:lnTo>
-                    <a:pt x="3939238" y="2768675"/>
-                  </a:lnTo>
-                  <a:lnTo>
-                    <a:pt x="3867616" y="2769835"/>
-                  </a:lnTo>
-                  <a:lnTo>
-                    <a:pt x="3795993" y="2770994"/>
-                  </a:lnTo>
-                  <a:lnTo>
-                    <a:pt x="3724371" y="2772150"/>
-                  </a:lnTo>
-                  <a:lnTo>
-                    <a:pt x="3652748" y="2773306"/>
-                  </a:lnTo>
-                  <a:lnTo>
-                    <a:pt x="3581126" y="2774459"/>
-                  </a:lnTo>
-                  <a:lnTo>
-                    <a:pt x="3509503" y="2775612"/>
-                  </a:lnTo>
-                  <a:lnTo>
-                    <a:pt x="3437881" y="2776762"/>
-                  </a:lnTo>
-                  <a:lnTo>
-                    <a:pt x="3366258" y="2777912"/>
-                  </a:lnTo>
-                  <a:lnTo>
-                    <a:pt x="3294636" y="2779059"/>
-                  </a:lnTo>
-                  <a:lnTo>
-                    <a:pt x="3223013" y="2780205"/>
-                  </a:lnTo>
-                  <a:lnTo>
-                    <a:pt x="3151391" y="2781350"/>
-                  </a:lnTo>
-                  <a:lnTo>
-                    <a:pt x="3079768" y="2782493"/>
-                  </a:lnTo>
-                  <a:lnTo>
-                    <a:pt x="3008146" y="2810427"/>
-                  </a:lnTo>
-                  <a:lnTo>
-                    <a:pt x="2936523" y="2855303"/>
-                  </a:lnTo>
-                  <a:lnTo>
-                    <a:pt x="2864901" y="2897787"/>
-                  </a:lnTo>
-                  <a:lnTo>
-                    <a:pt x="2793278" y="2938009"/>
-                  </a:lnTo>
-                  <a:lnTo>
-                    <a:pt x="2721655" y="2976087"/>
-                  </a:lnTo>
-                  <a:lnTo>
-                    <a:pt x="2650033" y="3012136"/>
-                  </a:lnTo>
-                  <a:lnTo>
-                    <a:pt x="2578410" y="3046264"/>
-                  </a:lnTo>
-                  <a:lnTo>
-                    <a:pt x="2506788" y="3078574"/>
-                  </a:lnTo>
-                  <a:lnTo>
-                    <a:pt x="2435165" y="3109162"/>
-                  </a:lnTo>
-                  <a:lnTo>
-                    <a:pt x="2363543" y="3138120"/>
-                  </a:lnTo>
-                  <a:lnTo>
-                    <a:pt x="2291920" y="3165536"/>
-                  </a:lnTo>
-                  <a:lnTo>
-                    <a:pt x="2220298" y="3191491"/>
-                  </a:lnTo>
-                  <a:lnTo>
-                    <a:pt x="2148675" y="3216062"/>
-                  </a:lnTo>
-                  <a:lnTo>
-                    <a:pt x="2077053" y="3239325"/>
-                  </a:lnTo>
-                  <a:lnTo>
-                    <a:pt x="2005430" y="3261348"/>
-                  </a:lnTo>
-                  <a:lnTo>
-                    <a:pt x="1933808" y="3282197"/>
-                  </a:lnTo>
-                  <a:lnTo>
-                    <a:pt x="1862185" y="3301936"/>
-                  </a:lnTo>
-                  <a:lnTo>
-                    <a:pt x="1790563" y="3320622"/>
-                  </a:lnTo>
-                  <a:lnTo>
-                    <a:pt x="1718940" y="3338314"/>
-                  </a:lnTo>
-                  <a:lnTo>
-                    <a:pt x="1647318" y="3355062"/>
-                  </a:lnTo>
-                  <a:lnTo>
-                    <a:pt x="1575695" y="3370918"/>
-                  </a:lnTo>
-                  <a:lnTo>
-                    <a:pt x="1504073" y="3385929"/>
-                  </a:lnTo>
-                  <a:lnTo>
-                    <a:pt x="1432450" y="3400141"/>
-                  </a:lnTo>
-                  <a:lnTo>
-                    <a:pt x="1360827" y="3413595"/>
-                  </a:lnTo>
-                  <a:lnTo>
-                    <a:pt x="1289205" y="3426332"/>
-                  </a:lnTo>
-                  <a:lnTo>
-                    <a:pt x="1217582" y="3438391"/>
-                  </a:lnTo>
-                  <a:lnTo>
-                    <a:pt x="1145960" y="3449807"/>
-                  </a:lnTo>
-                  <a:lnTo>
-                    <a:pt x="1074337" y="3460615"/>
-                  </a:lnTo>
-                  <a:lnTo>
-                    <a:pt x="1002715" y="3470846"/>
-                  </a:lnTo>
-                  <a:lnTo>
-                    <a:pt x="931092" y="3480533"/>
-                  </a:lnTo>
-                  <a:lnTo>
-                    <a:pt x="859470" y="3489704"/>
-                  </a:lnTo>
-                  <a:lnTo>
-                    <a:pt x="787847" y="3498386"/>
-                  </a:lnTo>
-                  <a:lnTo>
-                    <a:pt x="716225" y="3506605"/>
-                  </a:lnTo>
-                  <a:lnTo>
-                    <a:pt x="644602" y="3514386"/>
-                  </a:lnTo>
-                  <a:lnTo>
-                    <a:pt x="572980" y="3521753"/>
-                  </a:lnTo>
-                  <a:lnTo>
-                    <a:pt x="501357" y="3528727"/>
-                  </a:lnTo>
-                  <a:lnTo>
-                    <a:pt x="429735" y="3535330"/>
-                  </a:lnTo>
-                  <a:lnTo>
-                    <a:pt x="358112" y="3541581"/>
-                  </a:lnTo>
-                  <a:lnTo>
-                    <a:pt x="286490" y="3547499"/>
-                  </a:lnTo>
-                  <a:lnTo>
-                    <a:pt x="214867" y="3553101"/>
-                  </a:lnTo>
-                  <a:lnTo>
-                    <a:pt x="143245" y="3558405"/>
-                  </a:lnTo>
-                  <a:lnTo>
-                    <a:pt x="71622" y="3563426"/>
-                  </a:lnTo>
-                  <a:lnTo>
-                    <a:pt x="0" y="3568180"/>
+                    <a:pt x="7090630" y="2767108"/>
+                  </a:lnTo>
+                  <a:lnTo>
+                    <a:pt x="7019007" y="2767391"/>
+                  </a:lnTo>
+                  <a:lnTo>
+                    <a:pt x="6947385" y="2767675"/>
+                  </a:lnTo>
+                  <a:lnTo>
+                    <a:pt x="6875762" y="2767958"/>
+                  </a:lnTo>
+                  <a:lnTo>
+                    <a:pt x="6804139" y="2768241"/>
+                  </a:lnTo>
+                  <a:lnTo>
+                    <a:pt x="6732517" y="2768525"/>
+                  </a:lnTo>
+                  <a:lnTo>
+                    <a:pt x="6660894" y="2768808"/>
+                  </a:lnTo>
+                  <a:lnTo>
+                    <a:pt x="6589272" y="2769091"/>
+                  </a:lnTo>
+                  <a:lnTo>
+                    <a:pt x="6517649" y="2769374"/>
+                  </a:lnTo>
+                  <a:lnTo>
+                    <a:pt x="6446027" y="2769657"/>
+                  </a:lnTo>
+                  <a:lnTo>
+                    <a:pt x="6374404" y="2769940"/>
+                  </a:lnTo>
+                  <a:lnTo>
+                    <a:pt x="6302782" y="2770222"/>
+                  </a:lnTo>
+                  <a:lnTo>
+                    <a:pt x="6231159" y="2770505"/>
+                  </a:lnTo>
+                  <a:lnTo>
+                    <a:pt x="6159537" y="2770787"/>
+                  </a:lnTo>
+                  <a:lnTo>
+                    <a:pt x="6087914" y="2771070"/>
+                  </a:lnTo>
+                  <a:lnTo>
+                    <a:pt x="6016292" y="2771352"/>
+                  </a:lnTo>
+                  <a:lnTo>
+                    <a:pt x="5944669" y="2771634"/>
+                  </a:lnTo>
+                  <a:lnTo>
+                    <a:pt x="5873047" y="2771917"/>
+                  </a:lnTo>
+                  <a:lnTo>
+                    <a:pt x="5801424" y="2772199"/>
+                  </a:lnTo>
+                  <a:lnTo>
+                    <a:pt x="5729802" y="2772481"/>
+                  </a:lnTo>
+                  <a:lnTo>
+                    <a:pt x="5658179" y="2772763"/>
+                  </a:lnTo>
+                  <a:lnTo>
+                    <a:pt x="5586557" y="2773044"/>
+                  </a:lnTo>
+                  <a:lnTo>
+                    <a:pt x="5514934" y="2773326"/>
+                  </a:lnTo>
+                  <a:lnTo>
+                    <a:pt x="5443311" y="2773608"/>
+                  </a:lnTo>
+                  <a:lnTo>
+                    <a:pt x="5371689" y="2773889"/>
+                  </a:lnTo>
+                  <a:lnTo>
+                    <a:pt x="5300066" y="2774171"/>
+                  </a:lnTo>
+                  <a:lnTo>
+                    <a:pt x="5228444" y="2774452"/>
+                  </a:lnTo>
+                  <a:lnTo>
+                    <a:pt x="5156821" y="2774733"/>
+                  </a:lnTo>
+                  <a:lnTo>
+                    <a:pt x="5085199" y="2775014"/>
+                  </a:lnTo>
+                  <a:lnTo>
+                    <a:pt x="5013576" y="2775296"/>
+                  </a:lnTo>
+                  <a:lnTo>
+                    <a:pt x="4941954" y="2775577"/>
+                  </a:lnTo>
+                  <a:lnTo>
+                    <a:pt x="4870331" y="2775857"/>
+                  </a:lnTo>
+                  <a:lnTo>
+                    <a:pt x="4798709" y="2776138"/>
+                  </a:lnTo>
+                  <a:lnTo>
+                    <a:pt x="4727086" y="2776419"/>
+                  </a:lnTo>
+                  <a:lnTo>
+                    <a:pt x="4655464" y="2776700"/>
+                  </a:lnTo>
+                  <a:lnTo>
+                    <a:pt x="4583841" y="2776980"/>
+                  </a:lnTo>
+                  <a:lnTo>
+                    <a:pt x="4512219" y="2777261"/>
+                  </a:lnTo>
+                  <a:lnTo>
+                    <a:pt x="4440596" y="2777541"/>
+                  </a:lnTo>
+                  <a:lnTo>
+                    <a:pt x="4368974" y="2777821"/>
+                  </a:lnTo>
+                  <a:lnTo>
+                    <a:pt x="4297351" y="2778101"/>
+                  </a:lnTo>
+                  <a:lnTo>
+                    <a:pt x="4225729" y="2778382"/>
+                  </a:lnTo>
+                  <a:lnTo>
+                    <a:pt x="4154106" y="2778662"/>
+                  </a:lnTo>
+                  <a:lnTo>
+                    <a:pt x="4082483" y="2778941"/>
+                  </a:lnTo>
+                  <a:lnTo>
+                    <a:pt x="4010861" y="2779221"/>
+                  </a:lnTo>
+                  <a:lnTo>
+                    <a:pt x="3939238" y="2779501"/>
+                  </a:lnTo>
+                  <a:lnTo>
+                    <a:pt x="3867616" y="2779781"/>
+                  </a:lnTo>
+                  <a:lnTo>
+                    <a:pt x="3795993" y="2780060"/>
+                  </a:lnTo>
+                  <a:lnTo>
+                    <a:pt x="3724371" y="2780340"/>
+                  </a:lnTo>
+                  <a:lnTo>
+                    <a:pt x="3652748" y="2780619"/>
+                  </a:lnTo>
+                  <a:lnTo>
+                    <a:pt x="3581126" y="2780898"/>
+                  </a:lnTo>
+                  <a:lnTo>
+                    <a:pt x="3509503" y="2781178"/>
+                  </a:lnTo>
+                  <a:lnTo>
+                    <a:pt x="3437881" y="2781457"/>
+                  </a:lnTo>
+                  <a:lnTo>
+                    <a:pt x="3366258" y="2781736"/>
+                  </a:lnTo>
+                  <a:lnTo>
+                    <a:pt x="3294636" y="2782015"/>
+                  </a:lnTo>
+                  <a:lnTo>
+                    <a:pt x="3223013" y="2782293"/>
+                  </a:lnTo>
+                  <a:lnTo>
+                    <a:pt x="3151391" y="2782572"/>
+                  </a:lnTo>
+                  <a:lnTo>
+                    <a:pt x="3079768" y="2782851"/>
+                  </a:lnTo>
+                  <a:lnTo>
+                    <a:pt x="3008146" y="2812082"/>
+                  </a:lnTo>
+                  <a:lnTo>
+                    <a:pt x="2936523" y="2859538"/>
+                  </a:lnTo>
+                  <a:lnTo>
+                    <a:pt x="2864901" y="2904314"/>
+                  </a:lnTo>
+                  <a:lnTo>
+                    <a:pt x="2793278" y="2946562"/>
+                  </a:lnTo>
+                  <a:lnTo>
+                    <a:pt x="2721655" y="2986425"/>
+                  </a:lnTo>
+                  <a:lnTo>
+                    <a:pt x="2650033" y="3024038"/>
+                  </a:lnTo>
+                  <a:lnTo>
+                    <a:pt x="2578410" y="3059527"/>
+                  </a:lnTo>
+                  <a:lnTo>
+                    <a:pt x="2506788" y="3093012"/>
+                  </a:lnTo>
+                  <a:lnTo>
+                    <a:pt x="2435165" y="3124607"/>
+                  </a:lnTo>
+                  <a:lnTo>
+                    <a:pt x="2363543" y="3154419"/>
+                  </a:lnTo>
+                  <a:lnTo>
+                    <a:pt x="2291920" y="3182547"/>
+                  </a:lnTo>
+                  <a:lnTo>
+                    <a:pt x="2220298" y="3209087"/>
+                  </a:lnTo>
+                  <a:lnTo>
+                    <a:pt x="2148675" y="3234129"/>
+                  </a:lnTo>
+                  <a:lnTo>
+                    <a:pt x="2077053" y="3257757"/>
+                  </a:lnTo>
+                  <a:lnTo>
+                    <a:pt x="2005430" y="3280051"/>
+                  </a:lnTo>
+                  <a:lnTo>
+                    <a:pt x="1933808" y="3301086"/>
+                  </a:lnTo>
+                  <a:lnTo>
+                    <a:pt x="1862185" y="3320934"/>
+                  </a:lnTo>
+                  <a:lnTo>
+                    <a:pt x="1790563" y="3339661"/>
+                  </a:lnTo>
+                  <a:lnTo>
+                    <a:pt x="1718940" y="3357331"/>
+                  </a:lnTo>
+                  <a:lnTo>
+                    <a:pt x="1647318" y="3374004"/>
+                  </a:lnTo>
+                  <a:lnTo>
+                    <a:pt x="1575695" y="3389735"/>
+                  </a:lnTo>
+                  <a:lnTo>
+                    <a:pt x="1504073" y="3404578"/>
+                  </a:lnTo>
+                  <a:lnTo>
+                    <a:pt x="1432450" y="3418583"/>
+                  </a:lnTo>
+                  <a:lnTo>
+                    <a:pt x="1360827" y="3431797"/>
+                  </a:lnTo>
+                  <a:lnTo>
+                    <a:pt x="1289205" y="3444265"/>
+                  </a:lnTo>
+                  <a:lnTo>
+                    <a:pt x="1217582" y="3456030"/>
+                  </a:lnTo>
+                  <a:lnTo>
+                    <a:pt x="1145960" y="3467130"/>
+                  </a:lnTo>
+                  <a:lnTo>
+                    <a:pt x="1074337" y="3477603"/>
+                  </a:lnTo>
+                  <a:lnTo>
+                    <a:pt x="1002715" y="3487486"/>
+                  </a:lnTo>
+                  <a:lnTo>
+                    <a:pt x="931092" y="3496810"/>
+                  </a:lnTo>
+                  <a:lnTo>
+                    <a:pt x="859470" y="3505608"/>
+                  </a:lnTo>
+                  <a:lnTo>
+                    <a:pt x="787847" y="3513909"/>
+                  </a:lnTo>
+                  <a:lnTo>
+                    <a:pt x="716225" y="3521741"/>
+                  </a:lnTo>
+                  <a:lnTo>
+                    <a:pt x="644602" y="3529132"/>
+                  </a:lnTo>
+                  <a:lnTo>
+                    <a:pt x="572980" y="3536105"/>
+                  </a:lnTo>
+                  <a:lnTo>
+                    <a:pt x="501357" y="3542684"/>
+                  </a:lnTo>
+                  <a:lnTo>
+                    <a:pt x="429735" y="3548892"/>
+                  </a:lnTo>
+                  <a:lnTo>
+                    <a:pt x="358112" y="3554750"/>
+                  </a:lnTo>
+                  <a:lnTo>
+                    <a:pt x="286490" y="3560276"/>
+                  </a:lnTo>
+                  <a:lnTo>
+                    <a:pt x="214867" y="3565491"/>
+                  </a:lnTo>
+                  <a:lnTo>
+                    <a:pt x="143245" y="3570411"/>
+                  </a:lnTo>
+                  <a:lnTo>
+                    <a:pt x="71622" y="3575054"/>
+                  </a:lnTo>
+                  <a:lnTo>
+                    <a:pt x="0" y="3579434"/>
                   </a:lnTo>
                   <a:close/>
                 </a:path>
@@ -3676,221 +3673,218 @@
           <p:spPr>
             <a:xfrm>
               <a:off x="1172049" y="1896563"/>
-              <a:ext cx="4926952" cy="2830258"/>
+              <a:ext cx="4818389" cy="2794749"/>
             </a:xfrm>
             <a:custGeom>
               <a:avLst/>
               <a:pathLst>
-                <a:path w="4926952" h="2830258">
+                <a:path w="4818389" h="2794749">
                   <a:moveTo>
-                    <a:pt x="0" y="2830258"/>
+                    <a:pt x="0" y="2794749"/>
                   </a:moveTo>
                   <a:lnTo>
-                    <a:pt x="71622" y="2829177"/>
-                  </a:lnTo>
-                  <a:lnTo>
-                    <a:pt x="143245" y="2828095"/>
-                  </a:lnTo>
-                  <a:lnTo>
-                    <a:pt x="214867" y="2827012"/>
-                  </a:lnTo>
-                  <a:lnTo>
-                    <a:pt x="286490" y="2825927"/>
-                  </a:lnTo>
-                  <a:lnTo>
-                    <a:pt x="358112" y="2824841"/>
-                  </a:lnTo>
-                  <a:lnTo>
-                    <a:pt x="429735" y="2823754"/>
-                  </a:lnTo>
-                  <a:lnTo>
-                    <a:pt x="501357" y="2822665"/>
-                  </a:lnTo>
-                  <a:lnTo>
-                    <a:pt x="572980" y="2821574"/>
-                  </a:lnTo>
-                  <a:lnTo>
-                    <a:pt x="644602" y="2820482"/>
-                  </a:lnTo>
-                  <a:lnTo>
-                    <a:pt x="716225" y="2819389"/>
-                  </a:lnTo>
-                  <a:lnTo>
-                    <a:pt x="787847" y="2818294"/>
-                  </a:lnTo>
-                  <a:lnTo>
-                    <a:pt x="859470" y="2817198"/>
-                  </a:lnTo>
-                  <a:lnTo>
-                    <a:pt x="931092" y="2816101"/>
-                  </a:lnTo>
-                  <a:lnTo>
-                    <a:pt x="1002715" y="2815002"/>
-                  </a:lnTo>
-                  <a:lnTo>
-                    <a:pt x="1074337" y="2813901"/>
-                  </a:lnTo>
-                  <a:lnTo>
-                    <a:pt x="1145960" y="2812799"/>
-                  </a:lnTo>
-                  <a:lnTo>
-                    <a:pt x="1217582" y="2811696"/>
-                  </a:lnTo>
-                  <a:lnTo>
-                    <a:pt x="1289205" y="2810591"/>
-                  </a:lnTo>
-                  <a:lnTo>
-                    <a:pt x="1360827" y="2809485"/>
-                  </a:lnTo>
-                  <a:lnTo>
-                    <a:pt x="1432450" y="2808377"/>
-                  </a:lnTo>
-                  <a:lnTo>
-                    <a:pt x="1504073" y="2807268"/>
-                  </a:lnTo>
-                  <a:lnTo>
-                    <a:pt x="1575695" y="2806157"/>
-                  </a:lnTo>
-                  <a:lnTo>
-                    <a:pt x="1647318" y="2805045"/>
-                  </a:lnTo>
-                  <a:lnTo>
-                    <a:pt x="1718940" y="2803931"/>
-                  </a:lnTo>
-                  <a:lnTo>
-                    <a:pt x="1790563" y="2802816"/>
-                  </a:lnTo>
-                  <a:lnTo>
-                    <a:pt x="1862185" y="2801700"/>
-                  </a:lnTo>
-                  <a:lnTo>
-                    <a:pt x="1933808" y="2800582"/>
-                  </a:lnTo>
-                  <a:lnTo>
-                    <a:pt x="2005430" y="2799462"/>
-                  </a:lnTo>
-                  <a:lnTo>
-                    <a:pt x="2077053" y="2798342"/>
-                  </a:lnTo>
-                  <a:lnTo>
-                    <a:pt x="2148675" y="2797219"/>
-                  </a:lnTo>
-                  <a:lnTo>
-                    <a:pt x="2220298" y="2796095"/>
-                  </a:lnTo>
-                  <a:lnTo>
-                    <a:pt x="2291920" y="2794970"/>
-                  </a:lnTo>
-                  <a:lnTo>
-                    <a:pt x="2363543" y="2793843"/>
-                  </a:lnTo>
-                  <a:lnTo>
-                    <a:pt x="2435165" y="2792715"/>
-                  </a:lnTo>
-                  <a:lnTo>
-                    <a:pt x="2506788" y="2791585"/>
-                  </a:lnTo>
-                  <a:lnTo>
-                    <a:pt x="2578410" y="2790454"/>
-                  </a:lnTo>
-                  <a:lnTo>
-                    <a:pt x="2650033" y="2789321"/>
-                  </a:lnTo>
-                  <a:lnTo>
-                    <a:pt x="2721655" y="2788187"/>
-                  </a:lnTo>
-                  <a:lnTo>
-                    <a:pt x="2793278" y="2787051"/>
-                  </a:lnTo>
-                  <a:lnTo>
-                    <a:pt x="2864901" y="2785914"/>
-                  </a:lnTo>
-                  <a:lnTo>
-                    <a:pt x="2936523" y="2784775"/>
-                  </a:lnTo>
-                  <a:lnTo>
-                    <a:pt x="3008146" y="2783635"/>
-                  </a:lnTo>
-                  <a:lnTo>
-                    <a:pt x="3079768" y="2763025"/>
-                  </a:lnTo>
-                  <a:lnTo>
-                    <a:pt x="3151391" y="2712955"/>
-                  </a:lnTo>
-                  <a:lnTo>
-                    <a:pt x="3223013" y="2660068"/>
-                  </a:lnTo>
-                  <a:lnTo>
-                    <a:pt x="3294636" y="2604204"/>
-                  </a:lnTo>
-                  <a:lnTo>
-                    <a:pt x="3366258" y="2545195"/>
-                  </a:lnTo>
-                  <a:lnTo>
-                    <a:pt x="3437881" y="2482866"/>
-                  </a:lnTo>
-                  <a:lnTo>
-                    <a:pt x="3509503" y="2417028"/>
-                  </a:lnTo>
-                  <a:lnTo>
-                    <a:pt x="3581126" y="2347485"/>
-                  </a:lnTo>
-                  <a:lnTo>
-                    <a:pt x="3652748" y="2274028"/>
-                  </a:lnTo>
-                  <a:lnTo>
-                    <a:pt x="3724371" y="2196437"/>
-                  </a:lnTo>
-                  <a:lnTo>
-                    <a:pt x="3795993" y="2114479"/>
-                  </a:lnTo>
-                  <a:lnTo>
-                    <a:pt x="3867616" y="2027907"/>
-                  </a:lnTo>
-                  <a:lnTo>
-                    <a:pt x="3939238" y="1936464"/>
-                  </a:lnTo>
-                  <a:lnTo>
-                    <a:pt x="4010861" y="1839874"/>
-                  </a:lnTo>
-                  <a:lnTo>
-                    <a:pt x="4082483" y="1737847"/>
-                  </a:lnTo>
-                  <a:lnTo>
-                    <a:pt x="4154106" y="1630079"/>
-                  </a:lnTo>
-                  <a:lnTo>
-                    <a:pt x="4225729" y="1516244"/>
-                  </a:lnTo>
-                  <a:lnTo>
-                    <a:pt x="4297351" y="1396004"/>
-                  </a:lnTo>
-                  <a:lnTo>
-                    <a:pt x="4368974" y="1268995"/>
-                  </a:lnTo>
-                  <a:lnTo>
-                    <a:pt x="4440596" y="1134838"/>
-                  </a:lnTo>
-                  <a:lnTo>
-                    <a:pt x="4512219" y="993131"/>
-                  </a:lnTo>
-                  <a:lnTo>
-                    <a:pt x="4583841" y="843448"/>
-                  </a:lnTo>
-                  <a:lnTo>
-                    <a:pt x="4655464" y="685341"/>
-                  </a:lnTo>
-                  <a:lnTo>
-                    <a:pt x="4727086" y="518335"/>
-                  </a:lnTo>
-                  <a:lnTo>
-                    <a:pt x="4798709" y="341930"/>
-                  </a:lnTo>
-                  <a:lnTo>
-                    <a:pt x="4870331" y="155596"/>
-                  </a:lnTo>
-                  <a:lnTo>
-                    <a:pt x="4926952" y="0"/>
+                    <a:pt x="71622" y="2794474"/>
+                  </a:lnTo>
+                  <a:lnTo>
+                    <a:pt x="143245" y="2794199"/>
+                  </a:lnTo>
+                  <a:lnTo>
+                    <a:pt x="214867" y="2793924"/>
+                  </a:lnTo>
+                  <a:lnTo>
+                    <a:pt x="286490" y="2793649"/>
+                  </a:lnTo>
+                  <a:lnTo>
+                    <a:pt x="358112" y="2793374"/>
+                  </a:lnTo>
+                  <a:lnTo>
+                    <a:pt x="429735" y="2793099"/>
+                  </a:lnTo>
+                  <a:lnTo>
+                    <a:pt x="501357" y="2792823"/>
+                  </a:lnTo>
+                  <a:lnTo>
+                    <a:pt x="572980" y="2792548"/>
+                  </a:lnTo>
+                  <a:lnTo>
+                    <a:pt x="644602" y="2792272"/>
+                  </a:lnTo>
+                  <a:lnTo>
+                    <a:pt x="716225" y="2791997"/>
+                  </a:lnTo>
+                  <a:lnTo>
+                    <a:pt x="787847" y="2791721"/>
+                  </a:lnTo>
+                  <a:lnTo>
+                    <a:pt x="859470" y="2791445"/>
+                  </a:lnTo>
+                  <a:lnTo>
+                    <a:pt x="931092" y="2791169"/>
+                  </a:lnTo>
+                  <a:lnTo>
+                    <a:pt x="1002715" y="2790893"/>
+                  </a:lnTo>
+                  <a:lnTo>
+                    <a:pt x="1074337" y="2790617"/>
+                  </a:lnTo>
+                  <a:lnTo>
+                    <a:pt x="1145960" y="2790341"/>
+                  </a:lnTo>
+                  <a:lnTo>
+                    <a:pt x="1217582" y="2790065"/>
+                  </a:lnTo>
+                  <a:lnTo>
+                    <a:pt x="1289205" y="2789788"/>
+                  </a:lnTo>
+                  <a:lnTo>
+                    <a:pt x="1360827" y="2789512"/>
+                  </a:lnTo>
+                  <a:lnTo>
+                    <a:pt x="1432450" y="2789235"/>
+                  </a:lnTo>
+                  <a:lnTo>
+                    <a:pt x="1504073" y="2788959"/>
+                  </a:lnTo>
+                  <a:lnTo>
+                    <a:pt x="1575695" y="2788682"/>
+                  </a:lnTo>
+                  <a:lnTo>
+                    <a:pt x="1647318" y="2788405"/>
+                  </a:lnTo>
+                  <a:lnTo>
+                    <a:pt x="1718940" y="2788129"/>
+                  </a:lnTo>
+                  <a:lnTo>
+                    <a:pt x="1790563" y="2787852"/>
+                  </a:lnTo>
+                  <a:lnTo>
+                    <a:pt x="1862185" y="2787574"/>
+                  </a:lnTo>
+                  <a:lnTo>
+                    <a:pt x="1933808" y="2787297"/>
+                  </a:lnTo>
+                  <a:lnTo>
+                    <a:pt x="2005430" y="2787020"/>
+                  </a:lnTo>
+                  <a:lnTo>
+                    <a:pt x="2077053" y="2786743"/>
+                  </a:lnTo>
+                  <a:lnTo>
+                    <a:pt x="2148675" y="2786465"/>
+                  </a:lnTo>
+                  <a:lnTo>
+                    <a:pt x="2220298" y="2786188"/>
+                  </a:lnTo>
+                  <a:lnTo>
+                    <a:pt x="2291920" y="2785910"/>
+                  </a:lnTo>
+                  <a:lnTo>
+                    <a:pt x="2363543" y="2785633"/>
+                  </a:lnTo>
+                  <a:lnTo>
+                    <a:pt x="2435165" y="2785355"/>
+                  </a:lnTo>
+                  <a:lnTo>
+                    <a:pt x="2506788" y="2785077"/>
+                  </a:lnTo>
+                  <a:lnTo>
+                    <a:pt x="2578410" y="2784799"/>
+                  </a:lnTo>
+                  <a:lnTo>
+                    <a:pt x="2650033" y="2784521"/>
+                  </a:lnTo>
+                  <a:lnTo>
+                    <a:pt x="2721655" y="2784243"/>
+                  </a:lnTo>
+                  <a:lnTo>
+                    <a:pt x="2793278" y="2783965"/>
+                  </a:lnTo>
+                  <a:lnTo>
+                    <a:pt x="2864901" y="2783686"/>
+                  </a:lnTo>
+                  <a:lnTo>
+                    <a:pt x="2936523" y="2783408"/>
+                  </a:lnTo>
+                  <a:lnTo>
+                    <a:pt x="3008146" y="2783129"/>
+                  </a:lnTo>
+                  <a:lnTo>
+                    <a:pt x="3079768" y="2761787"/>
+                  </a:lnTo>
+                  <a:lnTo>
+                    <a:pt x="3151391" y="2708483"/>
+                  </a:lnTo>
+                  <a:lnTo>
+                    <a:pt x="3223013" y="2651989"/>
+                  </a:lnTo>
+                  <a:lnTo>
+                    <a:pt x="3294636" y="2592115"/>
+                  </a:lnTo>
+                  <a:lnTo>
+                    <a:pt x="3366258" y="2528659"/>
+                  </a:lnTo>
+                  <a:lnTo>
+                    <a:pt x="3437881" y="2461405"/>
+                  </a:lnTo>
+                  <a:lnTo>
+                    <a:pt x="3509503" y="2390127"/>
+                  </a:lnTo>
+                  <a:lnTo>
+                    <a:pt x="3581126" y="2314585"/>
+                  </a:lnTo>
+                  <a:lnTo>
+                    <a:pt x="3652748" y="2234522"/>
+                  </a:lnTo>
+                  <a:lnTo>
+                    <a:pt x="3724371" y="2149669"/>
+                  </a:lnTo>
+                  <a:lnTo>
+                    <a:pt x="3795993" y="2059739"/>
+                  </a:lnTo>
+                  <a:lnTo>
+                    <a:pt x="3867616" y="1964427"/>
+                  </a:lnTo>
+                  <a:lnTo>
+                    <a:pt x="3939238" y="1863413"/>
+                  </a:lnTo>
+                  <a:lnTo>
+                    <a:pt x="4010861" y="1756355"/>
+                  </a:lnTo>
+                  <a:lnTo>
+                    <a:pt x="4082483" y="1642890"/>
+                  </a:lnTo>
+                  <a:lnTo>
+                    <a:pt x="4154106" y="1522637"/>
+                  </a:lnTo>
+                  <a:lnTo>
+                    <a:pt x="4225729" y="1395188"/>
+                  </a:lnTo>
+                  <a:lnTo>
+                    <a:pt x="4297351" y="1260113"/>
+                  </a:lnTo>
+                  <a:lnTo>
+                    <a:pt x="4368974" y="1116957"/>
+                  </a:lnTo>
+                  <a:lnTo>
+                    <a:pt x="4440596" y="965234"/>
+                  </a:lnTo>
+                  <a:lnTo>
+                    <a:pt x="4512219" y="804433"/>
+                  </a:lnTo>
+                  <a:lnTo>
+                    <a:pt x="4583841" y="634011"/>
+                  </a:lnTo>
+                  <a:lnTo>
+                    <a:pt x="4655464" y="453391"/>
+                  </a:lnTo>
+                  <a:lnTo>
+                    <a:pt x="4727086" y="261964"/>
+                  </a:lnTo>
+                  <a:lnTo>
+                    <a:pt x="4798709" y="59083"/>
+                  </a:lnTo>
+                  <a:lnTo>
+                    <a:pt x="4818389" y="0"/>
                   </a:lnTo>
                 </a:path>
               </a:pathLst>
@@ -3910,312 +3904,312 @@
           </p:nvSpPr>
           <p:spPr>
             <a:xfrm>
-              <a:off x="1172049" y="4612669"/>
-              <a:ext cx="7090630" cy="852074"/>
+              <a:off x="1172049" y="4663671"/>
+              <a:ext cx="7090630" cy="812326"/>
             </a:xfrm>
             <a:custGeom>
               <a:avLst/>
               <a:pathLst>
-                <a:path w="7090630" h="852074">
+                <a:path w="7090630" h="812326">
                   <a:moveTo>
                     <a:pt x="7090630" y="0"/>
                   </a:moveTo>
                   <a:lnTo>
-                    <a:pt x="7019007" y="1228"/>
-                  </a:lnTo>
-                  <a:lnTo>
-                    <a:pt x="6947385" y="2455"/>
-                  </a:lnTo>
-                  <a:lnTo>
-                    <a:pt x="6875762" y="3681"/>
-                  </a:lnTo>
-                  <a:lnTo>
-                    <a:pt x="6804139" y="4905"/>
-                  </a:lnTo>
-                  <a:lnTo>
-                    <a:pt x="6732517" y="6127"/>
-                  </a:lnTo>
-                  <a:lnTo>
-                    <a:pt x="6660894" y="7348"/>
-                  </a:lnTo>
-                  <a:lnTo>
-                    <a:pt x="6589272" y="8567"/>
-                  </a:lnTo>
-                  <a:lnTo>
-                    <a:pt x="6517649" y="9785"/>
-                  </a:lnTo>
-                  <a:lnTo>
-                    <a:pt x="6446027" y="11001"/>
-                  </a:lnTo>
-                  <a:lnTo>
-                    <a:pt x="6374404" y="12215"/>
-                  </a:lnTo>
-                  <a:lnTo>
-                    <a:pt x="6302782" y="13428"/>
-                  </a:lnTo>
-                  <a:lnTo>
-                    <a:pt x="6231159" y="14639"/>
-                  </a:lnTo>
-                  <a:lnTo>
-                    <a:pt x="6159537" y="15849"/>
-                  </a:lnTo>
-                  <a:lnTo>
-                    <a:pt x="6087914" y="17057"/>
-                  </a:lnTo>
-                  <a:lnTo>
-                    <a:pt x="6016292" y="18263"/>
-                  </a:lnTo>
-                  <a:lnTo>
-                    <a:pt x="5944669" y="19468"/>
-                  </a:lnTo>
-                  <a:lnTo>
-                    <a:pt x="5873047" y="20671"/>
-                  </a:lnTo>
-                  <a:lnTo>
-                    <a:pt x="5801424" y="21873"/>
-                  </a:lnTo>
-                  <a:lnTo>
-                    <a:pt x="5729802" y="23073"/>
-                  </a:lnTo>
-                  <a:lnTo>
-                    <a:pt x="5658179" y="24272"/>
-                  </a:lnTo>
-                  <a:lnTo>
-                    <a:pt x="5586557" y="25469"/>
-                  </a:lnTo>
-                  <a:lnTo>
-                    <a:pt x="5514934" y="26664"/>
-                  </a:lnTo>
-                  <a:lnTo>
-                    <a:pt x="5443311" y="27858"/>
-                  </a:lnTo>
-                  <a:lnTo>
-                    <a:pt x="5371689" y="29050"/>
-                  </a:lnTo>
-                  <a:lnTo>
-                    <a:pt x="5300066" y="30241"/>
-                  </a:lnTo>
-                  <a:lnTo>
-                    <a:pt x="5228444" y="31430"/>
-                  </a:lnTo>
-                  <a:lnTo>
-                    <a:pt x="5156821" y="32617"/>
-                  </a:lnTo>
-                  <a:lnTo>
-                    <a:pt x="5085199" y="33803"/>
-                  </a:lnTo>
-                  <a:lnTo>
-                    <a:pt x="5013576" y="34988"/>
-                  </a:lnTo>
-                  <a:lnTo>
-                    <a:pt x="4941954" y="36171"/>
-                  </a:lnTo>
-                  <a:lnTo>
-                    <a:pt x="4870331" y="37352"/>
-                  </a:lnTo>
-                  <a:lnTo>
-                    <a:pt x="4798709" y="38532"/>
-                  </a:lnTo>
-                  <a:lnTo>
-                    <a:pt x="4727086" y="39710"/>
-                  </a:lnTo>
-                  <a:lnTo>
-                    <a:pt x="4655464" y="40887"/>
-                  </a:lnTo>
-                  <a:lnTo>
-                    <a:pt x="4583841" y="42062"/>
-                  </a:lnTo>
-                  <a:lnTo>
-                    <a:pt x="4512219" y="43236"/>
-                  </a:lnTo>
-                  <a:lnTo>
-                    <a:pt x="4440596" y="44408"/>
-                  </a:lnTo>
-                  <a:lnTo>
-                    <a:pt x="4368974" y="45578"/>
-                  </a:lnTo>
-                  <a:lnTo>
-                    <a:pt x="4297351" y="46747"/>
-                  </a:lnTo>
-                  <a:lnTo>
-                    <a:pt x="4225729" y="47915"/>
-                  </a:lnTo>
-                  <a:lnTo>
-                    <a:pt x="4154106" y="49081"/>
-                  </a:lnTo>
-                  <a:lnTo>
-                    <a:pt x="4082483" y="50245"/>
-                  </a:lnTo>
-                  <a:lnTo>
-                    <a:pt x="4010861" y="51408"/>
-                  </a:lnTo>
-                  <a:lnTo>
-                    <a:pt x="3939238" y="52569"/>
-                  </a:lnTo>
-                  <a:lnTo>
-                    <a:pt x="3867616" y="53729"/>
-                  </a:lnTo>
-                  <a:lnTo>
-                    <a:pt x="3795993" y="54887"/>
-                  </a:lnTo>
-                  <a:lnTo>
-                    <a:pt x="3724371" y="56044"/>
-                  </a:lnTo>
-                  <a:lnTo>
-                    <a:pt x="3652748" y="57200"/>
-                  </a:lnTo>
-                  <a:lnTo>
-                    <a:pt x="3581126" y="58353"/>
-                  </a:lnTo>
-                  <a:lnTo>
-                    <a:pt x="3509503" y="59506"/>
-                  </a:lnTo>
-                  <a:lnTo>
-                    <a:pt x="3437881" y="60656"/>
-                  </a:lnTo>
-                  <a:lnTo>
-                    <a:pt x="3366258" y="61805"/>
-                  </a:lnTo>
-                  <a:lnTo>
-                    <a:pt x="3294636" y="62953"/>
-                  </a:lnTo>
-                  <a:lnTo>
-                    <a:pt x="3223013" y="64099"/>
-                  </a:lnTo>
-                  <a:lnTo>
-                    <a:pt x="3151391" y="65244"/>
-                  </a:lnTo>
-                  <a:lnTo>
-                    <a:pt x="3079768" y="66387"/>
-                  </a:lnTo>
-                  <a:lnTo>
-                    <a:pt x="3008146" y="94321"/>
-                  </a:lnTo>
-                  <a:lnTo>
-                    <a:pt x="2936523" y="139197"/>
-                  </a:lnTo>
-                  <a:lnTo>
-                    <a:pt x="2864901" y="181681"/>
-                  </a:lnTo>
-                  <a:lnTo>
-                    <a:pt x="2793278" y="221903"/>
-                  </a:lnTo>
-                  <a:lnTo>
-                    <a:pt x="2721655" y="259981"/>
-                  </a:lnTo>
-                  <a:lnTo>
-                    <a:pt x="2650033" y="296030"/>
-                  </a:lnTo>
-                  <a:lnTo>
-                    <a:pt x="2578410" y="330158"/>
-                  </a:lnTo>
-                  <a:lnTo>
-                    <a:pt x="2506788" y="362468"/>
-                  </a:lnTo>
-                  <a:lnTo>
-                    <a:pt x="2435165" y="393056"/>
-                  </a:lnTo>
-                  <a:lnTo>
-                    <a:pt x="2363543" y="422014"/>
-                  </a:lnTo>
-                  <a:lnTo>
-                    <a:pt x="2291920" y="449430"/>
-                  </a:lnTo>
-                  <a:lnTo>
-                    <a:pt x="2220298" y="475385"/>
-                  </a:lnTo>
-                  <a:lnTo>
-                    <a:pt x="2148675" y="499956"/>
-                  </a:lnTo>
-                  <a:lnTo>
-                    <a:pt x="2077053" y="523219"/>
-                  </a:lnTo>
-                  <a:lnTo>
-                    <a:pt x="2005430" y="545242"/>
-                  </a:lnTo>
-                  <a:lnTo>
-                    <a:pt x="1933808" y="566091"/>
-                  </a:lnTo>
-                  <a:lnTo>
-                    <a:pt x="1862185" y="585830"/>
-                  </a:lnTo>
-                  <a:lnTo>
-                    <a:pt x="1790563" y="604516"/>
-                  </a:lnTo>
-                  <a:lnTo>
-                    <a:pt x="1718940" y="622208"/>
-                  </a:lnTo>
-                  <a:lnTo>
-                    <a:pt x="1647318" y="638956"/>
-                  </a:lnTo>
-                  <a:lnTo>
-                    <a:pt x="1575695" y="654812"/>
-                  </a:lnTo>
-                  <a:lnTo>
-                    <a:pt x="1504073" y="669823"/>
-                  </a:lnTo>
-                  <a:lnTo>
-                    <a:pt x="1432450" y="684035"/>
-                  </a:lnTo>
-                  <a:lnTo>
-                    <a:pt x="1360827" y="697489"/>
-                  </a:lnTo>
-                  <a:lnTo>
-                    <a:pt x="1289205" y="710226"/>
-                  </a:lnTo>
-                  <a:lnTo>
-                    <a:pt x="1217582" y="722285"/>
-                  </a:lnTo>
-                  <a:lnTo>
-                    <a:pt x="1145960" y="733701"/>
-                  </a:lnTo>
-                  <a:lnTo>
-                    <a:pt x="1074337" y="744509"/>
-                  </a:lnTo>
-                  <a:lnTo>
-                    <a:pt x="1002715" y="754740"/>
-                  </a:lnTo>
-                  <a:lnTo>
-                    <a:pt x="931092" y="764427"/>
-                  </a:lnTo>
-                  <a:lnTo>
-                    <a:pt x="859470" y="773598"/>
-                  </a:lnTo>
-                  <a:lnTo>
-                    <a:pt x="787847" y="782280"/>
-                  </a:lnTo>
-                  <a:lnTo>
-                    <a:pt x="716225" y="790499"/>
-                  </a:lnTo>
-                  <a:lnTo>
-                    <a:pt x="644602" y="798280"/>
-                  </a:lnTo>
-                  <a:lnTo>
-                    <a:pt x="572980" y="805647"/>
-                  </a:lnTo>
-                  <a:lnTo>
-                    <a:pt x="501357" y="812621"/>
-                  </a:lnTo>
-                  <a:lnTo>
-                    <a:pt x="429735" y="819224"/>
-                  </a:lnTo>
-                  <a:lnTo>
-                    <a:pt x="358112" y="825475"/>
-                  </a:lnTo>
-                  <a:lnTo>
-                    <a:pt x="286490" y="831393"/>
-                  </a:lnTo>
-                  <a:lnTo>
-                    <a:pt x="214867" y="836995"/>
-                  </a:lnTo>
-                  <a:lnTo>
-                    <a:pt x="143245" y="842299"/>
-                  </a:lnTo>
-                  <a:lnTo>
-                    <a:pt x="71622" y="847320"/>
-                  </a:lnTo>
-                  <a:lnTo>
-                    <a:pt x="0" y="852074"/>
+                    <a:pt x="7019007" y="283"/>
+                  </a:lnTo>
+                  <a:lnTo>
+                    <a:pt x="6947385" y="567"/>
+                  </a:lnTo>
+                  <a:lnTo>
+                    <a:pt x="6875762" y="850"/>
+                  </a:lnTo>
+                  <a:lnTo>
+                    <a:pt x="6804139" y="1133"/>
+                  </a:lnTo>
+                  <a:lnTo>
+                    <a:pt x="6732517" y="1417"/>
+                  </a:lnTo>
+                  <a:lnTo>
+                    <a:pt x="6660894" y="1700"/>
+                  </a:lnTo>
+                  <a:lnTo>
+                    <a:pt x="6589272" y="1983"/>
+                  </a:lnTo>
+                  <a:lnTo>
+                    <a:pt x="6517649" y="2266"/>
+                  </a:lnTo>
+                  <a:lnTo>
+                    <a:pt x="6446027" y="2549"/>
+                  </a:lnTo>
+                  <a:lnTo>
+                    <a:pt x="6374404" y="2832"/>
+                  </a:lnTo>
+                  <a:lnTo>
+                    <a:pt x="6302782" y="3114"/>
+                  </a:lnTo>
+                  <a:lnTo>
+                    <a:pt x="6231159" y="3397"/>
+                  </a:lnTo>
+                  <a:lnTo>
+                    <a:pt x="6159537" y="3679"/>
+                  </a:lnTo>
+                  <a:lnTo>
+                    <a:pt x="6087914" y="3962"/>
+                  </a:lnTo>
+                  <a:lnTo>
+                    <a:pt x="6016292" y="4244"/>
+                  </a:lnTo>
+                  <a:lnTo>
+                    <a:pt x="5944669" y="4526"/>
+                  </a:lnTo>
+                  <a:lnTo>
+                    <a:pt x="5873047" y="4809"/>
+                  </a:lnTo>
+                  <a:lnTo>
+                    <a:pt x="5801424" y="5091"/>
+                  </a:lnTo>
+                  <a:lnTo>
+                    <a:pt x="5729802" y="5373"/>
+                  </a:lnTo>
+                  <a:lnTo>
+                    <a:pt x="5658179" y="5655"/>
+                  </a:lnTo>
+                  <a:lnTo>
+                    <a:pt x="5586557" y="5936"/>
+                  </a:lnTo>
+                  <a:lnTo>
+                    <a:pt x="5514934" y="6218"/>
+                  </a:lnTo>
+                  <a:lnTo>
+                    <a:pt x="5443311" y="6500"/>
+                  </a:lnTo>
+                  <a:lnTo>
+                    <a:pt x="5371689" y="6781"/>
+                  </a:lnTo>
+                  <a:lnTo>
+                    <a:pt x="5300066" y="7063"/>
+                  </a:lnTo>
+                  <a:lnTo>
+                    <a:pt x="5228444" y="7344"/>
+                  </a:lnTo>
+                  <a:lnTo>
+                    <a:pt x="5156821" y="7625"/>
+                  </a:lnTo>
+                  <a:lnTo>
+                    <a:pt x="5085199" y="7906"/>
+                  </a:lnTo>
+                  <a:lnTo>
+                    <a:pt x="5013576" y="8188"/>
+                  </a:lnTo>
+                  <a:lnTo>
+                    <a:pt x="4941954" y="8469"/>
+                  </a:lnTo>
+                  <a:lnTo>
+                    <a:pt x="4870331" y="8749"/>
+                  </a:lnTo>
+                  <a:lnTo>
+                    <a:pt x="4798709" y="9030"/>
+                  </a:lnTo>
+                  <a:lnTo>
+                    <a:pt x="4727086" y="9311"/>
+                  </a:lnTo>
+                  <a:lnTo>
+                    <a:pt x="4655464" y="9592"/>
+                  </a:lnTo>
+                  <a:lnTo>
+                    <a:pt x="4583841" y="9872"/>
+                  </a:lnTo>
+                  <a:lnTo>
+                    <a:pt x="4512219" y="10153"/>
+                  </a:lnTo>
+                  <a:lnTo>
+                    <a:pt x="4440596" y="10433"/>
+                  </a:lnTo>
+                  <a:lnTo>
+                    <a:pt x="4368974" y="10713"/>
+                  </a:lnTo>
+                  <a:lnTo>
+                    <a:pt x="4297351" y="10993"/>
+                  </a:lnTo>
+                  <a:lnTo>
+                    <a:pt x="4225729" y="11274"/>
+                  </a:lnTo>
+                  <a:lnTo>
+                    <a:pt x="4154106" y="11554"/>
+                  </a:lnTo>
+                  <a:lnTo>
+                    <a:pt x="4082483" y="11833"/>
+                  </a:lnTo>
+                  <a:lnTo>
+                    <a:pt x="4010861" y="12113"/>
+                  </a:lnTo>
+                  <a:lnTo>
+                    <a:pt x="3939238" y="12393"/>
+                  </a:lnTo>
+                  <a:lnTo>
+                    <a:pt x="3867616" y="12673"/>
+                  </a:lnTo>
+                  <a:lnTo>
+                    <a:pt x="3795993" y="12952"/>
+                  </a:lnTo>
+                  <a:lnTo>
+                    <a:pt x="3724371" y="13232"/>
+                  </a:lnTo>
+                  <a:lnTo>
+                    <a:pt x="3652748" y="13511"/>
+                  </a:lnTo>
+                  <a:lnTo>
+                    <a:pt x="3581126" y="13790"/>
+                  </a:lnTo>
+                  <a:lnTo>
+                    <a:pt x="3509503" y="14070"/>
+                  </a:lnTo>
+                  <a:lnTo>
+                    <a:pt x="3437881" y="14349"/>
+                  </a:lnTo>
+                  <a:lnTo>
+                    <a:pt x="3366258" y="14628"/>
+                  </a:lnTo>
+                  <a:lnTo>
+                    <a:pt x="3294636" y="14907"/>
+                  </a:lnTo>
+                  <a:lnTo>
+                    <a:pt x="3223013" y="15185"/>
+                  </a:lnTo>
+                  <a:lnTo>
+                    <a:pt x="3151391" y="15464"/>
+                  </a:lnTo>
+                  <a:lnTo>
+                    <a:pt x="3079768" y="15743"/>
+                  </a:lnTo>
+                  <a:lnTo>
+                    <a:pt x="3008146" y="44974"/>
+                  </a:lnTo>
+                  <a:lnTo>
+                    <a:pt x="2936523" y="92430"/>
+                  </a:lnTo>
+                  <a:lnTo>
+                    <a:pt x="2864901" y="137206"/>
+                  </a:lnTo>
+                  <a:lnTo>
+                    <a:pt x="2793278" y="179454"/>
+                  </a:lnTo>
+                  <a:lnTo>
+                    <a:pt x="2721655" y="219317"/>
+                  </a:lnTo>
+                  <a:lnTo>
+                    <a:pt x="2650033" y="256930"/>
+                  </a:lnTo>
+                  <a:lnTo>
+                    <a:pt x="2578410" y="292419"/>
+                  </a:lnTo>
+                  <a:lnTo>
+                    <a:pt x="2506788" y="325904"/>
+                  </a:lnTo>
+                  <a:lnTo>
+                    <a:pt x="2435165" y="357499"/>
+                  </a:lnTo>
+                  <a:lnTo>
+                    <a:pt x="2363543" y="387311"/>
+                  </a:lnTo>
+                  <a:lnTo>
+                    <a:pt x="2291920" y="415439"/>
+                  </a:lnTo>
+                  <a:lnTo>
+                    <a:pt x="2220298" y="441979"/>
+                  </a:lnTo>
+                  <a:lnTo>
+                    <a:pt x="2148675" y="467021"/>
+                  </a:lnTo>
+                  <a:lnTo>
+                    <a:pt x="2077053" y="490649"/>
+                  </a:lnTo>
+                  <a:lnTo>
+                    <a:pt x="2005430" y="512943"/>
+                  </a:lnTo>
+                  <a:lnTo>
+                    <a:pt x="1933808" y="533978"/>
+                  </a:lnTo>
+                  <a:lnTo>
+                    <a:pt x="1862185" y="553826"/>
+                  </a:lnTo>
+                  <a:lnTo>
+                    <a:pt x="1790563" y="572553"/>
+                  </a:lnTo>
+                  <a:lnTo>
+                    <a:pt x="1718940" y="590223"/>
+                  </a:lnTo>
+                  <a:lnTo>
+                    <a:pt x="1647318" y="606896"/>
+                  </a:lnTo>
+                  <a:lnTo>
+                    <a:pt x="1575695" y="622627"/>
+                  </a:lnTo>
+                  <a:lnTo>
+                    <a:pt x="1504073" y="637470"/>
+                  </a:lnTo>
+                  <a:lnTo>
+                    <a:pt x="1432450" y="651475"/>
+                  </a:lnTo>
+                  <a:lnTo>
+                    <a:pt x="1360827" y="664689"/>
+                  </a:lnTo>
+                  <a:lnTo>
+                    <a:pt x="1289205" y="677157"/>
+                  </a:lnTo>
+                  <a:lnTo>
+                    <a:pt x="1217582" y="688922"/>
+                  </a:lnTo>
+                  <a:lnTo>
+                    <a:pt x="1145960" y="700022"/>
+                  </a:lnTo>
+                  <a:lnTo>
+                    <a:pt x="1074337" y="710495"/>
+                  </a:lnTo>
+                  <a:lnTo>
+                    <a:pt x="1002715" y="720378"/>
+                  </a:lnTo>
+                  <a:lnTo>
+                    <a:pt x="931092" y="729702"/>
+                  </a:lnTo>
+                  <a:lnTo>
+                    <a:pt x="859470" y="738500"/>
+                  </a:lnTo>
+                  <a:lnTo>
+                    <a:pt x="787847" y="746801"/>
+                  </a:lnTo>
+                  <a:lnTo>
+                    <a:pt x="716225" y="754633"/>
+                  </a:lnTo>
+                  <a:lnTo>
+                    <a:pt x="644602" y="762024"/>
+                  </a:lnTo>
+                  <a:lnTo>
+                    <a:pt x="572980" y="768997"/>
+                  </a:lnTo>
+                  <a:lnTo>
+                    <a:pt x="501357" y="775576"/>
+                  </a:lnTo>
+                  <a:lnTo>
+                    <a:pt x="429735" y="781784"/>
+                  </a:lnTo>
+                  <a:lnTo>
+                    <a:pt x="358112" y="787642"/>
+                  </a:lnTo>
+                  <a:lnTo>
+                    <a:pt x="286490" y="793168"/>
+                  </a:lnTo>
+                  <a:lnTo>
+                    <a:pt x="214867" y="798383"/>
+                  </a:lnTo>
+                  <a:lnTo>
+                    <a:pt x="143245" y="803303"/>
+                  </a:lnTo>
+                  <a:lnTo>
+                    <a:pt x="71622" y="807946"/>
+                  </a:lnTo>
+                  <a:lnTo>
+                    <a:pt x="0" y="812326"/>
                   </a:lnTo>
                 </a:path>
               </a:pathLst>
@@ -4236,296 +4230,290 @@
           <p:spPr>
             <a:xfrm>
               <a:off x="1172049" y="1896563"/>
-              <a:ext cx="6716345" cy="3389088"/>
+              <a:ext cx="6567891" cy="3402033"/>
             </a:xfrm>
             <a:custGeom>
               <a:avLst/>
               <a:pathLst>
-                <a:path w="6716345" h="3389088">
+                <a:path w="6567891" h="3402033">
                   <a:moveTo>
-                    <a:pt x="0" y="3389088"/>
+                    <a:pt x="0" y="3402033"/>
                   </a:moveTo>
                   <a:lnTo>
-                    <a:pt x="71622" y="3381595"/>
-                  </a:lnTo>
-                  <a:lnTo>
-                    <a:pt x="143245" y="3373889"/>
-                  </a:lnTo>
-                  <a:lnTo>
-                    <a:pt x="214867" y="3365964"/>
-                  </a:lnTo>
-                  <a:lnTo>
-                    <a:pt x="286490" y="3357813"/>
-                  </a:lnTo>
-                  <a:lnTo>
-                    <a:pt x="358112" y="3349431"/>
-                  </a:lnTo>
-                  <a:lnTo>
-                    <a:pt x="429735" y="3340810"/>
-                  </a:lnTo>
-                  <a:lnTo>
-                    <a:pt x="501357" y="3331945"/>
-                  </a:lnTo>
-                  <a:lnTo>
-                    <a:pt x="572980" y="3322827"/>
-                  </a:lnTo>
-                  <a:lnTo>
-                    <a:pt x="644602" y="3313450"/>
-                  </a:lnTo>
-                  <a:lnTo>
-                    <a:pt x="716225" y="3303807"/>
-                  </a:lnTo>
-                  <a:lnTo>
-                    <a:pt x="787847" y="3293889"/>
-                  </a:lnTo>
-                  <a:lnTo>
-                    <a:pt x="859470" y="3283689"/>
-                  </a:lnTo>
-                  <a:lnTo>
-                    <a:pt x="931092" y="3273200"/>
-                  </a:lnTo>
-                  <a:lnTo>
-                    <a:pt x="1002715" y="3262412"/>
-                  </a:lnTo>
-                  <a:lnTo>
-                    <a:pt x="1074337" y="3251317"/>
-                  </a:lnTo>
-                  <a:lnTo>
-                    <a:pt x="1145960" y="3239907"/>
-                  </a:lnTo>
-                  <a:lnTo>
-                    <a:pt x="1217582" y="3228173"/>
-                  </a:lnTo>
-                  <a:lnTo>
-                    <a:pt x="1289205" y="3216105"/>
-                  </a:lnTo>
-                  <a:lnTo>
-                    <a:pt x="1360827" y="3203694"/>
-                  </a:lnTo>
-                  <a:lnTo>
-                    <a:pt x="1432450" y="3190930"/>
-                  </a:lnTo>
-                  <a:lnTo>
-                    <a:pt x="1504073" y="3177803"/>
-                  </a:lnTo>
-                  <a:lnTo>
-                    <a:pt x="1575695" y="3164303"/>
-                  </a:lnTo>
-                  <a:lnTo>
-                    <a:pt x="1647318" y="3150419"/>
-                  </a:lnTo>
-                  <a:lnTo>
-                    <a:pt x="1718940" y="3136140"/>
-                  </a:lnTo>
-                  <a:lnTo>
-                    <a:pt x="1790563" y="3121456"/>
-                  </a:lnTo>
-                  <a:lnTo>
-                    <a:pt x="1862185" y="3106354"/>
-                  </a:lnTo>
-                  <a:lnTo>
-                    <a:pt x="1933808" y="3090822"/>
-                  </a:lnTo>
-                  <a:lnTo>
-                    <a:pt x="2005430" y="3074849"/>
-                  </a:lnTo>
-                  <a:lnTo>
-                    <a:pt x="2077053" y="3058422"/>
-                  </a:lnTo>
-                  <a:lnTo>
-                    <a:pt x="2148675" y="3041528"/>
-                  </a:lnTo>
-                  <a:lnTo>
-                    <a:pt x="2220298" y="3024153"/>
-                  </a:lnTo>
-                  <a:lnTo>
-                    <a:pt x="2291920" y="3006285"/>
-                  </a:lnTo>
-                  <a:lnTo>
-                    <a:pt x="2363543" y="2987909"/>
-                  </a:lnTo>
-                  <a:lnTo>
-                    <a:pt x="2435165" y="2969010"/>
-                  </a:lnTo>
-                  <a:lnTo>
-                    <a:pt x="2506788" y="2949573"/>
-                  </a:lnTo>
-                  <a:lnTo>
-                    <a:pt x="2578410" y="2929585"/>
-                  </a:lnTo>
-                  <a:lnTo>
-                    <a:pt x="2650033" y="2909028"/>
-                  </a:lnTo>
-                  <a:lnTo>
-                    <a:pt x="2721655" y="2887886"/>
-                  </a:lnTo>
-                  <a:lnTo>
-                    <a:pt x="2793278" y="2866143"/>
-                  </a:lnTo>
-                  <a:lnTo>
-                    <a:pt x="2864901" y="2843783"/>
-                  </a:lnTo>
-                  <a:lnTo>
-                    <a:pt x="2936523" y="2820786"/>
-                  </a:lnTo>
-                  <a:lnTo>
-                    <a:pt x="3008146" y="2797136"/>
-                  </a:lnTo>
-                  <a:lnTo>
-                    <a:pt x="3079768" y="2772813"/>
-                  </a:lnTo>
-                  <a:lnTo>
-                    <a:pt x="3151391" y="2747799"/>
-                  </a:lnTo>
-                  <a:lnTo>
-                    <a:pt x="3223013" y="2722073"/>
-                  </a:lnTo>
-                  <a:lnTo>
-                    <a:pt x="3294636" y="2695617"/>
-                  </a:lnTo>
-                  <a:lnTo>
-                    <a:pt x="3366258" y="2668408"/>
-                  </a:lnTo>
-                  <a:lnTo>
-                    <a:pt x="3437881" y="2640425"/>
-                  </a:lnTo>
-                  <a:lnTo>
-                    <a:pt x="3509503" y="2611647"/>
-                  </a:lnTo>
-                  <a:lnTo>
-                    <a:pt x="3581126" y="2582050"/>
-                  </a:lnTo>
-                  <a:lnTo>
-                    <a:pt x="3652748" y="2551613"/>
-                  </a:lnTo>
-                  <a:lnTo>
-                    <a:pt x="3724371" y="2520310"/>
-                  </a:lnTo>
-                  <a:lnTo>
-                    <a:pt x="3795993" y="2488117"/>
-                  </a:lnTo>
-                  <a:lnTo>
-                    <a:pt x="3867616" y="2455008"/>
-                  </a:lnTo>
-                  <a:lnTo>
-                    <a:pt x="3939238" y="2420958"/>
-                  </a:lnTo>
-                  <a:lnTo>
-                    <a:pt x="4010861" y="2385941"/>
-                  </a:lnTo>
-                  <a:lnTo>
-                    <a:pt x="4082483" y="2349927"/>
-                  </a:lnTo>
-                  <a:lnTo>
-                    <a:pt x="4154106" y="2312890"/>
-                  </a:lnTo>
-                  <a:lnTo>
-                    <a:pt x="4225729" y="2274800"/>
-                  </a:lnTo>
-                  <a:lnTo>
-                    <a:pt x="4297351" y="2235627"/>
-                  </a:lnTo>
-                  <a:lnTo>
-                    <a:pt x="4368974" y="2195340"/>
-                  </a:lnTo>
-                  <a:lnTo>
-                    <a:pt x="4440596" y="2153908"/>
-                  </a:lnTo>
-                  <a:lnTo>
-                    <a:pt x="4512219" y="2111298"/>
-                  </a:lnTo>
-                  <a:lnTo>
-                    <a:pt x="4583841" y="2067476"/>
-                  </a:lnTo>
-                  <a:lnTo>
-                    <a:pt x="4655464" y="2022409"/>
-                  </a:lnTo>
-                  <a:lnTo>
-                    <a:pt x="4727086" y="1976060"/>
-                  </a:lnTo>
-                  <a:lnTo>
-                    <a:pt x="4798709" y="1928393"/>
-                  </a:lnTo>
-                  <a:lnTo>
-                    <a:pt x="4870331" y="1879371"/>
-                  </a:lnTo>
-                  <a:lnTo>
-                    <a:pt x="4941954" y="1828956"/>
-                  </a:lnTo>
-                  <a:lnTo>
-                    <a:pt x="5013576" y="1777107"/>
-                  </a:lnTo>
-                  <a:lnTo>
-                    <a:pt x="5085199" y="1723784"/>
-                  </a:lnTo>
-                  <a:lnTo>
-                    <a:pt x="5156821" y="1668945"/>
-                  </a:lnTo>
-                  <a:lnTo>
-                    <a:pt x="5228444" y="1612547"/>
-                  </a:lnTo>
-                  <a:lnTo>
-                    <a:pt x="5300066" y="1554546"/>
-                  </a:lnTo>
-                  <a:lnTo>
-                    <a:pt x="5371689" y="1494895"/>
-                  </a:lnTo>
-                  <a:lnTo>
-                    <a:pt x="5443311" y="1433549"/>
-                  </a:lnTo>
-                  <a:lnTo>
-                    <a:pt x="5514934" y="1370458"/>
-                  </a:lnTo>
-                  <a:lnTo>
-                    <a:pt x="5586557" y="1305574"/>
-                  </a:lnTo>
-                  <a:lnTo>
-                    <a:pt x="5658179" y="1238845"/>
-                  </a:lnTo>
-                  <a:lnTo>
-                    <a:pt x="5729802" y="1170219"/>
-                  </a:lnTo>
-                  <a:lnTo>
-                    <a:pt x="5801424" y="1099642"/>
-                  </a:lnTo>
-                  <a:lnTo>
-                    <a:pt x="5873047" y="1027058"/>
-                  </a:lnTo>
-                  <a:lnTo>
-                    <a:pt x="5944669" y="952411"/>
-                  </a:lnTo>
-                  <a:lnTo>
-                    <a:pt x="6016292" y="875641"/>
-                  </a:lnTo>
-                  <a:lnTo>
-                    <a:pt x="6087914" y="796689"/>
-                  </a:lnTo>
-                  <a:lnTo>
-                    <a:pt x="6159537" y="715492"/>
-                  </a:lnTo>
-                  <a:lnTo>
-                    <a:pt x="6231159" y="631987"/>
-                  </a:lnTo>
-                  <a:lnTo>
-                    <a:pt x="6302782" y="546107"/>
-                  </a:lnTo>
-                  <a:lnTo>
-                    <a:pt x="6374404" y="457786"/>
-                  </a:lnTo>
-                  <a:lnTo>
-                    <a:pt x="6446027" y="366954"/>
-                  </a:lnTo>
-                  <a:lnTo>
-                    <a:pt x="6517649" y="273539"/>
-                  </a:lnTo>
-                  <a:lnTo>
-                    <a:pt x="6589272" y="177468"/>
-                  </a:lnTo>
-                  <a:lnTo>
-                    <a:pt x="6660894" y="78667"/>
-                  </a:lnTo>
-                  <a:lnTo>
-                    <a:pt x="6716345" y="0"/>
+                    <a:pt x="71622" y="3394603"/>
+                  </a:lnTo>
+                  <a:lnTo>
+                    <a:pt x="143245" y="3386953"/>
+                  </a:lnTo>
+                  <a:lnTo>
+                    <a:pt x="214867" y="3379076"/>
+                  </a:lnTo>
+                  <a:lnTo>
+                    <a:pt x="286490" y="3370965"/>
+                  </a:lnTo>
+                  <a:lnTo>
+                    <a:pt x="358112" y="3362614"/>
+                  </a:lnTo>
+                  <a:lnTo>
+                    <a:pt x="429735" y="3354015"/>
+                  </a:lnTo>
+                  <a:lnTo>
+                    <a:pt x="501357" y="3345161"/>
+                  </a:lnTo>
+                  <a:lnTo>
+                    <a:pt x="572980" y="3336045"/>
+                  </a:lnTo>
+                  <a:lnTo>
+                    <a:pt x="644602" y="3326659"/>
+                  </a:lnTo>
+                  <a:lnTo>
+                    <a:pt x="716225" y="3316994"/>
+                  </a:lnTo>
+                  <a:lnTo>
+                    <a:pt x="787847" y="3307043"/>
+                  </a:lnTo>
+                  <a:lnTo>
+                    <a:pt x="859470" y="3296797"/>
+                  </a:lnTo>
+                  <a:lnTo>
+                    <a:pt x="931092" y="3286247"/>
+                  </a:lnTo>
+                  <a:lnTo>
+                    <a:pt x="1002715" y="3275384"/>
+                  </a:lnTo>
+                  <a:lnTo>
+                    <a:pt x="1074337" y="3264199"/>
+                  </a:lnTo>
+                  <a:lnTo>
+                    <a:pt x="1145960" y="3252682"/>
+                  </a:lnTo>
+                  <a:lnTo>
+                    <a:pt x="1217582" y="3240825"/>
+                  </a:lnTo>
+                  <a:lnTo>
+                    <a:pt x="1289205" y="3228615"/>
+                  </a:lnTo>
+                  <a:lnTo>
+                    <a:pt x="1360827" y="3216044"/>
+                  </a:lnTo>
+                  <a:lnTo>
+                    <a:pt x="1432450" y="3203099"/>
+                  </a:lnTo>
+                  <a:lnTo>
+                    <a:pt x="1504073" y="3189771"/>
+                  </a:lnTo>
+                  <a:lnTo>
+                    <a:pt x="1575695" y="3176048"/>
+                  </a:lnTo>
+                  <a:lnTo>
+                    <a:pt x="1647318" y="3161918"/>
+                  </a:lnTo>
+                  <a:lnTo>
+                    <a:pt x="1718940" y="3147369"/>
+                  </a:lnTo>
+                  <a:lnTo>
+                    <a:pt x="1790563" y="3132389"/>
+                  </a:lnTo>
+                  <a:lnTo>
+                    <a:pt x="1862185" y="3116965"/>
+                  </a:lnTo>
+                  <a:lnTo>
+                    <a:pt x="1933808" y="3101083"/>
+                  </a:lnTo>
+                  <a:lnTo>
+                    <a:pt x="2005430" y="3084731"/>
+                  </a:lnTo>
+                  <a:lnTo>
+                    <a:pt x="2077053" y="3067893"/>
+                  </a:lnTo>
+                  <a:lnTo>
+                    <a:pt x="2148675" y="3050557"/>
+                  </a:lnTo>
+                  <a:lnTo>
+                    <a:pt x="2220298" y="3032706"/>
+                  </a:lnTo>
+                  <a:lnTo>
+                    <a:pt x="2291920" y="3014327"/>
+                  </a:lnTo>
+                  <a:lnTo>
+                    <a:pt x="2363543" y="2995402"/>
+                  </a:lnTo>
+                  <a:lnTo>
+                    <a:pt x="2435165" y="2975916"/>
+                  </a:lnTo>
+                  <a:lnTo>
+                    <a:pt x="2506788" y="2955853"/>
+                  </a:lnTo>
+                  <a:lnTo>
+                    <a:pt x="2578410" y="2935195"/>
+                  </a:lnTo>
+                  <a:lnTo>
+                    <a:pt x="2650033" y="2913924"/>
+                  </a:lnTo>
+                  <a:lnTo>
+                    <a:pt x="2721655" y="2892022"/>
+                  </a:lnTo>
+                  <a:lnTo>
+                    <a:pt x="2793278" y="2869472"/>
+                  </a:lnTo>
+                  <a:lnTo>
+                    <a:pt x="2864901" y="2846252"/>
+                  </a:lnTo>
+                  <a:lnTo>
+                    <a:pt x="2936523" y="2822345"/>
+                  </a:lnTo>
+                  <a:lnTo>
+                    <a:pt x="3008146" y="2797728"/>
+                  </a:lnTo>
+                  <a:lnTo>
+                    <a:pt x="3079768" y="2772382"/>
+                  </a:lnTo>
+                  <a:lnTo>
+                    <a:pt x="3151391" y="2746284"/>
+                  </a:lnTo>
+                  <a:lnTo>
+                    <a:pt x="3223013" y="2719413"/>
+                  </a:lnTo>
+                  <a:lnTo>
+                    <a:pt x="3294636" y="2691745"/>
+                  </a:lnTo>
+                  <a:lnTo>
+                    <a:pt x="3366258" y="2663256"/>
+                  </a:lnTo>
+                  <a:lnTo>
+                    <a:pt x="3437881" y="2633923"/>
+                  </a:lnTo>
+                  <a:lnTo>
+                    <a:pt x="3509503" y="2603720"/>
+                  </a:lnTo>
+                  <a:lnTo>
+                    <a:pt x="3581126" y="2572622"/>
+                  </a:lnTo>
+                  <a:lnTo>
+                    <a:pt x="3652748" y="2540602"/>
+                  </a:lnTo>
+                  <a:lnTo>
+                    <a:pt x="3724371" y="2507632"/>
+                  </a:lnTo>
+                  <a:lnTo>
+                    <a:pt x="3795993" y="2473685"/>
+                  </a:lnTo>
+                  <a:lnTo>
+                    <a:pt x="3867616" y="2438732"/>
+                  </a:lnTo>
+                  <a:lnTo>
+                    <a:pt x="3939238" y="2402742"/>
+                  </a:lnTo>
+                  <a:lnTo>
+                    <a:pt x="4010861" y="2365686"/>
+                  </a:lnTo>
+                  <a:lnTo>
+                    <a:pt x="4082483" y="2327530"/>
+                  </a:lnTo>
+                  <a:lnTo>
+                    <a:pt x="4154106" y="2288244"/>
+                  </a:lnTo>
+                  <a:lnTo>
+                    <a:pt x="4225729" y="2247792"/>
+                  </a:lnTo>
+                  <a:lnTo>
+                    <a:pt x="4297351" y="2206141"/>
+                  </a:lnTo>
+                  <a:lnTo>
+                    <a:pt x="4368974" y="2163256"/>
+                  </a:lnTo>
+                  <a:lnTo>
+                    <a:pt x="4440596" y="2119099"/>
+                  </a:lnTo>
+                  <a:lnTo>
+                    <a:pt x="4512219" y="2073633"/>
+                  </a:lnTo>
+                  <a:lnTo>
+                    <a:pt x="4583841" y="2026819"/>
+                  </a:lnTo>
+                  <a:lnTo>
+                    <a:pt x="4655464" y="1978617"/>
+                  </a:lnTo>
+                  <a:lnTo>
+                    <a:pt x="4727086" y="1928986"/>
+                  </a:lnTo>
+                  <a:lnTo>
+                    <a:pt x="4798709" y="1877883"/>
+                  </a:lnTo>
+                  <a:lnTo>
+                    <a:pt x="4870331" y="1825265"/>
+                  </a:lnTo>
+                  <a:lnTo>
+                    <a:pt x="4941954" y="1771088"/>
+                  </a:lnTo>
+                  <a:lnTo>
+                    <a:pt x="5013576" y="1715304"/>
+                  </a:lnTo>
+                  <a:lnTo>
+                    <a:pt x="5085199" y="1657866"/>
+                  </a:lnTo>
+                  <a:lnTo>
+                    <a:pt x="5156821" y="1598726"/>
+                  </a:lnTo>
+                  <a:lnTo>
+                    <a:pt x="5228444" y="1537832"/>
+                  </a:lnTo>
+                  <a:lnTo>
+                    <a:pt x="5300066" y="1475132"/>
+                  </a:lnTo>
+                  <a:lnTo>
+                    <a:pt x="5371689" y="1410574"/>
+                  </a:lnTo>
+                  <a:lnTo>
+                    <a:pt x="5443311" y="1344102"/>
+                  </a:lnTo>
+                  <a:lnTo>
+                    <a:pt x="5514934" y="1275659"/>
+                  </a:lnTo>
+                  <a:lnTo>
+                    <a:pt x="5586557" y="1205186"/>
+                  </a:lnTo>
+                  <a:lnTo>
+                    <a:pt x="5658179" y="1132625"/>
+                  </a:lnTo>
+                  <a:lnTo>
+                    <a:pt x="5729802" y="1057912"/>
+                  </a:lnTo>
+                  <a:lnTo>
+                    <a:pt x="5801424" y="980984"/>
+                  </a:lnTo>
+                  <a:lnTo>
+                    <a:pt x="5873047" y="901775"/>
+                  </a:lnTo>
+                  <a:lnTo>
+                    <a:pt x="5944669" y="820218"/>
+                  </a:lnTo>
+                  <a:lnTo>
+                    <a:pt x="6016292" y="736243"/>
+                  </a:lnTo>
+                  <a:lnTo>
+                    <a:pt x="6087914" y="649779"/>
+                  </a:lnTo>
+                  <a:lnTo>
+                    <a:pt x="6159537" y="560751"/>
+                  </a:lnTo>
+                  <a:lnTo>
+                    <a:pt x="6231159" y="469083"/>
+                  </a:lnTo>
+                  <a:lnTo>
+                    <a:pt x="6302782" y="374698"/>
+                  </a:lnTo>
+                  <a:lnTo>
+                    <a:pt x="6374404" y="277514"/>
+                  </a:lnTo>
+                  <a:lnTo>
+                    <a:pt x="6446027" y="177449"/>
+                  </a:lnTo>
+                  <a:lnTo>
+                    <a:pt x="6517649" y="74417"/>
+                  </a:lnTo>
+                  <a:lnTo>
+                    <a:pt x="6567891" y="0"/>
                   </a:lnTo>
                 </a:path>
               </a:pathLst>

--- a/docs/plots/carbo/jx_carbo_linsubhr_dosedisc_throm2.pptx
+++ b/docs/plots/carbo/jx_carbo_linsubhr_dosedisc_throm2.pptx
@@ -3139,34 +3139,34 @@
               <a:pathLst>
                 <a:path w="7090630" h="3579434">
                   <a:moveTo>
-                    <a:pt x="0" y="2794749"/>
+                    <a:pt x="0" y="2794750"/>
                   </a:moveTo>
                   <a:lnTo>
-                    <a:pt x="71622" y="2794474"/>
-                  </a:lnTo>
-                  <a:lnTo>
-                    <a:pt x="143245" y="2794199"/>
-                  </a:lnTo>
-                  <a:lnTo>
-                    <a:pt x="214867" y="2793924"/>
-                  </a:lnTo>
-                  <a:lnTo>
-                    <a:pt x="286490" y="2793649"/>
-                  </a:lnTo>
-                  <a:lnTo>
-                    <a:pt x="358112" y="2793374"/>
+                    <a:pt x="71622" y="2794475"/>
+                  </a:lnTo>
+                  <a:lnTo>
+                    <a:pt x="143245" y="2794200"/>
+                  </a:lnTo>
+                  <a:lnTo>
+                    <a:pt x="214867" y="2793925"/>
+                  </a:lnTo>
+                  <a:lnTo>
+                    <a:pt x="286490" y="2793650"/>
+                  </a:lnTo>
+                  <a:lnTo>
+                    <a:pt x="358112" y="2793375"/>
                   </a:lnTo>
                   <a:lnTo>
                     <a:pt x="429735" y="2793099"/>
                   </a:lnTo>
                   <a:lnTo>
-                    <a:pt x="501357" y="2792823"/>
+                    <a:pt x="501357" y="2792824"/>
                   </a:lnTo>
                   <a:lnTo>
                     <a:pt x="572980" y="2792548"/>
                   </a:lnTo>
                   <a:lnTo>
-                    <a:pt x="644602" y="2792272"/>
+                    <a:pt x="644602" y="2792273"/>
                   </a:lnTo>
                   <a:lnTo>
                     <a:pt x="716225" y="2791997"/>
@@ -3175,16 +3175,16 @@
                     <a:pt x="787847" y="2791721"/>
                   </a:lnTo>
                   <a:lnTo>
-                    <a:pt x="859470" y="2791445"/>
-                  </a:lnTo>
-                  <a:lnTo>
-                    <a:pt x="931092" y="2791169"/>
-                  </a:lnTo>
-                  <a:lnTo>
-                    <a:pt x="1002715" y="2790893"/>
-                  </a:lnTo>
-                  <a:lnTo>
-                    <a:pt x="1074337" y="2790617"/>
+                    <a:pt x="859470" y="2791446"/>
+                  </a:lnTo>
+                  <a:lnTo>
+                    <a:pt x="931092" y="2791170"/>
+                  </a:lnTo>
+                  <a:lnTo>
+                    <a:pt x="1002715" y="2790894"/>
+                  </a:lnTo>
+                  <a:lnTo>
+                    <a:pt x="1074337" y="2790618"/>
                   </a:lnTo>
                   <a:lnTo>
                     <a:pt x="1145960" y="2790341"/>
@@ -3193,13 +3193,13 @@
                     <a:pt x="1217582" y="2790065"/>
                   </a:lnTo>
                   <a:lnTo>
-                    <a:pt x="1289205" y="2789788"/>
+                    <a:pt x="1289205" y="2789789"/>
                   </a:lnTo>
                   <a:lnTo>
                     <a:pt x="1360827" y="2789512"/>
                   </a:lnTo>
                   <a:lnTo>
-                    <a:pt x="1432450" y="2789235"/>
+                    <a:pt x="1432450" y="2789236"/>
                   </a:lnTo>
                   <a:lnTo>
                     <a:pt x="1504073" y="2788959"/>
@@ -3208,7 +3208,7 @@
                     <a:pt x="1575695" y="2788682"/>
                   </a:lnTo>
                   <a:lnTo>
-                    <a:pt x="1647318" y="2788405"/>
+                    <a:pt x="1647318" y="2788406"/>
                   </a:lnTo>
                   <a:lnTo>
                     <a:pt x="1718940" y="2788129"/>
@@ -3217,10 +3217,10 @@
                     <a:pt x="1790563" y="2787852"/>
                   </a:lnTo>
                   <a:lnTo>
-                    <a:pt x="1862185" y="2787574"/>
-                  </a:lnTo>
-                  <a:lnTo>
-                    <a:pt x="1933808" y="2787297"/>
+                    <a:pt x="1862185" y="2787575"/>
+                  </a:lnTo>
+                  <a:lnTo>
+                    <a:pt x="1933808" y="2787298"/>
                   </a:lnTo>
                   <a:lnTo>
                     <a:pt x="2005430" y="2787020"/>
@@ -3229,7 +3229,7 @@
                     <a:pt x="2077053" y="2786743"/>
                   </a:lnTo>
                   <a:lnTo>
-                    <a:pt x="2148675" y="2786465"/>
+                    <a:pt x="2148675" y="2786466"/>
                   </a:lnTo>
                   <a:lnTo>
                     <a:pt x="2220298" y="2786188"/>
@@ -3280,7 +3280,7 @@
                     <a:pt x="3294636" y="2592115"/>
                   </a:lnTo>
                   <a:lnTo>
-                    <a:pt x="3366258" y="2528659"/>
+                    <a:pt x="3366258" y="2528658"/>
                   </a:lnTo>
                   <a:lnTo>
                     <a:pt x="3437881" y="2461405"/>
@@ -3298,100 +3298,100 @@
                     <a:pt x="3724371" y="2149669"/>
                   </a:lnTo>
                   <a:lnTo>
-                    <a:pt x="3795993" y="2059739"/>
+                    <a:pt x="3795993" y="2059738"/>
                   </a:lnTo>
                   <a:lnTo>
                     <a:pt x="3867616" y="1964427"/>
                   </a:lnTo>
                   <a:lnTo>
-                    <a:pt x="3939238" y="1863413"/>
-                  </a:lnTo>
-                  <a:lnTo>
-                    <a:pt x="4010861" y="1756355"/>
+                    <a:pt x="3939238" y="1863412"/>
+                  </a:lnTo>
+                  <a:lnTo>
+                    <a:pt x="4010861" y="1756354"/>
                   </a:lnTo>
                   <a:lnTo>
                     <a:pt x="4082483" y="1642890"/>
                   </a:lnTo>
                   <a:lnTo>
-                    <a:pt x="4154106" y="1522637"/>
-                  </a:lnTo>
-                  <a:lnTo>
-                    <a:pt x="4225729" y="1395188"/>
-                  </a:lnTo>
-                  <a:lnTo>
-                    <a:pt x="4297351" y="1260113"/>
-                  </a:lnTo>
-                  <a:lnTo>
-                    <a:pt x="4368974" y="1116957"/>
-                  </a:lnTo>
-                  <a:lnTo>
-                    <a:pt x="4440596" y="965234"/>
-                  </a:lnTo>
-                  <a:lnTo>
-                    <a:pt x="4512219" y="804433"/>
-                  </a:lnTo>
-                  <a:lnTo>
-                    <a:pt x="4583841" y="634011"/>
-                  </a:lnTo>
-                  <a:lnTo>
-                    <a:pt x="4655464" y="453391"/>
-                  </a:lnTo>
-                  <a:lnTo>
-                    <a:pt x="4727086" y="261964"/>
-                  </a:lnTo>
-                  <a:lnTo>
-                    <a:pt x="4798709" y="59083"/>
-                  </a:lnTo>
-                  <a:lnTo>
-                    <a:pt x="4818389" y="0"/>
+                    <a:pt x="4154106" y="1522636"/>
+                  </a:lnTo>
+                  <a:lnTo>
+                    <a:pt x="4225729" y="1395187"/>
+                  </a:lnTo>
+                  <a:lnTo>
+                    <a:pt x="4297351" y="1260112"/>
+                  </a:lnTo>
+                  <a:lnTo>
+                    <a:pt x="4368974" y="1116955"/>
+                  </a:lnTo>
+                  <a:lnTo>
+                    <a:pt x="4440596" y="965233"/>
+                  </a:lnTo>
+                  <a:lnTo>
+                    <a:pt x="4512219" y="804432"/>
+                  </a:lnTo>
+                  <a:lnTo>
+                    <a:pt x="4583841" y="634009"/>
+                  </a:lnTo>
+                  <a:lnTo>
+                    <a:pt x="4655464" y="453389"/>
+                  </a:lnTo>
+                  <a:lnTo>
+                    <a:pt x="4727086" y="261962"/>
+                  </a:lnTo>
+                  <a:lnTo>
+                    <a:pt x="4798709" y="59081"/>
+                  </a:lnTo>
+                  <a:lnTo>
+                    <a:pt x="4818388" y="0"/>
                   </a:lnTo>
                   <a:lnTo>
                     <a:pt x="7090630" y="0"/>
                   </a:lnTo>
                   <a:lnTo>
-                    <a:pt x="7090630" y="2767108"/>
-                  </a:lnTo>
-                  <a:lnTo>
-                    <a:pt x="7019007" y="2767391"/>
-                  </a:lnTo>
-                  <a:lnTo>
-                    <a:pt x="6947385" y="2767675"/>
-                  </a:lnTo>
-                  <a:lnTo>
-                    <a:pt x="6875762" y="2767958"/>
+                    <a:pt x="7090630" y="2767107"/>
+                  </a:lnTo>
+                  <a:lnTo>
+                    <a:pt x="7019007" y="2767390"/>
+                  </a:lnTo>
+                  <a:lnTo>
+                    <a:pt x="6947385" y="2767674"/>
+                  </a:lnTo>
+                  <a:lnTo>
+                    <a:pt x="6875762" y="2767957"/>
                   </a:lnTo>
                   <a:lnTo>
                     <a:pt x="6804139" y="2768241"/>
                   </a:lnTo>
                   <a:lnTo>
-                    <a:pt x="6732517" y="2768525"/>
-                  </a:lnTo>
-                  <a:lnTo>
-                    <a:pt x="6660894" y="2768808"/>
-                  </a:lnTo>
-                  <a:lnTo>
-                    <a:pt x="6589272" y="2769091"/>
-                  </a:lnTo>
-                  <a:lnTo>
-                    <a:pt x="6517649" y="2769374"/>
-                  </a:lnTo>
-                  <a:lnTo>
-                    <a:pt x="6446027" y="2769657"/>
-                  </a:lnTo>
-                  <a:lnTo>
-                    <a:pt x="6374404" y="2769940"/>
+                    <a:pt x="6732517" y="2768524"/>
+                  </a:lnTo>
+                  <a:lnTo>
+                    <a:pt x="6660894" y="2768807"/>
+                  </a:lnTo>
+                  <a:lnTo>
+                    <a:pt x="6589272" y="2769090"/>
+                  </a:lnTo>
+                  <a:lnTo>
+                    <a:pt x="6517649" y="2769373"/>
+                  </a:lnTo>
+                  <a:lnTo>
+                    <a:pt x="6446027" y="2769656"/>
+                  </a:lnTo>
+                  <a:lnTo>
+                    <a:pt x="6374404" y="2769939"/>
                   </a:lnTo>
                   <a:lnTo>
                     <a:pt x="6302782" y="2770222"/>
                   </a:lnTo>
                   <a:lnTo>
-                    <a:pt x="6231159" y="2770505"/>
+                    <a:pt x="6231159" y="2770504"/>
                   </a:lnTo>
                   <a:lnTo>
                     <a:pt x="6159537" y="2770787"/>
                   </a:lnTo>
                   <a:lnTo>
-                    <a:pt x="6087914" y="2771070"/>
+                    <a:pt x="6087914" y="2771069"/>
                   </a:lnTo>
                   <a:lnTo>
                     <a:pt x="6016292" y="2771352"/>
@@ -3400,16 +3400,16 @@
                     <a:pt x="5944669" y="2771634"/>
                   </a:lnTo>
                   <a:lnTo>
-                    <a:pt x="5873047" y="2771917"/>
-                  </a:lnTo>
-                  <a:lnTo>
-                    <a:pt x="5801424" y="2772199"/>
-                  </a:lnTo>
-                  <a:lnTo>
-                    <a:pt x="5729802" y="2772481"/>
-                  </a:lnTo>
-                  <a:lnTo>
-                    <a:pt x="5658179" y="2772763"/>
+                    <a:pt x="5873047" y="2771916"/>
+                  </a:lnTo>
+                  <a:lnTo>
+                    <a:pt x="5801424" y="2772198"/>
+                  </a:lnTo>
+                  <a:lnTo>
+                    <a:pt x="5729802" y="2772480"/>
+                  </a:lnTo>
+                  <a:lnTo>
+                    <a:pt x="5658179" y="2772762"/>
                   </a:lnTo>
                   <a:lnTo>
                     <a:pt x="5586557" y="2773044"/>
@@ -3418,13 +3418,13 @@
                     <a:pt x="5514934" y="2773326"/>
                   </a:lnTo>
                   <a:lnTo>
-                    <a:pt x="5443311" y="2773608"/>
+                    <a:pt x="5443311" y="2773607"/>
                   </a:lnTo>
                   <a:lnTo>
                     <a:pt x="5371689" y="2773889"/>
                   </a:lnTo>
                   <a:lnTo>
-                    <a:pt x="5300066" y="2774171"/>
+                    <a:pt x="5300066" y="2774170"/>
                   </a:lnTo>
                   <a:lnTo>
                     <a:pt x="5228444" y="2774452"/>
@@ -3436,10 +3436,10 @@
                     <a:pt x="5085199" y="2775014"/>
                   </a:lnTo>
                   <a:lnTo>
-                    <a:pt x="5013576" y="2775296"/>
-                  </a:lnTo>
-                  <a:lnTo>
-                    <a:pt x="4941954" y="2775577"/>
+                    <a:pt x="5013576" y="2775295"/>
+                  </a:lnTo>
+                  <a:lnTo>
+                    <a:pt x="4941954" y="2775576"/>
                   </a:lnTo>
                   <a:lnTo>
                     <a:pt x="4870331" y="2775857"/>
@@ -3451,13 +3451,13 @@
                     <a:pt x="4727086" y="2776419"/>
                   </a:lnTo>
                   <a:lnTo>
-                    <a:pt x="4655464" y="2776700"/>
+                    <a:pt x="4655464" y="2776699"/>
                   </a:lnTo>
                   <a:lnTo>
                     <a:pt x="4583841" y="2776980"/>
                   </a:lnTo>
                   <a:lnTo>
-                    <a:pt x="4512219" y="2777261"/>
+                    <a:pt x="4512219" y="2777260"/>
                   </a:lnTo>
                   <a:lnTo>
                     <a:pt x="4440596" y="2777541"/>
@@ -3469,10 +3469,10 @@
                     <a:pt x="4297351" y="2778101"/>
                   </a:lnTo>
                   <a:lnTo>
-                    <a:pt x="4225729" y="2778382"/>
-                  </a:lnTo>
-                  <a:lnTo>
-                    <a:pt x="4154106" y="2778662"/>
+                    <a:pt x="4225729" y="2778381"/>
+                  </a:lnTo>
+                  <a:lnTo>
+                    <a:pt x="4154106" y="2778661"/>
                   </a:lnTo>
                   <a:lnTo>
                     <a:pt x="4082483" y="2778941"/>
@@ -3499,7 +3499,7 @@
                     <a:pt x="3581126" y="2780898"/>
                   </a:lnTo>
                   <a:lnTo>
-                    <a:pt x="3509503" y="2781178"/>
+                    <a:pt x="3509503" y="2781177"/>
                   </a:lnTo>
                   <a:lnTo>
                     <a:pt x="3437881" y="2781457"/>
@@ -3673,41 +3673,41 @@
           <p:spPr>
             <a:xfrm>
               <a:off x="1172049" y="1896563"/>
-              <a:ext cx="4818389" cy="2794749"/>
+              <a:ext cx="4818388" cy="2794750"/>
             </a:xfrm>
             <a:custGeom>
               <a:avLst/>
               <a:pathLst>
-                <a:path w="4818389" h="2794749">
+                <a:path w="4818388" h="2794750">
                   <a:moveTo>
-                    <a:pt x="0" y="2794749"/>
+                    <a:pt x="0" y="2794750"/>
                   </a:moveTo>
                   <a:lnTo>
-                    <a:pt x="71622" y="2794474"/>
-                  </a:lnTo>
-                  <a:lnTo>
-                    <a:pt x="143245" y="2794199"/>
-                  </a:lnTo>
-                  <a:lnTo>
-                    <a:pt x="214867" y="2793924"/>
-                  </a:lnTo>
-                  <a:lnTo>
-                    <a:pt x="286490" y="2793649"/>
-                  </a:lnTo>
-                  <a:lnTo>
-                    <a:pt x="358112" y="2793374"/>
+                    <a:pt x="71622" y="2794475"/>
+                  </a:lnTo>
+                  <a:lnTo>
+                    <a:pt x="143245" y="2794200"/>
+                  </a:lnTo>
+                  <a:lnTo>
+                    <a:pt x="214867" y="2793925"/>
+                  </a:lnTo>
+                  <a:lnTo>
+                    <a:pt x="286490" y="2793650"/>
+                  </a:lnTo>
+                  <a:lnTo>
+                    <a:pt x="358112" y="2793375"/>
                   </a:lnTo>
                   <a:lnTo>
                     <a:pt x="429735" y="2793099"/>
                   </a:lnTo>
                   <a:lnTo>
-                    <a:pt x="501357" y="2792823"/>
+                    <a:pt x="501357" y="2792824"/>
                   </a:lnTo>
                   <a:lnTo>
                     <a:pt x="572980" y="2792548"/>
                   </a:lnTo>
                   <a:lnTo>
-                    <a:pt x="644602" y="2792272"/>
+                    <a:pt x="644602" y="2792273"/>
                   </a:lnTo>
                   <a:lnTo>
                     <a:pt x="716225" y="2791997"/>
@@ -3716,16 +3716,16 @@
                     <a:pt x="787847" y="2791721"/>
                   </a:lnTo>
                   <a:lnTo>
-                    <a:pt x="859470" y="2791445"/>
-                  </a:lnTo>
-                  <a:lnTo>
-                    <a:pt x="931092" y="2791169"/>
-                  </a:lnTo>
-                  <a:lnTo>
-                    <a:pt x="1002715" y="2790893"/>
-                  </a:lnTo>
-                  <a:lnTo>
-                    <a:pt x="1074337" y="2790617"/>
+                    <a:pt x="859470" y="2791446"/>
+                  </a:lnTo>
+                  <a:lnTo>
+                    <a:pt x="931092" y="2791170"/>
+                  </a:lnTo>
+                  <a:lnTo>
+                    <a:pt x="1002715" y="2790894"/>
+                  </a:lnTo>
+                  <a:lnTo>
+                    <a:pt x="1074337" y="2790618"/>
                   </a:lnTo>
                   <a:lnTo>
                     <a:pt x="1145960" y="2790341"/>
@@ -3734,13 +3734,13 @@
                     <a:pt x="1217582" y="2790065"/>
                   </a:lnTo>
                   <a:lnTo>
-                    <a:pt x="1289205" y="2789788"/>
+                    <a:pt x="1289205" y="2789789"/>
                   </a:lnTo>
                   <a:lnTo>
                     <a:pt x="1360827" y="2789512"/>
                   </a:lnTo>
                   <a:lnTo>
-                    <a:pt x="1432450" y="2789235"/>
+                    <a:pt x="1432450" y="2789236"/>
                   </a:lnTo>
                   <a:lnTo>
                     <a:pt x="1504073" y="2788959"/>
@@ -3749,7 +3749,7 @@
                     <a:pt x="1575695" y="2788682"/>
                   </a:lnTo>
                   <a:lnTo>
-                    <a:pt x="1647318" y="2788405"/>
+                    <a:pt x="1647318" y="2788406"/>
                   </a:lnTo>
                   <a:lnTo>
                     <a:pt x="1718940" y="2788129"/>
@@ -3758,10 +3758,10 @@
                     <a:pt x="1790563" y="2787852"/>
                   </a:lnTo>
                   <a:lnTo>
-                    <a:pt x="1862185" y="2787574"/>
-                  </a:lnTo>
-                  <a:lnTo>
-                    <a:pt x="1933808" y="2787297"/>
+                    <a:pt x="1862185" y="2787575"/>
+                  </a:lnTo>
+                  <a:lnTo>
+                    <a:pt x="1933808" y="2787298"/>
                   </a:lnTo>
                   <a:lnTo>
                     <a:pt x="2005430" y="2787020"/>
@@ -3770,7 +3770,7 @@
                     <a:pt x="2077053" y="2786743"/>
                   </a:lnTo>
                   <a:lnTo>
-                    <a:pt x="2148675" y="2786465"/>
+                    <a:pt x="2148675" y="2786466"/>
                   </a:lnTo>
                   <a:lnTo>
                     <a:pt x="2220298" y="2786188"/>
@@ -3821,7 +3821,7 @@
                     <a:pt x="3294636" y="2592115"/>
                   </a:lnTo>
                   <a:lnTo>
-                    <a:pt x="3366258" y="2528659"/>
+                    <a:pt x="3366258" y="2528658"/>
                   </a:lnTo>
                   <a:lnTo>
                     <a:pt x="3437881" y="2461405"/>
@@ -3839,52 +3839,52 @@
                     <a:pt x="3724371" y="2149669"/>
                   </a:lnTo>
                   <a:lnTo>
-                    <a:pt x="3795993" y="2059739"/>
+                    <a:pt x="3795993" y="2059738"/>
                   </a:lnTo>
                   <a:lnTo>
                     <a:pt x="3867616" y="1964427"/>
                   </a:lnTo>
                   <a:lnTo>
-                    <a:pt x="3939238" y="1863413"/>
-                  </a:lnTo>
-                  <a:lnTo>
-                    <a:pt x="4010861" y="1756355"/>
+                    <a:pt x="3939238" y="1863412"/>
+                  </a:lnTo>
+                  <a:lnTo>
+                    <a:pt x="4010861" y="1756354"/>
                   </a:lnTo>
                   <a:lnTo>
                     <a:pt x="4082483" y="1642890"/>
                   </a:lnTo>
                   <a:lnTo>
-                    <a:pt x="4154106" y="1522637"/>
-                  </a:lnTo>
-                  <a:lnTo>
-                    <a:pt x="4225729" y="1395188"/>
-                  </a:lnTo>
-                  <a:lnTo>
-                    <a:pt x="4297351" y="1260113"/>
-                  </a:lnTo>
-                  <a:lnTo>
-                    <a:pt x="4368974" y="1116957"/>
-                  </a:lnTo>
-                  <a:lnTo>
-                    <a:pt x="4440596" y="965234"/>
-                  </a:lnTo>
-                  <a:lnTo>
-                    <a:pt x="4512219" y="804433"/>
-                  </a:lnTo>
-                  <a:lnTo>
-                    <a:pt x="4583841" y="634011"/>
-                  </a:lnTo>
-                  <a:lnTo>
-                    <a:pt x="4655464" y="453391"/>
-                  </a:lnTo>
-                  <a:lnTo>
-                    <a:pt x="4727086" y="261964"/>
-                  </a:lnTo>
-                  <a:lnTo>
-                    <a:pt x="4798709" y="59083"/>
-                  </a:lnTo>
-                  <a:lnTo>
-                    <a:pt x="4818389" y="0"/>
+                    <a:pt x="4154106" y="1522636"/>
+                  </a:lnTo>
+                  <a:lnTo>
+                    <a:pt x="4225729" y="1395187"/>
+                  </a:lnTo>
+                  <a:lnTo>
+                    <a:pt x="4297351" y="1260112"/>
+                  </a:lnTo>
+                  <a:lnTo>
+                    <a:pt x="4368974" y="1116955"/>
+                  </a:lnTo>
+                  <a:lnTo>
+                    <a:pt x="4440596" y="965233"/>
+                  </a:lnTo>
+                  <a:lnTo>
+                    <a:pt x="4512219" y="804432"/>
+                  </a:lnTo>
+                  <a:lnTo>
+                    <a:pt x="4583841" y="634009"/>
+                  </a:lnTo>
+                  <a:lnTo>
+                    <a:pt x="4655464" y="453389"/>
+                  </a:lnTo>
+                  <a:lnTo>
+                    <a:pt x="4727086" y="261962"/>
+                  </a:lnTo>
+                  <a:lnTo>
+                    <a:pt x="4798709" y="59081"/>
+                  </a:lnTo>
+                  <a:lnTo>
+                    <a:pt x="4818388" y="0"/>
                   </a:lnTo>
                 </a:path>
               </a:pathLst>
@@ -3904,13 +3904,13 @@
           </p:nvSpPr>
           <p:spPr>
             <a:xfrm>
-              <a:off x="1172049" y="4663671"/>
-              <a:ext cx="7090630" cy="812326"/>
+              <a:off x="1172049" y="4663670"/>
+              <a:ext cx="7090630" cy="812327"/>
             </a:xfrm>
             <a:custGeom>
               <a:avLst/>
               <a:pathLst>
-                <a:path w="7090630" h="812326">
+                <a:path w="7090630" h="812327">
                   <a:moveTo>
                     <a:pt x="7090630" y="0"/>
                   </a:moveTo>
@@ -3951,7 +3951,7 @@
                     <a:pt x="6231159" y="3397"/>
                   </a:lnTo>
                   <a:lnTo>
-                    <a:pt x="6159537" y="3679"/>
+                    <a:pt x="6159537" y="3680"/>
                   </a:lnTo>
                   <a:lnTo>
                     <a:pt x="6087914" y="3962"/>
@@ -3960,7 +3960,7 @@
                     <a:pt x="6016292" y="4244"/>
                   </a:lnTo>
                   <a:lnTo>
-                    <a:pt x="5944669" y="4526"/>
+                    <a:pt x="5944669" y="4527"/>
                   </a:lnTo>
                   <a:lnTo>
                     <a:pt x="5873047" y="4809"/>
@@ -3975,7 +3975,7 @@
                     <a:pt x="5658179" y="5655"/>
                   </a:lnTo>
                   <a:lnTo>
-                    <a:pt x="5586557" y="5936"/>
+                    <a:pt x="5586557" y="5937"/>
                   </a:lnTo>
                   <a:lnTo>
                     <a:pt x="5514934" y="6218"/>
@@ -3984,7 +3984,7 @@
                     <a:pt x="5443311" y="6500"/>
                   </a:lnTo>
                   <a:lnTo>
-                    <a:pt x="5371689" y="6781"/>
+                    <a:pt x="5371689" y="6782"/>
                   </a:lnTo>
                   <a:lnTo>
                     <a:pt x="5300066" y="7063"/>
@@ -3993,10 +3993,10 @@
                     <a:pt x="5228444" y="7344"/>
                   </a:lnTo>
                   <a:lnTo>
-                    <a:pt x="5156821" y="7625"/>
-                  </a:lnTo>
-                  <a:lnTo>
-                    <a:pt x="5085199" y="7906"/>
+                    <a:pt x="5156821" y="7626"/>
+                  </a:lnTo>
+                  <a:lnTo>
+                    <a:pt x="5085199" y="7907"/>
                   </a:lnTo>
                   <a:lnTo>
                     <a:pt x="5013576" y="8188"/>
@@ -4005,10 +4005,10 @@
                     <a:pt x="4941954" y="8469"/>
                   </a:lnTo>
                   <a:lnTo>
-                    <a:pt x="4870331" y="8749"/>
-                  </a:lnTo>
-                  <a:lnTo>
-                    <a:pt x="4798709" y="9030"/>
+                    <a:pt x="4870331" y="8750"/>
+                  </a:lnTo>
+                  <a:lnTo>
+                    <a:pt x="4798709" y="9031"/>
                   </a:lnTo>
                   <a:lnTo>
                     <a:pt x="4727086" y="9311"/>
@@ -4017,7 +4017,7 @@
                     <a:pt x="4655464" y="9592"/>
                   </a:lnTo>
                   <a:lnTo>
-                    <a:pt x="4583841" y="9872"/>
+                    <a:pt x="4583841" y="9873"/>
                   </a:lnTo>
                   <a:lnTo>
                     <a:pt x="4512219" y="10153"/>
@@ -4026,10 +4026,10 @@
                     <a:pt x="4440596" y="10433"/>
                   </a:lnTo>
                   <a:lnTo>
-                    <a:pt x="4368974" y="10713"/>
-                  </a:lnTo>
-                  <a:lnTo>
-                    <a:pt x="4297351" y="10993"/>
+                    <a:pt x="4368974" y="10714"/>
+                  </a:lnTo>
+                  <a:lnTo>
+                    <a:pt x="4297351" y="10994"/>
                   </a:lnTo>
                   <a:lnTo>
                     <a:pt x="4225729" y="11274"/>
@@ -4038,28 +4038,28 @@
                     <a:pt x="4154106" y="11554"/>
                   </a:lnTo>
                   <a:lnTo>
-                    <a:pt x="4082483" y="11833"/>
-                  </a:lnTo>
-                  <a:lnTo>
-                    <a:pt x="4010861" y="12113"/>
-                  </a:lnTo>
-                  <a:lnTo>
-                    <a:pt x="3939238" y="12393"/>
+                    <a:pt x="4082483" y="11834"/>
+                  </a:lnTo>
+                  <a:lnTo>
+                    <a:pt x="4010861" y="12114"/>
+                  </a:lnTo>
+                  <a:lnTo>
+                    <a:pt x="3939238" y="12394"/>
                   </a:lnTo>
                   <a:lnTo>
                     <a:pt x="3867616" y="12673"/>
                   </a:lnTo>
                   <a:lnTo>
-                    <a:pt x="3795993" y="12952"/>
+                    <a:pt x="3795993" y="12953"/>
                   </a:lnTo>
                   <a:lnTo>
                     <a:pt x="3724371" y="13232"/>
                   </a:lnTo>
                   <a:lnTo>
-                    <a:pt x="3652748" y="13511"/>
-                  </a:lnTo>
-                  <a:lnTo>
-                    <a:pt x="3581126" y="13790"/>
+                    <a:pt x="3652748" y="13512"/>
+                  </a:lnTo>
+                  <a:lnTo>
+                    <a:pt x="3581126" y="13791"/>
                   </a:lnTo>
                   <a:lnTo>
                     <a:pt x="3509503" y="14070"/>
@@ -4074,142 +4074,142 @@
                     <a:pt x="3294636" y="14907"/>
                   </a:lnTo>
                   <a:lnTo>
-                    <a:pt x="3223013" y="15185"/>
-                  </a:lnTo>
-                  <a:lnTo>
-                    <a:pt x="3151391" y="15464"/>
-                  </a:lnTo>
-                  <a:lnTo>
-                    <a:pt x="3079768" y="15743"/>
-                  </a:lnTo>
-                  <a:lnTo>
-                    <a:pt x="3008146" y="44974"/>
+                    <a:pt x="3223013" y="15186"/>
+                  </a:lnTo>
+                  <a:lnTo>
+                    <a:pt x="3151391" y="15465"/>
+                  </a:lnTo>
+                  <a:lnTo>
+                    <a:pt x="3079768" y="15744"/>
+                  </a:lnTo>
+                  <a:lnTo>
+                    <a:pt x="3008146" y="44975"/>
                   </a:lnTo>
                   <a:lnTo>
                     <a:pt x="2936523" y="92430"/>
                   </a:lnTo>
                   <a:lnTo>
-                    <a:pt x="2864901" y="137206"/>
-                  </a:lnTo>
-                  <a:lnTo>
-                    <a:pt x="2793278" y="179454"/>
-                  </a:lnTo>
-                  <a:lnTo>
-                    <a:pt x="2721655" y="219317"/>
-                  </a:lnTo>
-                  <a:lnTo>
-                    <a:pt x="2650033" y="256930"/>
-                  </a:lnTo>
-                  <a:lnTo>
-                    <a:pt x="2578410" y="292419"/>
-                  </a:lnTo>
-                  <a:lnTo>
-                    <a:pt x="2506788" y="325904"/>
-                  </a:lnTo>
-                  <a:lnTo>
-                    <a:pt x="2435165" y="357499"/>
+                    <a:pt x="2864901" y="137207"/>
+                  </a:lnTo>
+                  <a:lnTo>
+                    <a:pt x="2793278" y="179455"/>
+                  </a:lnTo>
+                  <a:lnTo>
+                    <a:pt x="2721655" y="219318"/>
+                  </a:lnTo>
+                  <a:lnTo>
+                    <a:pt x="2650033" y="256931"/>
+                  </a:lnTo>
+                  <a:lnTo>
+                    <a:pt x="2578410" y="292420"/>
+                  </a:lnTo>
+                  <a:lnTo>
+                    <a:pt x="2506788" y="325905"/>
+                  </a:lnTo>
+                  <a:lnTo>
+                    <a:pt x="2435165" y="357500"/>
                   </a:lnTo>
                   <a:lnTo>
                     <a:pt x="2363543" y="387311"/>
                   </a:lnTo>
                   <a:lnTo>
-                    <a:pt x="2291920" y="415439"/>
-                  </a:lnTo>
-                  <a:lnTo>
-                    <a:pt x="2220298" y="441979"/>
-                  </a:lnTo>
-                  <a:lnTo>
-                    <a:pt x="2148675" y="467021"/>
-                  </a:lnTo>
-                  <a:lnTo>
-                    <a:pt x="2077053" y="490649"/>
-                  </a:lnTo>
-                  <a:lnTo>
-                    <a:pt x="2005430" y="512943"/>
-                  </a:lnTo>
-                  <a:lnTo>
-                    <a:pt x="1933808" y="533978"/>
-                  </a:lnTo>
-                  <a:lnTo>
-                    <a:pt x="1862185" y="553826"/>
-                  </a:lnTo>
-                  <a:lnTo>
-                    <a:pt x="1790563" y="572553"/>
-                  </a:lnTo>
-                  <a:lnTo>
-                    <a:pt x="1718940" y="590223"/>
+                    <a:pt x="2291920" y="415440"/>
+                  </a:lnTo>
+                  <a:lnTo>
+                    <a:pt x="2220298" y="441980"/>
+                  </a:lnTo>
+                  <a:lnTo>
+                    <a:pt x="2148675" y="467022"/>
+                  </a:lnTo>
+                  <a:lnTo>
+                    <a:pt x="2077053" y="490650"/>
+                  </a:lnTo>
+                  <a:lnTo>
+                    <a:pt x="2005430" y="512944"/>
+                  </a:lnTo>
+                  <a:lnTo>
+                    <a:pt x="1933808" y="533979"/>
+                  </a:lnTo>
+                  <a:lnTo>
+                    <a:pt x="1862185" y="553827"/>
+                  </a:lnTo>
+                  <a:lnTo>
+                    <a:pt x="1790563" y="572554"/>
+                  </a:lnTo>
+                  <a:lnTo>
+                    <a:pt x="1718940" y="590224"/>
                   </a:lnTo>
                   <a:lnTo>
                     <a:pt x="1647318" y="606896"/>
                   </a:lnTo>
                   <a:lnTo>
-                    <a:pt x="1575695" y="622627"/>
-                  </a:lnTo>
-                  <a:lnTo>
-                    <a:pt x="1504073" y="637470"/>
-                  </a:lnTo>
-                  <a:lnTo>
-                    <a:pt x="1432450" y="651475"/>
-                  </a:lnTo>
-                  <a:lnTo>
-                    <a:pt x="1360827" y="664689"/>
-                  </a:lnTo>
-                  <a:lnTo>
-                    <a:pt x="1289205" y="677157"/>
-                  </a:lnTo>
-                  <a:lnTo>
-                    <a:pt x="1217582" y="688922"/>
-                  </a:lnTo>
-                  <a:lnTo>
-                    <a:pt x="1145960" y="700022"/>
-                  </a:lnTo>
-                  <a:lnTo>
-                    <a:pt x="1074337" y="710495"/>
+                    <a:pt x="1575695" y="622628"/>
+                  </a:lnTo>
+                  <a:lnTo>
+                    <a:pt x="1504073" y="637471"/>
+                  </a:lnTo>
+                  <a:lnTo>
+                    <a:pt x="1432450" y="651476"/>
+                  </a:lnTo>
+                  <a:lnTo>
+                    <a:pt x="1360827" y="664690"/>
+                  </a:lnTo>
+                  <a:lnTo>
+                    <a:pt x="1289205" y="677158"/>
+                  </a:lnTo>
+                  <a:lnTo>
+                    <a:pt x="1217582" y="688923"/>
+                  </a:lnTo>
+                  <a:lnTo>
+                    <a:pt x="1145960" y="700023"/>
+                  </a:lnTo>
+                  <a:lnTo>
+                    <a:pt x="1074337" y="710496"/>
                   </a:lnTo>
                   <a:lnTo>
                     <a:pt x="1002715" y="720378"/>
                   </a:lnTo>
                   <a:lnTo>
-                    <a:pt x="931092" y="729702"/>
-                  </a:lnTo>
-                  <a:lnTo>
-                    <a:pt x="859470" y="738500"/>
-                  </a:lnTo>
-                  <a:lnTo>
-                    <a:pt x="787847" y="746801"/>
-                  </a:lnTo>
-                  <a:lnTo>
-                    <a:pt x="716225" y="754633"/>
-                  </a:lnTo>
-                  <a:lnTo>
-                    <a:pt x="644602" y="762024"/>
-                  </a:lnTo>
-                  <a:lnTo>
-                    <a:pt x="572980" y="768997"/>
-                  </a:lnTo>
-                  <a:lnTo>
-                    <a:pt x="501357" y="775576"/>
-                  </a:lnTo>
-                  <a:lnTo>
-                    <a:pt x="429735" y="781784"/>
+                    <a:pt x="931092" y="729703"/>
+                  </a:lnTo>
+                  <a:lnTo>
+                    <a:pt x="859470" y="738501"/>
+                  </a:lnTo>
+                  <a:lnTo>
+                    <a:pt x="787847" y="746802"/>
+                  </a:lnTo>
+                  <a:lnTo>
+                    <a:pt x="716225" y="754634"/>
+                  </a:lnTo>
+                  <a:lnTo>
+                    <a:pt x="644602" y="762025"/>
+                  </a:lnTo>
+                  <a:lnTo>
+                    <a:pt x="572980" y="768998"/>
+                  </a:lnTo>
+                  <a:lnTo>
+                    <a:pt x="501357" y="775577"/>
+                  </a:lnTo>
+                  <a:lnTo>
+                    <a:pt x="429735" y="781785"/>
                   </a:lnTo>
                   <a:lnTo>
                     <a:pt x="358112" y="787642"/>
                   </a:lnTo>
                   <a:lnTo>
-                    <a:pt x="286490" y="793168"/>
-                  </a:lnTo>
-                  <a:lnTo>
-                    <a:pt x="214867" y="798383"/>
-                  </a:lnTo>
-                  <a:lnTo>
-                    <a:pt x="143245" y="803303"/>
-                  </a:lnTo>
-                  <a:lnTo>
-                    <a:pt x="71622" y="807946"/>
-                  </a:lnTo>
-                  <a:lnTo>
-                    <a:pt x="0" y="812326"/>
+                    <a:pt x="286490" y="793169"/>
+                  </a:lnTo>
+                  <a:lnTo>
+                    <a:pt x="214867" y="798384"/>
+                  </a:lnTo>
+                  <a:lnTo>
+                    <a:pt x="143245" y="803304"/>
+                  </a:lnTo>
+                  <a:lnTo>
+                    <a:pt x="71622" y="807947"/>
+                  </a:lnTo>
+                  <a:lnTo>
+                    <a:pt x="0" y="812327"/>
                   </a:lnTo>
                 </a:path>
               </a:pathLst>
@@ -4230,12 +4230,12 @@
           <p:spPr>
             <a:xfrm>
               <a:off x="1172049" y="1896563"/>
-              <a:ext cx="6567891" cy="3402033"/>
+              <a:ext cx="6567889" cy="3402033"/>
             </a:xfrm>
             <a:custGeom>
               <a:avLst/>
               <a:pathLst>
-                <a:path w="6567891" h="3402033">
+                <a:path w="6567889" h="3402033">
                   <a:moveTo>
                     <a:pt x="0" y="3402033"/>
                   </a:moveTo>
@@ -4258,10 +4258,10 @@
                     <a:pt x="429735" y="3354015"/>
                   </a:lnTo>
                   <a:lnTo>
-                    <a:pt x="501357" y="3345161"/>
-                  </a:lnTo>
-                  <a:lnTo>
-                    <a:pt x="572980" y="3336045"/>
+                    <a:pt x="501357" y="3345162"/>
+                  </a:lnTo>
+                  <a:lnTo>
+                    <a:pt x="572980" y="3336046"/>
                   </a:lnTo>
                   <a:lnTo>
                     <a:pt x="644602" y="3326659"/>
@@ -4285,7 +4285,7 @@
                     <a:pt x="1074337" y="3264199"/>
                   </a:lnTo>
                   <a:lnTo>
-                    <a:pt x="1145960" y="3252682"/>
+                    <a:pt x="1145960" y="3252683"/>
                   </a:lnTo>
                   <a:lnTo>
                     <a:pt x="1217582" y="3240825"/>
@@ -4297,19 +4297,19 @@
                     <a:pt x="1360827" y="3216044"/>
                   </a:lnTo>
                   <a:lnTo>
-                    <a:pt x="1432450" y="3203099"/>
-                  </a:lnTo>
-                  <a:lnTo>
-                    <a:pt x="1504073" y="3189771"/>
+                    <a:pt x="1432450" y="3203100"/>
+                  </a:lnTo>
+                  <a:lnTo>
+                    <a:pt x="1504073" y="3189772"/>
                   </a:lnTo>
                   <a:lnTo>
                     <a:pt x="1575695" y="3176048"/>
                   </a:lnTo>
                   <a:lnTo>
-                    <a:pt x="1647318" y="3161918"/>
-                  </a:lnTo>
-                  <a:lnTo>
-                    <a:pt x="1718940" y="3147369"/>
+                    <a:pt x="1647318" y="3161919"/>
+                  </a:lnTo>
+                  <a:lnTo>
+                    <a:pt x="1718940" y="3147370"/>
                   </a:lnTo>
                   <a:lnTo>
                     <a:pt x="1790563" y="3132389"/>
@@ -4324,7 +4324,7 @@
                     <a:pt x="2005430" y="3084731"/>
                   </a:lnTo>
                   <a:lnTo>
-                    <a:pt x="2077053" y="3067893"/>
+                    <a:pt x="2077053" y="3067894"/>
                   </a:lnTo>
                   <a:lnTo>
                     <a:pt x="2148675" y="3050557"/>
@@ -4351,13 +4351,13 @@
                     <a:pt x="2650033" y="2913924"/>
                   </a:lnTo>
                   <a:lnTo>
-                    <a:pt x="2721655" y="2892022"/>
+                    <a:pt x="2721655" y="2892023"/>
                   </a:lnTo>
                   <a:lnTo>
                     <a:pt x="2793278" y="2869472"/>
                   </a:lnTo>
                   <a:lnTo>
-                    <a:pt x="2864901" y="2846252"/>
+                    <a:pt x="2864901" y="2846253"/>
                   </a:lnTo>
                   <a:lnTo>
                     <a:pt x="2936523" y="2822345"/>
@@ -4405,13 +4405,13 @@
                     <a:pt x="3939238" y="2402742"/>
                   </a:lnTo>
                   <a:lnTo>
-                    <a:pt x="4010861" y="2365686"/>
+                    <a:pt x="4010861" y="2365685"/>
                   </a:lnTo>
                   <a:lnTo>
                     <a:pt x="4082483" y="2327530"/>
                   </a:lnTo>
                   <a:lnTo>
-                    <a:pt x="4154106" y="2288244"/>
+                    <a:pt x="4154106" y="2288243"/>
                   </a:lnTo>
                   <a:lnTo>
                     <a:pt x="4225729" y="2247792"/>
@@ -4420,100 +4420,100 @@
                     <a:pt x="4297351" y="2206141"/>
                   </a:lnTo>
                   <a:lnTo>
-                    <a:pt x="4368974" y="2163256"/>
-                  </a:lnTo>
-                  <a:lnTo>
-                    <a:pt x="4440596" y="2119099"/>
-                  </a:lnTo>
-                  <a:lnTo>
-                    <a:pt x="4512219" y="2073633"/>
-                  </a:lnTo>
-                  <a:lnTo>
-                    <a:pt x="4583841" y="2026819"/>
-                  </a:lnTo>
-                  <a:lnTo>
-                    <a:pt x="4655464" y="1978617"/>
-                  </a:lnTo>
-                  <a:lnTo>
-                    <a:pt x="4727086" y="1928986"/>
-                  </a:lnTo>
-                  <a:lnTo>
-                    <a:pt x="4798709" y="1877883"/>
+                    <a:pt x="4368974" y="2163255"/>
+                  </a:lnTo>
+                  <a:lnTo>
+                    <a:pt x="4440596" y="2119098"/>
+                  </a:lnTo>
+                  <a:lnTo>
+                    <a:pt x="4512219" y="2073632"/>
+                  </a:lnTo>
+                  <a:lnTo>
+                    <a:pt x="4583841" y="2026818"/>
+                  </a:lnTo>
+                  <a:lnTo>
+                    <a:pt x="4655464" y="1978616"/>
+                  </a:lnTo>
+                  <a:lnTo>
+                    <a:pt x="4727086" y="1928985"/>
+                  </a:lnTo>
+                  <a:lnTo>
+                    <a:pt x="4798709" y="1877882"/>
                   </a:lnTo>
                   <a:lnTo>
                     <a:pt x="4870331" y="1825265"/>
                   </a:lnTo>
                   <a:lnTo>
-                    <a:pt x="4941954" y="1771088"/>
-                  </a:lnTo>
-                  <a:lnTo>
-                    <a:pt x="5013576" y="1715304"/>
-                  </a:lnTo>
-                  <a:lnTo>
-                    <a:pt x="5085199" y="1657866"/>
-                  </a:lnTo>
-                  <a:lnTo>
-                    <a:pt x="5156821" y="1598726"/>
-                  </a:lnTo>
-                  <a:lnTo>
-                    <a:pt x="5228444" y="1537832"/>
-                  </a:lnTo>
-                  <a:lnTo>
-                    <a:pt x="5300066" y="1475132"/>
-                  </a:lnTo>
-                  <a:lnTo>
-                    <a:pt x="5371689" y="1410574"/>
-                  </a:lnTo>
-                  <a:lnTo>
-                    <a:pt x="5443311" y="1344102"/>
-                  </a:lnTo>
-                  <a:lnTo>
-                    <a:pt x="5514934" y="1275659"/>
-                  </a:lnTo>
-                  <a:lnTo>
-                    <a:pt x="5586557" y="1205186"/>
-                  </a:lnTo>
-                  <a:lnTo>
-                    <a:pt x="5658179" y="1132625"/>
-                  </a:lnTo>
-                  <a:lnTo>
-                    <a:pt x="5729802" y="1057912"/>
-                  </a:lnTo>
-                  <a:lnTo>
-                    <a:pt x="5801424" y="980984"/>
-                  </a:lnTo>
-                  <a:lnTo>
-                    <a:pt x="5873047" y="901775"/>
-                  </a:lnTo>
-                  <a:lnTo>
-                    <a:pt x="5944669" y="820218"/>
-                  </a:lnTo>
-                  <a:lnTo>
-                    <a:pt x="6016292" y="736243"/>
-                  </a:lnTo>
-                  <a:lnTo>
-                    <a:pt x="6087914" y="649779"/>
-                  </a:lnTo>
-                  <a:lnTo>
-                    <a:pt x="6159537" y="560751"/>
-                  </a:lnTo>
-                  <a:lnTo>
-                    <a:pt x="6231159" y="469083"/>
-                  </a:lnTo>
-                  <a:lnTo>
-                    <a:pt x="6302782" y="374698"/>
-                  </a:lnTo>
-                  <a:lnTo>
-                    <a:pt x="6374404" y="277514"/>
-                  </a:lnTo>
-                  <a:lnTo>
-                    <a:pt x="6446027" y="177449"/>
-                  </a:lnTo>
-                  <a:lnTo>
-                    <a:pt x="6517649" y="74417"/>
-                  </a:lnTo>
-                  <a:lnTo>
-                    <a:pt x="6567891" y="0"/>
+                    <a:pt x="4941954" y="1771087"/>
+                  </a:lnTo>
+                  <a:lnTo>
+                    <a:pt x="5013576" y="1715303"/>
+                  </a:lnTo>
+                  <a:lnTo>
+                    <a:pt x="5085199" y="1657865"/>
+                  </a:lnTo>
+                  <a:lnTo>
+                    <a:pt x="5156821" y="1598724"/>
+                  </a:lnTo>
+                  <a:lnTo>
+                    <a:pt x="5228444" y="1537830"/>
+                  </a:lnTo>
+                  <a:lnTo>
+                    <a:pt x="5300066" y="1475131"/>
+                  </a:lnTo>
+                  <a:lnTo>
+                    <a:pt x="5371689" y="1410572"/>
+                  </a:lnTo>
+                  <a:lnTo>
+                    <a:pt x="5443311" y="1344100"/>
+                  </a:lnTo>
+                  <a:lnTo>
+                    <a:pt x="5514934" y="1275657"/>
+                  </a:lnTo>
+                  <a:lnTo>
+                    <a:pt x="5586557" y="1205185"/>
+                  </a:lnTo>
+                  <a:lnTo>
+                    <a:pt x="5658179" y="1132623"/>
+                  </a:lnTo>
+                  <a:lnTo>
+                    <a:pt x="5729802" y="1057910"/>
+                  </a:lnTo>
+                  <a:lnTo>
+                    <a:pt x="5801424" y="980982"/>
+                  </a:lnTo>
+                  <a:lnTo>
+                    <a:pt x="5873047" y="901773"/>
+                  </a:lnTo>
+                  <a:lnTo>
+                    <a:pt x="5944669" y="820216"/>
+                  </a:lnTo>
+                  <a:lnTo>
+                    <a:pt x="6016292" y="736241"/>
+                  </a:lnTo>
+                  <a:lnTo>
+                    <a:pt x="6087914" y="649776"/>
+                  </a:lnTo>
+                  <a:lnTo>
+                    <a:pt x="6159537" y="560748"/>
+                  </a:lnTo>
+                  <a:lnTo>
+                    <a:pt x="6231159" y="469080"/>
+                  </a:lnTo>
+                  <a:lnTo>
+                    <a:pt x="6302782" y="374695"/>
+                  </a:lnTo>
+                  <a:lnTo>
+                    <a:pt x="6374404" y="277511"/>
+                  </a:lnTo>
+                  <a:lnTo>
+                    <a:pt x="6446027" y="177446"/>
+                  </a:lnTo>
+                  <a:lnTo>
+                    <a:pt x="6517649" y="74414"/>
+                  </a:lnTo>
+                  <a:lnTo>
+                    <a:pt x="6567889" y="0"/>
                   </a:lnTo>
                 </a:path>
               </a:pathLst>

--- a/docs/plots/carbo/jx_carbo_linsubhr_dosedisc_throm2.pptx
+++ b/docs/plots/carbo/jx_carbo_linsubhr_dosedisc_throm2.pptx
@@ -2271,7 +2271,7 @@
           </p:nvSpPr>
           <p:spPr>
             <a:xfrm>
-              <a:off x="817517" y="5114368"/>
+              <a:off x="817517" y="5142518"/>
               <a:ext cx="7799693" cy="0"/>
             </a:xfrm>
             <a:custGeom>
@@ -2314,7 +2314,7 @@
           </p:nvSpPr>
           <p:spPr>
             <a:xfrm>
-              <a:off x="817517" y="4244691"/>
+              <a:off x="817517" y="4313054"/>
               <a:ext cx="7799693" cy="0"/>
             </a:xfrm>
             <a:custGeom>
@@ -2357,7 +2357,7 @@
           </p:nvSpPr>
           <p:spPr>
             <a:xfrm>
-              <a:off x="817517" y="3375014"/>
+              <a:off x="817517" y="3483591"/>
               <a:ext cx="7799693" cy="0"/>
             </a:xfrm>
             <a:custGeom>
@@ -2400,7 +2400,7 @@
           </p:nvSpPr>
           <p:spPr>
             <a:xfrm>
-              <a:off x="817517" y="2505337"/>
+              <a:off x="817517" y="2654127"/>
               <a:ext cx="7799693" cy="0"/>
             </a:xfrm>
             <a:custGeom>
@@ -2443,15 +2443,15 @@
           </p:nvSpPr>
           <p:spPr>
             <a:xfrm>
-              <a:off x="2122745" y="1896563"/>
-              <a:ext cx="0" cy="3826579"/>
+              <a:off x="2122745" y="2073503"/>
+              <a:ext cx="0" cy="3649639"/>
             </a:xfrm>
             <a:custGeom>
               <a:avLst/>
               <a:pathLst>
-                <a:path w="0" h="3826579">
+                <a:path w="0" h="3649639">
                   <a:moveTo>
-                    <a:pt x="0" y="3826579"/>
+                    <a:pt x="0" y="3649639"/>
                   </a:moveTo>
                   <a:lnTo>
                     <a:pt x="0" y="0"/>
@@ -2486,15 +2486,15 @@
           </p:nvSpPr>
           <p:spPr>
             <a:xfrm>
-              <a:off x="3487174" y="1896563"/>
-              <a:ext cx="0" cy="3826579"/>
+              <a:off x="3487174" y="2073503"/>
+              <a:ext cx="0" cy="3649639"/>
             </a:xfrm>
             <a:custGeom>
               <a:avLst/>
               <a:pathLst>
-                <a:path w="0" h="3826579">
+                <a:path w="0" h="3649639">
                   <a:moveTo>
-                    <a:pt x="0" y="3826579"/>
+                    <a:pt x="0" y="3649639"/>
                   </a:moveTo>
                   <a:lnTo>
                     <a:pt x="0" y="0"/>
@@ -2529,15 +2529,15 @@
           </p:nvSpPr>
           <p:spPr>
             <a:xfrm>
-              <a:off x="4851604" y="1896563"/>
-              <a:ext cx="0" cy="3826579"/>
+              <a:off x="4851604" y="2073503"/>
+              <a:ext cx="0" cy="3649639"/>
             </a:xfrm>
             <a:custGeom>
               <a:avLst/>
               <a:pathLst>
-                <a:path w="0" h="3826579">
+                <a:path w="0" h="3649639">
                   <a:moveTo>
-                    <a:pt x="0" y="3826579"/>
+                    <a:pt x="0" y="3649639"/>
                   </a:moveTo>
                   <a:lnTo>
                     <a:pt x="0" y="0"/>
@@ -2572,15 +2572,15 @@
           </p:nvSpPr>
           <p:spPr>
             <a:xfrm>
-              <a:off x="6216034" y="1896563"/>
-              <a:ext cx="0" cy="3826579"/>
+              <a:off x="6216034" y="2073503"/>
+              <a:ext cx="0" cy="3649639"/>
             </a:xfrm>
             <a:custGeom>
               <a:avLst/>
               <a:pathLst>
-                <a:path w="0" h="3826579">
+                <a:path w="0" h="3649639">
                   <a:moveTo>
-                    <a:pt x="0" y="3826579"/>
+                    <a:pt x="0" y="3649639"/>
                   </a:moveTo>
                   <a:lnTo>
                     <a:pt x="0" y="0"/>
@@ -2615,15 +2615,15 @@
           </p:nvSpPr>
           <p:spPr>
             <a:xfrm>
-              <a:off x="7580464" y="1896563"/>
-              <a:ext cx="0" cy="3826579"/>
+              <a:off x="7580464" y="2073503"/>
+              <a:ext cx="0" cy="3649639"/>
             </a:xfrm>
             <a:custGeom>
               <a:avLst/>
               <a:pathLst>
-                <a:path w="0" h="3826579">
+                <a:path w="0" h="3649639">
                   <a:moveTo>
-                    <a:pt x="0" y="3826579"/>
+                    <a:pt x="0" y="3649639"/>
                   </a:moveTo>
                   <a:lnTo>
                     <a:pt x="0" y="0"/>
@@ -2658,7 +2658,7 @@
           </p:nvSpPr>
           <p:spPr>
             <a:xfrm>
-              <a:off x="817517" y="5549207"/>
+              <a:off x="817517" y="5557249"/>
               <a:ext cx="7799693" cy="0"/>
             </a:xfrm>
             <a:custGeom>
@@ -2701,7 +2701,7 @@
           </p:nvSpPr>
           <p:spPr>
             <a:xfrm>
-              <a:off x="817517" y="4679530"/>
+              <a:off x="817517" y="4727786"/>
               <a:ext cx="7799693" cy="0"/>
             </a:xfrm>
             <a:custGeom>
@@ -2744,7 +2744,7 @@
           </p:nvSpPr>
           <p:spPr>
             <a:xfrm>
-              <a:off x="817517" y="3809853"/>
+              <a:off x="817517" y="3898322"/>
               <a:ext cx="7799693" cy="0"/>
             </a:xfrm>
             <a:custGeom>
@@ -2787,7 +2787,7 @@
           </p:nvSpPr>
           <p:spPr>
             <a:xfrm>
-              <a:off x="817517" y="2940175"/>
+              <a:off x="817517" y="3068859"/>
               <a:ext cx="7799693" cy="0"/>
             </a:xfrm>
             <a:custGeom>
@@ -2830,7 +2830,7 @@
           </p:nvSpPr>
           <p:spPr>
             <a:xfrm>
-              <a:off x="817517" y="2070498"/>
+              <a:off x="817517" y="2239395"/>
               <a:ext cx="7799693" cy="0"/>
             </a:xfrm>
             <a:custGeom>
@@ -2873,15 +2873,15 @@
           </p:nvSpPr>
           <p:spPr>
             <a:xfrm>
-              <a:off x="1440530" y="1896563"/>
-              <a:ext cx="0" cy="3826579"/>
+              <a:off x="1440530" y="2073503"/>
+              <a:ext cx="0" cy="3649639"/>
             </a:xfrm>
             <a:custGeom>
               <a:avLst/>
               <a:pathLst>
-                <a:path w="0" h="3826579">
+                <a:path w="0" h="3649639">
                   <a:moveTo>
-                    <a:pt x="0" y="3826579"/>
+                    <a:pt x="0" y="3649639"/>
                   </a:moveTo>
                   <a:lnTo>
                     <a:pt x="0" y="0"/>
@@ -2916,15 +2916,15 @@
           </p:nvSpPr>
           <p:spPr>
             <a:xfrm>
-              <a:off x="2804959" y="1896563"/>
-              <a:ext cx="0" cy="3826579"/>
+              <a:off x="2804959" y="2073503"/>
+              <a:ext cx="0" cy="3649639"/>
             </a:xfrm>
             <a:custGeom>
               <a:avLst/>
               <a:pathLst>
-                <a:path w="0" h="3826579">
+                <a:path w="0" h="3649639">
                   <a:moveTo>
-                    <a:pt x="0" y="3826579"/>
+                    <a:pt x="0" y="3649639"/>
                   </a:moveTo>
                   <a:lnTo>
                     <a:pt x="0" y="0"/>
@@ -2959,15 +2959,15 @@
           </p:nvSpPr>
           <p:spPr>
             <a:xfrm>
-              <a:off x="4169389" y="1896563"/>
-              <a:ext cx="0" cy="3826579"/>
+              <a:off x="4169389" y="2073503"/>
+              <a:ext cx="0" cy="3649639"/>
             </a:xfrm>
             <a:custGeom>
               <a:avLst/>
               <a:pathLst>
-                <a:path w="0" h="3826579">
+                <a:path w="0" h="3649639">
                   <a:moveTo>
-                    <a:pt x="0" y="3826579"/>
+                    <a:pt x="0" y="3649639"/>
                   </a:moveTo>
                   <a:lnTo>
                     <a:pt x="0" y="0"/>
@@ -3002,15 +3002,15 @@
           </p:nvSpPr>
           <p:spPr>
             <a:xfrm>
-              <a:off x="5533819" y="1896563"/>
-              <a:ext cx="0" cy="3826579"/>
+              <a:off x="5533819" y="2073503"/>
+              <a:ext cx="0" cy="3649639"/>
             </a:xfrm>
             <a:custGeom>
               <a:avLst/>
               <a:pathLst>
-                <a:path w="0" h="3826579">
+                <a:path w="0" h="3649639">
                   <a:moveTo>
-                    <a:pt x="0" y="3826579"/>
+                    <a:pt x="0" y="3649639"/>
                   </a:moveTo>
                   <a:lnTo>
                     <a:pt x="0" y="0"/>
@@ -3045,15 +3045,15 @@
           </p:nvSpPr>
           <p:spPr>
             <a:xfrm>
-              <a:off x="6898249" y="1896563"/>
-              <a:ext cx="0" cy="3826579"/>
+              <a:off x="6898249" y="2073503"/>
+              <a:ext cx="0" cy="3649639"/>
             </a:xfrm>
             <a:custGeom>
               <a:avLst/>
               <a:pathLst>
-                <a:path w="0" h="3826579">
+                <a:path w="0" h="3649639">
                   <a:moveTo>
-                    <a:pt x="0" y="3826579"/>
+                    <a:pt x="0" y="3649639"/>
                   </a:moveTo>
                   <a:lnTo>
                     <a:pt x="0" y="0"/>
@@ -3088,15 +3088,15 @@
           </p:nvSpPr>
           <p:spPr>
             <a:xfrm>
-              <a:off x="8262679" y="1896563"/>
-              <a:ext cx="0" cy="3826579"/>
+              <a:off x="8262679" y="2073503"/>
+              <a:ext cx="0" cy="3649639"/>
             </a:xfrm>
             <a:custGeom>
               <a:avLst/>
               <a:pathLst>
-                <a:path w="0" h="3826579">
+                <a:path w="0" h="3649639">
                   <a:moveTo>
-                    <a:pt x="0" y="3826579"/>
+                    <a:pt x="0" y="3649639"/>
                   </a:moveTo>
                   <a:lnTo>
                     <a:pt x="0" y="0"/>
@@ -3131,216 +3131,216 @@
           </p:nvSpPr>
           <p:spPr>
             <a:xfrm>
-              <a:off x="1172049" y="1896563"/>
-              <a:ext cx="7090630" cy="3579434"/>
+              <a:off x="1172049" y="2073503"/>
+              <a:ext cx="7090630" cy="3413923"/>
             </a:xfrm>
             <a:custGeom>
               <a:avLst/>
               <a:pathLst>
-                <a:path w="7090630" h="3579434">
+                <a:path w="7090630" h="3413923">
                   <a:moveTo>
-                    <a:pt x="0" y="2794750"/>
+                    <a:pt x="0" y="2665522"/>
                   </a:moveTo>
                   <a:lnTo>
-                    <a:pt x="71622" y="2794475"/>
-                  </a:lnTo>
-                  <a:lnTo>
-                    <a:pt x="143245" y="2794200"/>
-                  </a:lnTo>
-                  <a:lnTo>
-                    <a:pt x="214867" y="2793925"/>
-                  </a:lnTo>
-                  <a:lnTo>
-                    <a:pt x="286490" y="2793650"/>
-                  </a:lnTo>
-                  <a:lnTo>
-                    <a:pt x="358112" y="2793375"/>
-                  </a:lnTo>
-                  <a:lnTo>
-                    <a:pt x="429735" y="2793099"/>
-                  </a:lnTo>
-                  <a:lnTo>
-                    <a:pt x="501357" y="2792824"/>
-                  </a:lnTo>
-                  <a:lnTo>
-                    <a:pt x="572980" y="2792548"/>
-                  </a:lnTo>
-                  <a:lnTo>
-                    <a:pt x="644602" y="2792273"/>
-                  </a:lnTo>
-                  <a:lnTo>
-                    <a:pt x="716225" y="2791997"/>
-                  </a:lnTo>
-                  <a:lnTo>
-                    <a:pt x="787847" y="2791721"/>
-                  </a:lnTo>
-                  <a:lnTo>
-                    <a:pt x="859470" y="2791446"/>
-                  </a:lnTo>
-                  <a:lnTo>
-                    <a:pt x="931092" y="2791170"/>
-                  </a:lnTo>
-                  <a:lnTo>
-                    <a:pt x="1002715" y="2790894"/>
-                  </a:lnTo>
-                  <a:lnTo>
-                    <a:pt x="1074337" y="2790618"/>
-                  </a:lnTo>
-                  <a:lnTo>
-                    <a:pt x="1145960" y="2790341"/>
-                  </a:lnTo>
-                  <a:lnTo>
-                    <a:pt x="1217582" y="2790065"/>
-                  </a:lnTo>
-                  <a:lnTo>
-                    <a:pt x="1289205" y="2789789"/>
-                  </a:lnTo>
-                  <a:lnTo>
-                    <a:pt x="1360827" y="2789512"/>
-                  </a:lnTo>
-                  <a:lnTo>
-                    <a:pt x="1432450" y="2789236"/>
-                  </a:lnTo>
-                  <a:lnTo>
-                    <a:pt x="1504073" y="2788959"/>
-                  </a:lnTo>
-                  <a:lnTo>
-                    <a:pt x="1575695" y="2788682"/>
-                  </a:lnTo>
-                  <a:lnTo>
-                    <a:pt x="1647318" y="2788406"/>
-                  </a:lnTo>
-                  <a:lnTo>
-                    <a:pt x="1718940" y="2788129"/>
-                  </a:lnTo>
-                  <a:lnTo>
-                    <a:pt x="1790563" y="2787852"/>
-                  </a:lnTo>
-                  <a:lnTo>
-                    <a:pt x="1862185" y="2787575"/>
-                  </a:lnTo>
-                  <a:lnTo>
-                    <a:pt x="1933808" y="2787298"/>
-                  </a:lnTo>
-                  <a:lnTo>
-                    <a:pt x="2005430" y="2787020"/>
-                  </a:lnTo>
-                  <a:lnTo>
-                    <a:pt x="2077053" y="2786743"/>
-                  </a:lnTo>
-                  <a:lnTo>
-                    <a:pt x="2148675" y="2786466"/>
-                  </a:lnTo>
-                  <a:lnTo>
-                    <a:pt x="2220298" y="2786188"/>
-                  </a:lnTo>
-                  <a:lnTo>
-                    <a:pt x="2291920" y="2785910"/>
-                  </a:lnTo>
-                  <a:lnTo>
-                    <a:pt x="2363543" y="2785633"/>
-                  </a:lnTo>
-                  <a:lnTo>
-                    <a:pt x="2435165" y="2785355"/>
-                  </a:lnTo>
-                  <a:lnTo>
-                    <a:pt x="2506788" y="2785077"/>
-                  </a:lnTo>
-                  <a:lnTo>
-                    <a:pt x="2578410" y="2784799"/>
-                  </a:lnTo>
-                  <a:lnTo>
-                    <a:pt x="2650033" y="2784521"/>
-                  </a:lnTo>
-                  <a:lnTo>
-                    <a:pt x="2721655" y="2784243"/>
-                  </a:lnTo>
-                  <a:lnTo>
-                    <a:pt x="2793278" y="2783965"/>
-                  </a:lnTo>
-                  <a:lnTo>
-                    <a:pt x="2864901" y="2783686"/>
-                  </a:lnTo>
-                  <a:lnTo>
-                    <a:pt x="2936523" y="2783408"/>
-                  </a:lnTo>
-                  <a:lnTo>
-                    <a:pt x="3008146" y="2783129"/>
-                  </a:lnTo>
-                  <a:lnTo>
-                    <a:pt x="3079768" y="2761787"/>
-                  </a:lnTo>
-                  <a:lnTo>
-                    <a:pt x="3151391" y="2708483"/>
-                  </a:lnTo>
-                  <a:lnTo>
-                    <a:pt x="3223013" y="2651989"/>
-                  </a:lnTo>
-                  <a:lnTo>
-                    <a:pt x="3294636" y="2592115"/>
-                  </a:lnTo>
-                  <a:lnTo>
-                    <a:pt x="3366258" y="2528658"/>
-                  </a:lnTo>
-                  <a:lnTo>
-                    <a:pt x="3437881" y="2461405"/>
-                  </a:lnTo>
-                  <a:lnTo>
-                    <a:pt x="3509503" y="2390127"/>
-                  </a:lnTo>
-                  <a:lnTo>
-                    <a:pt x="3581126" y="2314585"/>
-                  </a:lnTo>
-                  <a:lnTo>
-                    <a:pt x="3652748" y="2234522"/>
-                  </a:lnTo>
-                  <a:lnTo>
-                    <a:pt x="3724371" y="2149669"/>
-                  </a:lnTo>
-                  <a:lnTo>
-                    <a:pt x="3795993" y="2059738"/>
-                  </a:lnTo>
-                  <a:lnTo>
-                    <a:pt x="3867616" y="1964427"/>
-                  </a:lnTo>
-                  <a:lnTo>
-                    <a:pt x="3939238" y="1863412"/>
-                  </a:lnTo>
-                  <a:lnTo>
-                    <a:pt x="4010861" y="1756354"/>
-                  </a:lnTo>
-                  <a:lnTo>
-                    <a:pt x="4082483" y="1642890"/>
-                  </a:lnTo>
-                  <a:lnTo>
-                    <a:pt x="4154106" y="1522636"/>
-                  </a:lnTo>
-                  <a:lnTo>
-                    <a:pt x="4225729" y="1395187"/>
-                  </a:lnTo>
-                  <a:lnTo>
-                    <a:pt x="4297351" y="1260112"/>
-                  </a:lnTo>
-                  <a:lnTo>
-                    <a:pt x="4368974" y="1116955"/>
-                  </a:lnTo>
-                  <a:lnTo>
-                    <a:pt x="4440596" y="965233"/>
-                  </a:lnTo>
-                  <a:lnTo>
-                    <a:pt x="4512219" y="804432"/>
-                  </a:lnTo>
-                  <a:lnTo>
-                    <a:pt x="4583841" y="634009"/>
-                  </a:lnTo>
-                  <a:lnTo>
-                    <a:pt x="4655464" y="453389"/>
-                  </a:lnTo>
-                  <a:lnTo>
-                    <a:pt x="4727086" y="261962"/>
-                  </a:lnTo>
-                  <a:lnTo>
-                    <a:pt x="4798709" y="59081"/>
+                    <a:pt x="71622" y="2665259"/>
+                  </a:lnTo>
+                  <a:lnTo>
+                    <a:pt x="143245" y="2664997"/>
+                  </a:lnTo>
+                  <a:lnTo>
+                    <a:pt x="214867" y="2664735"/>
+                  </a:lnTo>
+                  <a:lnTo>
+                    <a:pt x="286490" y="2664472"/>
+                  </a:lnTo>
+                  <a:lnTo>
+                    <a:pt x="358112" y="2664210"/>
+                  </a:lnTo>
+                  <a:lnTo>
+                    <a:pt x="429735" y="2663947"/>
+                  </a:lnTo>
+                  <a:lnTo>
+                    <a:pt x="501357" y="2663685"/>
+                  </a:lnTo>
+                  <a:lnTo>
+                    <a:pt x="572980" y="2663422"/>
+                  </a:lnTo>
+                  <a:lnTo>
+                    <a:pt x="644602" y="2663159"/>
+                  </a:lnTo>
+                  <a:lnTo>
+                    <a:pt x="716225" y="2662896"/>
+                  </a:lnTo>
+                  <a:lnTo>
+                    <a:pt x="787847" y="2662633"/>
+                  </a:lnTo>
+                  <a:lnTo>
+                    <a:pt x="859470" y="2662370"/>
+                  </a:lnTo>
+                  <a:lnTo>
+                    <a:pt x="931092" y="2662107"/>
+                  </a:lnTo>
+                  <a:lnTo>
+                    <a:pt x="1002715" y="2661844"/>
+                  </a:lnTo>
+                  <a:lnTo>
+                    <a:pt x="1074337" y="2661580"/>
+                  </a:lnTo>
+                  <a:lnTo>
+                    <a:pt x="1145960" y="2661317"/>
+                  </a:lnTo>
+                  <a:lnTo>
+                    <a:pt x="1217582" y="2661054"/>
+                  </a:lnTo>
+                  <a:lnTo>
+                    <a:pt x="1289205" y="2660790"/>
+                  </a:lnTo>
+                  <a:lnTo>
+                    <a:pt x="1360827" y="2660526"/>
+                  </a:lnTo>
+                  <a:lnTo>
+                    <a:pt x="1432450" y="2660263"/>
+                  </a:lnTo>
+                  <a:lnTo>
+                    <a:pt x="1504073" y="2659999"/>
+                  </a:lnTo>
+                  <a:lnTo>
+                    <a:pt x="1575695" y="2659735"/>
+                  </a:lnTo>
+                  <a:lnTo>
+                    <a:pt x="1647318" y="2659471"/>
+                  </a:lnTo>
+                  <a:lnTo>
+                    <a:pt x="1718940" y="2659207"/>
+                  </a:lnTo>
+                  <a:lnTo>
+                    <a:pt x="1790563" y="2658943"/>
+                  </a:lnTo>
+                  <a:lnTo>
+                    <a:pt x="1862185" y="2658678"/>
+                  </a:lnTo>
+                  <a:lnTo>
+                    <a:pt x="1933808" y="2658414"/>
+                  </a:lnTo>
+                  <a:lnTo>
+                    <a:pt x="2005430" y="2658149"/>
+                  </a:lnTo>
+                  <a:lnTo>
+                    <a:pt x="2077053" y="2657885"/>
+                  </a:lnTo>
+                  <a:lnTo>
+                    <a:pt x="2148675" y="2657620"/>
+                  </a:lnTo>
+                  <a:lnTo>
+                    <a:pt x="2220298" y="2657356"/>
+                  </a:lnTo>
+                  <a:lnTo>
+                    <a:pt x="2291920" y="2657091"/>
+                  </a:lnTo>
+                  <a:lnTo>
+                    <a:pt x="2363543" y="2656826"/>
+                  </a:lnTo>
+                  <a:lnTo>
+                    <a:pt x="2435165" y="2656561"/>
+                  </a:lnTo>
+                  <a:lnTo>
+                    <a:pt x="2506788" y="2656296"/>
+                  </a:lnTo>
+                  <a:lnTo>
+                    <a:pt x="2578410" y="2656031"/>
+                  </a:lnTo>
+                  <a:lnTo>
+                    <a:pt x="2650033" y="2655766"/>
+                  </a:lnTo>
+                  <a:lnTo>
+                    <a:pt x="2721655" y="2655501"/>
+                  </a:lnTo>
+                  <a:lnTo>
+                    <a:pt x="2793278" y="2655235"/>
+                  </a:lnTo>
+                  <a:lnTo>
+                    <a:pt x="2864901" y="2654970"/>
+                  </a:lnTo>
+                  <a:lnTo>
+                    <a:pt x="2936523" y="2654704"/>
+                  </a:lnTo>
+                  <a:lnTo>
+                    <a:pt x="3008146" y="2654439"/>
+                  </a:lnTo>
+                  <a:lnTo>
+                    <a:pt x="3079768" y="2634083"/>
+                  </a:lnTo>
+                  <a:lnTo>
+                    <a:pt x="3151391" y="2583244"/>
+                  </a:lnTo>
+                  <a:lnTo>
+                    <a:pt x="3223013" y="2529362"/>
+                  </a:lnTo>
+                  <a:lnTo>
+                    <a:pt x="3294636" y="2472257"/>
+                  </a:lnTo>
+                  <a:lnTo>
+                    <a:pt x="3366258" y="2411734"/>
+                  </a:lnTo>
+                  <a:lnTo>
+                    <a:pt x="3437881" y="2347590"/>
+                  </a:lnTo>
+                  <a:lnTo>
+                    <a:pt x="3509503" y="2279608"/>
+                  </a:lnTo>
+                  <a:lnTo>
+                    <a:pt x="3581126" y="2207559"/>
+                  </a:lnTo>
+                  <a:lnTo>
+                    <a:pt x="3652748" y="2131198"/>
+                  </a:lnTo>
+                  <a:lnTo>
+                    <a:pt x="3724371" y="2050269"/>
+                  </a:lnTo>
+                  <a:lnTo>
+                    <a:pt x="3795993" y="1964497"/>
+                  </a:lnTo>
+                  <a:lnTo>
+                    <a:pt x="3867616" y="1873592"/>
+                  </a:lnTo>
+                  <a:lnTo>
+                    <a:pt x="3939238" y="1777249"/>
+                  </a:lnTo>
+                  <a:lnTo>
+                    <a:pt x="4010861" y="1675141"/>
+                  </a:lnTo>
+                  <a:lnTo>
+                    <a:pt x="4082483" y="1566923"/>
+                  </a:lnTo>
+                  <a:lnTo>
+                    <a:pt x="4154106" y="1452230"/>
+                  </a:lnTo>
+                  <a:lnTo>
+                    <a:pt x="4225729" y="1330674"/>
+                  </a:lnTo>
+                  <a:lnTo>
+                    <a:pt x="4297351" y="1201845"/>
+                  </a:lnTo>
+                  <a:lnTo>
+                    <a:pt x="4368974" y="1065308"/>
+                  </a:lnTo>
+                  <a:lnTo>
+                    <a:pt x="4440596" y="920601"/>
+                  </a:lnTo>
+                  <a:lnTo>
+                    <a:pt x="4512219" y="767235"/>
+                  </a:lnTo>
+                  <a:lnTo>
+                    <a:pt x="4583841" y="604693"/>
+                  </a:lnTo>
+                  <a:lnTo>
+                    <a:pt x="4655464" y="432425"/>
+                  </a:lnTo>
+                  <a:lnTo>
+                    <a:pt x="4727086" y="249849"/>
+                  </a:lnTo>
+                  <a:lnTo>
+                    <a:pt x="4798709" y="56349"/>
                   </a:lnTo>
                   <a:lnTo>
                     <a:pt x="4818388" y="0"/>
@@ -3349,304 +3349,304 @@
                     <a:pt x="7090630" y="0"/>
                   </a:lnTo>
                   <a:lnTo>
-                    <a:pt x="7090630" y="2767107"/>
-                  </a:lnTo>
-                  <a:lnTo>
-                    <a:pt x="7019007" y="2767390"/>
-                  </a:lnTo>
-                  <a:lnTo>
-                    <a:pt x="6947385" y="2767674"/>
-                  </a:lnTo>
-                  <a:lnTo>
-                    <a:pt x="6875762" y="2767957"/>
-                  </a:lnTo>
-                  <a:lnTo>
-                    <a:pt x="6804139" y="2768241"/>
-                  </a:lnTo>
-                  <a:lnTo>
-                    <a:pt x="6732517" y="2768524"/>
-                  </a:lnTo>
-                  <a:lnTo>
-                    <a:pt x="6660894" y="2768807"/>
-                  </a:lnTo>
-                  <a:lnTo>
-                    <a:pt x="6589272" y="2769090"/>
-                  </a:lnTo>
-                  <a:lnTo>
-                    <a:pt x="6517649" y="2769373"/>
-                  </a:lnTo>
-                  <a:lnTo>
-                    <a:pt x="6446027" y="2769656"/>
-                  </a:lnTo>
-                  <a:lnTo>
-                    <a:pt x="6374404" y="2769939"/>
-                  </a:lnTo>
-                  <a:lnTo>
-                    <a:pt x="6302782" y="2770222"/>
-                  </a:lnTo>
-                  <a:lnTo>
-                    <a:pt x="6231159" y="2770504"/>
-                  </a:lnTo>
-                  <a:lnTo>
-                    <a:pt x="6159537" y="2770787"/>
-                  </a:lnTo>
-                  <a:lnTo>
-                    <a:pt x="6087914" y="2771069"/>
-                  </a:lnTo>
-                  <a:lnTo>
-                    <a:pt x="6016292" y="2771352"/>
-                  </a:lnTo>
-                  <a:lnTo>
-                    <a:pt x="5944669" y="2771634"/>
-                  </a:lnTo>
-                  <a:lnTo>
-                    <a:pt x="5873047" y="2771916"/>
-                  </a:lnTo>
-                  <a:lnTo>
-                    <a:pt x="5801424" y="2772198"/>
-                  </a:lnTo>
-                  <a:lnTo>
-                    <a:pt x="5729802" y="2772480"/>
-                  </a:lnTo>
-                  <a:lnTo>
-                    <a:pt x="5658179" y="2772762"/>
-                  </a:lnTo>
-                  <a:lnTo>
-                    <a:pt x="5586557" y="2773044"/>
-                  </a:lnTo>
-                  <a:lnTo>
-                    <a:pt x="5514934" y="2773326"/>
-                  </a:lnTo>
-                  <a:lnTo>
-                    <a:pt x="5443311" y="2773607"/>
-                  </a:lnTo>
-                  <a:lnTo>
-                    <a:pt x="5371689" y="2773889"/>
-                  </a:lnTo>
-                  <a:lnTo>
-                    <a:pt x="5300066" y="2774170"/>
-                  </a:lnTo>
-                  <a:lnTo>
-                    <a:pt x="5228444" y="2774452"/>
-                  </a:lnTo>
-                  <a:lnTo>
-                    <a:pt x="5156821" y="2774733"/>
-                  </a:lnTo>
-                  <a:lnTo>
-                    <a:pt x="5085199" y="2775014"/>
-                  </a:lnTo>
-                  <a:lnTo>
-                    <a:pt x="5013576" y="2775295"/>
-                  </a:lnTo>
-                  <a:lnTo>
-                    <a:pt x="4941954" y="2775576"/>
-                  </a:lnTo>
-                  <a:lnTo>
-                    <a:pt x="4870331" y="2775857"/>
-                  </a:lnTo>
-                  <a:lnTo>
-                    <a:pt x="4798709" y="2776138"/>
-                  </a:lnTo>
-                  <a:lnTo>
-                    <a:pt x="4727086" y="2776419"/>
-                  </a:lnTo>
-                  <a:lnTo>
-                    <a:pt x="4655464" y="2776699"/>
-                  </a:lnTo>
-                  <a:lnTo>
-                    <a:pt x="4583841" y="2776980"/>
-                  </a:lnTo>
-                  <a:lnTo>
-                    <a:pt x="4512219" y="2777260"/>
-                  </a:lnTo>
-                  <a:lnTo>
-                    <a:pt x="4440596" y="2777541"/>
-                  </a:lnTo>
-                  <a:lnTo>
-                    <a:pt x="4368974" y="2777821"/>
-                  </a:lnTo>
-                  <a:lnTo>
-                    <a:pt x="4297351" y="2778101"/>
-                  </a:lnTo>
-                  <a:lnTo>
-                    <a:pt x="4225729" y="2778381"/>
-                  </a:lnTo>
-                  <a:lnTo>
-                    <a:pt x="4154106" y="2778661"/>
-                  </a:lnTo>
-                  <a:lnTo>
-                    <a:pt x="4082483" y="2778941"/>
-                  </a:lnTo>
-                  <a:lnTo>
-                    <a:pt x="4010861" y="2779221"/>
-                  </a:lnTo>
-                  <a:lnTo>
-                    <a:pt x="3939238" y="2779501"/>
-                  </a:lnTo>
-                  <a:lnTo>
-                    <a:pt x="3867616" y="2779781"/>
-                  </a:lnTo>
-                  <a:lnTo>
-                    <a:pt x="3795993" y="2780060"/>
-                  </a:lnTo>
-                  <a:lnTo>
-                    <a:pt x="3724371" y="2780340"/>
-                  </a:lnTo>
-                  <a:lnTo>
-                    <a:pt x="3652748" y="2780619"/>
-                  </a:lnTo>
-                  <a:lnTo>
-                    <a:pt x="3581126" y="2780898"/>
-                  </a:lnTo>
-                  <a:lnTo>
-                    <a:pt x="3509503" y="2781177"/>
-                  </a:lnTo>
-                  <a:lnTo>
-                    <a:pt x="3437881" y="2781457"/>
-                  </a:lnTo>
-                  <a:lnTo>
-                    <a:pt x="3366258" y="2781736"/>
-                  </a:lnTo>
-                  <a:lnTo>
-                    <a:pt x="3294636" y="2782015"/>
-                  </a:lnTo>
-                  <a:lnTo>
-                    <a:pt x="3223013" y="2782293"/>
-                  </a:lnTo>
-                  <a:lnTo>
-                    <a:pt x="3151391" y="2782572"/>
-                  </a:lnTo>
-                  <a:lnTo>
-                    <a:pt x="3079768" y="2782851"/>
-                  </a:lnTo>
-                  <a:lnTo>
-                    <a:pt x="3008146" y="2812082"/>
-                  </a:lnTo>
-                  <a:lnTo>
-                    <a:pt x="2936523" y="2859538"/>
-                  </a:lnTo>
-                  <a:lnTo>
-                    <a:pt x="2864901" y="2904314"/>
-                  </a:lnTo>
-                  <a:lnTo>
-                    <a:pt x="2793278" y="2946562"/>
-                  </a:lnTo>
-                  <a:lnTo>
-                    <a:pt x="2721655" y="2986425"/>
-                  </a:lnTo>
-                  <a:lnTo>
-                    <a:pt x="2650033" y="3024038"/>
-                  </a:lnTo>
-                  <a:lnTo>
-                    <a:pt x="2578410" y="3059527"/>
-                  </a:lnTo>
-                  <a:lnTo>
-                    <a:pt x="2506788" y="3093012"/>
-                  </a:lnTo>
-                  <a:lnTo>
-                    <a:pt x="2435165" y="3124607"/>
-                  </a:lnTo>
-                  <a:lnTo>
-                    <a:pt x="2363543" y="3154419"/>
-                  </a:lnTo>
-                  <a:lnTo>
-                    <a:pt x="2291920" y="3182547"/>
-                  </a:lnTo>
-                  <a:lnTo>
-                    <a:pt x="2220298" y="3209087"/>
-                  </a:lnTo>
-                  <a:lnTo>
-                    <a:pt x="2148675" y="3234129"/>
-                  </a:lnTo>
-                  <a:lnTo>
-                    <a:pt x="2077053" y="3257757"/>
-                  </a:lnTo>
-                  <a:lnTo>
-                    <a:pt x="2005430" y="3280051"/>
-                  </a:lnTo>
-                  <a:lnTo>
-                    <a:pt x="1933808" y="3301086"/>
-                  </a:lnTo>
-                  <a:lnTo>
-                    <a:pt x="1862185" y="3320934"/>
-                  </a:lnTo>
-                  <a:lnTo>
-                    <a:pt x="1790563" y="3339661"/>
-                  </a:lnTo>
-                  <a:lnTo>
-                    <a:pt x="1718940" y="3357331"/>
-                  </a:lnTo>
-                  <a:lnTo>
-                    <a:pt x="1647318" y="3374004"/>
-                  </a:lnTo>
-                  <a:lnTo>
-                    <a:pt x="1575695" y="3389735"/>
-                  </a:lnTo>
-                  <a:lnTo>
-                    <a:pt x="1504073" y="3404578"/>
-                  </a:lnTo>
-                  <a:lnTo>
-                    <a:pt x="1432450" y="3418583"/>
-                  </a:lnTo>
-                  <a:lnTo>
-                    <a:pt x="1360827" y="3431797"/>
-                  </a:lnTo>
-                  <a:lnTo>
-                    <a:pt x="1289205" y="3444265"/>
-                  </a:lnTo>
-                  <a:lnTo>
-                    <a:pt x="1217582" y="3456030"/>
-                  </a:lnTo>
-                  <a:lnTo>
-                    <a:pt x="1145960" y="3467130"/>
-                  </a:lnTo>
-                  <a:lnTo>
-                    <a:pt x="1074337" y="3477603"/>
-                  </a:lnTo>
-                  <a:lnTo>
-                    <a:pt x="1002715" y="3487486"/>
-                  </a:lnTo>
-                  <a:lnTo>
-                    <a:pt x="931092" y="3496810"/>
-                  </a:lnTo>
-                  <a:lnTo>
-                    <a:pt x="859470" y="3505608"/>
-                  </a:lnTo>
-                  <a:lnTo>
-                    <a:pt x="787847" y="3513909"/>
-                  </a:lnTo>
-                  <a:lnTo>
-                    <a:pt x="716225" y="3521741"/>
-                  </a:lnTo>
-                  <a:lnTo>
-                    <a:pt x="644602" y="3529132"/>
-                  </a:lnTo>
-                  <a:lnTo>
-                    <a:pt x="572980" y="3536105"/>
-                  </a:lnTo>
-                  <a:lnTo>
-                    <a:pt x="501357" y="3542684"/>
-                  </a:lnTo>
-                  <a:lnTo>
-                    <a:pt x="429735" y="3548892"/>
-                  </a:lnTo>
-                  <a:lnTo>
-                    <a:pt x="358112" y="3554750"/>
-                  </a:lnTo>
-                  <a:lnTo>
-                    <a:pt x="286490" y="3560276"/>
-                  </a:lnTo>
-                  <a:lnTo>
-                    <a:pt x="214867" y="3565491"/>
-                  </a:lnTo>
-                  <a:lnTo>
-                    <a:pt x="143245" y="3570411"/>
-                  </a:lnTo>
-                  <a:lnTo>
-                    <a:pt x="71622" y="3575054"/>
-                  </a:lnTo>
-                  <a:lnTo>
-                    <a:pt x="0" y="3579434"/>
+                    <a:pt x="7090630" y="2639157"/>
+                  </a:lnTo>
+                  <a:lnTo>
+                    <a:pt x="7019007" y="2639427"/>
+                  </a:lnTo>
+                  <a:lnTo>
+                    <a:pt x="6947385" y="2639698"/>
+                  </a:lnTo>
+                  <a:lnTo>
+                    <a:pt x="6875762" y="2639968"/>
+                  </a:lnTo>
+                  <a:lnTo>
+                    <a:pt x="6804139" y="2640238"/>
+                  </a:lnTo>
+                  <a:lnTo>
+                    <a:pt x="6732517" y="2640508"/>
+                  </a:lnTo>
+                  <a:lnTo>
+                    <a:pt x="6660894" y="2640779"/>
+                  </a:lnTo>
+                  <a:lnTo>
+                    <a:pt x="6589272" y="2641049"/>
+                  </a:lnTo>
+                  <a:lnTo>
+                    <a:pt x="6517649" y="2641318"/>
+                  </a:lnTo>
+                  <a:lnTo>
+                    <a:pt x="6446027" y="2641588"/>
+                  </a:lnTo>
+                  <a:lnTo>
+                    <a:pt x="6374404" y="2641858"/>
+                  </a:lnTo>
+                  <a:lnTo>
+                    <a:pt x="6302782" y="2642128"/>
+                  </a:lnTo>
+                  <a:lnTo>
+                    <a:pt x="6231159" y="2642397"/>
+                  </a:lnTo>
+                  <a:lnTo>
+                    <a:pt x="6159537" y="2642667"/>
+                  </a:lnTo>
+                  <a:lnTo>
+                    <a:pt x="6087914" y="2642936"/>
+                  </a:lnTo>
+                  <a:lnTo>
+                    <a:pt x="6016292" y="2643205"/>
+                  </a:lnTo>
+                  <a:lnTo>
+                    <a:pt x="5944669" y="2643475"/>
+                  </a:lnTo>
+                  <a:lnTo>
+                    <a:pt x="5873047" y="2643744"/>
+                  </a:lnTo>
+                  <a:lnTo>
+                    <a:pt x="5801424" y="2644013"/>
+                  </a:lnTo>
+                  <a:lnTo>
+                    <a:pt x="5729802" y="2644282"/>
+                  </a:lnTo>
+                  <a:lnTo>
+                    <a:pt x="5658179" y="2644551"/>
+                  </a:lnTo>
+                  <a:lnTo>
+                    <a:pt x="5586557" y="2644819"/>
+                  </a:lnTo>
+                  <a:lnTo>
+                    <a:pt x="5514934" y="2645088"/>
+                  </a:lnTo>
+                  <a:lnTo>
+                    <a:pt x="5443311" y="2645357"/>
+                  </a:lnTo>
+                  <a:lnTo>
+                    <a:pt x="5371689" y="2645625"/>
+                  </a:lnTo>
+                  <a:lnTo>
+                    <a:pt x="5300066" y="2645894"/>
+                  </a:lnTo>
+                  <a:lnTo>
+                    <a:pt x="5228444" y="2646162"/>
+                  </a:lnTo>
+                  <a:lnTo>
+                    <a:pt x="5156821" y="2646430"/>
+                  </a:lnTo>
+                  <a:lnTo>
+                    <a:pt x="5085199" y="2646698"/>
+                  </a:lnTo>
+                  <a:lnTo>
+                    <a:pt x="5013576" y="2646967"/>
+                  </a:lnTo>
+                  <a:lnTo>
+                    <a:pt x="4941954" y="2647235"/>
+                  </a:lnTo>
+                  <a:lnTo>
+                    <a:pt x="4870331" y="2647503"/>
+                  </a:lnTo>
+                  <a:lnTo>
+                    <a:pt x="4798709" y="2647770"/>
+                  </a:lnTo>
+                  <a:lnTo>
+                    <a:pt x="4727086" y="2648038"/>
+                  </a:lnTo>
+                  <a:lnTo>
+                    <a:pt x="4655464" y="2648306"/>
+                  </a:lnTo>
+                  <a:lnTo>
+                    <a:pt x="4583841" y="2648573"/>
+                  </a:lnTo>
+                  <a:lnTo>
+                    <a:pt x="4512219" y="2648841"/>
+                  </a:lnTo>
+                  <a:lnTo>
+                    <a:pt x="4440596" y="2649108"/>
+                  </a:lnTo>
+                  <a:lnTo>
+                    <a:pt x="4368974" y="2649376"/>
+                  </a:lnTo>
+                  <a:lnTo>
+                    <a:pt x="4297351" y="2649643"/>
+                  </a:lnTo>
+                  <a:lnTo>
+                    <a:pt x="4225729" y="2649910"/>
+                  </a:lnTo>
+                  <a:lnTo>
+                    <a:pt x="4154106" y="2650177"/>
+                  </a:lnTo>
+                  <a:lnTo>
+                    <a:pt x="4082483" y="2650444"/>
+                  </a:lnTo>
+                  <a:lnTo>
+                    <a:pt x="4010861" y="2650711"/>
+                  </a:lnTo>
+                  <a:lnTo>
+                    <a:pt x="3939238" y="2650978"/>
+                  </a:lnTo>
+                  <a:lnTo>
+                    <a:pt x="3867616" y="2651244"/>
+                  </a:lnTo>
+                  <a:lnTo>
+                    <a:pt x="3795993" y="2651511"/>
+                  </a:lnTo>
+                  <a:lnTo>
+                    <a:pt x="3724371" y="2651778"/>
+                  </a:lnTo>
+                  <a:lnTo>
+                    <a:pt x="3652748" y="2652044"/>
+                  </a:lnTo>
+                  <a:lnTo>
+                    <a:pt x="3581126" y="2652311"/>
+                  </a:lnTo>
+                  <a:lnTo>
+                    <a:pt x="3509503" y="2652577"/>
+                  </a:lnTo>
+                  <a:lnTo>
+                    <a:pt x="3437881" y="2652843"/>
+                  </a:lnTo>
+                  <a:lnTo>
+                    <a:pt x="3366258" y="2653109"/>
+                  </a:lnTo>
+                  <a:lnTo>
+                    <a:pt x="3294636" y="2653375"/>
+                  </a:lnTo>
+                  <a:lnTo>
+                    <a:pt x="3223013" y="2653641"/>
+                  </a:lnTo>
+                  <a:lnTo>
+                    <a:pt x="3151391" y="2653907"/>
+                  </a:lnTo>
+                  <a:lnTo>
+                    <a:pt x="3079768" y="2654173"/>
+                  </a:lnTo>
+                  <a:lnTo>
+                    <a:pt x="3008146" y="2682053"/>
+                  </a:lnTo>
+                  <a:lnTo>
+                    <a:pt x="2936523" y="2727314"/>
+                  </a:lnTo>
+                  <a:lnTo>
+                    <a:pt x="2864901" y="2770019"/>
+                  </a:lnTo>
+                  <a:lnTo>
+                    <a:pt x="2793278" y="2810314"/>
+                  </a:lnTo>
+                  <a:lnTo>
+                    <a:pt x="2721655" y="2848334"/>
+                  </a:lnTo>
+                  <a:lnTo>
+                    <a:pt x="2650033" y="2884207"/>
+                  </a:lnTo>
+                  <a:lnTo>
+                    <a:pt x="2578410" y="2918056"/>
+                  </a:lnTo>
+                  <a:lnTo>
+                    <a:pt x="2506788" y="2949993"/>
+                  </a:lnTo>
+                  <a:lnTo>
+                    <a:pt x="2435165" y="2980127"/>
+                  </a:lnTo>
+                  <a:lnTo>
+                    <a:pt x="2363543" y="3008560"/>
+                  </a:lnTo>
+                  <a:lnTo>
+                    <a:pt x="2291920" y="3035387"/>
+                  </a:lnTo>
+                  <a:lnTo>
+                    <a:pt x="2220298" y="3060700"/>
+                  </a:lnTo>
+                  <a:lnTo>
+                    <a:pt x="2148675" y="3084584"/>
+                  </a:lnTo>
+                  <a:lnTo>
+                    <a:pt x="2077053" y="3107119"/>
+                  </a:lnTo>
+                  <a:lnTo>
+                    <a:pt x="2005430" y="3128383"/>
+                  </a:lnTo>
+                  <a:lnTo>
+                    <a:pt x="1933808" y="3148445"/>
+                  </a:lnTo>
+                  <a:lnTo>
+                    <a:pt x="1862185" y="3167375"/>
+                  </a:lnTo>
+                  <a:lnTo>
+                    <a:pt x="1790563" y="3185237"/>
+                  </a:lnTo>
+                  <a:lnTo>
+                    <a:pt x="1718940" y="3202090"/>
+                  </a:lnTo>
+                  <a:lnTo>
+                    <a:pt x="1647318" y="3217991"/>
+                  </a:lnTo>
+                  <a:lnTo>
+                    <a:pt x="1575695" y="3232995"/>
+                  </a:lnTo>
+                  <a:lnTo>
+                    <a:pt x="1504073" y="3247151"/>
+                  </a:lnTo>
+                  <a:lnTo>
+                    <a:pt x="1432450" y="3260509"/>
+                  </a:lnTo>
+                  <a:lnTo>
+                    <a:pt x="1360827" y="3273112"/>
+                  </a:lnTo>
+                  <a:lnTo>
+                    <a:pt x="1289205" y="3285004"/>
+                  </a:lnTo>
+                  <a:lnTo>
+                    <a:pt x="1217582" y="3296224"/>
+                  </a:lnTo>
+                  <a:lnTo>
+                    <a:pt x="1145960" y="3306811"/>
+                  </a:lnTo>
+                  <a:lnTo>
+                    <a:pt x="1074337" y="3316800"/>
+                  </a:lnTo>
+                  <a:lnTo>
+                    <a:pt x="1002715" y="3326226"/>
+                  </a:lnTo>
+                  <a:lnTo>
+                    <a:pt x="931092" y="3335119"/>
+                  </a:lnTo>
+                  <a:lnTo>
+                    <a:pt x="859470" y="3343510"/>
+                  </a:lnTo>
+                  <a:lnTo>
+                    <a:pt x="787847" y="3351427"/>
+                  </a:lnTo>
+                  <a:lnTo>
+                    <a:pt x="716225" y="3358897"/>
+                  </a:lnTo>
+                  <a:lnTo>
+                    <a:pt x="644602" y="3365946"/>
+                  </a:lnTo>
+                  <a:lnTo>
+                    <a:pt x="572980" y="3372597"/>
+                  </a:lnTo>
+                  <a:lnTo>
+                    <a:pt x="501357" y="3378872"/>
+                  </a:lnTo>
+                  <a:lnTo>
+                    <a:pt x="429735" y="3384793"/>
+                  </a:lnTo>
+                  <a:lnTo>
+                    <a:pt x="358112" y="3390379"/>
+                  </a:lnTo>
+                  <a:lnTo>
+                    <a:pt x="286490" y="3395651"/>
+                  </a:lnTo>
+                  <a:lnTo>
+                    <a:pt x="214867" y="3400624"/>
+                  </a:lnTo>
+                  <a:lnTo>
+                    <a:pt x="143245" y="3405317"/>
+                  </a:lnTo>
+                  <a:lnTo>
+                    <a:pt x="71622" y="3409745"/>
+                  </a:lnTo>
+                  <a:lnTo>
+                    <a:pt x="0" y="3413923"/>
                   </a:lnTo>
                   <a:close/>
                 </a:path>
@@ -3672,216 +3672,216 @@
           </p:nvSpPr>
           <p:spPr>
             <a:xfrm>
-              <a:off x="1172049" y="1896563"/>
-              <a:ext cx="4818388" cy="2794750"/>
+              <a:off x="1172049" y="2073503"/>
+              <a:ext cx="4818388" cy="2665522"/>
             </a:xfrm>
             <a:custGeom>
               <a:avLst/>
               <a:pathLst>
-                <a:path w="4818388" h="2794750">
+                <a:path w="4818388" h="2665522">
                   <a:moveTo>
-                    <a:pt x="0" y="2794750"/>
+                    <a:pt x="0" y="2665522"/>
                   </a:moveTo>
                   <a:lnTo>
-                    <a:pt x="71622" y="2794475"/>
-                  </a:lnTo>
-                  <a:lnTo>
-                    <a:pt x="143245" y="2794200"/>
-                  </a:lnTo>
-                  <a:lnTo>
-                    <a:pt x="214867" y="2793925"/>
-                  </a:lnTo>
-                  <a:lnTo>
-                    <a:pt x="286490" y="2793650"/>
-                  </a:lnTo>
-                  <a:lnTo>
-                    <a:pt x="358112" y="2793375"/>
-                  </a:lnTo>
-                  <a:lnTo>
-                    <a:pt x="429735" y="2793099"/>
-                  </a:lnTo>
-                  <a:lnTo>
-                    <a:pt x="501357" y="2792824"/>
-                  </a:lnTo>
-                  <a:lnTo>
-                    <a:pt x="572980" y="2792548"/>
-                  </a:lnTo>
-                  <a:lnTo>
-                    <a:pt x="644602" y="2792273"/>
-                  </a:lnTo>
-                  <a:lnTo>
-                    <a:pt x="716225" y="2791997"/>
-                  </a:lnTo>
-                  <a:lnTo>
-                    <a:pt x="787847" y="2791721"/>
-                  </a:lnTo>
-                  <a:lnTo>
-                    <a:pt x="859470" y="2791446"/>
-                  </a:lnTo>
-                  <a:lnTo>
-                    <a:pt x="931092" y="2791170"/>
-                  </a:lnTo>
-                  <a:lnTo>
-                    <a:pt x="1002715" y="2790894"/>
-                  </a:lnTo>
-                  <a:lnTo>
-                    <a:pt x="1074337" y="2790618"/>
-                  </a:lnTo>
-                  <a:lnTo>
-                    <a:pt x="1145960" y="2790341"/>
-                  </a:lnTo>
-                  <a:lnTo>
-                    <a:pt x="1217582" y="2790065"/>
-                  </a:lnTo>
-                  <a:lnTo>
-                    <a:pt x="1289205" y="2789789"/>
-                  </a:lnTo>
-                  <a:lnTo>
-                    <a:pt x="1360827" y="2789512"/>
-                  </a:lnTo>
-                  <a:lnTo>
-                    <a:pt x="1432450" y="2789236"/>
-                  </a:lnTo>
-                  <a:lnTo>
-                    <a:pt x="1504073" y="2788959"/>
-                  </a:lnTo>
-                  <a:lnTo>
-                    <a:pt x="1575695" y="2788682"/>
-                  </a:lnTo>
-                  <a:lnTo>
-                    <a:pt x="1647318" y="2788406"/>
-                  </a:lnTo>
-                  <a:lnTo>
-                    <a:pt x="1718940" y="2788129"/>
-                  </a:lnTo>
-                  <a:lnTo>
-                    <a:pt x="1790563" y="2787852"/>
-                  </a:lnTo>
-                  <a:lnTo>
-                    <a:pt x="1862185" y="2787575"/>
-                  </a:lnTo>
-                  <a:lnTo>
-                    <a:pt x="1933808" y="2787298"/>
-                  </a:lnTo>
-                  <a:lnTo>
-                    <a:pt x="2005430" y="2787020"/>
-                  </a:lnTo>
-                  <a:lnTo>
-                    <a:pt x="2077053" y="2786743"/>
-                  </a:lnTo>
-                  <a:lnTo>
-                    <a:pt x="2148675" y="2786466"/>
-                  </a:lnTo>
-                  <a:lnTo>
-                    <a:pt x="2220298" y="2786188"/>
-                  </a:lnTo>
-                  <a:lnTo>
-                    <a:pt x="2291920" y="2785910"/>
-                  </a:lnTo>
-                  <a:lnTo>
-                    <a:pt x="2363543" y="2785633"/>
-                  </a:lnTo>
-                  <a:lnTo>
-                    <a:pt x="2435165" y="2785355"/>
-                  </a:lnTo>
-                  <a:lnTo>
-                    <a:pt x="2506788" y="2785077"/>
-                  </a:lnTo>
-                  <a:lnTo>
-                    <a:pt x="2578410" y="2784799"/>
-                  </a:lnTo>
-                  <a:lnTo>
-                    <a:pt x="2650033" y="2784521"/>
-                  </a:lnTo>
-                  <a:lnTo>
-                    <a:pt x="2721655" y="2784243"/>
-                  </a:lnTo>
-                  <a:lnTo>
-                    <a:pt x="2793278" y="2783965"/>
-                  </a:lnTo>
-                  <a:lnTo>
-                    <a:pt x="2864901" y="2783686"/>
-                  </a:lnTo>
-                  <a:lnTo>
-                    <a:pt x="2936523" y="2783408"/>
-                  </a:lnTo>
-                  <a:lnTo>
-                    <a:pt x="3008146" y="2783129"/>
-                  </a:lnTo>
-                  <a:lnTo>
-                    <a:pt x="3079768" y="2761787"/>
-                  </a:lnTo>
-                  <a:lnTo>
-                    <a:pt x="3151391" y="2708483"/>
-                  </a:lnTo>
-                  <a:lnTo>
-                    <a:pt x="3223013" y="2651989"/>
-                  </a:lnTo>
-                  <a:lnTo>
-                    <a:pt x="3294636" y="2592115"/>
-                  </a:lnTo>
-                  <a:lnTo>
-                    <a:pt x="3366258" y="2528658"/>
-                  </a:lnTo>
-                  <a:lnTo>
-                    <a:pt x="3437881" y="2461405"/>
-                  </a:lnTo>
-                  <a:lnTo>
-                    <a:pt x="3509503" y="2390127"/>
-                  </a:lnTo>
-                  <a:lnTo>
-                    <a:pt x="3581126" y="2314585"/>
-                  </a:lnTo>
-                  <a:lnTo>
-                    <a:pt x="3652748" y="2234522"/>
-                  </a:lnTo>
-                  <a:lnTo>
-                    <a:pt x="3724371" y="2149669"/>
-                  </a:lnTo>
-                  <a:lnTo>
-                    <a:pt x="3795993" y="2059738"/>
-                  </a:lnTo>
-                  <a:lnTo>
-                    <a:pt x="3867616" y="1964427"/>
-                  </a:lnTo>
-                  <a:lnTo>
-                    <a:pt x="3939238" y="1863412"/>
-                  </a:lnTo>
-                  <a:lnTo>
-                    <a:pt x="4010861" y="1756354"/>
-                  </a:lnTo>
-                  <a:lnTo>
-                    <a:pt x="4082483" y="1642890"/>
-                  </a:lnTo>
-                  <a:lnTo>
-                    <a:pt x="4154106" y="1522636"/>
-                  </a:lnTo>
-                  <a:lnTo>
-                    <a:pt x="4225729" y="1395187"/>
-                  </a:lnTo>
-                  <a:lnTo>
-                    <a:pt x="4297351" y="1260112"/>
-                  </a:lnTo>
-                  <a:lnTo>
-                    <a:pt x="4368974" y="1116955"/>
-                  </a:lnTo>
-                  <a:lnTo>
-                    <a:pt x="4440596" y="965233"/>
-                  </a:lnTo>
-                  <a:lnTo>
-                    <a:pt x="4512219" y="804432"/>
-                  </a:lnTo>
-                  <a:lnTo>
-                    <a:pt x="4583841" y="634009"/>
-                  </a:lnTo>
-                  <a:lnTo>
-                    <a:pt x="4655464" y="453389"/>
-                  </a:lnTo>
-                  <a:lnTo>
-                    <a:pt x="4727086" y="261962"/>
-                  </a:lnTo>
-                  <a:lnTo>
-                    <a:pt x="4798709" y="59081"/>
+                    <a:pt x="71622" y="2665259"/>
+                  </a:lnTo>
+                  <a:lnTo>
+                    <a:pt x="143245" y="2664997"/>
+                  </a:lnTo>
+                  <a:lnTo>
+                    <a:pt x="214867" y="2664735"/>
+                  </a:lnTo>
+                  <a:lnTo>
+                    <a:pt x="286490" y="2664472"/>
+                  </a:lnTo>
+                  <a:lnTo>
+                    <a:pt x="358112" y="2664210"/>
+                  </a:lnTo>
+                  <a:lnTo>
+                    <a:pt x="429735" y="2663947"/>
+                  </a:lnTo>
+                  <a:lnTo>
+                    <a:pt x="501357" y="2663685"/>
+                  </a:lnTo>
+                  <a:lnTo>
+                    <a:pt x="572980" y="2663422"/>
+                  </a:lnTo>
+                  <a:lnTo>
+                    <a:pt x="644602" y="2663159"/>
+                  </a:lnTo>
+                  <a:lnTo>
+                    <a:pt x="716225" y="2662896"/>
+                  </a:lnTo>
+                  <a:lnTo>
+                    <a:pt x="787847" y="2662633"/>
+                  </a:lnTo>
+                  <a:lnTo>
+                    <a:pt x="859470" y="2662370"/>
+                  </a:lnTo>
+                  <a:lnTo>
+                    <a:pt x="931092" y="2662107"/>
+                  </a:lnTo>
+                  <a:lnTo>
+                    <a:pt x="1002715" y="2661844"/>
+                  </a:lnTo>
+                  <a:lnTo>
+                    <a:pt x="1074337" y="2661580"/>
+                  </a:lnTo>
+                  <a:lnTo>
+                    <a:pt x="1145960" y="2661317"/>
+                  </a:lnTo>
+                  <a:lnTo>
+                    <a:pt x="1217582" y="2661054"/>
+                  </a:lnTo>
+                  <a:lnTo>
+                    <a:pt x="1289205" y="2660790"/>
+                  </a:lnTo>
+                  <a:lnTo>
+                    <a:pt x="1360827" y="2660526"/>
+                  </a:lnTo>
+                  <a:lnTo>
+                    <a:pt x="1432450" y="2660263"/>
+                  </a:lnTo>
+                  <a:lnTo>
+                    <a:pt x="1504073" y="2659999"/>
+                  </a:lnTo>
+                  <a:lnTo>
+                    <a:pt x="1575695" y="2659735"/>
+                  </a:lnTo>
+                  <a:lnTo>
+                    <a:pt x="1647318" y="2659471"/>
+                  </a:lnTo>
+                  <a:lnTo>
+                    <a:pt x="1718940" y="2659207"/>
+                  </a:lnTo>
+                  <a:lnTo>
+                    <a:pt x="1790563" y="2658943"/>
+                  </a:lnTo>
+                  <a:lnTo>
+                    <a:pt x="1862185" y="2658678"/>
+                  </a:lnTo>
+                  <a:lnTo>
+                    <a:pt x="1933808" y="2658414"/>
+                  </a:lnTo>
+                  <a:lnTo>
+                    <a:pt x="2005430" y="2658149"/>
+                  </a:lnTo>
+                  <a:lnTo>
+                    <a:pt x="2077053" y="2657885"/>
+                  </a:lnTo>
+                  <a:lnTo>
+                    <a:pt x="2148675" y="2657620"/>
+                  </a:lnTo>
+                  <a:lnTo>
+                    <a:pt x="2220298" y="2657356"/>
+                  </a:lnTo>
+                  <a:lnTo>
+                    <a:pt x="2291920" y="2657091"/>
+                  </a:lnTo>
+                  <a:lnTo>
+                    <a:pt x="2363543" y="2656826"/>
+                  </a:lnTo>
+                  <a:lnTo>
+                    <a:pt x="2435165" y="2656561"/>
+                  </a:lnTo>
+                  <a:lnTo>
+                    <a:pt x="2506788" y="2656296"/>
+                  </a:lnTo>
+                  <a:lnTo>
+                    <a:pt x="2578410" y="2656031"/>
+                  </a:lnTo>
+                  <a:lnTo>
+                    <a:pt x="2650033" y="2655766"/>
+                  </a:lnTo>
+                  <a:lnTo>
+                    <a:pt x="2721655" y="2655501"/>
+                  </a:lnTo>
+                  <a:lnTo>
+                    <a:pt x="2793278" y="2655235"/>
+                  </a:lnTo>
+                  <a:lnTo>
+                    <a:pt x="2864901" y="2654970"/>
+                  </a:lnTo>
+                  <a:lnTo>
+                    <a:pt x="2936523" y="2654704"/>
+                  </a:lnTo>
+                  <a:lnTo>
+                    <a:pt x="3008146" y="2654439"/>
+                  </a:lnTo>
+                  <a:lnTo>
+                    <a:pt x="3079768" y="2634083"/>
+                  </a:lnTo>
+                  <a:lnTo>
+                    <a:pt x="3151391" y="2583244"/>
+                  </a:lnTo>
+                  <a:lnTo>
+                    <a:pt x="3223013" y="2529362"/>
+                  </a:lnTo>
+                  <a:lnTo>
+                    <a:pt x="3294636" y="2472257"/>
+                  </a:lnTo>
+                  <a:lnTo>
+                    <a:pt x="3366258" y="2411734"/>
+                  </a:lnTo>
+                  <a:lnTo>
+                    <a:pt x="3437881" y="2347590"/>
+                  </a:lnTo>
+                  <a:lnTo>
+                    <a:pt x="3509503" y="2279608"/>
+                  </a:lnTo>
+                  <a:lnTo>
+                    <a:pt x="3581126" y="2207559"/>
+                  </a:lnTo>
+                  <a:lnTo>
+                    <a:pt x="3652748" y="2131198"/>
+                  </a:lnTo>
+                  <a:lnTo>
+                    <a:pt x="3724371" y="2050269"/>
+                  </a:lnTo>
+                  <a:lnTo>
+                    <a:pt x="3795993" y="1964497"/>
+                  </a:lnTo>
+                  <a:lnTo>
+                    <a:pt x="3867616" y="1873592"/>
+                  </a:lnTo>
+                  <a:lnTo>
+                    <a:pt x="3939238" y="1777249"/>
+                  </a:lnTo>
+                  <a:lnTo>
+                    <a:pt x="4010861" y="1675141"/>
+                  </a:lnTo>
+                  <a:lnTo>
+                    <a:pt x="4082483" y="1566923"/>
+                  </a:lnTo>
+                  <a:lnTo>
+                    <a:pt x="4154106" y="1452230"/>
+                  </a:lnTo>
+                  <a:lnTo>
+                    <a:pt x="4225729" y="1330674"/>
+                  </a:lnTo>
+                  <a:lnTo>
+                    <a:pt x="4297351" y="1201845"/>
+                  </a:lnTo>
+                  <a:lnTo>
+                    <a:pt x="4368974" y="1065308"/>
+                  </a:lnTo>
+                  <a:lnTo>
+                    <a:pt x="4440596" y="920601"/>
+                  </a:lnTo>
+                  <a:lnTo>
+                    <a:pt x="4512219" y="767235"/>
+                  </a:lnTo>
+                  <a:lnTo>
+                    <a:pt x="4583841" y="604693"/>
+                  </a:lnTo>
+                  <a:lnTo>
+                    <a:pt x="4655464" y="432425"/>
+                  </a:lnTo>
+                  <a:lnTo>
+                    <a:pt x="4727086" y="249849"/>
+                  </a:lnTo>
+                  <a:lnTo>
+                    <a:pt x="4798709" y="56349"/>
                   </a:lnTo>
                   <a:lnTo>
                     <a:pt x="4818388" y="0"/>
@@ -3904,312 +3904,312 @@
           </p:nvSpPr>
           <p:spPr>
             <a:xfrm>
-              <a:off x="1172049" y="4663670"/>
-              <a:ext cx="7090630" cy="812327"/>
+              <a:off x="1172049" y="4712660"/>
+              <a:ext cx="7090630" cy="774765"/>
             </a:xfrm>
             <a:custGeom>
               <a:avLst/>
               <a:pathLst>
-                <a:path w="7090630" h="812327">
+                <a:path w="7090630" h="774765">
                   <a:moveTo>
                     <a:pt x="7090630" y="0"/>
                   </a:moveTo>
                   <a:lnTo>
-                    <a:pt x="7019007" y="283"/>
-                  </a:lnTo>
-                  <a:lnTo>
-                    <a:pt x="6947385" y="567"/>
-                  </a:lnTo>
-                  <a:lnTo>
-                    <a:pt x="6875762" y="850"/>
-                  </a:lnTo>
-                  <a:lnTo>
-                    <a:pt x="6804139" y="1133"/>
-                  </a:lnTo>
-                  <a:lnTo>
-                    <a:pt x="6732517" y="1417"/>
-                  </a:lnTo>
-                  <a:lnTo>
-                    <a:pt x="6660894" y="1700"/>
-                  </a:lnTo>
-                  <a:lnTo>
-                    <a:pt x="6589272" y="1983"/>
-                  </a:lnTo>
-                  <a:lnTo>
-                    <a:pt x="6517649" y="2266"/>
-                  </a:lnTo>
-                  <a:lnTo>
-                    <a:pt x="6446027" y="2549"/>
-                  </a:lnTo>
-                  <a:lnTo>
-                    <a:pt x="6374404" y="2832"/>
-                  </a:lnTo>
-                  <a:lnTo>
-                    <a:pt x="6302782" y="3114"/>
-                  </a:lnTo>
-                  <a:lnTo>
-                    <a:pt x="6231159" y="3397"/>
-                  </a:lnTo>
-                  <a:lnTo>
-                    <a:pt x="6159537" y="3680"/>
-                  </a:lnTo>
-                  <a:lnTo>
-                    <a:pt x="6087914" y="3962"/>
-                  </a:lnTo>
-                  <a:lnTo>
-                    <a:pt x="6016292" y="4244"/>
-                  </a:lnTo>
-                  <a:lnTo>
-                    <a:pt x="5944669" y="4527"/>
-                  </a:lnTo>
-                  <a:lnTo>
-                    <a:pt x="5873047" y="4809"/>
-                  </a:lnTo>
-                  <a:lnTo>
-                    <a:pt x="5801424" y="5091"/>
-                  </a:lnTo>
-                  <a:lnTo>
-                    <a:pt x="5729802" y="5373"/>
-                  </a:lnTo>
-                  <a:lnTo>
-                    <a:pt x="5658179" y="5655"/>
-                  </a:lnTo>
-                  <a:lnTo>
-                    <a:pt x="5586557" y="5937"/>
-                  </a:lnTo>
-                  <a:lnTo>
-                    <a:pt x="5514934" y="6218"/>
-                  </a:lnTo>
-                  <a:lnTo>
-                    <a:pt x="5443311" y="6500"/>
-                  </a:lnTo>
-                  <a:lnTo>
-                    <a:pt x="5371689" y="6782"/>
-                  </a:lnTo>
-                  <a:lnTo>
-                    <a:pt x="5300066" y="7063"/>
-                  </a:lnTo>
-                  <a:lnTo>
-                    <a:pt x="5228444" y="7344"/>
-                  </a:lnTo>
-                  <a:lnTo>
-                    <a:pt x="5156821" y="7626"/>
-                  </a:lnTo>
-                  <a:lnTo>
-                    <a:pt x="5085199" y="7907"/>
-                  </a:lnTo>
-                  <a:lnTo>
-                    <a:pt x="5013576" y="8188"/>
-                  </a:lnTo>
-                  <a:lnTo>
-                    <a:pt x="4941954" y="8469"/>
-                  </a:lnTo>
-                  <a:lnTo>
-                    <a:pt x="4870331" y="8750"/>
-                  </a:lnTo>
-                  <a:lnTo>
-                    <a:pt x="4798709" y="9031"/>
-                  </a:lnTo>
-                  <a:lnTo>
-                    <a:pt x="4727086" y="9311"/>
-                  </a:lnTo>
-                  <a:lnTo>
-                    <a:pt x="4655464" y="9592"/>
-                  </a:lnTo>
-                  <a:lnTo>
-                    <a:pt x="4583841" y="9873"/>
-                  </a:lnTo>
-                  <a:lnTo>
-                    <a:pt x="4512219" y="10153"/>
-                  </a:lnTo>
-                  <a:lnTo>
-                    <a:pt x="4440596" y="10433"/>
-                  </a:lnTo>
-                  <a:lnTo>
-                    <a:pt x="4368974" y="10714"/>
-                  </a:lnTo>
-                  <a:lnTo>
-                    <a:pt x="4297351" y="10994"/>
-                  </a:lnTo>
-                  <a:lnTo>
-                    <a:pt x="4225729" y="11274"/>
-                  </a:lnTo>
-                  <a:lnTo>
-                    <a:pt x="4154106" y="11554"/>
-                  </a:lnTo>
-                  <a:lnTo>
-                    <a:pt x="4082483" y="11834"/>
-                  </a:lnTo>
-                  <a:lnTo>
-                    <a:pt x="4010861" y="12114"/>
-                  </a:lnTo>
-                  <a:lnTo>
-                    <a:pt x="3939238" y="12394"/>
-                  </a:lnTo>
-                  <a:lnTo>
-                    <a:pt x="3867616" y="12673"/>
-                  </a:lnTo>
-                  <a:lnTo>
-                    <a:pt x="3795993" y="12953"/>
-                  </a:lnTo>
-                  <a:lnTo>
-                    <a:pt x="3724371" y="13232"/>
-                  </a:lnTo>
-                  <a:lnTo>
-                    <a:pt x="3652748" y="13512"/>
-                  </a:lnTo>
-                  <a:lnTo>
-                    <a:pt x="3581126" y="13791"/>
-                  </a:lnTo>
-                  <a:lnTo>
-                    <a:pt x="3509503" y="14070"/>
-                  </a:lnTo>
-                  <a:lnTo>
-                    <a:pt x="3437881" y="14349"/>
-                  </a:lnTo>
-                  <a:lnTo>
-                    <a:pt x="3366258" y="14628"/>
-                  </a:lnTo>
-                  <a:lnTo>
-                    <a:pt x="3294636" y="14907"/>
-                  </a:lnTo>
-                  <a:lnTo>
-                    <a:pt x="3223013" y="15186"/>
-                  </a:lnTo>
-                  <a:lnTo>
-                    <a:pt x="3151391" y="15465"/>
-                  </a:lnTo>
-                  <a:lnTo>
-                    <a:pt x="3079768" y="15744"/>
-                  </a:lnTo>
-                  <a:lnTo>
-                    <a:pt x="3008146" y="44975"/>
-                  </a:lnTo>
-                  <a:lnTo>
-                    <a:pt x="2936523" y="92430"/>
-                  </a:lnTo>
-                  <a:lnTo>
-                    <a:pt x="2864901" y="137207"/>
-                  </a:lnTo>
-                  <a:lnTo>
-                    <a:pt x="2793278" y="179455"/>
-                  </a:lnTo>
-                  <a:lnTo>
-                    <a:pt x="2721655" y="219318"/>
-                  </a:lnTo>
-                  <a:lnTo>
-                    <a:pt x="2650033" y="256931"/>
-                  </a:lnTo>
-                  <a:lnTo>
-                    <a:pt x="2578410" y="292420"/>
-                  </a:lnTo>
-                  <a:lnTo>
-                    <a:pt x="2506788" y="325905"/>
-                  </a:lnTo>
-                  <a:lnTo>
-                    <a:pt x="2435165" y="357500"/>
-                  </a:lnTo>
-                  <a:lnTo>
-                    <a:pt x="2363543" y="387311"/>
-                  </a:lnTo>
-                  <a:lnTo>
-                    <a:pt x="2291920" y="415440"/>
-                  </a:lnTo>
-                  <a:lnTo>
-                    <a:pt x="2220298" y="441980"/>
-                  </a:lnTo>
-                  <a:lnTo>
-                    <a:pt x="2148675" y="467022"/>
-                  </a:lnTo>
-                  <a:lnTo>
-                    <a:pt x="2077053" y="490650"/>
-                  </a:lnTo>
-                  <a:lnTo>
-                    <a:pt x="2005430" y="512944"/>
-                  </a:lnTo>
-                  <a:lnTo>
-                    <a:pt x="1933808" y="533979"/>
-                  </a:lnTo>
-                  <a:lnTo>
-                    <a:pt x="1862185" y="553827"/>
-                  </a:lnTo>
-                  <a:lnTo>
-                    <a:pt x="1790563" y="572554"/>
-                  </a:lnTo>
-                  <a:lnTo>
-                    <a:pt x="1718940" y="590224"/>
-                  </a:lnTo>
-                  <a:lnTo>
-                    <a:pt x="1647318" y="606896"/>
-                  </a:lnTo>
-                  <a:lnTo>
-                    <a:pt x="1575695" y="622628"/>
-                  </a:lnTo>
-                  <a:lnTo>
-                    <a:pt x="1504073" y="637471"/>
-                  </a:lnTo>
-                  <a:lnTo>
-                    <a:pt x="1432450" y="651476"/>
-                  </a:lnTo>
-                  <a:lnTo>
-                    <a:pt x="1360827" y="664690"/>
-                  </a:lnTo>
-                  <a:lnTo>
-                    <a:pt x="1289205" y="677158"/>
-                  </a:lnTo>
-                  <a:lnTo>
-                    <a:pt x="1217582" y="688923"/>
-                  </a:lnTo>
-                  <a:lnTo>
-                    <a:pt x="1145960" y="700023"/>
-                  </a:lnTo>
-                  <a:lnTo>
-                    <a:pt x="1074337" y="710496"/>
-                  </a:lnTo>
-                  <a:lnTo>
-                    <a:pt x="1002715" y="720378"/>
-                  </a:lnTo>
-                  <a:lnTo>
-                    <a:pt x="931092" y="729703"/>
-                  </a:lnTo>
-                  <a:lnTo>
-                    <a:pt x="859470" y="738501"/>
-                  </a:lnTo>
-                  <a:lnTo>
-                    <a:pt x="787847" y="746802"/>
-                  </a:lnTo>
-                  <a:lnTo>
-                    <a:pt x="716225" y="754634"/>
-                  </a:lnTo>
-                  <a:lnTo>
-                    <a:pt x="644602" y="762025"/>
-                  </a:lnTo>
-                  <a:lnTo>
-                    <a:pt x="572980" y="768998"/>
-                  </a:lnTo>
-                  <a:lnTo>
-                    <a:pt x="501357" y="775577"/>
-                  </a:lnTo>
-                  <a:lnTo>
-                    <a:pt x="429735" y="781785"/>
-                  </a:lnTo>
-                  <a:lnTo>
-                    <a:pt x="358112" y="787642"/>
-                  </a:lnTo>
-                  <a:lnTo>
-                    <a:pt x="286490" y="793169"/>
-                  </a:lnTo>
-                  <a:lnTo>
-                    <a:pt x="214867" y="798384"/>
-                  </a:lnTo>
-                  <a:lnTo>
-                    <a:pt x="143245" y="803304"/>
-                  </a:lnTo>
-                  <a:lnTo>
-                    <a:pt x="71622" y="807947"/>
-                  </a:lnTo>
-                  <a:lnTo>
-                    <a:pt x="0" y="812327"/>
+                    <a:pt x="7019007" y="270"/>
+                  </a:lnTo>
+                  <a:lnTo>
+                    <a:pt x="6947385" y="540"/>
+                  </a:lnTo>
+                  <a:lnTo>
+                    <a:pt x="6875762" y="811"/>
+                  </a:lnTo>
+                  <a:lnTo>
+                    <a:pt x="6804139" y="1081"/>
+                  </a:lnTo>
+                  <a:lnTo>
+                    <a:pt x="6732517" y="1351"/>
+                  </a:lnTo>
+                  <a:lnTo>
+                    <a:pt x="6660894" y="1621"/>
+                  </a:lnTo>
+                  <a:lnTo>
+                    <a:pt x="6589272" y="1891"/>
+                  </a:lnTo>
+                  <a:lnTo>
+                    <a:pt x="6517649" y="2161"/>
+                  </a:lnTo>
+                  <a:lnTo>
+                    <a:pt x="6446027" y="2431"/>
+                  </a:lnTo>
+                  <a:lnTo>
+                    <a:pt x="6374404" y="2701"/>
+                  </a:lnTo>
+                  <a:lnTo>
+                    <a:pt x="6302782" y="2970"/>
+                  </a:lnTo>
+                  <a:lnTo>
+                    <a:pt x="6231159" y="3240"/>
+                  </a:lnTo>
+                  <a:lnTo>
+                    <a:pt x="6159537" y="3509"/>
+                  </a:lnTo>
+                  <a:lnTo>
+                    <a:pt x="6087914" y="3779"/>
+                  </a:lnTo>
+                  <a:lnTo>
+                    <a:pt x="6016292" y="4048"/>
+                  </a:lnTo>
+                  <a:lnTo>
+                    <a:pt x="5944669" y="4317"/>
+                  </a:lnTo>
+                  <a:lnTo>
+                    <a:pt x="5873047" y="4586"/>
+                  </a:lnTo>
+                  <a:lnTo>
+                    <a:pt x="5801424" y="4856"/>
+                  </a:lnTo>
+                  <a:lnTo>
+                    <a:pt x="5729802" y="5124"/>
+                  </a:lnTo>
+                  <a:lnTo>
+                    <a:pt x="5658179" y="5393"/>
+                  </a:lnTo>
+                  <a:lnTo>
+                    <a:pt x="5586557" y="5662"/>
+                  </a:lnTo>
+                  <a:lnTo>
+                    <a:pt x="5514934" y="5931"/>
+                  </a:lnTo>
+                  <a:lnTo>
+                    <a:pt x="5443311" y="6199"/>
+                  </a:lnTo>
+                  <a:lnTo>
+                    <a:pt x="5371689" y="6468"/>
+                  </a:lnTo>
+                  <a:lnTo>
+                    <a:pt x="5300066" y="6736"/>
+                  </a:lnTo>
+                  <a:lnTo>
+                    <a:pt x="5228444" y="7005"/>
+                  </a:lnTo>
+                  <a:lnTo>
+                    <a:pt x="5156821" y="7273"/>
+                  </a:lnTo>
+                  <a:lnTo>
+                    <a:pt x="5085199" y="7541"/>
+                  </a:lnTo>
+                  <a:lnTo>
+                    <a:pt x="5013576" y="7809"/>
+                  </a:lnTo>
+                  <a:lnTo>
+                    <a:pt x="4941954" y="8077"/>
+                  </a:lnTo>
+                  <a:lnTo>
+                    <a:pt x="4870331" y="8345"/>
+                  </a:lnTo>
+                  <a:lnTo>
+                    <a:pt x="4798709" y="8613"/>
+                  </a:lnTo>
+                  <a:lnTo>
+                    <a:pt x="4727086" y="8881"/>
+                  </a:lnTo>
+                  <a:lnTo>
+                    <a:pt x="4655464" y="9149"/>
+                  </a:lnTo>
+                  <a:lnTo>
+                    <a:pt x="4583841" y="9416"/>
+                  </a:lnTo>
+                  <a:lnTo>
+                    <a:pt x="4512219" y="9684"/>
+                  </a:lnTo>
+                  <a:lnTo>
+                    <a:pt x="4440596" y="9951"/>
+                  </a:lnTo>
+                  <a:lnTo>
+                    <a:pt x="4368974" y="10218"/>
+                  </a:lnTo>
+                  <a:lnTo>
+                    <a:pt x="4297351" y="10486"/>
+                  </a:lnTo>
+                  <a:lnTo>
+                    <a:pt x="4225729" y="10753"/>
+                  </a:lnTo>
+                  <a:lnTo>
+                    <a:pt x="4154106" y="11020"/>
+                  </a:lnTo>
+                  <a:lnTo>
+                    <a:pt x="4082483" y="11287"/>
+                  </a:lnTo>
+                  <a:lnTo>
+                    <a:pt x="4010861" y="11554"/>
+                  </a:lnTo>
+                  <a:lnTo>
+                    <a:pt x="3939238" y="11820"/>
+                  </a:lnTo>
+                  <a:lnTo>
+                    <a:pt x="3867616" y="12087"/>
+                  </a:lnTo>
+                  <a:lnTo>
+                    <a:pt x="3795993" y="12354"/>
+                  </a:lnTo>
+                  <a:lnTo>
+                    <a:pt x="3724371" y="12620"/>
+                  </a:lnTo>
+                  <a:lnTo>
+                    <a:pt x="3652748" y="12887"/>
+                  </a:lnTo>
+                  <a:lnTo>
+                    <a:pt x="3581126" y="13153"/>
+                  </a:lnTo>
+                  <a:lnTo>
+                    <a:pt x="3509503" y="13420"/>
+                  </a:lnTo>
+                  <a:lnTo>
+                    <a:pt x="3437881" y="13686"/>
+                  </a:lnTo>
+                  <a:lnTo>
+                    <a:pt x="3366258" y="13952"/>
+                  </a:lnTo>
+                  <a:lnTo>
+                    <a:pt x="3294636" y="14218"/>
+                  </a:lnTo>
+                  <a:lnTo>
+                    <a:pt x="3223013" y="14484"/>
+                  </a:lnTo>
+                  <a:lnTo>
+                    <a:pt x="3151391" y="14750"/>
+                  </a:lnTo>
+                  <a:lnTo>
+                    <a:pt x="3079768" y="15016"/>
+                  </a:lnTo>
+                  <a:lnTo>
+                    <a:pt x="3008146" y="42895"/>
+                  </a:lnTo>
+                  <a:lnTo>
+                    <a:pt x="2936523" y="88156"/>
+                  </a:lnTo>
+                  <a:lnTo>
+                    <a:pt x="2864901" y="130862"/>
+                  </a:lnTo>
+                  <a:lnTo>
+                    <a:pt x="2793278" y="171157"/>
+                  </a:lnTo>
+                  <a:lnTo>
+                    <a:pt x="2721655" y="209177"/>
+                  </a:lnTo>
+                  <a:lnTo>
+                    <a:pt x="2650033" y="245050"/>
+                  </a:lnTo>
+                  <a:lnTo>
+                    <a:pt x="2578410" y="278898"/>
+                  </a:lnTo>
+                  <a:lnTo>
+                    <a:pt x="2506788" y="310835"/>
+                  </a:lnTo>
+                  <a:lnTo>
+                    <a:pt x="2435165" y="340969"/>
+                  </a:lnTo>
+                  <a:lnTo>
+                    <a:pt x="2363543" y="369402"/>
+                  </a:lnTo>
+                  <a:lnTo>
+                    <a:pt x="2291920" y="396230"/>
+                  </a:lnTo>
+                  <a:lnTo>
+                    <a:pt x="2220298" y="421543"/>
+                  </a:lnTo>
+                  <a:lnTo>
+                    <a:pt x="2148675" y="445427"/>
+                  </a:lnTo>
+                  <a:lnTo>
+                    <a:pt x="2077053" y="467962"/>
+                  </a:lnTo>
+                  <a:lnTo>
+                    <a:pt x="2005430" y="489225"/>
+                  </a:lnTo>
+                  <a:lnTo>
+                    <a:pt x="1933808" y="509288"/>
+                  </a:lnTo>
+                  <a:lnTo>
+                    <a:pt x="1862185" y="528218"/>
+                  </a:lnTo>
+                  <a:lnTo>
+                    <a:pt x="1790563" y="546079"/>
+                  </a:lnTo>
+                  <a:lnTo>
+                    <a:pt x="1718940" y="562932"/>
+                  </a:lnTo>
+                  <a:lnTo>
+                    <a:pt x="1647318" y="578834"/>
+                  </a:lnTo>
+                  <a:lnTo>
+                    <a:pt x="1575695" y="593837"/>
+                  </a:lnTo>
+                  <a:lnTo>
+                    <a:pt x="1504073" y="607994"/>
+                  </a:lnTo>
+                  <a:lnTo>
+                    <a:pt x="1432450" y="621352"/>
+                  </a:lnTo>
+                  <a:lnTo>
+                    <a:pt x="1360827" y="633955"/>
+                  </a:lnTo>
+                  <a:lnTo>
+                    <a:pt x="1289205" y="645847"/>
+                  </a:lnTo>
+                  <a:lnTo>
+                    <a:pt x="1217582" y="657067"/>
+                  </a:lnTo>
+                  <a:lnTo>
+                    <a:pt x="1145960" y="667654"/>
+                  </a:lnTo>
+                  <a:lnTo>
+                    <a:pt x="1074337" y="677643"/>
+                  </a:lnTo>
+                  <a:lnTo>
+                    <a:pt x="1002715" y="687068"/>
+                  </a:lnTo>
+                  <a:lnTo>
+                    <a:pt x="931092" y="695961"/>
+                  </a:lnTo>
+                  <a:lnTo>
+                    <a:pt x="859470" y="704353"/>
+                  </a:lnTo>
+                  <a:lnTo>
+                    <a:pt x="787847" y="712270"/>
+                  </a:lnTo>
+                  <a:lnTo>
+                    <a:pt x="716225" y="719740"/>
+                  </a:lnTo>
+                  <a:lnTo>
+                    <a:pt x="644602" y="726789"/>
+                  </a:lnTo>
+                  <a:lnTo>
+                    <a:pt x="572980" y="733439"/>
+                  </a:lnTo>
+                  <a:lnTo>
+                    <a:pt x="501357" y="739715"/>
+                  </a:lnTo>
+                  <a:lnTo>
+                    <a:pt x="429735" y="745635"/>
+                  </a:lnTo>
+                  <a:lnTo>
+                    <a:pt x="358112" y="751222"/>
+                  </a:lnTo>
+                  <a:lnTo>
+                    <a:pt x="286490" y="756493"/>
+                  </a:lnTo>
+                  <a:lnTo>
+                    <a:pt x="214867" y="761467"/>
+                  </a:lnTo>
+                  <a:lnTo>
+                    <a:pt x="143245" y="766160"/>
+                  </a:lnTo>
+                  <a:lnTo>
+                    <a:pt x="71622" y="770588"/>
+                  </a:lnTo>
+                  <a:lnTo>
+                    <a:pt x="0" y="774765"/>
                   </a:lnTo>
                 </a:path>
               </a:pathLst>
@@ -4229,288 +4229,288 @@
           </p:nvSpPr>
           <p:spPr>
             <a:xfrm>
-              <a:off x="1172049" y="1896563"/>
-              <a:ext cx="6567889" cy="3402033"/>
+              <a:off x="1172049" y="2073503"/>
+              <a:ext cx="6567889" cy="3244725"/>
             </a:xfrm>
             <a:custGeom>
               <a:avLst/>
               <a:pathLst>
-                <a:path w="6567889" h="3402033">
+                <a:path w="6567889" h="3244725">
                   <a:moveTo>
-                    <a:pt x="0" y="3402033"/>
+                    <a:pt x="0" y="3244725"/>
                   </a:moveTo>
                   <a:lnTo>
-                    <a:pt x="71622" y="3394603"/>
-                  </a:lnTo>
-                  <a:lnTo>
-                    <a:pt x="143245" y="3386953"/>
-                  </a:lnTo>
-                  <a:lnTo>
-                    <a:pt x="214867" y="3379076"/>
-                  </a:lnTo>
-                  <a:lnTo>
-                    <a:pt x="286490" y="3370965"/>
-                  </a:lnTo>
-                  <a:lnTo>
-                    <a:pt x="358112" y="3362614"/>
-                  </a:lnTo>
-                  <a:lnTo>
-                    <a:pt x="429735" y="3354015"/>
-                  </a:lnTo>
-                  <a:lnTo>
-                    <a:pt x="501357" y="3345162"/>
-                  </a:lnTo>
-                  <a:lnTo>
-                    <a:pt x="572980" y="3336046"/>
-                  </a:lnTo>
-                  <a:lnTo>
-                    <a:pt x="644602" y="3326659"/>
-                  </a:lnTo>
-                  <a:lnTo>
-                    <a:pt x="716225" y="3316994"/>
-                  </a:lnTo>
-                  <a:lnTo>
-                    <a:pt x="787847" y="3307043"/>
-                  </a:lnTo>
-                  <a:lnTo>
-                    <a:pt x="859470" y="3296797"/>
-                  </a:lnTo>
-                  <a:lnTo>
-                    <a:pt x="931092" y="3286247"/>
-                  </a:lnTo>
-                  <a:lnTo>
-                    <a:pt x="1002715" y="3275384"/>
-                  </a:lnTo>
-                  <a:lnTo>
-                    <a:pt x="1074337" y="3264199"/>
-                  </a:lnTo>
-                  <a:lnTo>
-                    <a:pt x="1145960" y="3252683"/>
-                  </a:lnTo>
-                  <a:lnTo>
-                    <a:pt x="1217582" y="3240825"/>
-                  </a:lnTo>
-                  <a:lnTo>
-                    <a:pt x="1289205" y="3228615"/>
-                  </a:lnTo>
-                  <a:lnTo>
-                    <a:pt x="1360827" y="3216044"/>
-                  </a:lnTo>
-                  <a:lnTo>
-                    <a:pt x="1432450" y="3203100"/>
-                  </a:lnTo>
-                  <a:lnTo>
-                    <a:pt x="1504073" y="3189772"/>
-                  </a:lnTo>
-                  <a:lnTo>
-                    <a:pt x="1575695" y="3176048"/>
-                  </a:lnTo>
-                  <a:lnTo>
-                    <a:pt x="1647318" y="3161919"/>
-                  </a:lnTo>
-                  <a:lnTo>
-                    <a:pt x="1718940" y="3147370"/>
-                  </a:lnTo>
-                  <a:lnTo>
-                    <a:pt x="1790563" y="3132389"/>
-                  </a:lnTo>
-                  <a:lnTo>
-                    <a:pt x="1862185" y="3116965"/>
-                  </a:lnTo>
-                  <a:lnTo>
-                    <a:pt x="1933808" y="3101083"/>
-                  </a:lnTo>
-                  <a:lnTo>
-                    <a:pt x="2005430" y="3084731"/>
-                  </a:lnTo>
-                  <a:lnTo>
-                    <a:pt x="2077053" y="3067894"/>
-                  </a:lnTo>
-                  <a:lnTo>
-                    <a:pt x="2148675" y="3050557"/>
-                  </a:lnTo>
-                  <a:lnTo>
-                    <a:pt x="2220298" y="3032706"/>
-                  </a:lnTo>
-                  <a:lnTo>
-                    <a:pt x="2291920" y="3014327"/>
-                  </a:lnTo>
-                  <a:lnTo>
-                    <a:pt x="2363543" y="2995402"/>
-                  </a:lnTo>
-                  <a:lnTo>
-                    <a:pt x="2435165" y="2975916"/>
-                  </a:lnTo>
-                  <a:lnTo>
-                    <a:pt x="2506788" y="2955853"/>
-                  </a:lnTo>
-                  <a:lnTo>
-                    <a:pt x="2578410" y="2935195"/>
-                  </a:lnTo>
-                  <a:lnTo>
-                    <a:pt x="2650033" y="2913924"/>
-                  </a:lnTo>
-                  <a:lnTo>
-                    <a:pt x="2721655" y="2892023"/>
-                  </a:lnTo>
-                  <a:lnTo>
-                    <a:pt x="2793278" y="2869472"/>
-                  </a:lnTo>
-                  <a:lnTo>
-                    <a:pt x="2864901" y="2846253"/>
-                  </a:lnTo>
-                  <a:lnTo>
-                    <a:pt x="2936523" y="2822345"/>
-                  </a:lnTo>
-                  <a:lnTo>
-                    <a:pt x="3008146" y="2797728"/>
-                  </a:lnTo>
-                  <a:lnTo>
-                    <a:pt x="3079768" y="2772382"/>
-                  </a:lnTo>
-                  <a:lnTo>
-                    <a:pt x="3151391" y="2746284"/>
-                  </a:lnTo>
-                  <a:lnTo>
-                    <a:pt x="3223013" y="2719413"/>
-                  </a:lnTo>
-                  <a:lnTo>
-                    <a:pt x="3294636" y="2691745"/>
-                  </a:lnTo>
-                  <a:lnTo>
-                    <a:pt x="3366258" y="2663256"/>
-                  </a:lnTo>
-                  <a:lnTo>
-                    <a:pt x="3437881" y="2633923"/>
-                  </a:lnTo>
-                  <a:lnTo>
-                    <a:pt x="3509503" y="2603720"/>
-                  </a:lnTo>
-                  <a:lnTo>
-                    <a:pt x="3581126" y="2572622"/>
-                  </a:lnTo>
-                  <a:lnTo>
-                    <a:pt x="3652748" y="2540602"/>
-                  </a:lnTo>
-                  <a:lnTo>
-                    <a:pt x="3724371" y="2507632"/>
-                  </a:lnTo>
-                  <a:lnTo>
-                    <a:pt x="3795993" y="2473685"/>
-                  </a:lnTo>
-                  <a:lnTo>
-                    <a:pt x="3867616" y="2438732"/>
-                  </a:lnTo>
-                  <a:lnTo>
-                    <a:pt x="3939238" y="2402742"/>
-                  </a:lnTo>
-                  <a:lnTo>
-                    <a:pt x="4010861" y="2365685"/>
-                  </a:lnTo>
-                  <a:lnTo>
-                    <a:pt x="4082483" y="2327530"/>
-                  </a:lnTo>
-                  <a:lnTo>
-                    <a:pt x="4154106" y="2288243"/>
-                  </a:lnTo>
-                  <a:lnTo>
-                    <a:pt x="4225729" y="2247792"/>
-                  </a:lnTo>
-                  <a:lnTo>
-                    <a:pt x="4297351" y="2206141"/>
-                  </a:lnTo>
-                  <a:lnTo>
-                    <a:pt x="4368974" y="2163255"/>
-                  </a:lnTo>
-                  <a:lnTo>
-                    <a:pt x="4440596" y="2119098"/>
-                  </a:lnTo>
-                  <a:lnTo>
-                    <a:pt x="4512219" y="2073632"/>
-                  </a:lnTo>
-                  <a:lnTo>
-                    <a:pt x="4583841" y="2026818"/>
-                  </a:lnTo>
-                  <a:lnTo>
-                    <a:pt x="4655464" y="1978616"/>
-                  </a:lnTo>
-                  <a:lnTo>
-                    <a:pt x="4727086" y="1928985"/>
-                  </a:lnTo>
-                  <a:lnTo>
-                    <a:pt x="4798709" y="1877882"/>
-                  </a:lnTo>
-                  <a:lnTo>
-                    <a:pt x="4870331" y="1825265"/>
-                  </a:lnTo>
-                  <a:lnTo>
-                    <a:pt x="4941954" y="1771087"/>
-                  </a:lnTo>
-                  <a:lnTo>
-                    <a:pt x="5013576" y="1715303"/>
-                  </a:lnTo>
-                  <a:lnTo>
-                    <a:pt x="5085199" y="1657865"/>
-                  </a:lnTo>
-                  <a:lnTo>
-                    <a:pt x="5156821" y="1598724"/>
-                  </a:lnTo>
-                  <a:lnTo>
-                    <a:pt x="5228444" y="1537830"/>
-                  </a:lnTo>
-                  <a:lnTo>
-                    <a:pt x="5300066" y="1475131"/>
-                  </a:lnTo>
-                  <a:lnTo>
-                    <a:pt x="5371689" y="1410572"/>
-                  </a:lnTo>
-                  <a:lnTo>
-                    <a:pt x="5443311" y="1344100"/>
-                  </a:lnTo>
-                  <a:lnTo>
-                    <a:pt x="5514934" y="1275657"/>
-                  </a:lnTo>
-                  <a:lnTo>
-                    <a:pt x="5586557" y="1205185"/>
-                  </a:lnTo>
-                  <a:lnTo>
-                    <a:pt x="5658179" y="1132623"/>
-                  </a:lnTo>
-                  <a:lnTo>
-                    <a:pt x="5729802" y="1057910"/>
-                  </a:lnTo>
-                  <a:lnTo>
-                    <a:pt x="5801424" y="980982"/>
-                  </a:lnTo>
-                  <a:lnTo>
-                    <a:pt x="5873047" y="901773"/>
-                  </a:lnTo>
-                  <a:lnTo>
-                    <a:pt x="5944669" y="820216"/>
-                  </a:lnTo>
-                  <a:lnTo>
-                    <a:pt x="6016292" y="736241"/>
-                  </a:lnTo>
-                  <a:lnTo>
-                    <a:pt x="6087914" y="649776"/>
-                  </a:lnTo>
-                  <a:lnTo>
-                    <a:pt x="6159537" y="560748"/>
-                  </a:lnTo>
-                  <a:lnTo>
-                    <a:pt x="6231159" y="469080"/>
-                  </a:lnTo>
-                  <a:lnTo>
-                    <a:pt x="6302782" y="374695"/>
-                  </a:lnTo>
-                  <a:lnTo>
-                    <a:pt x="6374404" y="277511"/>
-                  </a:lnTo>
-                  <a:lnTo>
-                    <a:pt x="6446027" y="177446"/>
-                  </a:lnTo>
-                  <a:lnTo>
-                    <a:pt x="6517649" y="74414"/>
+                    <a:pt x="71622" y="3237638"/>
+                  </a:lnTo>
+                  <a:lnTo>
+                    <a:pt x="143245" y="3230342"/>
+                  </a:lnTo>
+                  <a:lnTo>
+                    <a:pt x="214867" y="3222829"/>
+                  </a:lnTo>
+                  <a:lnTo>
+                    <a:pt x="286490" y="3215093"/>
+                  </a:lnTo>
+                  <a:lnTo>
+                    <a:pt x="358112" y="3207128"/>
+                  </a:lnTo>
+                  <a:lnTo>
+                    <a:pt x="429735" y="3198927"/>
+                  </a:lnTo>
+                  <a:lnTo>
+                    <a:pt x="501357" y="3190483"/>
+                  </a:lnTo>
+                  <a:lnTo>
+                    <a:pt x="572980" y="3181788"/>
+                  </a:lnTo>
+                  <a:lnTo>
+                    <a:pt x="644602" y="3172836"/>
+                  </a:lnTo>
+                  <a:lnTo>
+                    <a:pt x="716225" y="3163618"/>
+                  </a:lnTo>
+                  <a:lnTo>
+                    <a:pt x="787847" y="3154127"/>
+                  </a:lnTo>
+                  <a:lnTo>
+                    <a:pt x="859470" y="3144354"/>
+                  </a:lnTo>
+                  <a:lnTo>
+                    <a:pt x="931092" y="3134292"/>
+                  </a:lnTo>
+                  <a:lnTo>
+                    <a:pt x="1002715" y="3123931"/>
+                  </a:lnTo>
+                  <a:lnTo>
+                    <a:pt x="1074337" y="3113264"/>
+                  </a:lnTo>
+                  <a:lnTo>
+                    <a:pt x="1145960" y="3102280"/>
+                  </a:lnTo>
+                  <a:lnTo>
+                    <a:pt x="1217582" y="3090970"/>
+                  </a:lnTo>
+                  <a:lnTo>
+                    <a:pt x="1289205" y="3079325"/>
+                  </a:lnTo>
+                  <a:lnTo>
+                    <a:pt x="1360827" y="3067335"/>
+                  </a:lnTo>
+                  <a:lnTo>
+                    <a:pt x="1432450" y="3054989"/>
+                  </a:lnTo>
+                  <a:lnTo>
+                    <a:pt x="1504073" y="3042278"/>
+                  </a:lnTo>
+                  <a:lnTo>
+                    <a:pt x="1575695" y="3029189"/>
+                  </a:lnTo>
+                  <a:lnTo>
+                    <a:pt x="1647318" y="3015713"/>
+                  </a:lnTo>
+                  <a:lnTo>
+                    <a:pt x="1718940" y="3001836"/>
+                  </a:lnTo>
+                  <a:lnTo>
+                    <a:pt x="1790563" y="2987549"/>
+                  </a:lnTo>
+                  <a:lnTo>
+                    <a:pt x="1862185" y="2972838"/>
+                  </a:lnTo>
+                  <a:lnTo>
+                    <a:pt x="1933808" y="2957690"/>
+                  </a:lnTo>
+                  <a:lnTo>
+                    <a:pt x="2005430" y="2942094"/>
+                  </a:lnTo>
+                  <a:lnTo>
+                    <a:pt x="2077053" y="2926035"/>
+                  </a:lnTo>
+                  <a:lnTo>
+                    <a:pt x="2148675" y="2909500"/>
+                  </a:lnTo>
+                  <a:lnTo>
+                    <a:pt x="2220298" y="2892475"/>
+                  </a:lnTo>
+                  <a:lnTo>
+                    <a:pt x="2291920" y="2874945"/>
+                  </a:lnTo>
+                  <a:lnTo>
+                    <a:pt x="2363543" y="2856896"/>
+                  </a:lnTo>
+                  <a:lnTo>
+                    <a:pt x="2435165" y="2838311"/>
+                  </a:lnTo>
+                  <a:lnTo>
+                    <a:pt x="2506788" y="2819175"/>
+                  </a:lnTo>
+                  <a:lnTo>
+                    <a:pt x="2578410" y="2799472"/>
+                  </a:lnTo>
+                  <a:lnTo>
+                    <a:pt x="2650033" y="2779185"/>
+                  </a:lnTo>
+                  <a:lnTo>
+                    <a:pt x="2721655" y="2758296"/>
+                  </a:lnTo>
+                  <a:lnTo>
+                    <a:pt x="2793278" y="2736788"/>
+                  </a:lnTo>
+                  <a:lnTo>
+                    <a:pt x="2864901" y="2714643"/>
+                  </a:lnTo>
+                  <a:lnTo>
+                    <a:pt x="2936523" y="2691841"/>
+                  </a:lnTo>
+                  <a:lnTo>
+                    <a:pt x="3008146" y="2668362"/>
+                  </a:lnTo>
+                  <a:lnTo>
+                    <a:pt x="3079768" y="2644188"/>
+                  </a:lnTo>
+                  <a:lnTo>
+                    <a:pt x="3151391" y="2619297"/>
+                  </a:lnTo>
+                  <a:lnTo>
+                    <a:pt x="3223013" y="2593668"/>
+                  </a:lnTo>
+                  <a:lnTo>
+                    <a:pt x="3294636" y="2567279"/>
+                  </a:lnTo>
+                  <a:lnTo>
+                    <a:pt x="3366258" y="2540108"/>
+                  </a:lnTo>
+                  <a:lnTo>
+                    <a:pt x="3437881" y="2512131"/>
+                  </a:lnTo>
+                  <a:lnTo>
+                    <a:pt x="3509503" y="2483325"/>
+                  </a:lnTo>
+                  <a:lnTo>
+                    <a:pt x="3581126" y="2453665"/>
+                  </a:lnTo>
+                  <a:lnTo>
+                    <a:pt x="3652748" y="2423125"/>
+                  </a:lnTo>
+                  <a:lnTo>
+                    <a:pt x="3724371" y="2391680"/>
+                  </a:lnTo>
+                  <a:lnTo>
+                    <a:pt x="3795993" y="2359303"/>
+                  </a:lnTo>
+                  <a:lnTo>
+                    <a:pt x="3867616" y="2325966"/>
+                  </a:lnTo>
+                  <a:lnTo>
+                    <a:pt x="3939238" y="2291640"/>
+                  </a:lnTo>
+                  <a:lnTo>
+                    <a:pt x="4010861" y="2256297"/>
+                  </a:lnTo>
+                  <a:lnTo>
+                    <a:pt x="4082483" y="2219906"/>
+                  </a:lnTo>
+                  <a:lnTo>
+                    <a:pt x="4154106" y="2182436"/>
+                  </a:lnTo>
+                  <a:lnTo>
+                    <a:pt x="4225729" y="2143855"/>
+                  </a:lnTo>
+                  <a:lnTo>
+                    <a:pt x="4297351" y="2104130"/>
+                  </a:lnTo>
+                  <a:lnTo>
+                    <a:pt x="4368974" y="2063227"/>
+                  </a:lnTo>
+                  <a:lnTo>
+                    <a:pt x="4440596" y="2021112"/>
+                  </a:lnTo>
+                  <a:lnTo>
+                    <a:pt x="4512219" y="1977748"/>
+                  </a:lnTo>
+                  <a:lnTo>
+                    <a:pt x="4583841" y="1933099"/>
+                  </a:lnTo>
+                  <a:lnTo>
+                    <a:pt x="4655464" y="1887126"/>
+                  </a:lnTo>
+                  <a:lnTo>
+                    <a:pt x="4727086" y="1839789"/>
+                  </a:lnTo>
+                  <a:lnTo>
+                    <a:pt x="4798709" y="1791050"/>
+                  </a:lnTo>
+                  <a:lnTo>
+                    <a:pt x="4870331" y="1740865"/>
+                  </a:lnTo>
+                  <a:lnTo>
+                    <a:pt x="4941954" y="1689192"/>
+                  </a:lnTo>
+                  <a:lnTo>
+                    <a:pt x="5013576" y="1635988"/>
+                  </a:lnTo>
+                  <a:lnTo>
+                    <a:pt x="5085199" y="1581206"/>
+                  </a:lnTo>
+                  <a:lnTo>
+                    <a:pt x="5156821" y="1524800"/>
+                  </a:lnTo>
+                  <a:lnTo>
+                    <a:pt x="5228444" y="1466722"/>
+                  </a:lnTo>
+                  <a:lnTo>
+                    <a:pt x="5300066" y="1406921"/>
+                  </a:lnTo>
+                  <a:lnTo>
+                    <a:pt x="5371689" y="1345348"/>
+                  </a:lnTo>
+                  <a:lnTo>
+                    <a:pt x="5443311" y="1281949"/>
+                  </a:lnTo>
+                  <a:lnTo>
+                    <a:pt x="5514934" y="1216671"/>
+                  </a:lnTo>
+                  <a:lnTo>
+                    <a:pt x="5586557" y="1149457"/>
+                  </a:lnTo>
+                  <a:lnTo>
+                    <a:pt x="5658179" y="1080251"/>
+                  </a:lnTo>
+                  <a:lnTo>
+                    <a:pt x="5729802" y="1008993"/>
+                  </a:lnTo>
+                  <a:lnTo>
+                    <a:pt x="5801424" y="935622"/>
+                  </a:lnTo>
+                  <a:lnTo>
+                    <a:pt x="5873047" y="860076"/>
+                  </a:lnTo>
+                  <a:lnTo>
+                    <a:pt x="5944669" y="782290"/>
+                  </a:lnTo>
+                  <a:lnTo>
+                    <a:pt x="6016292" y="702197"/>
+                  </a:lnTo>
+                  <a:lnTo>
+                    <a:pt x="6087914" y="619731"/>
+                  </a:lnTo>
+                  <a:lnTo>
+                    <a:pt x="6159537" y="534819"/>
+                  </a:lnTo>
+                  <a:lnTo>
+                    <a:pt x="6231159" y="447390"/>
+                  </a:lnTo>
+                  <a:lnTo>
+                    <a:pt x="6302782" y="357369"/>
+                  </a:lnTo>
+                  <a:lnTo>
+                    <a:pt x="6374404" y="264679"/>
+                  </a:lnTo>
+                  <a:lnTo>
+                    <a:pt x="6446027" y="169241"/>
+                  </a:lnTo>
+                  <a:lnTo>
+                    <a:pt x="6517649" y="70973"/>
                   </a:lnTo>
                   <a:lnTo>
                     <a:pt x="6567889" y="0"/>
@@ -4542,7 +4542,7 @@
           </p:nvSpPr>
           <p:spPr>
             <a:xfrm>
-              <a:off x="817517" y="4679530"/>
+              <a:off x="817517" y="4727786"/>
               <a:ext cx="7799693" cy="0"/>
             </a:xfrm>
             <a:custGeom>
@@ -4585,15 +4585,15 @@
           </p:nvSpPr>
           <p:spPr>
             <a:xfrm>
-              <a:off x="4222163" y="1896563"/>
-              <a:ext cx="0" cy="3826579"/>
+              <a:off x="4222163" y="2073503"/>
+              <a:ext cx="0" cy="3649639"/>
             </a:xfrm>
             <a:custGeom>
               <a:avLst/>
               <a:pathLst>
-                <a:path w="0" h="3826579">
+                <a:path w="0" h="3649639">
                   <a:moveTo>
-                    <a:pt x="0" y="3826579"/>
+                    <a:pt x="0" y="3649639"/>
                   </a:moveTo>
                   <a:lnTo>
                     <a:pt x="0" y="0"/>
@@ -4628,7 +4628,7 @@
           </p:nvSpPr>
           <p:spPr>
             <a:xfrm>
-              <a:off x="692708" y="5509156"/>
+              <a:off x="692708" y="5517199"/>
               <a:ext cx="62179" cy="80101"/>
             </a:xfrm>
             <a:prstGeom prst="rect">
@@ -4674,7 +4674,7 @@
           </p:nvSpPr>
           <p:spPr>
             <a:xfrm>
-              <a:off x="692708" y="4639479"/>
+              <a:off x="692708" y="4687735"/>
               <a:ext cx="62179" cy="80101"/>
             </a:xfrm>
             <a:prstGeom prst="rect">
@@ -4720,7 +4720,7 @@
           </p:nvSpPr>
           <p:spPr>
             <a:xfrm>
-              <a:off x="692708" y="3769802"/>
+              <a:off x="692708" y="3858272"/>
               <a:ext cx="62179" cy="80101"/>
             </a:xfrm>
             <a:prstGeom prst="rect">
@@ -4766,7 +4766,7 @@
           </p:nvSpPr>
           <p:spPr>
             <a:xfrm>
-              <a:off x="692708" y="2900125"/>
+              <a:off x="692708" y="3028808"/>
               <a:ext cx="62179" cy="80101"/>
             </a:xfrm>
             <a:prstGeom prst="rect">
@@ -4812,7 +4812,7 @@
           </p:nvSpPr>
           <p:spPr>
             <a:xfrm>
-              <a:off x="692708" y="2030448"/>
+              <a:off x="692708" y="2199345"/>
               <a:ext cx="62179" cy="80101"/>
             </a:xfrm>
             <a:prstGeom prst="rect">
@@ -5180,7 +5180,7 @@
           </p:nvSpPr>
           <p:spPr>
             <a:xfrm rot="-5400000">
-              <a:off x="68446" y="3759743"/>
+              <a:off x="68446" y="3848213"/>
               <a:ext cx="1016904" cy="100218"/>
             </a:xfrm>
             <a:prstGeom prst="rect">
@@ -5221,6 +5221,52 @@
         <p:sp>
           <p:nvSpPr>
             <p:cNvPr id="43" name="tx43"/>
+            <p:cNvSpPr/>
+            <p:nvPr/>
+          </p:nvSpPr>
+          <p:spPr>
+            <a:xfrm>
+              <a:off x="817517" y="1896563"/>
+              <a:ext cx="4433376" cy="82021"/>
+            </a:xfrm>
+            <a:prstGeom prst="rect">
+              <a:avLst/>
+            </a:prstGeom>
+            <a:noFill/>
+          </p:spPr>
+          <p:txBody>
+            <a:bodyPr lIns="0" rIns="0" tIns="0" bIns="0" anchorCtr="1" anchor="ctr" wrap="none"/>
+            <a:lstStyle/>
+            <a:p>
+              <a:pPr algn="l" marL="0" marR="0" indent="0">
+                <a:lnSpc>
+                  <a:spcPts val="900"/>
+                </a:lnSpc>
+                <a:spcBef>
+                  <a:spcPts val="0"/>
+                </a:spcBef>
+                <a:spcAft>
+                  <a:spcPts val="0"/>
+                </a:spcAft>
+              </a:pPr>
+              <a:r>
+                <a:rPr sz="900">
+                  <a:solidFill>
+                    <a:srgbClr val="404040">
+                      <a:alpha val="100000"/>
+                    </a:srgbClr>
+                  </a:solidFill>
+                  <a:latin typeface="Helvetica"/>
+                  <a:cs typeface="Helvetica"/>
+                </a:rPr>
+                <a:t>subHR = 1.32 (95% CI 1.00-1.74), p = 0.048   (per 25 mg increase in dose discrepancy)</a:t>
+              </a:r>
+            </a:p>
+          </p:txBody>
+        </p:sp>
+        <p:sp>
+          <p:nvSpPr>
+            <p:cNvPr id="44" name="tx44"/>
             <p:cNvSpPr/>
             <p:nvPr/>
           </p:nvSpPr>

--- a/docs/plots/carbo/jx_carbo_linsubhr_dosedisc_throm2.pptx
+++ b/docs/plots/carbo/jx_carbo_linsubhr_dosedisc_throm2.pptx
@@ -2271,26 +2271,26 @@
           </p:nvSpPr>
           <p:spPr>
             <a:xfrm>
-              <a:off x="817517" y="5142518"/>
-              <a:ext cx="7799693" cy="0"/>
+              <a:off x="915645" y="5071743"/>
+              <a:ext cx="7682587" cy="0"/>
             </a:xfrm>
             <a:custGeom>
               <a:avLst/>
               <a:pathLst>
-                <a:path w="7799693" h="0">
+                <a:path w="7682587" h="0">
                   <a:moveTo>
                     <a:pt x="0" y="0"/>
                   </a:moveTo>
                   <a:lnTo>
-                    <a:pt x="7799693" y="0"/>
-                  </a:lnTo>
-                  <a:lnTo>
-                    <a:pt x="7799693" y="0"/>
+                    <a:pt x="7682587" y="0"/>
+                  </a:lnTo>
+                  <a:lnTo>
+                    <a:pt x="7682587" y="0"/>
                   </a:lnTo>
                 </a:path>
               </a:pathLst>
             </a:custGeom>
-            <a:ln w="6775" cap="flat">
+            <a:ln w="8623" cap="flat">
               <a:solidFill>
                 <a:srgbClr val="EBEBEB">
                   <a:alpha val="100000"/>
@@ -2314,26 +2314,26 @@
           </p:nvSpPr>
           <p:spPr>
             <a:xfrm>
-              <a:off x="817517" y="4313054"/>
-              <a:ext cx="7799693" cy="0"/>
+              <a:off x="915645" y="4298074"/>
+              <a:ext cx="7682587" cy="0"/>
             </a:xfrm>
             <a:custGeom>
               <a:avLst/>
               <a:pathLst>
-                <a:path w="7799693" h="0">
+                <a:path w="7682587" h="0">
                   <a:moveTo>
                     <a:pt x="0" y="0"/>
                   </a:moveTo>
                   <a:lnTo>
-                    <a:pt x="7799693" y="0"/>
-                  </a:lnTo>
-                  <a:lnTo>
-                    <a:pt x="7799693" y="0"/>
+                    <a:pt x="7682587" y="0"/>
+                  </a:lnTo>
+                  <a:lnTo>
+                    <a:pt x="7682587" y="0"/>
                   </a:lnTo>
                 </a:path>
               </a:pathLst>
             </a:custGeom>
-            <a:ln w="6775" cap="flat">
+            <a:ln w="8623" cap="flat">
               <a:solidFill>
                 <a:srgbClr val="EBEBEB">
                   <a:alpha val="100000"/>
@@ -2357,26 +2357,26 @@
           </p:nvSpPr>
           <p:spPr>
             <a:xfrm>
-              <a:off x="817517" y="3483591"/>
-              <a:ext cx="7799693" cy="0"/>
+              <a:off x="915645" y="3524405"/>
+              <a:ext cx="7682587" cy="0"/>
             </a:xfrm>
             <a:custGeom>
               <a:avLst/>
               <a:pathLst>
-                <a:path w="7799693" h="0">
+                <a:path w="7682587" h="0">
                   <a:moveTo>
                     <a:pt x="0" y="0"/>
                   </a:moveTo>
                   <a:lnTo>
-                    <a:pt x="7799693" y="0"/>
-                  </a:lnTo>
-                  <a:lnTo>
-                    <a:pt x="7799693" y="0"/>
+                    <a:pt x="7682587" y="0"/>
+                  </a:lnTo>
+                  <a:lnTo>
+                    <a:pt x="7682587" y="0"/>
                   </a:lnTo>
                 </a:path>
               </a:pathLst>
             </a:custGeom>
-            <a:ln w="6775" cap="flat">
+            <a:ln w="8623" cap="flat">
               <a:solidFill>
                 <a:srgbClr val="EBEBEB">
                   <a:alpha val="100000"/>
@@ -2400,26 +2400,26 @@
           </p:nvSpPr>
           <p:spPr>
             <a:xfrm>
-              <a:off x="817517" y="2654127"/>
-              <a:ext cx="7799693" cy="0"/>
+              <a:off x="915645" y="2750737"/>
+              <a:ext cx="7682587" cy="0"/>
             </a:xfrm>
             <a:custGeom>
               <a:avLst/>
               <a:pathLst>
-                <a:path w="7799693" h="0">
+                <a:path w="7682587" h="0">
                   <a:moveTo>
                     <a:pt x="0" y="0"/>
                   </a:moveTo>
                   <a:lnTo>
-                    <a:pt x="7799693" y="0"/>
-                  </a:lnTo>
-                  <a:lnTo>
-                    <a:pt x="7799693" y="0"/>
+                    <a:pt x="7682587" y="0"/>
+                  </a:lnTo>
+                  <a:lnTo>
+                    <a:pt x="7682587" y="0"/>
                   </a:lnTo>
                 </a:path>
               </a:pathLst>
             </a:custGeom>
-            <a:ln w="6775" cap="flat">
+            <a:ln w="8623" cap="flat">
               <a:solidFill>
                 <a:srgbClr val="EBEBEB">
                   <a:alpha val="100000"/>
@@ -2443,15 +2443,15 @@
           </p:nvSpPr>
           <p:spPr>
             <a:xfrm>
-              <a:off x="2122745" y="2073503"/>
-              <a:ext cx="0" cy="3649639"/>
+              <a:off x="2201275" y="2209169"/>
+              <a:ext cx="0" cy="3404141"/>
             </a:xfrm>
             <a:custGeom>
               <a:avLst/>
               <a:pathLst>
-                <a:path w="0" h="3649639">
+                <a:path w="0" h="3404141">
                   <a:moveTo>
-                    <a:pt x="0" y="3649639"/>
+                    <a:pt x="0" y="3404141"/>
                   </a:moveTo>
                   <a:lnTo>
                     <a:pt x="0" y="0"/>
@@ -2462,7 +2462,7 @@
                 </a:path>
               </a:pathLst>
             </a:custGeom>
-            <a:ln w="6775" cap="flat">
+            <a:ln w="8623" cap="flat">
               <a:solidFill>
                 <a:srgbClr val="EBEBEB">
                   <a:alpha val="100000"/>
@@ -2486,15 +2486,15 @@
           </p:nvSpPr>
           <p:spPr>
             <a:xfrm>
-              <a:off x="3487174" y="2073503"/>
-              <a:ext cx="0" cy="3649639"/>
+              <a:off x="3545219" y="2209169"/>
+              <a:ext cx="0" cy="3404141"/>
             </a:xfrm>
             <a:custGeom>
               <a:avLst/>
               <a:pathLst>
-                <a:path w="0" h="3649639">
+                <a:path w="0" h="3404141">
                   <a:moveTo>
-                    <a:pt x="0" y="3649639"/>
+                    <a:pt x="0" y="3404141"/>
                   </a:moveTo>
                   <a:lnTo>
                     <a:pt x="0" y="0"/>
@@ -2505,7 +2505,7 @@
                 </a:path>
               </a:pathLst>
             </a:custGeom>
-            <a:ln w="6775" cap="flat">
+            <a:ln w="8623" cap="flat">
               <a:solidFill>
                 <a:srgbClr val="EBEBEB">
                   <a:alpha val="100000"/>
@@ -2529,15 +2529,15 @@
           </p:nvSpPr>
           <p:spPr>
             <a:xfrm>
-              <a:off x="4851604" y="2073503"/>
-              <a:ext cx="0" cy="3649639"/>
+              <a:off x="4889163" y="2209169"/>
+              <a:ext cx="0" cy="3404141"/>
             </a:xfrm>
             <a:custGeom>
               <a:avLst/>
               <a:pathLst>
-                <a:path w="0" h="3649639">
+                <a:path w="0" h="3404141">
                   <a:moveTo>
-                    <a:pt x="0" y="3649639"/>
+                    <a:pt x="0" y="3404141"/>
                   </a:moveTo>
                   <a:lnTo>
                     <a:pt x="0" y="0"/>
@@ -2548,7 +2548,7 @@
                 </a:path>
               </a:pathLst>
             </a:custGeom>
-            <a:ln w="6775" cap="flat">
+            <a:ln w="8623" cap="flat">
               <a:solidFill>
                 <a:srgbClr val="EBEBEB">
                   <a:alpha val="100000"/>
@@ -2572,15 +2572,15 @@
           </p:nvSpPr>
           <p:spPr>
             <a:xfrm>
-              <a:off x="6216034" y="2073503"/>
-              <a:ext cx="0" cy="3649639"/>
+              <a:off x="6233107" y="2209169"/>
+              <a:ext cx="0" cy="3404141"/>
             </a:xfrm>
             <a:custGeom>
               <a:avLst/>
               <a:pathLst>
-                <a:path w="0" h="3649639">
+                <a:path w="0" h="3404141">
                   <a:moveTo>
-                    <a:pt x="0" y="3649639"/>
+                    <a:pt x="0" y="3404141"/>
                   </a:moveTo>
                   <a:lnTo>
                     <a:pt x="0" y="0"/>
@@ -2591,7 +2591,7 @@
                 </a:path>
               </a:pathLst>
             </a:custGeom>
-            <a:ln w="6775" cap="flat">
+            <a:ln w="8623" cap="flat">
               <a:solidFill>
                 <a:srgbClr val="EBEBEB">
                   <a:alpha val="100000"/>
@@ -2615,15 +2615,15 @@
           </p:nvSpPr>
           <p:spPr>
             <a:xfrm>
-              <a:off x="7580464" y="2073503"/>
-              <a:ext cx="0" cy="3649639"/>
+              <a:off x="7577051" y="2209169"/>
+              <a:ext cx="0" cy="3404141"/>
             </a:xfrm>
             <a:custGeom>
               <a:avLst/>
               <a:pathLst>
-                <a:path w="0" h="3649639">
+                <a:path w="0" h="3404141">
                   <a:moveTo>
-                    <a:pt x="0" y="3649639"/>
+                    <a:pt x="0" y="3404141"/>
                   </a:moveTo>
                   <a:lnTo>
                     <a:pt x="0" y="0"/>
@@ -2634,7 +2634,7 @@
                 </a:path>
               </a:pathLst>
             </a:custGeom>
-            <a:ln w="6775" cap="flat">
+            <a:ln w="8623" cap="flat">
               <a:solidFill>
                 <a:srgbClr val="EBEBEB">
                   <a:alpha val="100000"/>
@@ -2658,26 +2658,26 @@
           </p:nvSpPr>
           <p:spPr>
             <a:xfrm>
-              <a:off x="817517" y="5557249"/>
-              <a:ext cx="7799693" cy="0"/>
+              <a:off x="915645" y="5458577"/>
+              <a:ext cx="7682587" cy="0"/>
             </a:xfrm>
             <a:custGeom>
               <a:avLst/>
               <a:pathLst>
-                <a:path w="7799693" h="0">
+                <a:path w="7682587" h="0">
                   <a:moveTo>
                     <a:pt x="0" y="0"/>
                   </a:moveTo>
                   <a:lnTo>
-                    <a:pt x="7799693" y="0"/>
-                  </a:lnTo>
-                  <a:lnTo>
-                    <a:pt x="7799693" y="0"/>
+                    <a:pt x="7682587" y="0"/>
+                  </a:lnTo>
+                  <a:lnTo>
+                    <a:pt x="7682587" y="0"/>
                   </a:lnTo>
                 </a:path>
               </a:pathLst>
             </a:custGeom>
-            <a:ln w="13550" cap="flat">
+            <a:ln w="17246" cap="flat">
               <a:solidFill>
                 <a:srgbClr val="EBEBEB">
                   <a:alpha val="100000"/>
@@ -2701,26 +2701,26 @@
           </p:nvSpPr>
           <p:spPr>
             <a:xfrm>
-              <a:off x="817517" y="4727786"/>
-              <a:ext cx="7799693" cy="0"/>
+              <a:off x="915645" y="4684908"/>
+              <a:ext cx="7682587" cy="0"/>
             </a:xfrm>
             <a:custGeom>
               <a:avLst/>
               <a:pathLst>
-                <a:path w="7799693" h="0">
+                <a:path w="7682587" h="0">
                   <a:moveTo>
                     <a:pt x="0" y="0"/>
                   </a:moveTo>
                   <a:lnTo>
-                    <a:pt x="7799693" y="0"/>
-                  </a:lnTo>
-                  <a:lnTo>
-                    <a:pt x="7799693" y="0"/>
+                    <a:pt x="7682587" y="0"/>
+                  </a:lnTo>
+                  <a:lnTo>
+                    <a:pt x="7682587" y="0"/>
                   </a:lnTo>
                 </a:path>
               </a:pathLst>
             </a:custGeom>
-            <a:ln w="13550" cap="flat">
+            <a:ln w="17246" cap="flat">
               <a:solidFill>
                 <a:srgbClr val="EBEBEB">
                   <a:alpha val="100000"/>
@@ -2744,26 +2744,26 @@
           </p:nvSpPr>
           <p:spPr>
             <a:xfrm>
-              <a:off x="817517" y="3898322"/>
-              <a:ext cx="7799693" cy="0"/>
+              <a:off x="915645" y="3911240"/>
+              <a:ext cx="7682587" cy="0"/>
             </a:xfrm>
             <a:custGeom>
               <a:avLst/>
               <a:pathLst>
-                <a:path w="7799693" h="0">
+                <a:path w="7682587" h="0">
                   <a:moveTo>
                     <a:pt x="0" y="0"/>
                   </a:moveTo>
                   <a:lnTo>
-                    <a:pt x="7799693" y="0"/>
-                  </a:lnTo>
-                  <a:lnTo>
-                    <a:pt x="7799693" y="0"/>
+                    <a:pt x="7682587" y="0"/>
+                  </a:lnTo>
+                  <a:lnTo>
+                    <a:pt x="7682587" y="0"/>
                   </a:lnTo>
                 </a:path>
               </a:pathLst>
             </a:custGeom>
-            <a:ln w="13550" cap="flat">
+            <a:ln w="17246" cap="flat">
               <a:solidFill>
                 <a:srgbClr val="EBEBEB">
                   <a:alpha val="100000"/>
@@ -2787,26 +2787,26 @@
           </p:nvSpPr>
           <p:spPr>
             <a:xfrm>
-              <a:off x="817517" y="3068859"/>
-              <a:ext cx="7799693" cy="0"/>
+              <a:off x="915645" y="3137571"/>
+              <a:ext cx="7682587" cy="0"/>
             </a:xfrm>
             <a:custGeom>
               <a:avLst/>
               <a:pathLst>
-                <a:path w="7799693" h="0">
+                <a:path w="7682587" h="0">
                   <a:moveTo>
                     <a:pt x="0" y="0"/>
                   </a:moveTo>
                   <a:lnTo>
-                    <a:pt x="7799693" y="0"/>
-                  </a:lnTo>
-                  <a:lnTo>
-                    <a:pt x="7799693" y="0"/>
+                    <a:pt x="7682587" y="0"/>
+                  </a:lnTo>
+                  <a:lnTo>
+                    <a:pt x="7682587" y="0"/>
                   </a:lnTo>
                 </a:path>
               </a:pathLst>
             </a:custGeom>
-            <a:ln w="13550" cap="flat">
+            <a:ln w="17246" cap="flat">
               <a:solidFill>
                 <a:srgbClr val="EBEBEB">
                   <a:alpha val="100000"/>
@@ -2830,26 +2830,26 @@
           </p:nvSpPr>
           <p:spPr>
             <a:xfrm>
-              <a:off x="817517" y="2239395"/>
-              <a:ext cx="7799693" cy="0"/>
+              <a:off x="915645" y="2363903"/>
+              <a:ext cx="7682587" cy="0"/>
             </a:xfrm>
             <a:custGeom>
               <a:avLst/>
               <a:pathLst>
-                <a:path w="7799693" h="0">
+                <a:path w="7682587" h="0">
                   <a:moveTo>
                     <a:pt x="0" y="0"/>
                   </a:moveTo>
                   <a:lnTo>
-                    <a:pt x="7799693" y="0"/>
-                  </a:lnTo>
-                  <a:lnTo>
-                    <a:pt x="7799693" y="0"/>
+                    <a:pt x="7682587" y="0"/>
+                  </a:lnTo>
+                  <a:lnTo>
+                    <a:pt x="7682587" y="0"/>
                   </a:lnTo>
                 </a:path>
               </a:pathLst>
             </a:custGeom>
-            <a:ln w="13550" cap="flat">
+            <a:ln w="17246" cap="flat">
               <a:solidFill>
                 <a:srgbClr val="EBEBEB">
                   <a:alpha val="100000"/>
@@ -2873,15 +2873,15 @@
           </p:nvSpPr>
           <p:spPr>
             <a:xfrm>
-              <a:off x="1440530" y="2073503"/>
-              <a:ext cx="0" cy="3649639"/>
+              <a:off x="1529303" y="2209169"/>
+              <a:ext cx="0" cy="3404141"/>
             </a:xfrm>
             <a:custGeom>
               <a:avLst/>
               <a:pathLst>
-                <a:path w="0" h="3649639">
+                <a:path w="0" h="3404141">
                   <a:moveTo>
-                    <a:pt x="0" y="3649639"/>
+                    <a:pt x="0" y="3404141"/>
                   </a:moveTo>
                   <a:lnTo>
                     <a:pt x="0" y="0"/>
@@ -2892,7 +2892,7 @@
                 </a:path>
               </a:pathLst>
             </a:custGeom>
-            <a:ln w="13550" cap="flat">
+            <a:ln w="17246" cap="flat">
               <a:solidFill>
                 <a:srgbClr val="EBEBEB">
                   <a:alpha val="100000"/>
@@ -2916,15 +2916,15 @@
           </p:nvSpPr>
           <p:spPr>
             <a:xfrm>
-              <a:off x="2804959" y="2073503"/>
-              <a:ext cx="0" cy="3649639"/>
+              <a:off x="2873247" y="2209169"/>
+              <a:ext cx="0" cy="3404141"/>
             </a:xfrm>
             <a:custGeom>
               <a:avLst/>
               <a:pathLst>
-                <a:path w="0" h="3649639">
+                <a:path w="0" h="3404141">
                   <a:moveTo>
-                    <a:pt x="0" y="3649639"/>
+                    <a:pt x="0" y="3404141"/>
                   </a:moveTo>
                   <a:lnTo>
                     <a:pt x="0" y="0"/>
@@ -2935,7 +2935,7 @@
                 </a:path>
               </a:pathLst>
             </a:custGeom>
-            <a:ln w="13550" cap="flat">
+            <a:ln w="17246" cap="flat">
               <a:solidFill>
                 <a:srgbClr val="EBEBEB">
                   <a:alpha val="100000"/>
@@ -2959,15 +2959,15 @@
           </p:nvSpPr>
           <p:spPr>
             <a:xfrm>
-              <a:off x="4169389" y="2073503"/>
-              <a:ext cx="0" cy="3649639"/>
+              <a:off x="4217191" y="2209169"/>
+              <a:ext cx="0" cy="3404141"/>
             </a:xfrm>
             <a:custGeom>
               <a:avLst/>
               <a:pathLst>
-                <a:path w="0" h="3649639">
+                <a:path w="0" h="3404141">
                   <a:moveTo>
-                    <a:pt x="0" y="3649639"/>
+                    <a:pt x="0" y="3404141"/>
                   </a:moveTo>
                   <a:lnTo>
                     <a:pt x="0" y="0"/>
@@ -2978,7 +2978,7 @@
                 </a:path>
               </a:pathLst>
             </a:custGeom>
-            <a:ln w="13550" cap="flat">
+            <a:ln w="17246" cap="flat">
               <a:solidFill>
                 <a:srgbClr val="EBEBEB">
                   <a:alpha val="100000"/>
@@ -3002,15 +3002,15 @@
           </p:nvSpPr>
           <p:spPr>
             <a:xfrm>
-              <a:off x="5533819" y="2073503"/>
-              <a:ext cx="0" cy="3649639"/>
+              <a:off x="5561135" y="2209169"/>
+              <a:ext cx="0" cy="3404141"/>
             </a:xfrm>
             <a:custGeom>
               <a:avLst/>
               <a:pathLst>
-                <a:path w="0" h="3649639">
+                <a:path w="0" h="3404141">
                   <a:moveTo>
-                    <a:pt x="0" y="3649639"/>
+                    <a:pt x="0" y="3404141"/>
                   </a:moveTo>
                   <a:lnTo>
                     <a:pt x="0" y="0"/>
@@ -3021,7 +3021,7 @@
                 </a:path>
               </a:pathLst>
             </a:custGeom>
-            <a:ln w="13550" cap="flat">
+            <a:ln w="17246" cap="flat">
               <a:solidFill>
                 <a:srgbClr val="EBEBEB">
                   <a:alpha val="100000"/>
@@ -3045,15 +3045,15 @@
           </p:nvSpPr>
           <p:spPr>
             <a:xfrm>
-              <a:off x="6898249" y="2073503"/>
-              <a:ext cx="0" cy="3649639"/>
+              <a:off x="6905079" y="2209169"/>
+              <a:ext cx="0" cy="3404141"/>
             </a:xfrm>
             <a:custGeom>
               <a:avLst/>
               <a:pathLst>
-                <a:path w="0" h="3649639">
+                <a:path w="0" h="3404141">
                   <a:moveTo>
-                    <a:pt x="0" y="3649639"/>
+                    <a:pt x="0" y="3404141"/>
                   </a:moveTo>
                   <a:lnTo>
                     <a:pt x="0" y="0"/>
@@ -3064,7 +3064,7 @@
                 </a:path>
               </a:pathLst>
             </a:custGeom>
-            <a:ln w="13550" cap="flat">
+            <a:ln w="17246" cap="flat">
               <a:solidFill>
                 <a:srgbClr val="EBEBEB">
                   <a:alpha val="100000"/>
@@ -3088,15 +3088,15 @@
           </p:nvSpPr>
           <p:spPr>
             <a:xfrm>
-              <a:off x="8262679" y="2073503"/>
-              <a:ext cx="0" cy="3649639"/>
+              <a:off x="8249023" y="2209169"/>
+              <a:ext cx="0" cy="3404141"/>
             </a:xfrm>
             <a:custGeom>
               <a:avLst/>
               <a:pathLst>
-                <a:path w="0" h="3649639">
+                <a:path w="0" h="3404141">
                   <a:moveTo>
-                    <a:pt x="0" y="3649639"/>
+                    <a:pt x="0" y="3404141"/>
                   </a:moveTo>
                   <a:lnTo>
                     <a:pt x="0" y="0"/>
@@ -3107,7 +3107,7 @@
                 </a:path>
               </a:pathLst>
             </a:custGeom>
-            <a:ln w="13550" cap="flat">
+            <a:ln w="17246" cap="flat">
               <a:solidFill>
                 <a:srgbClr val="EBEBEB">
                   <a:alpha val="100000"/>
@@ -3131,522 +3131,522 @@
           </p:nvSpPr>
           <p:spPr>
             <a:xfrm>
-              <a:off x="1172049" y="2073503"/>
-              <a:ext cx="7090630" cy="3413923"/>
+              <a:off x="1264853" y="2209169"/>
+              <a:ext cx="6984170" cy="3184281"/>
             </a:xfrm>
             <a:custGeom>
               <a:avLst/>
               <a:pathLst>
-                <a:path w="7090630" h="3413923">
+                <a:path w="6984170" h="3184281">
                   <a:moveTo>
-                    <a:pt x="0" y="2665522"/>
+                    <a:pt x="0" y="2486222"/>
                   </a:moveTo>
                   <a:lnTo>
-                    <a:pt x="71622" y="2665259"/>
-                  </a:lnTo>
-                  <a:lnTo>
-                    <a:pt x="143245" y="2664997"/>
-                  </a:lnTo>
-                  <a:lnTo>
-                    <a:pt x="214867" y="2664735"/>
-                  </a:lnTo>
-                  <a:lnTo>
-                    <a:pt x="286490" y="2664472"/>
-                  </a:lnTo>
-                  <a:lnTo>
-                    <a:pt x="358112" y="2664210"/>
-                  </a:lnTo>
-                  <a:lnTo>
-                    <a:pt x="429735" y="2663947"/>
-                  </a:lnTo>
-                  <a:lnTo>
-                    <a:pt x="501357" y="2663685"/>
-                  </a:lnTo>
-                  <a:lnTo>
-                    <a:pt x="572980" y="2663422"/>
-                  </a:lnTo>
-                  <a:lnTo>
-                    <a:pt x="644602" y="2663159"/>
-                  </a:lnTo>
-                  <a:lnTo>
-                    <a:pt x="716225" y="2662896"/>
-                  </a:lnTo>
-                  <a:lnTo>
-                    <a:pt x="787847" y="2662633"/>
-                  </a:lnTo>
-                  <a:lnTo>
-                    <a:pt x="859470" y="2662370"/>
-                  </a:lnTo>
-                  <a:lnTo>
-                    <a:pt x="931092" y="2662107"/>
-                  </a:lnTo>
-                  <a:lnTo>
-                    <a:pt x="1002715" y="2661844"/>
-                  </a:lnTo>
-                  <a:lnTo>
-                    <a:pt x="1074337" y="2661580"/>
-                  </a:lnTo>
-                  <a:lnTo>
-                    <a:pt x="1145960" y="2661317"/>
-                  </a:lnTo>
-                  <a:lnTo>
-                    <a:pt x="1217582" y="2661054"/>
-                  </a:lnTo>
-                  <a:lnTo>
-                    <a:pt x="1289205" y="2660790"/>
-                  </a:lnTo>
-                  <a:lnTo>
-                    <a:pt x="1360827" y="2660526"/>
-                  </a:lnTo>
-                  <a:lnTo>
-                    <a:pt x="1432450" y="2660263"/>
-                  </a:lnTo>
-                  <a:lnTo>
-                    <a:pt x="1504073" y="2659999"/>
-                  </a:lnTo>
-                  <a:lnTo>
-                    <a:pt x="1575695" y="2659735"/>
-                  </a:lnTo>
-                  <a:lnTo>
-                    <a:pt x="1647318" y="2659471"/>
-                  </a:lnTo>
-                  <a:lnTo>
-                    <a:pt x="1718940" y="2659207"/>
-                  </a:lnTo>
-                  <a:lnTo>
-                    <a:pt x="1790563" y="2658943"/>
-                  </a:lnTo>
-                  <a:lnTo>
-                    <a:pt x="1862185" y="2658678"/>
-                  </a:lnTo>
-                  <a:lnTo>
-                    <a:pt x="1933808" y="2658414"/>
-                  </a:lnTo>
-                  <a:lnTo>
-                    <a:pt x="2005430" y="2658149"/>
-                  </a:lnTo>
-                  <a:lnTo>
-                    <a:pt x="2077053" y="2657885"/>
-                  </a:lnTo>
-                  <a:lnTo>
-                    <a:pt x="2148675" y="2657620"/>
-                  </a:lnTo>
-                  <a:lnTo>
-                    <a:pt x="2220298" y="2657356"/>
-                  </a:lnTo>
-                  <a:lnTo>
-                    <a:pt x="2291920" y="2657091"/>
-                  </a:lnTo>
-                  <a:lnTo>
-                    <a:pt x="2363543" y="2656826"/>
-                  </a:lnTo>
-                  <a:lnTo>
-                    <a:pt x="2435165" y="2656561"/>
-                  </a:lnTo>
-                  <a:lnTo>
-                    <a:pt x="2506788" y="2656296"/>
-                  </a:lnTo>
-                  <a:lnTo>
-                    <a:pt x="2578410" y="2656031"/>
-                  </a:lnTo>
-                  <a:lnTo>
-                    <a:pt x="2650033" y="2655766"/>
-                  </a:lnTo>
-                  <a:lnTo>
-                    <a:pt x="2721655" y="2655501"/>
-                  </a:lnTo>
-                  <a:lnTo>
-                    <a:pt x="2793278" y="2655235"/>
-                  </a:lnTo>
-                  <a:lnTo>
-                    <a:pt x="2864901" y="2654970"/>
-                  </a:lnTo>
-                  <a:lnTo>
-                    <a:pt x="2936523" y="2654704"/>
-                  </a:lnTo>
-                  <a:lnTo>
-                    <a:pt x="3008146" y="2654439"/>
-                  </a:lnTo>
-                  <a:lnTo>
-                    <a:pt x="3079768" y="2634083"/>
-                  </a:lnTo>
-                  <a:lnTo>
-                    <a:pt x="3151391" y="2583244"/>
-                  </a:lnTo>
-                  <a:lnTo>
-                    <a:pt x="3223013" y="2529362"/>
-                  </a:lnTo>
-                  <a:lnTo>
-                    <a:pt x="3294636" y="2472257"/>
-                  </a:lnTo>
-                  <a:lnTo>
-                    <a:pt x="3366258" y="2411734"/>
-                  </a:lnTo>
-                  <a:lnTo>
-                    <a:pt x="3437881" y="2347590"/>
-                  </a:lnTo>
-                  <a:lnTo>
-                    <a:pt x="3509503" y="2279608"/>
-                  </a:lnTo>
-                  <a:lnTo>
-                    <a:pt x="3581126" y="2207559"/>
-                  </a:lnTo>
-                  <a:lnTo>
-                    <a:pt x="3652748" y="2131198"/>
-                  </a:lnTo>
-                  <a:lnTo>
-                    <a:pt x="3724371" y="2050269"/>
-                  </a:lnTo>
-                  <a:lnTo>
-                    <a:pt x="3795993" y="1964497"/>
-                  </a:lnTo>
-                  <a:lnTo>
-                    <a:pt x="3867616" y="1873592"/>
-                  </a:lnTo>
-                  <a:lnTo>
-                    <a:pt x="3939238" y="1777249"/>
-                  </a:lnTo>
-                  <a:lnTo>
-                    <a:pt x="4010861" y="1675141"/>
-                  </a:lnTo>
-                  <a:lnTo>
-                    <a:pt x="4082483" y="1566923"/>
-                  </a:lnTo>
-                  <a:lnTo>
-                    <a:pt x="4154106" y="1452230"/>
-                  </a:lnTo>
-                  <a:lnTo>
-                    <a:pt x="4225729" y="1330674"/>
-                  </a:lnTo>
-                  <a:lnTo>
-                    <a:pt x="4297351" y="1201845"/>
-                  </a:lnTo>
-                  <a:lnTo>
-                    <a:pt x="4368974" y="1065308"/>
-                  </a:lnTo>
-                  <a:lnTo>
-                    <a:pt x="4440596" y="920601"/>
-                  </a:lnTo>
-                  <a:lnTo>
-                    <a:pt x="4512219" y="767235"/>
-                  </a:lnTo>
-                  <a:lnTo>
-                    <a:pt x="4583841" y="604693"/>
-                  </a:lnTo>
-                  <a:lnTo>
-                    <a:pt x="4655464" y="432425"/>
-                  </a:lnTo>
-                  <a:lnTo>
-                    <a:pt x="4727086" y="249849"/>
-                  </a:lnTo>
-                  <a:lnTo>
-                    <a:pt x="4798709" y="56349"/>
-                  </a:lnTo>
-                  <a:lnTo>
-                    <a:pt x="4818388" y="0"/>
-                  </a:lnTo>
-                  <a:lnTo>
-                    <a:pt x="7090630" y="0"/>
-                  </a:lnTo>
-                  <a:lnTo>
-                    <a:pt x="7090630" y="2639157"/>
-                  </a:lnTo>
-                  <a:lnTo>
-                    <a:pt x="7019007" y="2639427"/>
-                  </a:lnTo>
-                  <a:lnTo>
-                    <a:pt x="6947385" y="2639698"/>
-                  </a:lnTo>
-                  <a:lnTo>
-                    <a:pt x="6875762" y="2639968"/>
-                  </a:lnTo>
-                  <a:lnTo>
-                    <a:pt x="6804139" y="2640238"/>
-                  </a:lnTo>
-                  <a:lnTo>
-                    <a:pt x="6732517" y="2640508"/>
-                  </a:lnTo>
-                  <a:lnTo>
-                    <a:pt x="6660894" y="2640779"/>
-                  </a:lnTo>
-                  <a:lnTo>
-                    <a:pt x="6589272" y="2641049"/>
-                  </a:lnTo>
-                  <a:lnTo>
-                    <a:pt x="6517649" y="2641318"/>
-                  </a:lnTo>
-                  <a:lnTo>
-                    <a:pt x="6446027" y="2641588"/>
-                  </a:lnTo>
-                  <a:lnTo>
-                    <a:pt x="6374404" y="2641858"/>
-                  </a:lnTo>
-                  <a:lnTo>
-                    <a:pt x="6302782" y="2642128"/>
-                  </a:lnTo>
-                  <a:lnTo>
-                    <a:pt x="6231159" y="2642397"/>
-                  </a:lnTo>
-                  <a:lnTo>
-                    <a:pt x="6159537" y="2642667"/>
-                  </a:lnTo>
-                  <a:lnTo>
-                    <a:pt x="6087914" y="2642936"/>
-                  </a:lnTo>
-                  <a:lnTo>
-                    <a:pt x="6016292" y="2643205"/>
-                  </a:lnTo>
-                  <a:lnTo>
-                    <a:pt x="5944669" y="2643475"/>
-                  </a:lnTo>
-                  <a:lnTo>
-                    <a:pt x="5873047" y="2643744"/>
-                  </a:lnTo>
-                  <a:lnTo>
-                    <a:pt x="5801424" y="2644013"/>
-                  </a:lnTo>
-                  <a:lnTo>
-                    <a:pt x="5729802" y="2644282"/>
-                  </a:lnTo>
-                  <a:lnTo>
-                    <a:pt x="5658179" y="2644551"/>
-                  </a:lnTo>
-                  <a:lnTo>
-                    <a:pt x="5586557" y="2644819"/>
-                  </a:lnTo>
-                  <a:lnTo>
-                    <a:pt x="5514934" y="2645088"/>
-                  </a:lnTo>
-                  <a:lnTo>
-                    <a:pt x="5443311" y="2645357"/>
-                  </a:lnTo>
-                  <a:lnTo>
-                    <a:pt x="5371689" y="2645625"/>
-                  </a:lnTo>
-                  <a:lnTo>
-                    <a:pt x="5300066" y="2645894"/>
-                  </a:lnTo>
-                  <a:lnTo>
-                    <a:pt x="5228444" y="2646162"/>
-                  </a:lnTo>
-                  <a:lnTo>
-                    <a:pt x="5156821" y="2646430"/>
-                  </a:lnTo>
-                  <a:lnTo>
-                    <a:pt x="5085199" y="2646698"/>
-                  </a:lnTo>
-                  <a:lnTo>
-                    <a:pt x="5013576" y="2646967"/>
-                  </a:lnTo>
-                  <a:lnTo>
-                    <a:pt x="4941954" y="2647235"/>
-                  </a:lnTo>
-                  <a:lnTo>
-                    <a:pt x="4870331" y="2647503"/>
-                  </a:lnTo>
-                  <a:lnTo>
-                    <a:pt x="4798709" y="2647770"/>
-                  </a:lnTo>
-                  <a:lnTo>
-                    <a:pt x="4727086" y="2648038"/>
-                  </a:lnTo>
-                  <a:lnTo>
-                    <a:pt x="4655464" y="2648306"/>
-                  </a:lnTo>
-                  <a:lnTo>
-                    <a:pt x="4583841" y="2648573"/>
-                  </a:lnTo>
-                  <a:lnTo>
-                    <a:pt x="4512219" y="2648841"/>
-                  </a:lnTo>
-                  <a:lnTo>
-                    <a:pt x="4440596" y="2649108"/>
-                  </a:lnTo>
-                  <a:lnTo>
-                    <a:pt x="4368974" y="2649376"/>
-                  </a:lnTo>
-                  <a:lnTo>
-                    <a:pt x="4297351" y="2649643"/>
-                  </a:lnTo>
-                  <a:lnTo>
-                    <a:pt x="4225729" y="2649910"/>
-                  </a:lnTo>
-                  <a:lnTo>
-                    <a:pt x="4154106" y="2650177"/>
-                  </a:lnTo>
-                  <a:lnTo>
-                    <a:pt x="4082483" y="2650444"/>
-                  </a:lnTo>
-                  <a:lnTo>
-                    <a:pt x="4010861" y="2650711"/>
-                  </a:lnTo>
-                  <a:lnTo>
-                    <a:pt x="3939238" y="2650978"/>
-                  </a:lnTo>
-                  <a:lnTo>
-                    <a:pt x="3867616" y="2651244"/>
-                  </a:lnTo>
-                  <a:lnTo>
-                    <a:pt x="3795993" y="2651511"/>
-                  </a:lnTo>
-                  <a:lnTo>
-                    <a:pt x="3724371" y="2651778"/>
-                  </a:lnTo>
-                  <a:lnTo>
-                    <a:pt x="3652748" y="2652044"/>
-                  </a:lnTo>
-                  <a:lnTo>
-                    <a:pt x="3581126" y="2652311"/>
-                  </a:lnTo>
-                  <a:lnTo>
-                    <a:pt x="3509503" y="2652577"/>
-                  </a:lnTo>
-                  <a:lnTo>
-                    <a:pt x="3437881" y="2652843"/>
-                  </a:lnTo>
-                  <a:lnTo>
-                    <a:pt x="3366258" y="2653109"/>
-                  </a:lnTo>
-                  <a:lnTo>
-                    <a:pt x="3294636" y="2653375"/>
-                  </a:lnTo>
-                  <a:lnTo>
-                    <a:pt x="3223013" y="2653641"/>
-                  </a:lnTo>
-                  <a:lnTo>
-                    <a:pt x="3151391" y="2653907"/>
-                  </a:lnTo>
-                  <a:lnTo>
-                    <a:pt x="3079768" y="2654173"/>
-                  </a:lnTo>
-                  <a:lnTo>
-                    <a:pt x="3008146" y="2682053"/>
-                  </a:lnTo>
-                  <a:lnTo>
-                    <a:pt x="2936523" y="2727314"/>
-                  </a:lnTo>
-                  <a:lnTo>
-                    <a:pt x="2864901" y="2770019"/>
-                  </a:lnTo>
-                  <a:lnTo>
-                    <a:pt x="2793278" y="2810314"/>
-                  </a:lnTo>
-                  <a:lnTo>
-                    <a:pt x="2721655" y="2848334"/>
-                  </a:lnTo>
-                  <a:lnTo>
-                    <a:pt x="2650033" y="2884207"/>
-                  </a:lnTo>
-                  <a:lnTo>
-                    <a:pt x="2578410" y="2918056"/>
-                  </a:lnTo>
-                  <a:lnTo>
-                    <a:pt x="2506788" y="2949993"/>
-                  </a:lnTo>
-                  <a:lnTo>
-                    <a:pt x="2435165" y="2980127"/>
-                  </a:lnTo>
-                  <a:lnTo>
-                    <a:pt x="2363543" y="3008560"/>
-                  </a:lnTo>
-                  <a:lnTo>
-                    <a:pt x="2291920" y="3035387"/>
-                  </a:lnTo>
-                  <a:lnTo>
-                    <a:pt x="2220298" y="3060700"/>
-                  </a:lnTo>
-                  <a:lnTo>
-                    <a:pt x="2148675" y="3084584"/>
-                  </a:lnTo>
-                  <a:lnTo>
-                    <a:pt x="2077053" y="3107119"/>
-                  </a:lnTo>
-                  <a:lnTo>
-                    <a:pt x="2005430" y="3128383"/>
-                  </a:lnTo>
-                  <a:lnTo>
-                    <a:pt x="1933808" y="3148445"/>
-                  </a:lnTo>
-                  <a:lnTo>
-                    <a:pt x="1862185" y="3167375"/>
-                  </a:lnTo>
-                  <a:lnTo>
-                    <a:pt x="1790563" y="3185237"/>
-                  </a:lnTo>
-                  <a:lnTo>
-                    <a:pt x="1718940" y="3202090"/>
-                  </a:lnTo>
-                  <a:lnTo>
-                    <a:pt x="1647318" y="3217991"/>
-                  </a:lnTo>
-                  <a:lnTo>
-                    <a:pt x="1575695" y="3232995"/>
-                  </a:lnTo>
-                  <a:lnTo>
-                    <a:pt x="1504073" y="3247151"/>
-                  </a:lnTo>
-                  <a:lnTo>
-                    <a:pt x="1432450" y="3260509"/>
-                  </a:lnTo>
-                  <a:lnTo>
-                    <a:pt x="1360827" y="3273112"/>
-                  </a:lnTo>
-                  <a:lnTo>
-                    <a:pt x="1289205" y="3285004"/>
-                  </a:lnTo>
-                  <a:lnTo>
-                    <a:pt x="1217582" y="3296224"/>
-                  </a:lnTo>
-                  <a:lnTo>
-                    <a:pt x="1145960" y="3306811"/>
-                  </a:lnTo>
-                  <a:lnTo>
-                    <a:pt x="1074337" y="3316800"/>
-                  </a:lnTo>
-                  <a:lnTo>
-                    <a:pt x="1002715" y="3326226"/>
-                  </a:lnTo>
-                  <a:lnTo>
-                    <a:pt x="931092" y="3335119"/>
-                  </a:lnTo>
-                  <a:lnTo>
-                    <a:pt x="859470" y="3343510"/>
-                  </a:lnTo>
-                  <a:lnTo>
-                    <a:pt x="787847" y="3351427"/>
-                  </a:lnTo>
-                  <a:lnTo>
-                    <a:pt x="716225" y="3358897"/>
-                  </a:lnTo>
-                  <a:lnTo>
-                    <a:pt x="644602" y="3365946"/>
-                  </a:lnTo>
-                  <a:lnTo>
-                    <a:pt x="572980" y="3372597"/>
-                  </a:lnTo>
-                  <a:lnTo>
-                    <a:pt x="501357" y="3378872"/>
-                  </a:lnTo>
-                  <a:lnTo>
-                    <a:pt x="429735" y="3384793"/>
-                  </a:lnTo>
-                  <a:lnTo>
-                    <a:pt x="358112" y="3390379"/>
-                  </a:lnTo>
-                  <a:lnTo>
-                    <a:pt x="286490" y="3395651"/>
-                  </a:lnTo>
-                  <a:lnTo>
-                    <a:pt x="214867" y="3400624"/>
-                  </a:lnTo>
-                  <a:lnTo>
-                    <a:pt x="143245" y="3405317"/>
-                  </a:lnTo>
-                  <a:lnTo>
-                    <a:pt x="71622" y="3409745"/>
-                  </a:lnTo>
-                  <a:lnTo>
-                    <a:pt x="0" y="3413923"/>
+                    <a:pt x="70547" y="2485977"/>
+                  </a:lnTo>
+                  <a:lnTo>
+                    <a:pt x="141094" y="2485733"/>
+                  </a:lnTo>
+                  <a:lnTo>
+                    <a:pt x="211641" y="2485488"/>
+                  </a:lnTo>
+                  <a:lnTo>
+                    <a:pt x="282188" y="2485243"/>
+                  </a:lnTo>
+                  <a:lnTo>
+                    <a:pt x="352735" y="2484998"/>
+                  </a:lnTo>
+                  <a:lnTo>
+                    <a:pt x="423283" y="2484753"/>
+                  </a:lnTo>
+                  <a:lnTo>
+                    <a:pt x="493830" y="2484508"/>
+                  </a:lnTo>
+                  <a:lnTo>
+                    <a:pt x="564377" y="2484263"/>
+                  </a:lnTo>
+                  <a:lnTo>
+                    <a:pt x="634924" y="2484018"/>
+                  </a:lnTo>
+                  <a:lnTo>
+                    <a:pt x="705471" y="2483773"/>
+                  </a:lnTo>
+                  <a:lnTo>
+                    <a:pt x="776018" y="2483528"/>
+                  </a:lnTo>
+                  <a:lnTo>
+                    <a:pt x="846566" y="2483282"/>
+                  </a:lnTo>
+                  <a:lnTo>
+                    <a:pt x="917113" y="2483037"/>
+                  </a:lnTo>
+                  <a:lnTo>
+                    <a:pt x="987660" y="2482791"/>
+                  </a:lnTo>
+                  <a:lnTo>
+                    <a:pt x="1058207" y="2482546"/>
+                  </a:lnTo>
+                  <a:lnTo>
+                    <a:pt x="1128754" y="2482300"/>
+                  </a:lnTo>
+                  <a:lnTo>
+                    <a:pt x="1199301" y="2482054"/>
+                  </a:lnTo>
+                  <a:lnTo>
+                    <a:pt x="1269849" y="2481808"/>
+                  </a:lnTo>
+                  <a:lnTo>
+                    <a:pt x="1340396" y="2481562"/>
+                  </a:lnTo>
+                  <a:lnTo>
+                    <a:pt x="1410943" y="2481316"/>
+                  </a:lnTo>
+                  <a:lnTo>
+                    <a:pt x="1481490" y="2481070"/>
+                  </a:lnTo>
+                  <a:lnTo>
+                    <a:pt x="1552037" y="2480824"/>
+                  </a:lnTo>
+                  <a:lnTo>
+                    <a:pt x="1622584" y="2480578"/>
+                  </a:lnTo>
+                  <a:lnTo>
+                    <a:pt x="1693132" y="2480332"/>
+                  </a:lnTo>
+                  <a:lnTo>
+                    <a:pt x="1763679" y="2480085"/>
+                  </a:lnTo>
+                  <a:lnTo>
+                    <a:pt x="1834226" y="2479839"/>
+                  </a:lnTo>
+                  <a:lnTo>
+                    <a:pt x="1904773" y="2479592"/>
+                  </a:lnTo>
+                  <a:lnTo>
+                    <a:pt x="1975320" y="2479345"/>
+                  </a:lnTo>
+                  <a:lnTo>
+                    <a:pt x="2045868" y="2479099"/>
+                  </a:lnTo>
+                  <a:lnTo>
+                    <a:pt x="2116415" y="2478852"/>
+                  </a:lnTo>
+                  <a:lnTo>
+                    <a:pt x="2186962" y="2478605"/>
+                  </a:lnTo>
+                  <a:lnTo>
+                    <a:pt x="2257509" y="2478358"/>
+                  </a:lnTo>
+                  <a:lnTo>
+                    <a:pt x="2328056" y="2478111"/>
+                  </a:lnTo>
+                  <a:lnTo>
+                    <a:pt x="2398603" y="2477864"/>
+                  </a:lnTo>
+                  <a:lnTo>
+                    <a:pt x="2469151" y="2477617"/>
+                  </a:lnTo>
+                  <a:lnTo>
+                    <a:pt x="2539698" y="2477370"/>
+                  </a:lnTo>
+                  <a:lnTo>
+                    <a:pt x="2610245" y="2477122"/>
+                  </a:lnTo>
+                  <a:lnTo>
+                    <a:pt x="2680792" y="2476875"/>
+                  </a:lnTo>
+                  <a:lnTo>
+                    <a:pt x="2751339" y="2476627"/>
+                  </a:lnTo>
+                  <a:lnTo>
+                    <a:pt x="2821886" y="2476380"/>
+                  </a:lnTo>
+                  <a:lnTo>
+                    <a:pt x="2892434" y="2476132"/>
+                  </a:lnTo>
+                  <a:lnTo>
+                    <a:pt x="2962981" y="2475884"/>
+                  </a:lnTo>
+                  <a:lnTo>
+                    <a:pt x="3033528" y="2456898"/>
+                  </a:lnTo>
+                  <a:lnTo>
+                    <a:pt x="3104075" y="2409478"/>
+                  </a:lnTo>
+                  <a:lnTo>
+                    <a:pt x="3174622" y="2359221"/>
+                  </a:lnTo>
+                  <a:lnTo>
+                    <a:pt x="3245169" y="2305957"/>
+                  </a:lnTo>
+                  <a:lnTo>
+                    <a:pt x="3315717" y="2249506"/>
+                  </a:lnTo>
+                  <a:lnTo>
+                    <a:pt x="3386264" y="2189677"/>
+                  </a:lnTo>
+                  <a:lnTo>
+                    <a:pt x="3456811" y="2126268"/>
+                  </a:lnTo>
+                  <a:lnTo>
+                    <a:pt x="3527358" y="2059065"/>
+                  </a:lnTo>
+                  <a:lnTo>
+                    <a:pt x="3597905" y="1987840"/>
+                  </a:lnTo>
+                  <a:lnTo>
+                    <a:pt x="3668452" y="1912355"/>
+                  </a:lnTo>
+                  <a:lnTo>
+                    <a:pt x="3739000" y="1832352"/>
+                  </a:lnTo>
+                  <a:lnTo>
+                    <a:pt x="3809547" y="1747563"/>
+                  </a:lnTo>
+                  <a:lnTo>
+                    <a:pt x="3880094" y="1657700"/>
+                  </a:lnTo>
+                  <a:lnTo>
+                    <a:pt x="3950641" y="1562460"/>
+                  </a:lnTo>
+                  <a:lnTo>
+                    <a:pt x="4021188" y="1461522"/>
+                  </a:lnTo>
+                  <a:lnTo>
+                    <a:pt x="4091736" y="1354544"/>
+                  </a:lnTo>
+                  <a:lnTo>
+                    <a:pt x="4162283" y="1241165"/>
+                  </a:lnTo>
+                  <a:lnTo>
+                    <a:pt x="4232830" y="1121001"/>
+                  </a:lnTo>
+                  <a:lnTo>
+                    <a:pt x="4303377" y="993648"/>
+                  </a:lnTo>
+                  <a:lnTo>
+                    <a:pt x="4373924" y="858675"/>
+                  </a:lnTo>
+                  <a:lnTo>
+                    <a:pt x="4444471" y="715626"/>
+                  </a:lnTo>
+                  <a:lnTo>
+                    <a:pt x="4515019" y="564017"/>
+                  </a:lnTo>
+                  <a:lnTo>
+                    <a:pt x="4585566" y="403337"/>
+                  </a:lnTo>
+                  <a:lnTo>
+                    <a:pt x="4656113" y="233042"/>
+                  </a:lnTo>
+                  <a:lnTo>
+                    <a:pt x="4726660" y="52558"/>
+                  </a:lnTo>
+                  <a:lnTo>
+                    <a:pt x="4746044" y="0"/>
+                  </a:lnTo>
+                  <a:lnTo>
+                    <a:pt x="6984170" y="0"/>
+                  </a:lnTo>
+                  <a:lnTo>
+                    <a:pt x="6984170" y="2461630"/>
+                  </a:lnTo>
+                  <a:lnTo>
+                    <a:pt x="6913622" y="2461883"/>
+                  </a:lnTo>
+                  <a:lnTo>
+                    <a:pt x="6843075" y="2462135"/>
+                  </a:lnTo>
+                  <a:lnTo>
+                    <a:pt x="6772528" y="2462387"/>
+                  </a:lnTo>
+                  <a:lnTo>
+                    <a:pt x="6701981" y="2462639"/>
+                  </a:lnTo>
+                  <a:lnTo>
+                    <a:pt x="6631434" y="2462891"/>
+                  </a:lnTo>
+                  <a:lnTo>
+                    <a:pt x="6560887" y="2463143"/>
+                  </a:lnTo>
+                  <a:lnTo>
+                    <a:pt x="6490339" y="2463395"/>
+                  </a:lnTo>
+                  <a:lnTo>
+                    <a:pt x="6419792" y="2463647"/>
+                  </a:lnTo>
+                  <a:lnTo>
+                    <a:pt x="6349245" y="2463898"/>
+                  </a:lnTo>
+                  <a:lnTo>
+                    <a:pt x="6278698" y="2464150"/>
+                  </a:lnTo>
+                  <a:lnTo>
+                    <a:pt x="6208151" y="2464401"/>
+                  </a:lnTo>
+                  <a:lnTo>
+                    <a:pt x="6137604" y="2464653"/>
+                  </a:lnTo>
+                  <a:lnTo>
+                    <a:pt x="6067056" y="2464904"/>
+                  </a:lnTo>
+                  <a:lnTo>
+                    <a:pt x="5996509" y="2465155"/>
+                  </a:lnTo>
+                  <a:lnTo>
+                    <a:pt x="5925962" y="2465407"/>
+                  </a:lnTo>
+                  <a:lnTo>
+                    <a:pt x="5855415" y="2465658"/>
+                  </a:lnTo>
+                  <a:lnTo>
+                    <a:pt x="5784868" y="2465909"/>
+                  </a:lnTo>
+                  <a:lnTo>
+                    <a:pt x="5714320" y="2466160"/>
+                  </a:lnTo>
+                  <a:lnTo>
+                    <a:pt x="5643773" y="2466411"/>
+                  </a:lnTo>
+                  <a:lnTo>
+                    <a:pt x="5573226" y="2466661"/>
+                  </a:lnTo>
+                  <a:lnTo>
+                    <a:pt x="5502679" y="2466912"/>
+                  </a:lnTo>
+                  <a:lnTo>
+                    <a:pt x="5432132" y="2467163"/>
+                  </a:lnTo>
+                  <a:lnTo>
+                    <a:pt x="5361585" y="2467413"/>
+                  </a:lnTo>
+                  <a:lnTo>
+                    <a:pt x="5291037" y="2467664"/>
+                  </a:lnTo>
+                  <a:lnTo>
+                    <a:pt x="5220490" y="2467914"/>
+                  </a:lnTo>
+                  <a:lnTo>
+                    <a:pt x="5149943" y="2468164"/>
+                  </a:lnTo>
+                  <a:lnTo>
+                    <a:pt x="5079396" y="2468415"/>
+                  </a:lnTo>
+                  <a:lnTo>
+                    <a:pt x="5008849" y="2468665"/>
+                  </a:lnTo>
+                  <a:lnTo>
+                    <a:pt x="4938302" y="2468915"/>
+                  </a:lnTo>
+                  <a:lnTo>
+                    <a:pt x="4867754" y="2469165"/>
+                  </a:lnTo>
+                  <a:lnTo>
+                    <a:pt x="4797207" y="2469415"/>
+                  </a:lnTo>
+                  <a:lnTo>
+                    <a:pt x="4726660" y="2469665"/>
+                  </a:lnTo>
+                  <a:lnTo>
+                    <a:pt x="4656113" y="2469914"/>
+                  </a:lnTo>
+                  <a:lnTo>
+                    <a:pt x="4585566" y="2470164"/>
+                  </a:lnTo>
+                  <a:lnTo>
+                    <a:pt x="4515019" y="2470414"/>
+                  </a:lnTo>
+                  <a:lnTo>
+                    <a:pt x="4444471" y="2470663"/>
+                  </a:lnTo>
+                  <a:lnTo>
+                    <a:pt x="4373924" y="2470912"/>
+                  </a:lnTo>
+                  <a:lnTo>
+                    <a:pt x="4303377" y="2471162"/>
+                  </a:lnTo>
+                  <a:lnTo>
+                    <a:pt x="4232830" y="2471411"/>
+                  </a:lnTo>
+                  <a:lnTo>
+                    <a:pt x="4162283" y="2471660"/>
+                  </a:lnTo>
+                  <a:lnTo>
+                    <a:pt x="4091736" y="2471909"/>
+                  </a:lnTo>
+                  <a:lnTo>
+                    <a:pt x="4021188" y="2472158"/>
+                  </a:lnTo>
+                  <a:lnTo>
+                    <a:pt x="3950641" y="2472407"/>
+                  </a:lnTo>
+                  <a:lnTo>
+                    <a:pt x="3880094" y="2472656"/>
+                  </a:lnTo>
+                  <a:lnTo>
+                    <a:pt x="3809547" y="2472905"/>
+                  </a:lnTo>
+                  <a:lnTo>
+                    <a:pt x="3739000" y="2473154"/>
+                  </a:lnTo>
+                  <a:lnTo>
+                    <a:pt x="3668452" y="2473402"/>
+                  </a:lnTo>
+                  <a:lnTo>
+                    <a:pt x="3597905" y="2473651"/>
+                  </a:lnTo>
+                  <a:lnTo>
+                    <a:pt x="3527358" y="2473899"/>
+                  </a:lnTo>
+                  <a:lnTo>
+                    <a:pt x="3456811" y="2474148"/>
+                  </a:lnTo>
+                  <a:lnTo>
+                    <a:pt x="3386264" y="2474396"/>
+                  </a:lnTo>
+                  <a:lnTo>
+                    <a:pt x="3315717" y="2474644"/>
+                  </a:lnTo>
+                  <a:lnTo>
+                    <a:pt x="3245169" y="2474892"/>
+                  </a:lnTo>
+                  <a:lnTo>
+                    <a:pt x="3174622" y="2475140"/>
+                  </a:lnTo>
+                  <a:lnTo>
+                    <a:pt x="3104075" y="2475388"/>
+                  </a:lnTo>
+                  <a:lnTo>
+                    <a:pt x="3033528" y="2475636"/>
+                  </a:lnTo>
+                  <a:lnTo>
+                    <a:pt x="2962981" y="2501641"/>
+                  </a:lnTo>
+                  <a:lnTo>
+                    <a:pt x="2892434" y="2543857"/>
+                  </a:lnTo>
+                  <a:lnTo>
+                    <a:pt x="2821886" y="2583690"/>
+                  </a:lnTo>
+                  <a:lnTo>
+                    <a:pt x="2751339" y="2621275"/>
+                  </a:lnTo>
+                  <a:lnTo>
+                    <a:pt x="2680792" y="2656737"/>
+                  </a:lnTo>
+                  <a:lnTo>
+                    <a:pt x="2610245" y="2690197"/>
+                  </a:lnTo>
+                  <a:lnTo>
+                    <a:pt x="2539698" y="2721769"/>
+                  </a:lnTo>
+                  <a:lnTo>
+                    <a:pt x="2469151" y="2751557"/>
+                  </a:lnTo>
+                  <a:lnTo>
+                    <a:pt x="2398603" y="2779665"/>
+                  </a:lnTo>
+                  <a:lnTo>
+                    <a:pt x="2328056" y="2806185"/>
+                  </a:lnTo>
+                  <a:lnTo>
+                    <a:pt x="2257509" y="2831208"/>
+                  </a:lnTo>
+                  <a:lnTo>
+                    <a:pt x="2186962" y="2854818"/>
+                  </a:lnTo>
+                  <a:lnTo>
+                    <a:pt x="2116415" y="2877095"/>
+                  </a:lnTo>
+                  <a:lnTo>
+                    <a:pt x="2045868" y="2898115"/>
+                  </a:lnTo>
+                  <a:lnTo>
+                    <a:pt x="1975320" y="2917948"/>
+                  </a:lnTo>
+                  <a:lnTo>
+                    <a:pt x="1904773" y="2936661"/>
+                  </a:lnTo>
+                  <a:lnTo>
+                    <a:pt x="1834226" y="2954318"/>
+                  </a:lnTo>
+                  <a:lnTo>
+                    <a:pt x="1763679" y="2970977"/>
+                  </a:lnTo>
+                  <a:lnTo>
+                    <a:pt x="1693132" y="2986697"/>
+                  </a:lnTo>
+                  <a:lnTo>
+                    <a:pt x="1622584" y="3001529"/>
+                  </a:lnTo>
+                  <a:lnTo>
+                    <a:pt x="1552037" y="3015523"/>
+                  </a:lnTo>
+                  <a:lnTo>
+                    <a:pt x="1481490" y="3028727"/>
+                  </a:lnTo>
+                  <a:lnTo>
+                    <a:pt x="1410943" y="3041186"/>
+                  </a:lnTo>
+                  <a:lnTo>
+                    <a:pt x="1340396" y="3052942"/>
+                  </a:lnTo>
+                  <a:lnTo>
+                    <a:pt x="1269849" y="3064034"/>
+                  </a:lnTo>
+                  <a:lnTo>
+                    <a:pt x="1199301" y="3074499"/>
+                  </a:lnTo>
+                  <a:lnTo>
+                    <a:pt x="1128754" y="3084374"/>
+                  </a:lnTo>
+                  <a:lnTo>
+                    <a:pt x="1058207" y="3093691"/>
+                  </a:lnTo>
+                  <a:lnTo>
+                    <a:pt x="987660" y="3102483"/>
+                  </a:lnTo>
+                  <a:lnTo>
+                    <a:pt x="917113" y="3110778"/>
+                  </a:lnTo>
+                  <a:lnTo>
+                    <a:pt x="846566" y="3118604"/>
+                  </a:lnTo>
+                  <a:lnTo>
+                    <a:pt x="776018" y="3125989"/>
+                  </a:lnTo>
+                  <a:lnTo>
+                    <a:pt x="705471" y="3132957"/>
+                  </a:lnTo>
+                  <a:lnTo>
+                    <a:pt x="634924" y="3139531"/>
+                  </a:lnTo>
+                  <a:lnTo>
+                    <a:pt x="564377" y="3145734"/>
+                  </a:lnTo>
+                  <a:lnTo>
+                    <a:pt x="493830" y="3151587"/>
+                  </a:lnTo>
+                  <a:lnTo>
+                    <a:pt x="423283" y="3157110"/>
+                  </a:lnTo>
+                  <a:lnTo>
+                    <a:pt x="352735" y="3162321"/>
+                  </a:lnTo>
+                  <a:lnTo>
+                    <a:pt x="282188" y="3167238"/>
+                  </a:lnTo>
+                  <a:lnTo>
+                    <a:pt x="211641" y="3171877"/>
+                  </a:lnTo>
+                  <a:lnTo>
+                    <a:pt x="141094" y="3176254"/>
+                  </a:lnTo>
+                  <a:lnTo>
+                    <a:pt x="70547" y="3180384"/>
+                  </a:lnTo>
+                  <a:lnTo>
+                    <a:pt x="0" y="3184281"/>
                   </a:lnTo>
                   <a:close/>
                 </a:path>
@@ -3672,219 +3672,219 @@
           </p:nvSpPr>
           <p:spPr>
             <a:xfrm>
-              <a:off x="1172049" y="2073503"/>
-              <a:ext cx="4818388" cy="2665522"/>
+              <a:off x="1264853" y="2209169"/>
+              <a:ext cx="4746044" cy="2486222"/>
             </a:xfrm>
             <a:custGeom>
               <a:avLst/>
               <a:pathLst>
-                <a:path w="4818388" h="2665522">
+                <a:path w="4746044" h="2486222">
                   <a:moveTo>
-                    <a:pt x="0" y="2665522"/>
+                    <a:pt x="0" y="2486222"/>
                   </a:moveTo>
                   <a:lnTo>
-                    <a:pt x="71622" y="2665259"/>
-                  </a:lnTo>
-                  <a:lnTo>
-                    <a:pt x="143245" y="2664997"/>
-                  </a:lnTo>
-                  <a:lnTo>
-                    <a:pt x="214867" y="2664735"/>
-                  </a:lnTo>
-                  <a:lnTo>
-                    <a:pt x="286490" y="2664472"/>
-                  </a:lnTo>
-                  <a:lnTo>
-                    <a:pt x="358112" y="2664210"/>
-                  </a:lnTo>
-                  <a:lnTo>
-                    <a:pt x="429735" y="2663947"/>
-                  </a:lnTo>
-                  <a:lnTo>
-                    <a:pt x="501357" y="2663685"/>
-                  </a:lnTo>
-                  <a:lnTo>
-                    <a:pt x="572980" y="2663422"/>
-                  </a:lnTo>
-                  <a:lnTo>
-                    <a:pt x="644602" y="2663159"/>
-                  </a:lnTo>
-                  <a:lnTo>
-                    <a:pt x="716225" y="2662896"/>
-                  </a:lnTo>
-                  <a:lnTo>
-                    <a:pt x="787847" y="2662633"/>
-                  </a:lnTo>
-                  <a:lnTo>
-                    <a:pt x="859470" y="2662370"/>
-                  </a:lnTo>
-                  <a:lnTo>
-                    <a:pt x="931092" y="2662107"/>
-                  </a:lnTo>
-                  <a:lnTo>
-                    <a:pt x="1002715" y="2661844"/>
-                  </a:lnTo>
-                  <a:lnTo>
-                    <a:pt x="1074337" y="2661580"/>
-                  </a:lnTo>
-                  <a:lnTo>
-                    <a:pt x="1145960" y="2661317"/>
-                  </a:lnTo>
-                  <a:lnTo>
-                    <a:pt x="1217582" y="2661054"/>
-                  </a:lnTo>
-                  <a:lnTo>
-                    <a:pt x="1289205" y="2660790"/>
-                  </a:lnTo>
-                  <a:lnTo>
-                    <a:pt x="1360827" y="2660526"/>
-                  </a:lnTo>
-                  <a:lnTo>
-                    <a:pt x="1432450" y="2660263"/>
-                  </a:lnTo>
-                  <a:lnTo>
-                    <a:pt x="1504073" y="2659999"/>
-                  </a:lnTo>
-                  <a:lnTo>
-                    <a:pt x="1575695" y="2659735"/>
-                  </a:lnTo>
-                  <a:lnTo>
-                    <a:pt x="1647318" y="2659471"/>
-                  </a:lnTo>
-                  <a:lnTo>
-                    <a:pt x="1718940" y="2659207"/>
-                  </a:lnTo>
-                  <a:lnTo>
-                    <a:pt x="1790563" y="2658943"/>
-                  </a:lnTo>
-                  <a:lnTo>
-                    <a:pt x="1862185" y="2658678"/>
-                  </a:lnTo>
-                  <a:lnTo>
-                    <a:pt x="1933808" y="2658414"/>
-                  </a:lnTo>
-                  <a:lnTo>
-                    <a:pt x="2005430" y="2658149"/>
-                  </a:lnTo>
-                  <a:lnTo>
-                    <a:pt x="2077053" y="2657885"/>
-                  </a:lnTo>
-                  <a:lnTo>
-                    <a:pt x="2148675" y="2657620"/>
-                  </a:lnTo>
-                  <a:lnTo>
-                    <a:pt x="2220298" y="2657356"/>
-                  </a:lnTo>
-                  <a:lnTo>
-                    <a:pt x="2291920" y="2657091"/>
-                  </a:lnTo>
-                  <a:lnTo>
-                    <a:pt x="2363543" y="2656826"/>
-                  </a:lnTo>
-                  <a:lnTo>
-                    <a:pt x="2435165" y="2656561"/>
-                  </a:lnTo>
-                  <a:lnTo>
-                    <a:pt x="2506788" y="2656296"/>
-                  </a:lnTo>
-                  <a:lnTo>
-                    <a:pt x="2578410" y="2656031"/>
-                  </a:lnTo>
-                  <a:lnTo>
-                    <a:pt x="2650033" y="2655766"/>
-                  </a:lnTo>
-                  <a:lnTo>
-                    <a:pt x="2721655" y="2655501"/>
-                  </a:lnTo>
-                  <a:lnTo>
-                    <a:pt x="2793278" y="2655235"/>
-                  </a:lnTo>
-                  <a:lnTo>
-                    <a:pt x="2864901" y="2654970"/>
-                  </a:lnTo>
-                  <a:lnTo>
-                    <a:pt x="2936523" y="2654704"/>
-                  </a:lnTo>
-                  <a:lnTo>
-                    <a:pt x="3008146" y="2654439"/>
-                  </a:lnTo>
-                  <a:lnTo>
-                    <a:pt x="3079768" y="2634083"/>
-                  </a:lnTo>
-                  <a:lnTo>
-                    <a:pt x="3151391" y="2583244"/>
-                  </a:lnTo>
-                  <a:lnTo>
-                    <a:pt x="3223013" y="2529362"/>
-                  </a:lnTo>
-                  <a:lnTo>
-                    <a:pt x="3294636" y="2472257"/>
-                  </a:lnTo>
-                  <a:lnTo>
-                    <a:pt x="3366258" y="2411734"/>
-                  </a:lnTo>
-                  <a:lnTo>
-                    <a:pt x="3437881" y="2347590"/>
-                  </a:lnTo>
-                  <a:lnTo>
-                    <a:pt x="3509503" y="2279608"/>
-                  </a:lnTo>
-                  <a:lnTo>
-                    <a:pt x="3581126" y="2207559"/>
-                  </a:lnTo>
-                  <a:lnTo>
-                    <a:pt x="3652748" y="2131198"/>
-                  </a:lnTo>
-                  <a:lnTo>
-                    <a:pt x="3724371" y="2050269"/>
-                  </a:lnTo>
-                  <a:lnTo>
-                    <a:pt x="3795993" y="1964497"/>
-                  </a:lnTo>
-                  <a:lnTo>
-                    <a:pt x="3867616" y="1873592"/>
-                  </a:lnTo>
-                  <a:lnTo>
-                    <a:pt x="3939238" y="1777249"/>
-                  </a:lnTo>
-                  <a:lnTo>
-                    <a:pt x="4010861" y="1675141"/>
-                  </a:lnTo>
-                  <a:lnTo>
-                    <a:pt x="4082483" y="1566923"/>
-                  </a:lnTo>
-                  <a:lnTo>
-                    <a:pt x="4154106" y="1452230"/>
-                  </a:lnTo>
-                  <a:lnTo>
-                    <a:pt x="4225729" y="1330674"/>
-                  </a:lnTo>
-                  <a:lnTo>
-                    <a:pt x="4297351" y="1201845"/>
-                  </a:lnTo>
-                  <a:lnTo>
-                    <a:pt x="4368974" y="1065308"/>
-                  </a:lnTo>
-                  <a:lnTo>
-                    <a:pt x="4440596" y="920601"/>
-                  </a:lnTo>
-                  <a:lnTo>
-                    <a:pt x="4512219" y="767235"/>
-                  </a:lnTo>
-                  <a:lnTo>
-                    <a:pt x="4583841" y="604693"/>
-                  </a:lnTo>
-                  <a:lnTo>
-                    <a:pt x="4655464" y="432425"/>
-                  </a:lnTo>
-                  <a:lnTo>
-                    <a:pt x="4727086" y="249849"/>
-                  </a:lnTo>
-                  <a:lnTo>
-                    <a:pt x="4798709" y="56349"/>
-                  </a:lnTo>
-                  <a:lnTo>
-                    <a:pt x="4818388" y="0"/>
+                    <a:pt x="70547" y="2485977"/>
+                  </a:lnTo>
+                  <a:lnTo>
+                    <a:pt x="141094" y="2485733"/>
+                  </a:lnTo>
+                  <a:lnTo>
+                    <a:pt x="211641" y="2485488"/>
+                  </a:lnTo>
+                  <a:lnTo>
+                    <a:pt x="282188" y="2485243"/>
+                  </a:lnTo>
+                  <a:lnTo>
+                    <a:pt x="352735" y="2484998"/>
+                  </a:lnTo>
+                  <a:lnTo>
+                    <a:pt x="423283" y="2484753"/>
+                  </a:lnTo>
+                  <a:lnTo>
+                    <a:pt x="493830" y="2484508"/>
+                  </a:lnTo>
+                  <a:lnTo>
+                    <a:pt x="564377" y="2484263"/>
+                  </a:lnTo>
+                  <a:lnTo>
+                    <a:pt x="634924" y="2484018"/>
+                  </a:lnTo>
+                  <a:lnTo>
+                    <a:pt x="705471" y="2483773"/>
+                  </a:lnTo>
+                  <a:lnTo>
+                    <a:pt x="776018" y="2483528"/>
+                  </a:lnTo>
+                  <a:lnTo>
+                    <a:pt x="846566" y="2483282"/>
+                  </a:lnTo>
+                  <a:lnTo>
+                    <a:pt x="917113" y="2483037"/>
+                  </a:lnTo>
+                  <a:lnTo>
+                    <a:pt x="987660" y="2482791"/>
+                  </a:lnTo>
+                  <a:lnTo>
+                    <a:pt x="1058207" y="2482546"/>
+                  </a:lnTo>
+                  <a:lnTo>
+                    <a:pt x="1128754" y="2482300"/>
+                  </a:lnTo>
+                  <a:lnTo>
+                    <a:pt x="1199301" y="2482054"/>
+                  </a:lnTo>
+                  <a:lnTo>
+                    <a:pt x="1269849" y="2481808"/>
+                  </a:lnTo>
+                  <a:lnTo>
+                    <a:pt x="1340396" y="2481562"/>
+                  </a:lnTo>
+                  <a:lnTo>
+                    <a:pt x="1410943" y="2481316"/>
+                  </a:lnTo>
+                  <a:lnTo>
+                    <a:pt x="1481490" y="2481070"/>
+                  </a:lnTo>
+                  <a:lnTo>
+                    <a:pt x="1552037" y="2480824"/>
+                  </a:lnTo>
+                  <a:lnTo>
+                    <a:pt x="1622584" y="2480578"/>
+                  </a:lnTo>
+                  <a:lnTo>
+                    <a:pt x="1693132" y="2480332"/>
+                  </a:lnTo>
+                  <a:lnTo>
+                    <a:pt x="1763679" y="2480085"/>
+                  </a:lnTo>
+                  <a:lnTo>
+                    <a:pt x="1834226" y="2479839"/>
+                  </a:lnTo>
+                  <a:lnTo>
+                    <a:pt x="1904773" y="2479592"/>
+                  </a:lnTo>
+                  <a:lnTo>
+                    <a:pt x="1975320" y="2479345"/>
+                  </a:lnTo>
+                  <a:lnTo>
+                    <a:pt x="2045868" y="2479099"/>
+                  </a:lnTo>
+                  <a:lnTo>
+                    <a:pt x="2116415" y="2478852"/>
+                  </a:lnTo>
+                  <a:lnTo>
+                    <a:pt x="2186962" y="2478605"/>
+                  </a:lnTo>
+                  <a:lnTo>
+                    <a:pt x="2257509" y="2478358"/>
+                  </a:lnTo>
+                  <a:lnTo>
+                    <a:pt x="2328056" y="2478111"/>
+                  </a:lnTo>
+                  <a:lnTo>
+                    <a:pt x="2398603" y="2477864"/>
+                  </a:lnTo>
+                  <a:lnTo>
+                    <a:pt x="2469151" y="2477617"/>
+                  </a:lnTo>
+                  <a:lnTo>
+                    <a:pt x="2539698" y="2477370"/>
+                  </a:lnTo>
+                  <a:lnTo>
+                    <a:pt x="2610245" y="2477122"/>
+                  </a:lnTo>
+                  <a:lnTo>
+                    <a:pt x="2680792" y="2476875"/>
+                  </a:lnTo>
+                  <a:lnTo>
+                    <a:pt x="2751339" y="2476627"/>
+                  </a:lnTo>
+                  <a:lnTo>
+                    <a:pt x="2821886" y="2476380"/>
+                  </a:lnTo>
+                  <a:lnTo>
+                    <a:pt x="2892434" y="2476132"/>
+                  </a:lnTo>
+                  <a:lnTo>
+                    <a:pt x="2962981" y="2475884"/>
+                  </a:lnTo>
+                  <a:lnTo>
+                    <a:pt x="3033528" y="2456898"/>
+                  </a:lnTo>
+                  <a:lnTo>
+                    <a:pt x="3104075" y="2409478"/>
+                  </a:lnTo>
+                  <a:lnTo>
+                    <a:pt x="3174622" y="2359221"/>
+                  </a:lnTo>
+                  <a:lnTo>
+                    <a:pt x="3245169" y="2305957"/>
+                  </a:lnTo>
+                  <a:lnTo>
+                    <a:pt x="3315717" y="2249506"/>
+                  </a:lnTo>
+                  <a:lnTo>
+                    <a:pt x="3386264" y="2189677"/>
+                  </a:lnTo>
+                  <a:lnTo>
+                    <a:pt x="3456811" y="2126268"/>
+                  </a:lnTo>
+                  <a:lnTo>
+                    <a:pt x="3527358" y="2059065"/>
+                  </a:lnTo>
+                  <a:lnTo>
+                    <a:pt x="3597905" y="1987840"/>
+                  </a:lnTo>
+                  <a:lnTo>
+                    <a:pt x="3668452" y="1912355"/>
+                  </a:lnTo>
+                  <a:lnTo>
+                    <a:pt x="3739000" y="1832352"/>
+                  </a:lnTo>
+                  <a:lnTo>
+                    <a:pt x="3809547" y="1747563"/>
+                  </a:lnTo>
+                  <a:lnTo>
+                    <a:pt x="3880094" y="1657700"/>
+                  </a:lnTo>
+                  <a:lnTo>
+                    <a:pt x="3950641" y="1562460"/>
+                  </a:lnTo>
+                  <a:lnTo>
+                    <a:pt x="4021188" y="1461522"/>
+                  </a:lnTo>
+                  <a:lnTo>
+                    <a:pt x="4091736" y="1354544"/>
+                  </a:lnTo>
+                  <a:lnTo>
+                    <a:pt x="4162283" y="1241165"/>
+                  </a:lnTo>
+                  <a:lnTo>
+                    <a:pt x="4232830" y="1121001"/>
+                  </a:lnTo>
+                  <a:lnTo>
+                    <a:pt x="4303377" y="993648"/>
+                  </a:lnTo>
+                  <a:lnTo>
+                    <a:pt x="4373924" y="858675"/>
+                  </a:lnTo>
+                  <a:lnTo>
+                    <a:pt x="4444471" y="715626"/>
+                  </a:lnTo>
+                  <a:lnTo>
+                    <a:pt x="4515019" y="564017"/>
+                  </a:lnTo>
+                  <a:lnTo>
+                    <a:pt x="4585566" y="403337"/>
+                  </a:lnTo>
+                  <a:lnTo>
+                    <a:pt x="4656113" y="233042"/>
+                  </a:lnTo>
+                  <a:lnTo>
+                    <a:pt x="4726660" y="52558"/>
+                  </a:lnTo>
+                  <a:lnTo>
+                    <a:pt x="4746044" y="0"/>
                   </a:lnTo>
                 </a:path>
               </a:pathLst>
@@ -3904,312 +3904,312 @@
           </p:nvSpPr>
           <p:spPr>
             <a:xfrm>
-              <a:off x="1172049" y="4712660"/>
-              <a:ext cx="7090630" cy="774765"/>
+              <a:off x="1264853" y="4670800"/>
+              <a:ext cx="6984170" cy="722650"/>
             </a:xfrm>
             <a:custGeom>
               <a:avLst/>
               <a:pathLst>
-                <a:path w="7090630" h="774765">
+                <a:path w="6984170" h="722650">
                   <a:moveTo>
-                    <a:pt x="7090630" y="0"/>
+                    <a:pt x="6984170" y="0"/>
                   </a:moveTo>
                   <a:lnTo>
-                    <a:pt x="7019007" y="270"/>
-                  </a:lnTo>
-                  <a:lnTo>
-                    <a:pt x="6947385" y="540"/>
-                  </a:lnTo>
-                  <a:lnTo>
-                    <a:pt x="6875762" y="811"/>
-                  </a:lnTo>
-                  <a:lnTo>
-                    <a:pt x="6804139" y="1081"/>
-                  </a:lnTo>
-                  <a:lnTo>
-                    <a:pt x="6732517" y="1351"/>
-                  </a:lnTo>
-                  <a:lnTo>
-                    <a:pt x="6660894" y="1621"/>
-                  </a:lnTo>
-                  <a:lnTo>
-                    <a:pt x="6589272" y="1891"/>
-                  </a:lnTo>
-                  <a:lnTo>
-                    <a:pt x="6517649" y="2161"/>
-                  </a:lnTo>
-                  <a:lnTo>
-                    <a:pt x="6446027" y="2431"/>
-                  </a:lnTo>
-                  <a:lnTo>
-                    <a:pt x="6374404" y="2701"/>
-                  </a:lnTo>
-                  <a:lnTo>
-                    <a:pt x="6302782" y="2970"/>
-                  </a:lnTo>
-                  <a:lnTo>
-                    <a:pt x="6231159" y="3240"/>
-                  </a:lnTo>
-                  <a:lnTo>
-                    <a:pt x="6159537" y="3509"/>
-                  </a:lnTo>
-                  <a:lnTo>
-                    <a:pt x="6087914" y="3779"/>
-                  </a:lnTo>
-                  <a:lnTo>
-                    <a:pt x="6016292" y="4048"/>
-                  </a:lnTo>
-                  <a:lnTo>
-                    <a:pt x="5944669" y="4317"/>
-                  </a:lnTo>
-                  <a:lnTo>
-                    <a:pt x="5873047" y="4586"/>
-                  </a:lnTo>
-                  <a:lnTo>
-                    <a:pt x="5801424" y="4856"/>
-                  </a:lnTo>
-                  <a:lnTo>
-                    <a:pt x="5729802" y="5124"/>
-                  </a:lnTo>
-                  <a:lnTo>
-                    <a:pt x="5658179" y="5393"/>
-                  </a:lnTo>
-                  <a:lnTo>
-                    <a:pt x="5586557" y="5662"/>
-                  </a:lnTo>
-                  <a:lnTo>
-                    <a:pt x="5514934" y="5931"/>
-                  </a:lnTo>
-                  <a:lnTo>
-                    <a:pt x="5443311" y="6199"/>
-                  </a:lnTo>
-                  <a:lnTo>
-                    <a:pt x="5371689" y="6468"/>
-                  </a:lnTo>
-                  <a:lnTo>
-                    <a:pt x="5300066" y="6736"/>
-                  </a:lnTo>
-                  <a:lnTo>
-                    <a:pt x="5228444" y="7005"/>
-                  </a:lnTo>
-                  <a:lnTo>
-                    <a:pt x="5156821" y="7273"/>
-                  </a:lnTo>
-                  <a:lnTo>
-                    <a:pt x="5085199" y="7541"/>
-                  </a:lnTo>
-                  <a:lnTo>
-                    <a:pt x="5013576" y="7809"/>
-                  </a:lnTo>
-                  <a:lnTo>
-                    <a:pt x="4941954" y="8077"/>
-                  </a:lnTo>
-                  <a:lnTo>
-                    <a:pt x="4870331" y="8345"/>
-                  </a:lnTo>
-                  <a:lnTo>
-                    <a:pt x="4798709" y="8613"/>
-                  </a:lnTo>
-                  <a:lnTo>
-                    <a:pt x="4727086" y="8881"/>
-                  </a:lnTo>
-                  <a:lnTo>
-                    <a:pt x="4655464" y="9149"/>
-                  </a:lnTo>
-                  <a:lnTo>
-                    <a:pt x="4583841" y="9416"/>
-                  </a:lnTo>
-                  <a:lnTo>
-                    <a:pt x="4512219" y="9684"/>
-                  </a:lnTo>
-                  <a:lnTo>
-                    <a:pt x="4440596" y="9951"/>
-                  </a:lnTo>
-                  <a:lnTo>
-                    <a:pt x="4368974" y="10218"/>
-                  </a:lnTo>
-                  <a:lnTo>
-                    <a:pt x="4297351" y="10486"/>
-                  </a:lnTo>
-                  <a:lnTo>
-                    <a:pt x="4225729" y="10753"/>
-                  </a:lnTo>
-                  <a:lnTo>
-                    <a:pt x="4154106" y="11020"/>
-                  </a:lnTo>
-                  <a:lnTo>
-                    <a:pt x="4082483" y="11287"/>
-                  </a:lnTo>
-                  <a:lnTo>
-                    <a:pt x="4010861" y="11554"/>
-                  </a:lnTo>
-                  <a:lnTo>
-                    <a:pt x="3939238" y="11820"/>
-                  </a:lnTo>
-                  <a:lnTo>
-                    <a:pt x="3867616" y="12087"/>
-                  </a:lnTo>
-                  <a:lnTo>
-                    <a:pt x="3795993" y="12354"/>
-                  </a:lnTo>
-                  <a:lnTo>
-                    <a:pt x="3724371" y="12620"/>
-                  </a:lnTo>
-                  <a:lnTo>
-                    <a:pt x="3652748" y="12887"/>
-                  </a:lnTo>
-                  <a:lnTo>
-                    <a:pt x="3581126" y="13153"/>
-                  </a:lnTo>
-                  <a:lnTo>
-                    <a:pt x="3509503" y="13420"/>
-                  </a:lnTo>
-                  <a:lnTo>
-                    <a:pt x="3437881" y="13686"/>
-                  </a:lnTo>
-                  <a:lnTo>
-                    <a:pt x="3366258" y="13952"/>
-                  </a:lnTo>
-                  <a:lnTo>
-                    <a:pt x="3294636" y="14218"/>
-                  </a:lnTo>
-                  <a:lnTo>
-                    <a:pt x="3223013" y="14484"/>
-                  </a:lnTo>
-                  <a:lnTo>
-                    <a:pt x="3151391" y="14750"/>
-                  </a:lnTo>
-                  <a:lnTo>
-                    <a:pt x="3079768" y="15016"/>
-                  </a:lnTo>
-                  <a:lnTo>
-                    <a:pt x="3008146" y="42895"/>
-                  </a:lnTo>
-                  <a:lnTo>
-                    <a:pt x="2936523" y="88156"/>
-                  </a:lnTo>
-                  <a:lnTo>
-                    <a:pt x="2864901" y="130862"/>
-                  </a:lnTo>
-                  <a:lnTo>
-                    <a:pt x="2793278" y="171157"/>
-                  </a:lnTo>
-                  <a:lnTo>
-                    <a:pt x="2721655" y="209177"/>
-                  </a:lnTo>
-                  <a:lnTo>
-                    <a:pt x="2650033" y="245050"/>
-                  </a:lnTo>
-                  <a:lnTo>
-                    <a:pt x="2578410" y="278898"/>
-                  </a:lnTo>
-                  <a:lnTo>
-                    <a:pt x="2506788" y="310835"/>
-                  </a:lnTo>
-                  <a:lnTo>
-                    <a:pt x="2435165" y="340969"/>
-                  </a:lnTo>
-                  <a:lnTo>
-                    <a:pt x="2363543" y="369402"/>
-                  </a:lnTo>
-                  <a:lnTo>
-                    <a:pt x="2291920" y="396230"/>
-                  </a:lnTo>
-                  <a:lnTo>
-                    <a:pt x="2220298" y="421543"/>
-                  </a:lnTo>
-                  <a:lnTo>
-                    <a:pt x="2148675" y="445427"/>
-                  </a:lnTo>
-                  <a:lnTo>
-                    <a:pt x="2077053" y="467962"/>
-                  </a:lnTo>
-                  <a:lnTo>
-                    <a:pt x="2005430" y="489225"/>
-                  </a:lnTo>
-                  <a:lnTo>
-                    <a:pt x="1933808" y="509288"/>
-                  </a:lnTo>
-                  <a:lnTo>
-                    <a:pt x="1862185" y="528218"/>
-                  </a:lnTo>
-                  <a:lnTo>
-                    <a:pt x="1790563" y="546079"/>
-                  </a:lnTo>
-                  <a:lnTo>
-                    <a:pt x="1718940" y="562932"/>
-                  </a:lnTo>
-                  <a:lnTo>
-                    <a:pt x="1647318" y="578834"/>
-                  </a:lnTo>
-                  <a:lnTo>
-                    <a:pt x="1575695" y="593837"/>
-                  </a:lnTo>
-                  <a:lnTo>
-                    <a:pt x="1504073" y="607994"/>
-                  </a:lnTo>
-                  <a:lnTo>
-                    <a:pt x="1432450" y="621352"/>
-                  </a:lnTo>
-                  <a:lnTo>
-                    <a:pt x="1360827" y="633955"/>
-                  </a:lnTo>
-                  <a:lnTo>
-                    <a:pt x="1289205" y="645847"/>
-                  </a:lnTo>
-                  <a:lnTo>
-                    <a:pt x="1217582" y="657067"/>
-                  </a:lnTo>
-                  <a:lnTo>
-                    <a:pt x="1145960" y="667654"/>
-                  </a:lnTo>
-                  <a:lnTo>
-                    <a:pt x="1074337" y="677643"/>
-                  </a:lnTo>
-                  <a:lnTo>
-                    <a:pt x="1002715" y="687068"/>
-                  </a:lnTo>
-                  <a:lnTo>
-                    <a:pt x="931092" y="695961"/>
-                  </a:lnTo>
-                  <a:lnTo>
-                    <a:pt x="859470" y="704353"/>
-                  </a:lnTo>
-                  <a:lnTo>
-                    <a:pt x="787847" y="712270"/>
-                  </a:lnTo>
-                  <a:lnTo>
-                    <a:pt x="716225" y="719740"/>
-                  </a:lnTo>
-                  <a:lnTo>
-                    <a:pt x="644602" y="726789"/>
-                  </a:lnTo>
-                  <a:lnTo>
-                    <a:pt x="572980" y="733439"/>
-                  </a:lnTo>
-                  <a:lnTo>
-                    <a:pt x="501357" y="739715"/>
-                  </a:lnTo>
-                  <a:lnTo>
-                    <a:pt x="429735" y="745635"/>
-                  </a:lnTo>
-                  <a:lnTo>
-                    <a:pt x="358112" y="751222"/>
-                  </a:lnTo>
-                  <a:lnTo>
-                    <a:pt x="286490" y="756493"/>
-                  </a:lnTo>
-                  <a:lnTo>
-                    <a:pt x="214867" y="761467"/>
-                  </a:lnTo>
-                  <a:lnTo>
-                    <a:pt x="143245" y="766160"/>
-                  </a:lnTo>
-                  <a:lnTo>
-                    <a:pt x="71622" y="770588"/>
-                  </a:lnTo>
-                  <a:lnTo>
-                    <a:pt x="0" y="774765"/>
+                    <a:pt x="6913622" y="252"/>
+                  </a:lnTo>
+                  <a:lnTo>
+                    <a:pt x="6843075" y="504"/>
+                  </a:lnTo>
+                  <a:lnTo>
+                    <a:pt x="6772528" y="756"/>
+                  </a:lnTo>
+                  <a:lnTo>
+                    <a:pt x="6701981" y="1008"/>
+                  </a:lnTo>
+                  <a:lnTo>
+                    <a:pt x="6631434" y="1260"/>
+                  </a:lnTo>
+                  <a:lnTo>
+                    <a:pt x="6560887" y="1512"/>
+                  </a:lnTo>
+                  <a:lnTo>
+                    <a:pt x="6490339" y="1764"/>
+                  </a:lnTo>
+                  <a:lnTo>
+                    <a:pt x="6419792" y="2016"/>
+                  </a:lnTo>
+                  <a:lnTo>
+                    <a:pt x="6349245" y="2267"/>
+                  </a:lnTo>
+                  <a:lnTo>
+                    <a:pt x="6278698" y="2519"/>
+                  </a:lnTo>
+                  <a:lnTo>
+                    <a:pt x="6208151" y="2771"/>
+                  </a:lnTo>
+                  <a:lnTo>
+                    <a:pt x="6137604" y="3022"/>
+                  </a:lnTo>
+                  <a:lnTo>
+                    <a:pt x="6067056" y="3273"/>
+                  </a:lnTo>
+                  <a:lnTo>
+                    <a:pt x="5996509" y="3525"/>
+                  </a:lnTo>
+                  <a:lnTo>
+                    <a:pt x="5925962" y="3776"/>
+                  </a:lnTo>
+                  <a:lnTo>
+                    <a:pt x="5855415" y="4027"/>
+                  </a:lnTo>
+                  <a:lnTo>
+                    <a:pt x="5784868" y="4278"/>
+                  </a:lnTo>
+                  <a:lnTo>
+                    <a:pt x="5714320" y="4529"/>
+                  </a:lnTo>
+                  <a:lnTo>
+                    <a:pt x="5643773" y="4780"/>
+                  </a:lnTo>
+                  <a:lnTo>
+                    <a:pt x="5573226" y="5031"/>
+                  </a:lnTo>
+                  <a:lnTo>
+                    <a:pt x="5502679" y="5281"/>
+                  </a:lnTo>
+                  <a:lnTo>
+                    <a:pt x="5432132" y="5532"/>
+                  </a:lnTo>
+                  <a:lnTo>
+                    <a:pt x="5361585" y="5782"/>
+                  </a:lnTo>
+                  <a:lnTo>
+                    <a:pt x="5291037" y="6033"/>
+                  </a:lnTo>
+                  <a:lnTo>
+                    <a:pt x="5220490" y="6283"/>
+                  </a:lnTo>
+                  <a:lnTo>
+                    <a:pt x="5149943" y="6534"/>
+                  </a:lnTo>
+                  <a:lnTo>
+                    <a:pt x="5079396" y="6784"/>
+                  </a:lnTo>
+                  <a:lnTo>
+                    <a:pt x="5008849" y="7034"/>
+                  </a:lnTo>
+                  <a:lnTo>
+                    <a:pt x="4938302" y="7284"/>
+                  </a:lnTo>
+                  <a:lnTo>
+                    <a:pt x="4867754" y="7534"/>
+                  </a:lnTo>
+                  <a:lnTo>
+                    <a:pt x="4797207" y="7784"/>
+                  </a:lnTo>
+                  <a:lnTo>
+                    <a:pt x="4726660" y="8034"/>
+                  </a:lnTo>
+                  <a:lnTo>
+                    <a:pt x="4656113" y="8283"/>
+                  </a:lnTo>
+                  <a:lnTo>
+                    <a:pt x="4585566" y="8533"/>
+                  </a:lnTo>
+                  <a:lnTo>
+                    <a:pt x="4515019" y="8783"/>
+                  </a:lnTo>
+                  <a:lnTo>
+                    <a:pt x="4444471" y="9032"/>
+                  </a:lnTo>
+                  <a:lnTo>
+                    <a:pt x="4373924" y="9282"/>
+                  </a:lnTo>
+                  <a:lnTo>
+                    <a:pt x="4303377" y="9531"/>
+                  </a:lnTo>
+                  <a:lnTo>
+                    <a:pt x="4232830" y="9780"/>
+                  </a:lnTo>
+                  <a:lnTo>
+                    <a:pt x="4162283" y="10029"/>
+                  </a:lnTo>
+                  <a:lnTo>
+                    <a:pt x="4091736" y="10279"/>
+                  </a:lnTo>
+                  <a:lnTo>
+                    <a:pt x="4021188" y="10528"/>
+                  </a:lnTo>
+                  <a:lnTo>
+                    <a:pt x="3950641" y="10776"/>
+                  </a:lnTo>
+                  <a:lnTo>
+                    <a:pt x="3880094" y="11025"/>
+                  </a:lnTo>
+                  <a:lnTo>
+                    <a:pt x="3809547" y="11274"/>
+                  </a:lnTo>
+                  <a:lnTo>
+                    <a:pt x="3739000" y="11523"/>
+                  </a:lnTo>
+                  <a:lnTo>
+                    <a:pt x="3668452" y="11771"/>
+                  </a:lnTo>
+                  <a:lnTo>
+                    <a:pt x="3597905" y="12020"/>
+                  </a:lnTo>
+                  <a:lnTo>
+                    <a:pt x="3527358" y="12268"/>
+                  </a:lnTo>
+                  <a:lnTo>
+                    <a:pt x="3456811" y="12517"/>
+                  </a:lnTo>
+                  <a:lnTo>
+                    <a:pt x="3386264" y="12765"/>
+                  </a:lnTo>
+                  <a:lnTo>
+                    <a:pt x="3315717" y="13013"/>
+                  </a:lnTo>
+                  <a:lnTo>
+                    <a:pt x="3245169" y="13262"/>
+                  </a:lnTo>
+                  <a:lnTo>
+                    <a:pt x="3174622" y="13510"/>
+                  </a:lnTo>
+                  <a:lnTo>
+                    <a:pt x="3104075" y="13758"/>
+                  </a:lnTo>
+                  <a:lnTo>
+                    <a:pt x="3033528" y="14006"/>
+                  </a:lnTo>
+                  <a:lnTo>
+                    <a:pt x="2962981" y="40010"/>
+                  </a:lnTo>
+                  <a:lnTo>
+                    <a:pt x="2892434" y="82226"/>
+                  </a:lnTo>
+                  <a:lnTo>
+                    <a:pt x="2821886" y="122060"/>
+                  </a:lnTo>
+                  <a:lnTo>
+                    <a:pt x="2751339" y="159644"/>
+                  </a:lnTo>
+                  <a:lnTo>
+                    <a:pt x="2680792" y="195106"/>
+                  </a:lnTo>
+                  <a:lnTo>
+                    <a:pt x="2610245" y="228567"/>
+                  </a:lnTo>
+                  <a:lnTo>
+                    <a:pt x="2539698" y="260138"/>
+                  </a:lnTo>
+                  <a:lnTo>
+                    <a:pt x="2469151" y="289927"/>
+                  </a:lnTo>
+                  <a:lnTo>
+                    <a:pt x="2398603" y="318034"/>
+                  </a:lnTo>
+                  <a:lnTo>
+                    <a:pt x="2328056" y="344554"/>
+                  </a:lnTo>
+                  <a:lnTo>
+                    <a:pt x="2257509" y="369577"/>
+                  </a:lnTo>
+                  <a:lnTo>
+                    <a:pt x="2186962" y="393187"/>
+                  </a:lnTo>
+                  <a:lnTo>
+                    <a:pt x="2116415" y="415464"/>
+                  </a:lnTo>
+                  <a:lnTo>
+                    <a:pt x="2045868" y="436484"/>
+                  </a:lnTo>
+                  <a:lnTo>
+                    <a:pt x="1975320" y="456317"/>
+                  </a:lnTo>
+                  <a:lnTo>
+                    <a:pt x="1904773" y="475030"/>
+                  </a:lnTo>
+                  <a:lnTo>
+                    <a:pt x="1834226" y="492687"/>
+                  </a:lnTo>
+                  <a:lnTo>
+                    <a:pt x="1763679" y="509347"/>
+                  </a:lnTo>
+                  <a:lnTo>
+                    <a:pt x="1693132" y="525066"/>
+                  </a:lnTo>
+                  <a:lnTo>
+                    <a:pt x="1622584" y="539898"/>
+                  </a:lnTo>
+                  <a:lnTo>
+                    <a:pt x="1552037" y="553892"/>
+                  </a:lnTo>
+                  <a:lnTo>
+                    <a:pt x="1481490" y="567097"/>
+                  </a:lnTo>
+                  <a:lnTo>
+                    <a:pt x="1410943" y="579555"/>
+                  </a:lnTo>
+                  <a:lnTo>
+                    <a:pt x="1340396" y="591311"/>
+                  </a:lnTo>
+                  <a:lnTo>
+                    <a:pt x="1269849" y="602403"/>
+                  </a:lnTo>
+                  <a:lnTo>
+                    <a:pt x="1199301" y="612868"/>
+                  </a:lnTo>
+                  <a:lnTo>
+                    <a:pt x="1128754" y="622743"/>
+                  </a:lnTo>
+                  <a:lnTo>
+                    <a:pt x="1058207" y="632060"/>
+                  </a:lnTo>
+                  <a:lnTo>
+                    <a:pt x="987660" y="640852"/>
+                  </a:lnTo>
+                  <a:lnTo>
+                    <a:pt x="917113" y="649147"/>
+                  </a:lnTo>
+                  <a:lnTo>
+                    <a:pt x="846566" y="656973"/>
+                  </a:lnTo>
+                  <a:lnTo>
+                    <a:pt x="776018" y="664358"/>
+                  </a:lnTo>
+                  <a:lnTo>
+                    <a:pt x="705471" y="671326"/>
+                  </a:lnTo>
+                  <a:lnTo>
+                    <a:pt x="634924" y="677900"/>
+                  </a:lnTo>
+                  <a:lnTo>
+                    <a:pt x="564377" y="684104"/>
+                  </a:lnTo>
+                  <a:lnTo>
+                    <a:pt x="493830" y="689957"/>
+                  </a:lnTo>
+                  <a:lnTo>
+                    <a:pt x="423283" y="695479"/>
+                  </a:lnTo>
+                  <a:lnTo>
+                    <a:pt x="352735" y="700690"/>
+                  </a:lnTo>
+                  <a:lnTo>
+                    <a:pt x="282188" y="705607"/>
+                  </a:lnTo>
+                  <a:lnTo>
+                    <a:pt x="211641" y="710246"/>
+                  </a:lnTo>
+                  <a:lnTo>
+                    <a:pt x="141094" y="714623"/>
+                  </a:lnTo>
+                  <a:lnTo>
+                    <a:pt x="70547" y="718753"/>
+                  </a:lnTo>
+                  <a:lnTo>
+                    <a:pt x="0" y="722650"/>
                   </a:lnTo>
                 </a:path>
               </a:pathLst>
@@ -4229,291 +4229,291 @@
           </p:nvSpPr>
           <p:spPr>
             <a:xfrm>
-              <a:off x="1172049" y="2073503"/>
-              <a:ext cx="6567889" cy="3244725"/>
+              <a:off x="1264853" y="2209169"/>
+              <a:ext cx="6469277" cy="3026464"/>
             </a:xfrm>
             <a:custGeom>
               <a:avLst/>
               <a:pathLst>
-                <a:path w="6567889" h="3244725">
+                <a:path w="6469277" h="3026464">
                   <a:moveTo>
-                    <a:pt x="0" y="3244725"/>
+                    <a:pt x="0" y="3026464"/>
                   </a:moveTo>
                   <a:lnTo>
-                    <a:pt x="71622" y="3237638"/>
-                  </a:lnTo>
-                  <a:lnTo>
-                    <a:pt x="143245" y="3230342"/>
-                  </a:lnTo>
-                  <a:lnTo>
-                    <a:pt x="214867" y="3222829"/>
-                  </a:lnTo>
-                  <a:lnTo>
-                    <a:pt x="286490" y="3215093"/>
-                  </a:lnTo>
-                  <a:lnTo>
-                    <a:pt x="358112" y="3207128"/>
-                  </a:lnTo>
-                  <a:lnTo>
-                    <a:pt x="429735" y="3198927"/>
-                  </a:lnTo>
-                  <a:lnTo>
-                    <a:pt x="501357" y="3190483"/>
-                  </a:lnTo>
-                  <a:lnTo>
-                    <a:pt x="572980" y="3181788"/>
-                  </a:lnTo>
-                  <a:lnTo>
-                    <a:pt x="644602" y="3172836"/>
-                  </a:lnTo>
-                  <a:lnTo>
-                    <a:pt x="716225" y="3163618"/>
-                  </a:lnTo>
-                  <a:lnTo>
-                    <a:pt x="787847" y="3154127"/>
-                  </a:lnTo>
-                  <a:lnTo>
-                    <a:pt x="859470" y="3144354"/>
-                  </a:lnTo>
-                  <a:lnTo>
-                    <a:pt x="931092" y="3134292"/>
-                  </a:lnTo>
-                  <a:lnTo>
-                    <a:pt x="1002715" y="3123931"/>
-                  </a:lnTo>
-                  <a:lnTo>
-                    <a:pt x="1074337" y="3113264"/>
-                  </a:lnTo>
-                  <a:lnTo>
-                    <a:pt x="1145960" y="3102280"/>
-                  </a:lnTo>
-                  <a:lnTo>
-                    <a:pt x="1217582" y="3090970"/>
-                  </a:lnTo>
-                  <a:lnTo>
-                    <a:pt x="1289205" y="3079325"/>
-                  </a:lnTo>
-                  <a:lnTo>
-                    <a:pt x="1360827" y="3067335"/>
-                  </a:lnTo>
-                  <a:lnTo>
-                    <a:pt x="1432450" y="3054989"/>
-                  </a:lnTo>
-                  <a:lnTo>
-                    <a:pt x="1504073" y="3042278"/>
-                  </a:lnTo>
-                  <a:lnTo>
-                    <a:pt x="1575695" y="3029189"/>
-                  </a:lnTo>
-                  <a:lnTo>
-                    <a:pt x="1647318" y="3015713"/>
-                  </a:lnTo>
-                  <a:lnTo>
-                    <a:pt x="1718940" y="3001836"/>
-                  </a:lnTo>
-                  <a:lnTo>
-                    <a:pt x="1790563" y="2987549"/>
-                  </a:lnTo>
-                  <a:lnTo>
-                    <a:pt x="1862185" y="2972838"/>
-                  </a:lnTo>
-                  <a:lnTo>
-                    <a:pt x="1933808" y="2957690"/>
-                  </a:lnTo>
-                  <a:lnTo>
-                    <a:pt x="2005430" y="2942094"/>
-                  </a:lnTo>
-                  <a:lnTo>
-                    <a:pt x="2077053" y="2926035"/>
-                  </a:lnTo>
-                  <a:lnTo>
-                    <a:pt x="2148675" y="2909500"/>
-                  </a:lnTo>
-                  <a:lnTo>
-                    <a:pt x="2220298" y="2892475"/>
-                  </a:lnTo>
-                  <a:lnTo>
-                    <a:pt x="2291920" y="2874945"/>
-                  </a:lnTo>
-                  <a:lnTo>
-                    <a:pt x="2363543" y="2856896"/>
-                  </a:lnTo>
-                  <a:lnTo>
-                    <a:pt x="2435165" y="2838311"/>
-                  </a:lnTo>
-                  <a:lnTo>
-                    <a:pt x="2506788" y="2819175"/>
-                  </a:lnTo>
-                  <a:lnTo>
-                    <a:pt x="2578410" y="2799472"/>
-                  </a:lnTo>
-                  <a:lnTo>
-                    <a:pt x="2650033" y="2779185"/>
-                  </a:lnTo>
-                  <a:lnTo>
-                    <a:pt x="2721655" y="2758296"/>
-                  </a:lnTo>
-                  <a:lnTo>
-                    <a:pt x="2793278" y="2736788"/>
-                  </a:lnTo>
-                  <a:lnTo>
-                    <a:pt x="2864901" y="2714643"/>
-                  </a:lnTo>
-                  <a:lnTo>
-                    <a:pt x="2936523" y="2691841"/>
-                  </a:lnTo>
-                  <a:lnTo>
-                    <a:pt x="3008146" y="2668362"/>
-                  </a:lnTo>
-                  <a:lnTo>
-                    <a:pt x="3079768" y="2644188"/>
-                  </a:lnTo>
-                  <a:lnTo>
-                    <a:pt x="3151391" y="2619297"/>
-                  </a:lnTo>
-                  <a:lnTo>
-                    <a:pt x="3223013" y="2593668"/>
-                  </a:lnTo>
-                  <a:lnTo>
-                    <a:pt x="3294636" y="2567279"/>
-                  </a:lnTo>
-                  <a:lnTo>
-                    <a:pt x="3366258" y="2540108"/>
-                  </a:lnTo>
-                  <a:lnTo>
-                    <a:pt x="3437881" y="2512131"/>
-                  </a:lnTo>
-                  <a:lnTo>
-                    <a:pt x="3509503" y="2483325"/>
-                  </a:lnTo>
-                  <a:lnTo>
-                    <a:pt x="3581126" y="2453665"/>
-                  </a:lnTo>
-                  <a:lnTo>
-                    <a:pt x="3652748" y="2423125"/>
-                  </a:lnTo>
-                  <a:lnTo>
-                    <a:pt x="3724371" y="2391680"/>
-                  </a:lnTo>
-                  <a:lnTo>
-                    <a:pt x="3795993" y="2359303"/>
-                  </a:lnTo>
-                  <a:lnTo>
-                    <a:pt x="3867616" y="2325966"/>
-                  </a:lnTo>
-                  <a:lnTo>
-                    <a:pt x="3939238" y="2291640"/>
-                  </a:lnTo>
-                  <a:lnTo>
-                    <a:pt x="4010861" y="2256297"/>
-                  </a:lnTo>
-                  <a:lnTo>
-                    <a:pt x="4082483" y="2219906"/>
-                  </a:lnTo>
-                  <a:lnTo>
-                    <a:pt x="4154106" y="2182436"/>
-                  </a:lnTo>
-                  <a:lnTo>
-                    <a:pt x="4225729" y="2143855"/>
-                  </a:lnTo>
-                  <a:lnTo>
-                    <a:pt x="4297351" y="2104130"/>
-                  </a:lnTo>
-                  <a:lnTo>
-                    <a:pt x="4368974" y="2063227"/>
-                  </a:lnTo>
-                  <a:lnTo>
-                    <a:pt x="4440596" y="2021112"/>
-                  </a:lnTo>
-                  <a:lnTo>
-                    <a:pt x="4512219" y="1977748"/>
-                  </a:lnTo>
-                  <a:lnTo>
-                    <a:pt x="4583841" y="1933099"/>
-                  </a:lnTo>
-                  <a:lnTo>
-                    <a:pt x="4655464" y="1887126"/>
-                  </a:lnTo>
-                  <a:lnTo>
-                    <a:pt x="4727086" y="1839789"/>
-                  </a:lnTo>
-                  <a:lnTo>
-                    <a:pt x="4798709" y="1791050"/>
-                  </a:lnTo>
-                  <a:lnTo>
-                    <a:pt x="4870331" y="1740865"/>
-                  </a:lnTo>
-                  <a:lnTo>
-                    <a:pt x="4941954" y="1689192"/>
-                  </a:lnTo>
-                  <a:lnTo>
-                    <a:pt x="5013576" y="1635988"/>
-                  </a:lnTo>
-                  <a:lnTo>
-                    <a:pt x="5085199" y="1581206"/>
-                  </a:lnTo>
-                  <a:lnTo>
-                    <a:pt x="5156821" y="1524800"/>
-                  </a:lnTo>
-                  <a:lnTo>
-                    <a:pt x="5228444" y="1466722"/>
-                  </a:lnTo>
-                  <a:lnTo>
-                    <a:pt x="5300066" y="1406921"/>
-                  </a:lnTo>
-                  <a:lnTo>
-                    <a:pt x="5371689" y="1345348"/>
-                  </a:lnTo>
-                  <a:lnTo>
-                    <a:pt x="5443311" y="1281949"/>
-                  </a:lnTo>
-                  <a:lnTo>
-                    <a:pt x="5514934" y="1216671"/>
-                  </a:lnTo>
-                  <a:lnTo>
-                    <a:pt x="5586557" y="1149457"/>
-                  </a:lnTo>
-                  <a:lnTo>
-                    <a:pt x="5658179" y="1080251"/>
-                  </a:lnTo>
-                  <a:lnTo>
-                    <a:pt x="5729802" y="1008993"/>
-                  </a:lnTo>
-                  <a:lnTo>
-                    <a:pt x="5801424" y="935622"/>
-                  </a:lnTo>
-                  <a:lnTo>
-                    <a:pt x="5873047" y="860076"/>
-                  </a:lnTo>
-                  <a:lnTo>
-                    <a:pt x="5944669" y="782290"/>
-                  </a:lnTo>
-                  <a:lnTo>
-                    <a:pt x="6016292" y="702197"/>
-                  </a:lnTo>
-                  <a:lnTo>
-                    <a:pt x="6087914" y="619731"/>
-                  </a:lnTo>
-                  <a:lnTo>
-                    <a:pt x="6159537" y="534819"/>
-                  </a:lnTo>
-                  <a:lnTo>
-                    <a:pt x="6231159" y="447390"/>
-                  </a:lnTo>
-                  <a:lnTo>
-                    <a:pt x="6302782" y="357369"/>
-                  </a:lnTo>
-                  <a:lnTo>
-                    <a:pt x="6374404" y="264679"/>
-                  </a:lnTo>
-                  <a:lnTo>
-                    <a:pt x="6446027" y="169241"/>
-                  </a:lnTo>
-                  <a:lnTo>
-                    <a:pt x="6517649" y="70973"/>
-                  </a:lnTo>
-                  <a:lnTo>
-                    <a:pt x="6567889" y="0"/>
+                    <a:pt x="70547" y="3019854"/>
+                  </a:lnTo>
+                  <a:lnTo>
+                    <a:pt x="141094" y="3013048"/>
+                  </a:lnTo>
+                  <a:lnTo>
+                    <a:pt x="211641" y="3006041"/>
+                  </a:lnTo>
+                  <a:lnTo>
+                    <a:pt x="282188" y="2998825"/>
+                  </a:lnTo>
+                  <a:lnTo>
+                    <a:pt x="352735" y="2991396"/>
+                  </a:lnTo>
+                  <a:lnTo>
+                    <a:pt x="423283" y="2983747"/>
+                  </a:lnTo>
+                  <a:lnTo>
+                    <a:pt x="493830" y="2975871"/>
+                  </a:lnTo>
+                  <a:lnTo>
+                    <a:pt x="564377" y="2967761"/>
+                  </a:lnTo>
+                  <a:lnTo>
+                    <a:pt x="634924" y="2959411"/>
+                  </a:lnTo>
+                  <a:lnTo>
+                    <a:pt x="705471" y="2950813"/>
+                  </a:lnTo>
+                  <a:lnTo>
+                    <a:pt x="776018" y="2941960"/>
+                  </a:lnTo>
+                  <a:lnTo>
+                    <a:pt x="846566" y="2932845"/>
+                  </a:lnTo>
+                  <a:lnTo>
+                    <a:pt x="917113" y="2923460"/>
+                  </a:lnTo>
+                  <a:lnTo>
+                    <a:pt x="987660" y="2913796"/>
+                  </a:lnTo>
+                  <a:lnTo>
+                    <a:pt x="1058207" y="2903846"/>
+                  </a:lnTo>
+                  <a:lnTo>
+                    <a:pt x="1128754" y="2893601"/>
+                  </a:lnTo>
+                  <a:lnTo>
+                    <a:pt x="1199301" y="2883052"/>
+                  </a:lnTo>
+                  <a:lnTo>
+                    <a:pt x="1269849" y="2872190"/>
+                  </a:lnTo>
+                  <a:lnTo>
+                    <a:pt x="1340396" y="2861007"/>
+                  </a:lnTo>
+                  <a:lnTo>
+                    <a:pt x="1410943" y="2849491"/>
+                  </a:lnTo>
+                  <a:lnTo>
+                    <a:pt x="1481490" y="2837635"/>
+                  </a:lnTo>
+                  <a:lnTo>
+                    <a:pt x="1552037" y="2825427"/>
+                  </a:lnTo>
+                  <a:lnTo>
+                    <a:pt x="1622584" y="2812857"/>
+                  </a:lnTo>
+                  <a:lnTo>
+                    <a:pt x="1693132" y="2799914"/>
+                  </a:lnTo>
+                  <a:lnTo>
+                    <a:pt x="1763679" y="2786587"/>
+                  </a:lnTo>
+                  <a:lnTo>
+                    <a:pt x="1834226" y="2772866"/>
+                  </a:lnTo>
+                  <a:lnTo>
+                    <a:pt x="1904773" y="2758737"/>
+                  </a:lnTo>
+                  <a:lnTo>
+                    <a:pt x="1975320" y="2744190"/>
+                  </a:lnTo>
+                  <a:lnTo>
+                    <a:pt x="2045868" y="2729212"/>
+                  </a:lnTo>
+                  <a:lnTo>
+                    <a:pt x="2116415" y="2713789"/>
+                  </a:lnTo>
+                  <a:lnTo>
+                    <a:pt x="2186962" y="2697909"/>
+                  </a:lnTo>
+                  <a:lnTo>
+                    <a:pt x="2257509" y="2681558"/>
+                  </a:lnTo>
+                  <a:lnTo>
+                    <a:pt x="2328056" y="2664723"/>
+                  </a:lnTo>
+                  <a:lnTo>
+                    <a:pt x="2398603" y="2647388"/>
+                  </a:lnTo>
+                  <a:lnTo>
+                    <a:pt x="2469151" y="2629540"/>
+                  </a:lnTo>
+                  <a:lnTo>
+                    <a:pt x="2539698" y="2611162"/>
+                  </a:lnTo>
+                  <a:lnTo>
+                    <a:pt x="2610245" y="2592240"/>
+                  </a:lnTo>
+                  <a:lnTo>
+                    <a:pt x="2680792" y="2572756"/>
+                  </a:lnTo>
+                  <a:lnTo>
+                    <a:pt x="2751339" y="2552695"/>
+                  </a:lnTo>
+                  <a:lnTo>
+                    <a:pt x="2821886" y="2532039"/>
+                  </a:lnTo>
+                  <a:lnTo>
+                    <a:pt x="2892434" y="2510770"/>
+                  </a:lnTo>
+                  <a:lnTo>
+                    <a:pt x="2962981" y="2488871"/>
+                  </a:lnTo>
+                  <a:lnTo>
+                    <a:pt x="3033528" y="2466323"/>
+                  </a:lnTo>
+                  <a:lnTo>
+                    <a:pt x="3104075" y="2443107"/>
+                  </a:lnTo>
+                  <a:lnTo>
+                    <a:pt x="3174622" y="2419202"/>
+                  </a:lnTo>
+                  <a:lnTo>
+                    <a:pt x="3245169" y="2394588"/>
+                  </a:lnTo>
+                  <a:lnTo>
+                    <a:pt x="3315717" y="2369244"/>
+                  </a:lnTo>
+                  <a:lnTo>
+                    <a:pt x="3386264" y="2343149"/>
+                  </a:lnTo>
+                  <a:lnTo>
+                    <a:pt x="3456811" y="2316281"/>
+                  </a:lnTo>
+                  <a:lnTo>
+                    <a:pt x="3527358" y="2288616"/>
+                  </a:lnTo>
+                  <a:lnTo>
+                    <a:pt x="3597905" y="2260130"/>
+                  </a:lnTo>
+                  <a:lnTo>
+                    <a:pt x="3668452" y="2230801"/>
+                  </a:lnTo>
+                  <a:lnTo>
+                    <a:pt x="3739000" y="2200601"/>
+                  </a:lnTo>
+                  <a:lnTo>
+                    <a:pt x="3809547" y="2169506"/>
+                  </a:lnTo>
+                  <a:lnTo>
+                    <a:pt x="3880094" y="2137490"/>
+                  </a:lnTo>
+                  <a:lnTo>
+                    <a:pt x="3950641" y="2104524"/>
+                  </a:lnTo>
+                  <a:lnTo>
+                    <a:pt x="4021188" y="2070581"/>
+                  </a:lnTo>
+                  <a:lnTo>
+                    <a:pt x="4091736" y="2035631"/>
+                  </a:lnTo>
+                  <a:lnTo>
+                    <a:pt x="4162283" y="1999645"/>
+                  </a:lnTo>
+                  <a:lnTo>
+                    <a:pt x="4232830" y="1962593"/>
+                  </a:lnTo>
+                  <a:lnTo>
+                    <a:pt x="4303377" y="1924442"/>
+                  </a:lnTo>
+                  <a:lnTo>
+                    <a:pt x="4373924" y="1885159"/>
+                  </a:lnTo>
+                  <a:lnTo>
+                    <a:pt x="4444471" y="1844712"/>
+                  </a:lnTo>
+                  <a:lnTo>
+                    <a:pt x="4515019" y="1803066"/>
+                  </a:lnTo>
+                  <a:lnTo>
+                    <a:pt x="4585566" y="1760185"/>
+                  </a:lnTo>
+                  <a:lnTo>
+                    <a:pt x="4656113" y="1716033"/>
+                  </a:lnTo>
+                  <a:lnTo>
+                    <a:pt x="4726660" y="1670572"/>
+                  </a:lnTo>
+                  <a:lnTo>
+                    <a:pt x="4797207" y="1623763"/>
+                  </a:lnTo>
+                  <a:lnTo>
+                    <a:pt x="4867754" y="1575567"/>
+                  </a:lnTo>
+                  <a:lnTo>
+                    <a:pt x="4938302" y="1525941"/>
+                  </a:lnTo>
+                  <a:lnTo>
+                    <a:pt x="5008849" y="1474844"/>
+                  </a:lnTo>
+                  <a:lnTo>
+                    <a:pt x="5079396" y="1422232"/>
+                  </a:lnTo>
+                  <a:lnTo>
+                    <a:pt x="5149943" y="1368061"/>
+                  </a:lnTo>
+                  <a:lnTo>
+                    <a:pt x="5220490" y="1312283"/>
+                  </a:lnTo>
+                  <a:lnTo>
+                    <a:pt x="5291037" y="1254851"/>
+                  </a:lnTo>
+                  <a:lnTo>
+                    <a:pt x="5361585" y="1195717"/>
+                  </a:lnTo>
+                  <a:lnTo>
+                    <a:pt x="5432132" y="1134830"/>
+                  </a:lnTo>
+                  <a:lnTo>
+                    <a:pt x="5502679" y="1072138"/>
+                  </a:lnTo>
+                  <a:lnTo>
+                    <a:pt x="5573226" y="1007586"/>
+                  </a:lnTo>
+                  <a:lnTo>
+                    <a:pt x="5643773" y="941121"/>
+                  </a:lnTo>
+                  <a:lnTo>
+                    <a:pt x="5714320" y="872686"/>
+                  </a:lnTo>
+                  <a:lnTo>
+                    <a:pt x="5784868" y="802221"/>
+                  </a:lnTo>
+                  <a:lnTo>
+                    <a:pt x="5855415" y="729668"/>
+                  </a:lnTo>
+                  <a:lnTo>
+                    <a:pt x="5925962" y="654963"/>
+                  </a:lnTo>
+                  <a:lnTo>
+                    <a:pt x="5996509" y="578044"/>
+                  </a:lnTo>
+                  <a:lnTo>
+                    <a:pt x="6067056" y="498844"/>
+                  </a:lnTo>
+                  <a:lnTo>
+                    <a:pt x="6137604" y="417296"/>
+                  </a:lnTo>
+                  <a:lnTo>
+                    <a:pt x="6208151" y="333330"/>
+                  </a:lnTo>
+                  <a:lnTo>
+                    <a:pt x="6278698" y="246875"/>
+                  </a:lnTo>
+                  <a:lnTo>
+                    <a:pt x="6349245" y="157856"/>
+                  </a:lnTo>
+                  <a:lnTo>
+                    <a:pt x="6419792" y="66199"/>
+                  </a:lnTo>
+                  <a:lnTo>
+                    <a:pt x="6469277" y="0"/>
                   </a:lnTo>
                 </a:path>
               </a:pathLst>
@@ -4542,21 +4542,21 @@
           </p:nvSpPr>
           <p:spPr>
             <a:xfrm>
-              <a:off x="817517" y="4727786"/>
-              <a:ext cx="7799693" cy="0"/>
+              <a:off x="915645" y="4684908"/>
+              <a:ext cx="7682587" cy="0"/>
             </a:xfrm>
             <a:custGeom>
               <a:avLst/>
               <a:pathLst>
-                <a:path w="7799693" h="0">
+                <a:path w="7682587" h="0">
                   <a:moveTo>
                     <a:pt x="0" y="0"/>
                   </a:moveTo>
                   <a:lnTo>
-                    <a:pt x="7799693" y="0"/>
-                  </a:lnTo>
-                  <a:lnTo>
-                    <a:pt x="7799693" y="0"/>
+                    <a:pt x="7682587" y="0"/>
+                  </a:lnTo>
+                  <a:lnTo>
+                    <a:pt x="7682587" y="0"/>
                   </a:lnTo>
                 </a:path>
               </a:pathLst>
@@ -4585,15 +4585,15 @@
           </p:nvSpPr>
           <p:spPr>
             <a:xfrm>
-              <a:off x="4222163" y="2073503"/>
-              <a:ext cx="0" cy="3649639"/>
+              <a:off x="4269172" y="2209169"/>
+              <a:ext cx="0" cy="3404141"/>
             </a:xfrm>
             <a:custGeom>
               <a:avLst/>
               <a:pathLst>
-                <a:path w="0" h="3649639">
+                <a:path w="0" h="3404141">
                   <a:moveTo>
-                    <a:pt x="0" y="3649639"/>
+                    <a:pt x="0" y="3404141"/>
                   </a:moveTo>
                   <a:lnTo>
                     <a:pt x="0" y="0"/>
@@ -4628,8 +4628,8 @@
           </p:nvSpPr>
           <p:spPr>
             <a:xfrm>
-              <a:off x="692708" y="5517199"/>
-              <a:ext cx="62179" cy="80101"/>
+              <a:off x="756929" y="5407599"/>
+              <a:ext cx="79004" cy="101955"/>
             </a:xfrm>
             <a:prstGeom prst="rect">
               <a:avLst/>
@@ -4642,7 +4642,7 @@
             <a:p>
               <a:pPr algn="l" marL="0" marR="0" indent="0">
                 <a:lnSpc>
-                  <a:spcPts val="880"/>
+                  <a:spcPts val="1120"/>
                 </a:lnSpc>
                 <a:spcBef>
                   <a:spcPts val="0"/>
@@ -4652,7 +4652,7 @@
                 </a:spcAft>
               </a:pPr>
               <a:r>
-                <a:rPr sz="880">
+                <a:rPr sz="1120">
                   <a:solidFill>
                     <a:srgbClr val="4D4D4D">
                       <a:alpha val="100000"/>
@@ -4674,8 +4674,8 @@
           </p:nvSpPr>
           <p:spPr>
             <a:xfrm>
-              <a:off x="692708" y="4687735"/>
-              <a:ext cx="62179" cy="80101"/>
+              <a:off x="756929" y="4633931"/>
+              <a:ext cx="79004" cy="101955"/>
             </a:xfrm>
             <a:prstGeom prst="rect">
               <a:avLst/>
@@ -4688,7 +4688,7 @@
             <a:p>
               <a:pPr algn="l" marL="0" marR="0" indent="0">
                 <a:lnSpc>
-                  <a:spcPts val="880"/>
+                  <a:spcPts val="1120"/>
                 </a:lnSpc>
                 <a:spcBef>
                   <a:spcPts val="0"/>
@@ -4698,7 +4698,7 @@
                 </a:spcAft>
               </a:pPr>
               <a:r>
-                <a:rPr sz="880">
+                <a:rPr sz="1120">
                   <a:solidFill>
                     <a:srgbClr val="4D4D4D">
                       <a:alpha val="100000"/>
@@ -4720,8 +4720,8 @@
           </p:nvSpPr>
           <p:spPr>
             <a:xfrm>
-              <a:off x="692708" y="3858272"/>
-              <a:ext cx="62179" cy="80101"/>
+              <a:off x="756929" y="3860262"/>
+              <a:ext cx="79004" cy="101955"/>
             </a:xfrm>
             <a:prstGeom prst="rect">
               <a:avLst/>
@@ -4734,7 +4734,7 @@
             <a:p>
               <a:pPr algn="l" marL="0" marR="0" indent="0">
                 <a:lnSpc>
-                  <a:spcPts val="880"/>
+                  <a:spcPts val="1120"/>
                 </a:lnSpc>
                 <a:spcBef>
                   <a:spcPts val="0"/>
@@ -4744,7 +4744,7 @@
                 </a:spcAft>
               </a:pPr>
               <a:r>
-                <a:rPr sz="880">
+                <a:rPr sz="1120">
                   <a:solidFill>
                     <a:srgbClr val="4D4D4D">
                       <a:alpha val="100000"/>
@@ -4766,8 +4766,8 @@
           </p:nvSpPr>
           <p:spPr>
             <a:xfrm>
-              <a:off x="692708" y="3028808"/>
-              <a:ext cx="62179" cy="80101"/>
+              <a:off x="756929" y="3086593"/>
+              <a:ext cx="79004" cy="101955"/>
             </a:xfrm>
             <a:prstGeom prst="rect">
               <a:avLst/>
@@ -4780,7 +4780,7 @@
             <a:p>
               <a:pPr algn="l" marL="0" marR="0" indent="0">
                 <a:lnSpc>
-                  <a:spcPts val="880"/>
+                  <a:spcPts val="1120"/>
                 </a:lnSpc>
                 <a:spcBef>
                   <a:spcPts val="0"/>
@@ -4790,7 +4790,7 @@
                 </a:spcAft>
               </a:pPr>
               <a:r>
-                <a:rPr sz="880">
+                <a:rPr sz="1120">
                   <a:solidFill>
                     <a:srgbClr val="4D4D4D">
                       <a:alpha val="100000"/>
@@ -4812,8 +4812,8 @@
           </p:nvSpPr>
           <p:spPr>
             <a:xfrm>
-              <a:off x="692708" y="2199345"/>
-              <a:ext cx="62179" cy="80101"/>
+              <a:off x="756929" y="2312925"/>
+              <a:ext cx="79004" cy="101955"/>
             </a:xfrm>
             <a:prstGeom prst="rect">
               <a:avLst/>
@@ -4826,7 +4826,7 @@
             <a:p>
               <a:pPr algn="l" marL="0" marR="0" indent="0">
                 <a:lnSpc>
-                  <a:spcPts val="880"/>
+                  <a:spcPts val="1120"/>
                 </a:lnSpc>
                 <a:spcBef>
                   <a:spcPts val="0"/>
@@ -4836,7 +4836,7 @@
                 </a:spcAft>
               </a:pPr>
               <a:r>
-                <a:rPr sz="880">
+                <a:rPr sz="1120">
                   <a:solidFill>
                     <a:srgbClr val="4D4D4D">
                       <a:alpha val="100000"/>
@@ -4858,8 +4858,8 @@
           </p:nvSpPr>
           <p:spPr>
             <a:xfrm>
-              <a:off x="1328653" y="5785772"/>
-              <a:ext cx="223753" cy="80101"/>
+              <a:off x="1387159" y="5693022"/>
+              <a:ext cx="284286" cy="101955"/>
             </a:xfrm>
             <a:prstGeom prst="rect">
               <a:avLst/>
@@ -4872,7 +4872,7 @@
             <a:p>
               <a:pPr algn="l" marL="0" marR="0" indent="0">
                 <a:lnSpc>
-                  <a:spcPts val="880"/>
+                  <a:spcPts val="1120"/>
                 </a:lnSpc>
                 <a:spcBef>
                   <a:spcPts val="0"/>
@@ -4882,7 +4882,7 @@
                 </a:spcAft>
               </a:pPr>
               <a:r>
-                <a:rPr sz="880">
+                <a:rPr sz="1120">
                   <a:solidFill>
                     <a:srgbClr val="4D4D4D">
                       <a:alpha val="100000"/>
@@ -4904,8 +4904,8 @@
           </p:nvSpPr>
           <p:spPr>
             <a:xfrm>
-              <a:off x="2724172" y="5785772"/>
-              <a:ext cx="161574" cy="80101"/>
+              <a:off x="2770605" y="5693022"/>
+              <a:ext cx="205282" cy="101955"/>
             </a:xfrm>
             <a:prstGeom prst="rect">
               <a:avLst/>
@@ -4918,7 +4918,7 @@
             <a:p>
               <a:pPr algn="l" marL="0" marR="0" indent="0">
                 <a:lnSpc>
-                  <a:spcPts val="880"/>
+                  <a:spcPts val="1120"/>
                 </a:lnSpc>
                 <a:spcBef>
                   <a:spcPts val="0"/>
@@ -4928,7 +4928,7 @@
                 </a:spcAft>
               </a:pPr>
               <a:r>
-                <a:rPr sz="880">
+                <a:rPr sz="1120">
                   <a:solidFill>
                     <a:srgbClr val="4D4D4D">
                       <a:alpha val="100000"/>
@@ -4950,8 +4950,8 @@
           </p:nvSpPr>
           <p:spPr>
             <a:xfrm>
-              <a:off x="4138300" y="5785772"/>
-              <a:ext cx="62179" cy="80101"/>
+              <a:off x="4177689" y="5693022"/>
+              <a:ext cx="79004" cy="101955"/>
             </a:xfrm>
             <a:prstGeom prst="rect">
               <a:avLst/>
@@ -4964,7 +4964,7 @@
             <a:p>
               <a:pPr algn="l" marL="0" marR="0" indent="0">
                 <a:lnSpc>
-                  <a:spcPts val="880"/>
+                  <a:spcPts val="1120"/>
                 </a:lnSpc>
                 <a:spcBef>
                   <a:spcPts val="0"/>
@@ -4974,7 +4974,7 @@
                 </a:spcAft>
               </a:pPr>
               <a:r>
-                <a:rPr sz="880">
+                <a:rPr sz="1120">
                   <a:solidFill>
                     <a:srgbClr val="4D4D4D">
                       <a:alpha val="100000"/>
@@ -4996,8 +4996,8 @@
           </p:nvSpPr>
           <p:spPr>
             <a:xfrm>
-              <a:off x="5471640" y="5785772"/>
-              <a:ext cx="124358" cy="80101"/>
+              <a:off x="5482131" y="5693022"/>
+              <a:ext cx="158008" cy="101955"/>
             </a:xfrm>
             <a:prstGeom prst="rect">
               <a:avLst/>
@@ -5010,7 +5010,7 @@
             <a:p>
               <a:pPr algn="l" marL="0" marR="0" indent="0">
                 <a:lnSpc>
-                  <a:spcPts val="880"/>
+                  <a:spcPts val="1120"/>
                 </a:lnSpc>
                 <a:spcBef>
                   <a:spcPts val="0"/>
@@ -5020,7 +5020,7 @@
                 </a:spcAft>
               </a:pPr>
               <a:r>
-                <a:rPr sz="880">
+                <a:rPr sz="1120">
                   <a:solidFill>
                     <a:srgbClr val="4D4D4D">
                       <a:alpha val="100000"/>
@@ -5042,8 +5042,8 @@
           </p:nvSpPr>
           <p:spPr>
             <a:xfrm>
-              <a:off x="6804980" y="5785772"/>
-              <a:ext cx="186537" cy="80101"/>
+              <a:off x="6786573" y="5693022"/>
+              <a:ext cx="237012" cy="101955"/>
             </a:xfrm>
             <a:prstGeom prst="rect">
               <a:avLst/>
@@ -5056,7 +5056,7 @@
             <a:p>
               <a:pPr algn="l" marL="0" marR="0" indent="0">
                 <a:lnSpc>
-                  <a:spcPts val="880"/>
+                  <a:spcPts val="1120"/>
                 </a:lnSpc>
                 <a:spcBef>
                   <a:spcPts val="0"/>
@@ -5066,7 +5066,7 @@
                 </a:spcAft>
               </a:pPr>
               <a:r>
-                <a:rPr sz="880">
+                <a:rPr sz="1120">
                   <a:solidFill>
                     <a:srgbClr val="4D4D4D">
                       <a:alpha val="100000"/>
@@ -5088,8 +5088,8 @@
           </p:nvSpPr>
           <p:spPr>
             <a:xfrm>
-              <a:off x="8169410" y="5785772"/>
-              <a:ext cx="186537" cy="80101"/>
+              <a:off x="8130517" y="5693022"/>
+              <a:ext cx="237012" cy="101955"/>
             </a:xfrm>
             <a:prstGeom prst="rect">
               <a:avLst/>
@@ -5102,7 +5102,7 @@
             <a:p>
               <a:pPr algn="l" marL="0" marR="0" indent="0">
                 <a:lnSpc>
-                  <a:spcPts val="880"/>
+                  <a:spcPts val="1120"/>
                 </a:lnSpc>
                 <a:spcBef>
                   <a:spcPts val="0"/>
@@ -5112,7 +5112,7 @@
                 </a:spcAft>
               </a:pPr>
               <a:r>
-                <a:rPr sz="880">
+                <a:rPr sz="1120">
                   <a:solidFill>
                     <a:srgbClr val="4D4D4D">
                       <a:alpha val="100000"/>
@@ -5134,8 +5134,8 @@
           </p:nvSpPr>
           <p:spPr>
             <a:xfrm>
-              <a:off x="3987536" y="5925448"/>
-              <a:ext cx="1459656" cy="100218"/>
+              <a:off x="3828319" y="5870717"/>
+              <a:ext cx="1857237" cy="127558"/>
             </a:xfrm>
             <a:prstGeom prst="rect">
               <a:avLst/>
@@ -5148,7 +5148,7 @@
             <a:p>
               <a:pPr algn="l" marL="0" marR="0" indent="0">
                 <a:lnSpc>
-                  <a:spcPts val="1100"/>
+                  <a:spcPts val="1400"/>
                 </a:lnSpc>
                 <a:spcBef>
                   <a:spcPts val="0"/>
@@ -5158,7 +5158,7 @@
                 </a:spcAft>
               </a:pPr>
               <a:r>
-                <a:rPr sz="1100">
+                <a:rPr sz="1400">
                   <a:solidFill>
                     <a:srgbClr val="000000">
                       <a:alpha val="100000"/>
@@ -5180,8 +5180,8 @@
           </p:nvSpPr>
           <p:spPr>
             <a:xfrm rot="-5400000">
-              <a:off x="68446" y="3848213"/>
-              <a:ext cx="1016904" cy="100218"/>
+              <a:off x="-37527" y="3847460"/>
+              <a:ext cx="1294150" cy="127558"/>
             </a:xfrm>
             <a:prstGeom prst="rect">
               <a:avLst/>
@@ -5194,7 +5194,7 @@
             <a:p>
               <a:pPr algn="l" marL="0" marR="0" indent="0">
                 <a:lnSpc>
-                  <a:spcPts val="1100"/>
+                  <a:spcPts val="1400"/>
                 </a:lnSpc>
                 <a:spcBef>
                   <a:spcPts val="0"/>
@@ -5204,7 +5204,7 @@
                 </a:spcAft>
               </a:pPr>
               <a:r>
-                <a:rPr sz="1100">
+                <a:rPr sz="1400">
                   <a:solidFill>
                     <a:srgbClr val="000000">
                       <a:alpha val="100000"/>
@@ -5226,8 +5226,8 @@
           </p:nvSpPr>
           <p:spPr>
             <a:xfrm>
-              <a:off x="817517" y="1896563"/>
-              <a:ext cx="4433376" cy="82021"/>
+              <a:off x="915645" y="1977589"/>
+              <a:ext cx="5912784" cy="109362"/>
             </a:xfrm>
             <a:prstGeom prst="rect">
               <a:avLst/>
@@ -5240,7 +5240,7 @@
             <a:p>
               <a:pPr algn="l" marL="0" marR="0" indent="0">
                 <a:lnSpc>
-                  <a:spcPts val="900"/>
+                  <a:spcPts val="1200"/>
                 </a:lnSpc>
                 <a:spcBef>
                   <a:spcPts val="0"/>
@@ -5250,7 +5250,7 @@
                 </a:spcAft>
               </a:pPr>
               <a:r>
-                <a:rPr sz="900">
+                <a:rPr sz="1200">
                   <a:solidFill>
                     <a:srgbClr val="404040">
                       <a:alpha val="100000"/>
@@ -5272,8 +5272,8 @@
           </p:nvSpPr>
           <p:spPr>
             <a:xfrm>
-              <a:off x="817517" y="1669789"/>
-              <a:ext cx="3054278" cy="120152"/>
+              <a:off x="915645" y="1688767"/>
+              <a:ext cx="3888211" cy="153070"/>
             </a:xfrm>
             <a:prstGeom prst="rect">
               <a:avLst/>
@@ -5286,7 +5286,7 @@
             <a:p>
               <a:pPr algn="l" marL="0" marR="0" indent="0">
                 <a:lnSpc>
-                  <a:spcPts val="1320"/>
+                  <a:spcPts val="1680"/>
                 </a:lnSpc>
                 <a:spcBef>
                   <a:spcPts val="0"/>
@@ -5296,7 +5296,7 @@
                 </a:spcAft>
               </a:pPr>
               <a:r>
-                <a:rPr sz="1320">
+                <a:rPr sz="1680">
                   <a:solidFill>
                     <a:srgbClr val="000000">
                       <a:alpha val="100000"/>
